--- a/docs/plots/carbo/jx_carbo_linsubhr_dosedisc_throm3.pptx
+++ b/docs/plots/carbo/jx_carbo_linsubhr_dosedisc_throm3.pptx
@@ -3132,497 +3132,494 @@
           <p:spPr>
             <a:xfrm>
               <a:off x="1172049" y="1896563"/>
-              <a:ext cx="7090630" cy="3627154"/>
+              <a:ext cx="7090630" cy="3633381"/>
             </a:xfrm>
             <a:custGeom>
               <a:avLst/>
               <a:pathLst>
-                <a:path w="7090630" h="3627154">
+                <a:path w="7090630" h="3633381">
                   <a:moveTo>
-                    <a:pt x="0" y="3224430"/>
+                    <a:pt x="0" y="3054372"/>
                   </a:moveTo>
                   <a:lnTo>
-                    <a:pt x="71622" y="3217246"/>
-                  </a:lnTo>
-                  <a:lnTo>
-                    <a:pt x="143245" y="3209942"/>
-                  </a:lnTo>
-                  <a:lnTo>
-                    <a:pt x="214867" y="3202515"/>
-                  </a:lnTo>
-                  <a:lnTo>
-                    <a:pt x="286490" y="3194964"/>
-                  </a:lnTo>
-                  <a:lnTo>
-                    <a:pt x="358112" y="3187286"/>
-                  </a:lnTo>
-                  <a:lnTo>
-                    <a:pt x="429735" y="3179479"/>
-                  </a:lnTo>
-                  <a:lnTo>
-                    <a:pt x="501357" y="3171541"/>
-                  </a:lnTo>
-                  <a:lnTo>
-                    <a:pt x="572980" y="3163470"/>
-                  </a:lnTo>
-                  <a:lnTo>
-                    <a:pt x="644602" y="3155263"/>
-                  </a:lnTo>
-                  <a:lnTo>
-                    <a:pt x="716225" y="3146919"/>
-                  </a:lnTo>
-                  <a:lnTo>
-                    <a:pt x="787847" y="3138435"/>
-                  </a:lnTo>
-                  <a:lnTo>
-                    <a:pt x="859470" y="3129809"/>
-                  </a:lnTo>
-                  <a:lnTo>
-                    <a:pt x="931092" y="3121038"/>
-                  </a:lnTo>
-                  <a:lnTo>
-                    <a:pt x="1002715" y="3112119"/>
-                  </a:lnTo>
-                  <a:lnTo>
-                    <a:pt x="1074337" y="3103052"/>
-                  </a:lnTo>
-                  <a:lnTo>
-                    <a:pt x="1145960" y="3093832"/>
-                  </a:lnTo>
-                  <a:lnTo>
-                    <a:pt x="1217582" y="3084457"/>
-                  </a:lnTo>
-                  <a:lnTo>
-                    <a:pt x="1289205" y="3074925"/>
-                  </a:lnTo>
-                  <a:lnTo>
-                    <a:pt x="1360827" y="3065233"/>
-                  </a:lnTo>
-                  <a:lnTo>
-                    <a:pt x="1432450" y="3055379"/>
-                  </a:lnTo>
-                  <a:lnTo>
-                    <a:pt x="1504073" y="3045359"/>
-                  </a:lnTo>
-                  <a:lnTo>
-                    <a:pt x="1575695" y="3035171"/>
-                  </a:lnTo>
-                  <a:lnTo>
-                    <a:pt x="1647318" y="3024812"/>
-                  </a:lnTo>
-                  <a:lnTo>
-                    <a:pt x="1718940" y="3014280"/>
-                  </a:lnTo>
-                  <a:lnTo>
-                    <a:pt x="1790563" y="3003570"/>
-                  </a:lnTo>
-                  <a:lnTo>
-                    <a:pt x="1862185" y="2992681"/>
-                  </a:lnTo>
-                  <a:lnTo>
-                    <a:pt x="1933808" y="2981610"/>
-                  </a:lnTo>
-                  <a:lnTo>
-                    <a:pt x="2005430" y="2970352"/>
-                  </a:lnTo>
-                  <a:lnTo>
-                    <a:pt x="2077053" y="2958906"/>
-                  </a:lnTo>
-                  <a:lnTo>
-                    <a:pt x="2148675" y="2947268"/>
-                  </a:lnTo>
-                  <a:lnTo>
-                    <a:pt x="2220298" y="2935435"/>
-                  </a:lnTo>
-                  <a:lnTo>
-                    <a:pt x="2291920" y="2923403"/>
-                  </a:lnTo>
-                  <a:lnTo>
-                    <a:pt x="2363543" y="2911169"/>
-                  </a:lnTo>
-                  <a:lnTo>
-                    <a:pt x="2435165" y="2898730"/>
-                  </a:lnTo>
-                  <a:lnTo>
-                    <a:pt x="2506788" y="2886082"/>
-                  </a:lnTo>
-                  <a:lnTo>
-                    <a:pt x="2578410" y="2873222"/>
-                  </a:lnTo>
-                  <a:lnTo>
-                    <a:pt x="2650033" y="2860146"/>
-                  </a:lnTo>
-                  <a:lnTo>
-                    <a:pt x="2721655" y="2846851"/>
-                  </a:lnTo>
-                  <a:lnTo>
-                    <a:pt x="2793278" y="2833333"/>
-                  </a:lnTo>
-                  <a:lnTo>
-                    <a:pt x="2864901" y="2819589"/>
-                  </a:lnTo>
-                  <a:lnTo>
-                    <a:pt x="2936523" y="2805613"/>
-                  </a:lnTo>
-                  <a:lnTo>
-                    <a:pt x="3008146" y="2791403"/>
-                  </a:lnTo>
-                  <a:lnTo>
-                    <a:pt x="3079768" y="2752602"/>
-                  </a:lnTo>
-                  <a:lnTo>
-                    <a:pt x="3151391" y="2674821"/>
-                  </a:lnTo>
-                  <a:lnTo>
-                    <a:pt x="3223013" y="2590317"/>
-                  </a:lnTo>
-                  <a:lnTo>
-                    <a:pt x="3294636" y="2498511"/>
-                  </a:lnTo>
-                  <a:lnTo>
-                    <a:pt x="3366258" y="2398771"/>
-                  </a:lnTo>
-                  <a:lnTo>
-                    <a:pt x="3437881" y="2290411"/>
-                  </a:lnTo>
-                  <a:lnTo>
-                    <a:pt x="3509503" y="2172687"/>
-                  </a:lnTo>
-                  <a:lnTo>
-                    <a:pt x="3581126" y="2044789"/>
-                  </a:lnTo>
-                  <a:lnTo>
-                    <a:pt x="3652748" y="1905839"/>
-                  </a:lnTo>
-                  <a:lnTo>
-                    <a:pt x="3724371" y="1754880"/>
-                  </a:lnTo>
-                  <a:lnTo>
-                    <a:pt x="3795993" y="1590875"/>
-                  </a:lnTo>
-                  <a:lnTo>
-                    <a:pt x="3867616" y="1412697"/>
-                  </a:lnTo>
-                  <a:lnTo>
-                    <a:pt x="3939238" y="1219121"/>
-                  </a:lnTo>
-                  <a:lnTo>
-                    <a:pt x="4010861" y="1008816"/>
-                  </a:lnTo>
-                  <a:lnTo>
-                    <a:pt x="4082483" y="780336"/>
-                  </a:lnTo>
-                  <a:lnTo>
-                    <a:pt x="4154106" y="532111"/>
-                  </a:lnTo>
-                  <a:lnTo>
-                    <a:pt x="4225729" y="262435"/>
-                  </a:lnTo>
-                  <a:lnTo>
-                    <a:pt x="4289884" y="0"/>
+                    <a:pt x="71622" y="3049094"/>
+                  </a:lnTo>
+                  <a:lnTo>
+                    <a:pt x="143245" y="3043769"/>
+                  </a:lnTo>
+                  <a:lnTo>
+                    <a:pt x="214867" y="3038397"/>
+                  </a:lnTo>
+                  <a:lnTo>
+                    <a:pt x="286490" y="3032977"/>
+                  </a:lnTo>
+                  <a:lnTo>
+                    <a:pt x="358112" y="3027510"/>
+                  </a:lnTo>
+                  <a:lnTo>
+                    <a:pt x="429735" y="3021995"/>
+                  </a:lnTo>
+                  <a:lnTo>
+                    <a:pt x="501357" y="3016431"/>
+                  </a:lnTo>
+                  <a:lnTo>
+                    <a:pt x="572980" y="3010818"/>
+                  </a:lnTo>
+                  <a:lnTo>
+                    <a:pt x="644602" y="3005155"/>
+                  </a:lnTo>
+                  <a:lnTo>
+                    <a:pt x="716225" y="2999442"/>
+                  </a:lnTo>
+                  <a:lnTo>
+                    <a:pt x="787847" y="2993679"/>
+                  </a:lnTo>
+                  <a:lnTo>
+                    <a:pt x="859470" y="2987865"/>
+                  </a:lnTo>
+                  <a:lnTo>
+                    <a:pt x="931092" y="2982000"/>
+                  </a:lnTo>
+                  <a:lnTo>
+                    <a:pt x="1002715" y="2976083"/>
+                  </a:lnTo>
+                  <a:lnTo>
+                    <a:pt x="1074337" y="2970114"/>
+                  </a:lnTo>
+                  <a:lnTo>
+                    <a:pt x="1145960" y="2964092"/>
+                  </a:lnTo>
+                  <a:lnTo>
+                    <a:pt x="1217582" y="2958018"/>
+                  </a:lnTo>
+                  <a:lnTo>
+                    <a:pt x="1289205" y="2951889"/>
+                  </a:lnTo>
+                  <a:lnTo>
+                    <a:pt x="1360827" y="2945706"/>
+                  </a:lnTo>
+                  <a:lnTo>
+                    <a:pt x="1432450" y="2939469"/>
+                  </a:lnTo>
+                  <a:lnTo>
+                    <a:pt x="1504073" y="2933177"/>
+                  </a:lnTo>
+                  <a:lnTo>
+                    <a:pt x="1575695" y="2926829"/>
+                  </a:lnTo>
+                  <a:lnTo>
+                    <a:pt x="1647318" y="2920426"/>
+                  </a:lnTo>
+                  <a:lnTo>
+                    <a:pt x="1718940" y="2913966"/>
+                  </a:lnTo>
+                  <a:lnTo>
+                    <a:pt x="1790563" y="2907448"/>
+                  </a:lnTo>
+                  <a:lnTo>
+                    <a:pt x="1862185" y="2900874"/>
+                  </a:lnTo>
+                  <a:lnTo>
+                    <a:pt x="1933808" y="2894241"/>
+                  </a:lnTo>
+                  <a:lnTo>
+                    <a:pt x="2005430" y="2887550"/>
+                  </a:lnTo>
+                  <a:lnTo>
+                    <a:pt x="2077053" y="2880800"/>
+                  </a:lnTo>
+                  <a:lnTo>
+                    <a:pt x="2148675" y="2873990"/>
+                  </a:lnTo>
+                  <a:lnTo>
+                    <a:pt x="2220298" y="2867120"/>
+                  </a:lnTo>
+                  <a:lnTo>
+                    <a:pt x="2291920" y="2860190"/>
+                  </a:lnTo>
+                  <a:lnTo>
+                    <a:pt x="2363543" y="2853198"/>
+                  </a:lnTo>
+                  <a:lnTo>
+                    <a:pt x="2435165" y="2846145"/>
+                  </a:lnTo>
+                  <a:lnTo>
+                    <a:pt x="2506788" y="2839029"/>
+                  </a:lnTo>
+                  <a:lnTo>
+                    <a:pt x="2578410" y="2831851"/>
+                  </a:lnTo>
+                  <a:lnTo>
+                    <a:pt x="2650033" y="2824609"/>
+                  </a:lnTo>
+                  <a:lnTo>
+                    <a:pt x="2721655" y="2817304"/>
+                  </a:lnTo>
+                  <a:lnTo>
+                    <a:pt x="2793278" y="2809934"/>
+                  </a:lnTo>
+                  <a:lnTo>
+                    <a:pt x="2864901" y="2802498"/>
+                  </a:lnTo>
+                  <a:lnTo>
+                    <a:pt x="2936523" y="2794998"/>
+                  </a:lnTo>
+                  <a:lnTo>
+                    <a:pt x="3008146" y="2787431"/>
+                  </a:lnTo>
+                  <a:lnTo>
+                    <a:pt x="3079768" y="2750148"/>
+                  </a:lnTo>
+                  <a:lnTo>
+                    <a:pt x="3151391" y="2665683"/>
+                  </a:lnTo>
+                  <a:lnTo>
+                    <a:pt x="3223013" y="2573314"/>
+                  </a:lnTo>
+                  <a:lnTo>
+                    <a:pt x="3294636" y="2472300"/>
+                  </a:lnTo>
+                  <a:lnTo>
+                    <a:pt x="3366258" y="2361832"/>
+                  </a:lnTo>
+                  <a:lnTo>
+                    <a:pt x="3437881" y="2241026"/>
+                  </a:lnTo>
+                  <a:lnTo>
+                    <a:pt x="3509503" y="2108913"/>
+                  </a:lnTo>
+                  <a:lnTo>
+                    <a:pt x="3581126" y="1964435"/>
+                  </a:lnTo>
+                  <a:lnTo>
+                    <a:pt x="3652748" y="1806437"/>
+                  </a:lnTo>
+                  <a:lnTo>
+                    <a:pt x="3724371" y="1633651"/>
+                  </a:lnTo>
+                  <a:lnTo>
+                    <a:pt x="3795993" y="1444694"/>
+                  </a:lnTo>
+                  <a:lnTo>
+                    <a:pt x="3867616" y="1238053"/>
+                  </a:lnTo>
+                  <a:lnTo>
+                    <a:pt x="3939238" y="1012072"/>
+                  </a:lnTo>
+                  <a:lnTo>
+                    <a:pt x="4010861" y="764942"/>
+                  </a:lnTo>
+                  <a:lnTo>
+                    <a:pt x="4082483" y="494683"/>
+                  </a:lnTo>
+                  <a:lnTo>
+                    <a:pt x="4154106" y="199130"/>
+                  </a:lnTo>
+                  <a:lnTo>
+                    <a:pt x="4198232" y="0"/>
                   </a:lnTo>
                   <a:lnTo>
                     <a:pt x="7090630" y="0"/>
                   </a:lnTo>
                   <a:lnTo>
-                    <a:pt x="7090630" y="1429496"/>
-                  </a:lnTo>
-                  <a:lnTo>
-                    <a:pt x="7019007" y="1466176"/>
-                  </a:lnTo>
-                  <a:lnTo>
-                    <a:pt x="6947385" y="1502251"/>
-                  </a:lnTo>
-                  <a:lnTo>
-                    <a:pt x="6875762" y="1537731"/>
-                  </a:lnTo>
-                  <a:lnTo>
-                    <a:pt x="6804139" y="1572626"/>
-                  </a:lnTo>
-                  <a:lnTo>
-                    <a:pt x="6732517" y="1606945"/>
-                  </a:lnTo>
-                  <a:lnTo>
-                    <a:pt x="6660894" y="1640697"/>
-                  </a:lnTo>
-                  <a:lnTo>
-                    <a:pt x="6589272" y="1673893"/>
-                  </a:lnTo>
-                  <a:lnTo>
-                    <a:pt x="6517649" y="1706541"/>
-                  </a:lnTo>
-                  <a:lnTo>
-                    <a:pt x="6446027" y="1738650"/>
-                  </a:lnTo>
-                  <a:lnTo>
-                    <a:pt x="6374404" y="1770230"/>
-                  </a:lnTo>
-                  <a:lnTo>
-                    <a:pt x="6302782" y="1801289"/>
-                  </a:lnTo>
-                  <a:lnTo>
-                    <a:pt x="6231159" y="1831835"/>
-                  </a:lnTo>
-                  <a:lnTo>
-                    <a:pt x="6159537" y="1861877"/>
-                  </a:lnTo>
-                  <a:lnTo>
-                    <a:pt x="6087914" y="1891423"/>
-                  </a:lnTo>
-                  <a:lnTo>
-                    <a:pt x="6016292" y="1920482"/>
-                  </a:lnTo>
-                  <a:lnTo>
-                    <a:pt x="5944669" y="1949062"/>
-                  </a:lnTo>
-                  <a:lnTo>
-                    <a:pt x="5873047" y="1977170"/>
-                  </a:lnTo>
-                  <a:lnTo>
-                    <a:pt x="5801424" y="2004814"/>
-                  </a:lnTo>
-                  <a:lnTo>
-                    <a:pt x="5729802" y="2032002"/>
-                  </a:lnTo>
-                  <a:lnTo>
-                    <a:pt x="5658179" y="2058741"/>
-                  </a:lnTo>
-                  <a:lnTo>
-                    <a:pt x="5586557" y="2085040"/>
-                  </a:lnTo>
-                  <a:lnTo>
-                    <a:pt x="5514934" y="2110904"/>
-                  </a:lnTo>
-                  <a:lnTo>
-                    <a:pt x="5443311" y="2136342"/>
-                  </a:lnTo>
-                  <a:lnTo>
-                    <a:pt x="5371689" y="2161360"/>
-                  </a:lnTo>
-                  <a:lnTo>
-                    <a:pt x="5300066" y="2185965"/>
-                  </a:lnTo>
-                  <a:lnTo>
-                    <a:pt x="5228444" y="2210164"/>
-                  </a:lnTo>
-                  <a:lnTo>
-                    <a:pt x="5156821" y="2233964"/>
-                  </a:lnTo>
-                  <a:lnTo>
-                    <a:pt x="5085199" y="2257371"/>
-                  </a:lnTo>
-                  <a:lnTo>
-                    <a:pt x="5013576" y="2280392"/>
-                  </a:lnTo>
-                  <a:lnTo>
-                    <a:pt x="4941954" y="2303033"/>
-                  </a:lnTo>
-                  <a:lnTo>
-                    <a:pt x="4870331" y="2325301"/>
-                  </a:lnTo>
-                  <a:lnTo>
-                    <a:pt x="4798709" y="2347201"/>
-                  </a:lnTo>
-                  <a:lnTo>
-                    <a:pt x="4727086" y="2368740"/>
-                  </a:lnTo>
-                  <a:lnTo>
-                    <a:pt x="4655464" y="2389924"/>
-                  </a:lnTo>
-                  <a:lnTo>
-                    <a:pt x="4583841" y="2410758"/>
-                  </a:lnTo>
-                  <a:lnTo>
-                    <a:pt x="4512219" y="2431248"/>
-                  </a:lnTo>
-                  <a:lnTo>
-                    <a:pt x="4440596" y="2451400"/>
-                  </a:lnTo>
-                  <a:lnTo>
-                    <a:pt x="4368974" y="2471220"/>
-                  </a:lnTo>
-                  <a:lnTo>
-                    <a:pt x="4297351" y="2490713"/>
-                  </a:lnTo>
-                  <a:lnTo>
-                    <a:pt x="4225729" y="2509884"/>
-                  </a:lnTo>
-                  <a:lnTo>
-                    <a:pt x="4154106" y="2528738"/>
-                  </a:lnTo>
-                  <a:lnTo>
-                    <a:pt x="4082483" y="2547282"/>
-                  </a:lnTo>
-                  <a:lnTo>
-                    <a:pt x="4010861" y="2565520"/>
-                  </a:lnTo>
-                  <a:lnTo>
-                    <a:pt x="3939238" y="2583457"/>
-                  </a:lnTo>
-                  <a:lnTo>
-                    <a:pt x="3867616" y="2601097"/>
-                  </a:lnTo>
-                  <a:lnTo>
-                    <a:pt x="3795993" y="2618447"/>
-                  </a:lnTo>
-                  <a:lnTo>
-                    <a:pt x="3724371" y="2635511"/>
-                  </a:lnTo>
-                  <a:lnTo>
-                    <a:pt x="3652748" y="2652293"/>
-                  </a:lnTo>
-                  <a:lnTo>
-                    <a:pt x="3581126" y="2668798"/>
-                  </a:lnTo>
-                  <a:lnTo>
-                    <a:pt x="3509503" y="2685031"/>
-                  </a:lnTo>
-                  <a:lnTo>
-                    <a:pt x="3437881" y="2700996"/>
-                  </a:lnTo>
-                  <a:lnTo>
-                    <a:pt x="3366258" y="2716697"/>
-                  </a:lnTo>
-                  <a:lnTo>
-                    <a:pt x="3294636" y="2732140"/>
-                  </a:lnTo>
-                  <a:lnTo>
-                    <a:pt x="3223013" y="2747327"/>
-                  </a:lnTo>
-                  <a:lnTo>
-                    <a:pt x="3151391" y="2762264"/>
-                  </a:lnTo>
-                  <a:lnTo>
-                    <a:pt x="3079768" y="2776955"/>
-                  </a:lnTo>
-                  <a:lnTo>
-                    <a:pt x="3008146" y="2824197"/>
-                  </a:lnTo>
-                  <a:lnTo>
-                    <a:pt x="2936523" y="2890096"/>
-                  </a:lnTo>
-                  <a:lnTo>
-                    <a:pt x="2864901" y="2950753"/>
-                  </a:lnTo>
-                  <a:lnTo>
-                    <a:pt x="2793278" y="3006586"/>
-                  </a:lnTo>
-                  <a:lnTo>
-                    <a:pt x="2721655" y="3057977"/>
-                  </a:lnTo>
-                  <a:lnTo>
-                    <a:pt x="2650033" y="3105280"/>
-                  </a:lnTo>
-                  <a:lnTo>
-                    <a:pt x="2578410" y="3148820"/>
-                  </a:lnTo>
-                  <a:lnTo>
-                    <a:pt x="2506788" y="3188897"/>
-                  </a:lnTo>
-                  <a:lnTo>
-                    <a:pt x="2435165" y="3225786"/>
-                  </a:lnTo>
-                  <a:lnTo>
-                    <a:pt x="2363543" y="3259741"/>
-                  </a:lnTo>
-                  <a:lnTo>
-                    <a:pt x="2291920" y="3290994"/>
-                  </a:lnTo>
-                  <a:lnTo>
-                    <a:pt x="2220298" y="3319762"/>
-                  </a:lnTo>
-                  <a:lnTo>
-                    <a:pt x="2148675" y="3346241"/>
-                  </a:lnTo>
-                  <a:lnTo>
-                    <a:pt x="2077053" y="3370614"/>
-                  </a:lnTo>
-                  <a:lnTo>
-                    <a:pt x="2005430" y="3393048"/>
-                  </a:lnTo>
-                  <a:lnTo>
-                    <a:pt x="1933808" y="3413698"/>
-                  </a:lnTo>
-                  <a:lnTo>
-                    <a:pt x="1862185" y="3432705"/>
-                  </a:lnTo>
-                  <a:lnTo>
-                    <a:pt x="1790563" y="3450200"/>
-                  </a:lnTo>
-                  <a:lnTo>
-                    <a:pt x="1718940" y="3466304"/>
-                  </a:lnTo>
-                  <a:lnTo>
-                    <a:pt x="1647318" y="3481126"/>
-                  </a:lnTo>
-                  <a:lnTo>
-                    <a:pt x="1575695" y="3494770"/>
-                  </a:lnTo>
-                  <a:lnTo>
-                    <a:pt x="1504073" y="3507328"/>
-                  </a:lnTo>
-                  <a:lnTo>
-                    <a:pt x="1432450" y="3518887"/>
-                  </a:lnTo>
-                  <a:lnTo>
-                    <a:pt x="1360827" y="3529527"/>
-                  </a:lnTo>
-                  <a:lnTo>
-                    <a:pt x="1289205" y="3539320"/>
-                  </a:lnTo>
-                  <a:lnTo>
-                    <a:pt x="1217582" y="3548335"/>
-                  </a:lnTo>
-                  <a:lnTo>
-                    <a:pt x="1145960" y="3556632"/>
-                  </a:lnTo>
-                  <a:lnTo>
-                    <a:pt x="1074337" y="3564269"/>
-                  </a:lnTo>
-                  <a:lnTo>
-                    <a:pt x="1002715" y="3571299"/>
-                  </a:lnTo>
-                  <a:lnTo>
-                    <a:pt x="931092" y="3577770"/>
-                  </a:lnTo>
-                  <a:lnTo>
-                    <a:pt x="859470" y="3583725"/>
-                  </a:lnTo>
-                  <a:lnTo>
-                    <a:pt x="787847" y="3589208"/>
-                  </a:lnTo>
-                  <a:lnTo>
-                    <a:pt x="716225" y="3594254"/>
-                  </a:lnTo>
-                  <a:lnTo>
-                    <a:pt x="644602" y="3598898"/>
-                  </a:lnTo>
-                  <a:lnTo>
-                    <a:pt x="572980" y="3603173"/>
-                  </a:lnTo>
-                  <a:lnTo>
-                    <a:pt x="501357" y="3607109"/>
-                  </a:lnTo>
-                  <a:lnTo>
-                    <a:pt x="429735" y="3610731"/>
-                  </a:lnTo>
-                  <a:lnTo>
-                    <a:pt x="358112" y="3614065"/>
-                  </a:lnTo>
-                  <a:lnTo>
-                    <a:pt x="286490" y="3617133"/>
-                  </a:lnTo>
-                  <a:lnTo>
-                    <a:pt x="214867" y="3619958"/>
-                  </a:lnTo>
-                  <a:lnTo>
-                    <a:pt x="143245" y="3622558"/>
-                  </a:lnTo>
-                  <a:lnTo>
-                    <a:pt x="71622" y="3624951"/>
-                  </a:lnTo>
-                  <a:lnTo>
-                    <a:pt x="0" y="3627154"/>
+                    <a:pt x="7090630" y="2225163"/>
+                  </a:lnTo>
+                  <a:lnTo>
+                    <a:pt x="7019007" y="2237647"/>
+                  </a:lnTo>
+                  <a:lnTo>
+                    <a:pt x="6947385" y="2250022"/>
+                  </a:lnTo>
+                  <a:lnTo>
+                    <a:pt x="6875762" y="2262288"/>
+                  </a:lnTo>
+                  <a:lnTo>
+                    <a:pt x="6804139" y="2274448"/>
+                  </a:lnTo>
+                  <a:lnTo>
+                    <a:pt x="6732517" y="2286501"/>
+                  </a:lnTo>
+                  <a:lnTo>
+                    <a:pt x="6660894" y="2298449"/>
+                  </a:lnTo>
+                  <a:lnTo>
+                    <a:pt x="6589272" y="2310292"/>
+                  </a:lnTo>
+                  <a:lnTo>
+                    <a:pt x="6517649" y="2322032"/>
+                  </a:lnTo>
+                  <a:lnTo>
+                    <a:pt x="6446027" y="2333669"/>
+                  </a:lnTo>
+                  <a:lnTo>
+                    <a:pt x="6374404" y="2345204"/>
+                  </a:lnTo>
+                  <a:lnTo>
+                    <a:pt x="6302782" y="2356638"/>
+                  </a:lnTo>
+                  <a:lnTo>
+                    <a:pt x="6231159" y="2367973"/>
+                  </a:lnTo>
+                  <a:lnTo>
+                    <a:pt x="6159537" y="2379208"/>
+                  </a:lnTo>
+                  <a:lnTo>
+                    <a:pt x="6087914" y="2390345"/>
+                  </a:lnTo>
+                  <a:lnTo>
+                    <a:pt x="6016292" y="2401384"/>
+                  </a:lnTo>
+                  <a:lnTo>
+                    <a:pt x="5944669" y="2412327"/>
+                  </a:lnTo>
+                  <a:lnTo>
+                    <a:pt x="5873047" y="2423175"/>
+                  </a:lnTo>
+                  <a:lnTo>
+                    <a:pt x="5801424" y="2433927"/>
+                  </a:lnTo>
+                  <a:lnTo>
+                    <a:pt x="5729802" y="2444585"/>
+                  </a:lnTo>
+                  <a:lnTo>
+                    <a:pt x="5658179" y="2455151"/>
+                  </a:lnTo>
+                  <a:lnTo>
+                    <a:pt x="5586557" y="2465623"/>
+                  </a:lnTo>
+                  <a:lnTo>
+                    <a:pt x="5514934" y="2476005"/>
+                  </a:lnTo>
+                  <a:lnTo>
+                    <a:pt x="5443311" y="2486295"/>
+                  </a:lnTo>
+                  <a:lnTo>
+                    <a:pt x="5371689" y="2496495"/>
+                  </a:lnTo>
+                  <a:lnTo>
+                    <a:pt x="5300066" y="2506607"/>
+                  </a:lnTo>
+                  <a:lnTo>
+                    <a:pt x="5228444" y="2516629"/>
+                  </a:lnTo>
+                  <a:lnTo>
+                    <a:pt x="5156821" y="2526565"/>
+                  </a:lnTo>
+                  <a:lnTo>
+                    <a:pt x="5085199" y="2536413"/>
+                  </a:lnTo>
+                  <a:lnTo>
+                    <a:pt x="5013576" y="2546175"/>
+                  </a:lnTo>
+                  <a:lnTo>
+                    <a:pt x="4941954" y="2555852"/>
+                  </a:lnTo>
+                  <a:lnTo>
+                    <a:pt x="4870331" y="2565444"/>
+                  </a:lnTo>
+                  <a:lnTo>
+                    <a:pt x="4798709" y="2574952"/>
+                  </a:lnTo>
+                  <a:lnTo>
+                    <a:pt x="4727086" y="2584377"/>
+                  </a:lnTo>
+                  <a:lnTo>
+                    <a:pt x="4655464" y="2593720"/>
+                  </a:lnTo>
+                  <a:lnTo>
+                    <a:pt x="4583841" y="2602981"/>
+                  </a:lnTo>
+                  <a:lnTo>
+                    <a:pt x="4512219" y="2612160"/>
+                  </a:lnTo>
+                  <a:lnTo>
+                    <a:pt x="4440596" y="2621260"/>
+                  </a:lnTo>
+                  <a:lnTo>
+                    <a:pt x="4368974" y="2630280"/>
+                  </a:lnTo>
+                  <a:lnTo>
+                    <a:pt x="4297351" y="2639221"/>
+                  </a:lnTo>
+                  <a:lnTo>
+                    <a:pt x="4225729" y="2648084"/>
+                  </a:lnTo>
+                  <a:lnTo>
+                    <a:pt x="4154106" y="2656870"/>
+                  </a:lnTo>
+                  <a:lnTo>
+                    <a:pt x="4082483" y="2665578"/>
+                  </a:lnTo>
+                  <a:lnTo>
+                    <a:pt x="4010861" y="2674211"/>
+                  </a:lnTo>
+                  <a:lnTo>
+                    <a:pt x="3939238" y="2682768"/>
+                  </a:lnTo>
+                  <a:lnTo>
+                    <a:pt x="3867616" y="2691250"/>
+                  </a:lnTo>
+                  <a:lnTo>
+                    <a:pt x="3795993" y="2699658"/>
+                  </a:lnTo>
+                  <a:lnTo>
+                    <a:pt x="3724371" y="2707992"/>
+                  </a:lnTo>
+                  <a:lnTo>
+                    <a:pt x="3652748" y="2716254"/>
+                  </a:lnTo>
+                  <a:lnTo>
+                    <a:pt x="3581126" y="2724443"/>
+                  </a:lnTo>
+                  <a:lnTo>
+                    <a:pt x="3509503" y="2732561"/>
+                  </a:lnTo>
+                  <a:lnTo>
+                    <a:pt x="3437881" y="2740608"/>
+                  </a:lnTo>
+                  <a:lnTo>
+                    <a:pt x="3366258" y="2748584"/>
+                  </a:lnTo>
+                  <a:lnTo>
+                    <a:pt x="3294636" y="2756490"/>
+                  </a:lnTo>
+                  <a:lnTo>
+                    <a:pt x="3223013" y="2764328"/>
+                  </a:lnTo>
+                  <a:lnTo>
+                    <a:pt x="3151391" y="2772097"/>
+                  </a:lnTo>
+                  <a:lnTo>
+                    <a:pt x="3079768" y="2779798"/>
+                  </a:lnTo>
+                  <a:lnTo>
+                    <a:pt x="3008146" y="2827383"/>
+                  </a:lnTo>
+                  <a:lnTo>
+                    <a:pt x="2936523" y="2898009"/>
+                  </a:lnTo>
+                  <a:lnTo>
+                    <a:pt x="2864901" y="2962591"/>
+                  </a:lnTo>
+                  <a:lnTo>
+                    <a:pt x="2793278" y="3021646"/>
+                  </a:lnTo>
+                  <a:lnTo>
+                    <a:pt x="2721655" y="3075647"/>
+                  </a:lnTo>
+                  <a:lnTo>
+                    <a:pt x="2650033" y="3125026"/>
+                  </a:lnTo>
+                  <a:lnTo>
+                    <a:pt x="2578410" y="3170180"/>
+                  </a:lnTo>
+                  <a:lnTo>
+                    <a:pt x="2506788" y="3211469"/>
+                  </a:lnTo>
+                  <a:lnTo>
+                    <a:pt x="2435165" y="3249225"/>
+                  </a:lnTo>
+                  <a:lnTo>
+                    <a:pt x="2363543" y="3283750"/>
+                  </a:lnTo>
+                  <a:lnTo>
+                    <a:pt x="2291920" y="3315320"/>
+                  </a:lnTo>
+                  <a:lnTo>
+                    <a:pt x="2220298" y="3344188"/>
+                  </a:lnTo>
+                  <a:lnTo>
+                    <a:pt x="2148675" y="3370586"/>
+                  </a:lnTo>
+                  <a:lnTo>
+                    <a:pt x="2077053" y="3394724"/>
+                  </a:lnTo>
+                  <a:lnTo>
+                    <a:pt x="2005430" y="3416797"/>
+                  </a:lnTo>
+                  <a:lnTo>
+                    <a:pt x="1933808" y="3436981"/>
+                  </a:lnTo>
+                  <a:lnTo>
+                    <a:pt x="1862185" y="3455437"/>
+                  </a:lnTo>
+                  <a:lnTo>
+                    <a:pt x="1790563" y="3472314"/>
+                  </a:lnTo>
+                  <a:lnTo>
+                    <a:pt x="1718940" y="3487747"/>
+                  </a:lnTo>
+                  <a:lnTo>
+                    <a:pt x="1647318" y="3501859"/>
+                  </a:lnTo>
+                  <a:lnTo>
+                    <a:pt x="1575695" y="3514763"/>
+                  </a:lnTo>
+                  <a:lnTo>
+                    <a:pt x="1504073" y="3526563"/>
+                  </a:lnTo>
+                  <a:lnTo>
+                    <a:pt x="1432450" y="3537353"/>
+                  </a:lnTo>
+                  <a:lnTo>
+                    <a:pt x="1360827" y="3547219"/>
+                  </a:lnTo>
+                  <a:lnTo>
+                    <a:pt x="1289205" y="3556242"/>
+                  </a:lnTo>
+                  <a:lnTo>
+                    <a:pt x="1217582" y="3564492"/>
+                  </a:lnTo>
+                  <a:lnTo>
+                    <a:pt x="1145960" y="3572036"/>
+                  </a:lnTo>
+                  <a:lnTo>
+                    <a:pt x="1074337" y="3578934"/>
+                  </a:lnTo>
+                  <a:lnTo>
+                    <a:pt x="1002715" y="3585242"/>
+                  </a:lnTo>
+                  <a:lnTo>
+                    <a:pt x="931092" y="3591010"/>
+                  </a:lnTo>
+                  <a:lnTo>
+                    <a:pt x="859470" y="3596285"/>
+                  </a:lnTo>
+                  <a:lnTo>
+                    <a:pt x="787847" y="3601108"/>
+                  </a:lnTo>
+                  <a:lnTo>
+                    <a:pt x="716225" y="3605518"/>
+                  </a:lnTo>
+                  <a:lnTo>
+                    <a:pt x="644602" y="3609551"/>
+                  </a:lnTo>
+                  <a:lnTo>
+                    <a:pt x="572980" y="3613239"/>
+                  </a:lnTo>
+                  <a:lnTo>
+                    <a:pt x="501357" y="3616611"/>
+                  </a:lnTo>
+                  <a:lnTo>
+                    <a:pt x="429735" y="3619695"/>
+                  </a:lnTo>
+                  <a:lnTo>
+                    <a:pt x="358112" y="3622515"/>
+                  </a:lnTo>
+                  <a:lnTo>
+                    <a:pt x="286490" y="3625093"/>
+                  </a:lnTo>
+                  <a:lnTo>
+                    <a:pt x="214867" y="3627451"/>
+                  </a:lnTo>
+                  <a:lnTo>
+                    <a:pt x="143245" y="3629607"/>
+                  </a:lnTo>
+                  <a:lnTo>
+                    <a:pt x="71622" y="3631578"/>
+                  </a:lnTo>
+                  <a:lnTo>
+                    <a:pt x="0" y="3633381"/>
                   </a:lnTo>
                   <a:close/>
                 </a:path>
@@ -3649,194 +3646,191 @@
           <p:spPr>
             <a:xfrm>
               <a:off x="1172049" y="1896563"/>
-              <a:ext cx="4289884" cy="3224430"/>
+              <a:ext cx="4198232" cy="3054372"/>
             </a:xfrm>
             <a:custGeom>
               <a:avLst/>
               <a:pathLst>
-                <a:path w="4289884" h="3224430">
+                <a:path w="4198232" h="3054372">
                   <a:moveTo>
-                    <a:pt x="0" y="3224430"/>
+                    <a:pt x="0" y="3054372"/>
                   </a:moveTo>
                   <a:lnTo>
-                    <a:pt x="71622" y="3217246"/>
-                  </a:lnTo>
-                  <a:lnTo>
-                    <a:pt x="143245" y="3209942"/>
-                  </a:lnTo>
-                  <a:lnTo>
-                    <a:pt x="214867" y="3202515"/>
-                  </a:lnTo>
-                  <a:lnTo>
-                    <a:pt x="286490" y="3194964"/>
-                  </a:lnTo>
-                  <a:lnTo>
-                    <a:pt x="358112" y="3187286"/>
-                  </a:lnTo>
-                  <a:lnTo>
-                    <a:pt x="429735" y="3179479"/>
-                  </a:lnTo>
-                  <a:lnTo>
-                    <a:pt x="501357" y="3171541"/>
-                  </a:lnTo>
-                  <a:lnTo>
-                    <a:pt x="572980" y="3163470"/>
-                  </a:lnTo>
-                  <a:lnTo>
-                    <a:pt x="644602" y="3155263"/>
-                  </a:lnTo>
-                  <a:lnTo>
-                    <a:pt x="716225" y="3146919"/>
-                  </a:lnTo>
-                  <a:lnTo>
-                    <a:pt x="787847" y="3138435"/>
-                  </a:lnTo>
-                  <a:lnTo>
-                    <a:pt x="859470" y="3129809"/>
-                  </a:lnTo>
-                  <a:lnTo>
-                    <a:pt x="931092" y="3121038"/>
-                  </a:lnTo>
-                  <a:lnTo>
-                    <a:pt x="1002715" y="3112119"/>
-                  </a:lnTo>
-                  <a:lnTo>
-                    <a:pt x="1074337" y="3103052"/>
-                  </a:lnTo>
-                  <a:lnTo>
-                    <a:pt x="1145960" y="3093832"/>
-                  </a:lnTo>
-                  <a:lnTo>
-                    <a:pt x="1217582" y="3084457"/>
-                  </a:lnTo>
-                  <a:lnTo>
-                    <a:pt x="1289205" y="3074925"/>
-                  </a:lnTo>
-                  <a:lnTo>
-                    <a:pt x="1360827" y="3065233"/>
-                  </a:lnTo>
-                  <a:lnTo>
-                    <a:pt x="1432450" y="3055379"/>
-                  </a:lnTo>
-                  <a:lnTo>
-                    <a:pt x="1504073" y="3045359"/>
-                  </a:lnTo>
-                  <a:lnTo>
-                    <a:pt x="1575695" y="3035171"/>
-                  </a:lnTo>
-                  <a:lnTo>
-                    <a:pt x="1647318" y="3024812"/>
-                  </a:lnTo>
-                  <a:lnTo>
-                    <a:pt x="1718940" y="3014280"/>
-                  </a:lnTo>
-                  <a:lnTo>
-                    <a:pt x="1790563" y="3003570"/>
-                  </a:lnTo>
-                  <a:lnTo>
-                    <a:pt x="1862185" y="2992681"/>
-                  </a:lnTo>
-                  <a:lnTo>
-                    <a:pt x="1933808" y="2981610"/>
-                  </a:lnTo>
-                  <a:lnTo>
-                    <a:pt x="2005430" y="2970352"/>
-                  </a:lnTo>
-                  <a:lnTo>
-                    <a:pt x="2077053" y="2958906"/>
-                  </a:lnTo>
-                  <a:lnTo>
-                    <a:pt x="2148675" y="2947268"/>
-                  </a:lnTo>
-                  <a:lnTo>
-                    <a:pt x="2220298" y="2935435"/>
-                  </a:lnTo>
-                  <a:lnTo>
-                    <a:pt x="2291920" y="2923403"/>
-                  </a:lnTo>
-                  <a:lnTo>
-                    <a:pt x="2363543" y="2911169"/>
-                  </a:lnTo>
-                  <a:lnTo>
-                    <a:pt x="2435165" y="2898730"/>
-                  </a:lnTo>
-                  <a:lnTo>
-                    <a:pt x="2506788" y="2886082"/>
-                  </a:lnTo>
-                  <a:lnTo>
-                    <a:pt x="2578410" y="2873222"/>
-                  </a:lnTo>
-                  <a:lnTo>
-                    <a:pt x="2650033" y="2860146"/>
-                  </a:lnTo>
-                  <a:lnTo>
-                    <a:pt x="2721655" y="2846851"/>
-                  </a:lnTo>
-                  <a:lnTo>
-                    <a:pt x="2793278" y="2833333"/>
-                  </a:lnTo>
-                  <a:lnTo>
-                    <a:pt x="2864901" y="2819589"/>
-                  </a:lnTo>
-                  <a:lnTo>
-                    <a:pt x="2936523" y="2805613"/>
-                  </a:lnTo>
-                  <a:lnTo>
-                    <a:pt x="3008146" y="2791403"/>
-                  </a:lnTo>
-                  <a:lnTo>
-                    <a:pt x="3079768" y="2752602"/>
-                  </a:lnTo>
-                  <a:lnTo>
-                    <a:pt x="3151391" y="2674821"/>
-                  </a:lnTo>
-                  <a:lnTo>
-                    <a:pt x="3223013" y="2590317"/>
-                  </a:lnTo>
-                  <a:lnTo>
-                    <a:pt x="3294636" y="2498511"/>
-                  </a:lnTo>
-                  <a:lnTo>
-                    <a:pt x="3366258" y="2398771"/>
-                  </a:lnTo>
-                  <a:lnTo>
-                    <a:pt x="3437881" y="2290411"/>
-                  </a:lnTo>
-                  <a:lnTo>
-                    <a:pt x="3509503" y="2172687"/>
-                  </a:lnTo>
-                  <a:lnTo>
-                    <a:pt x="3581126" y="2044789"/>
-                  </a:lnTo>
-                  <a:lnTo>
-                    <a:pt x="3652748" y="1905839"/>
-                  </a:lnTo>
-                  <a:lnTo>
-                    <a:pt x="3724371" y="1754880"/>
-                  </a:lnTo>
-                  <a:lnTo>
-                    <a:pt x="3795993" y="1590875"/>
-                  </a:lnTo>
-                  <a:lnTo>
-                    <a:pt x="3867616" y="1412697"/>
-                  </a:lnTo>
-                  <a:lnTo>
-                    <a:pt x="3939238" y="1219121"/>
-                  </a:lnTo>
-                  <a:lnTo>
-                    <a:pt x="4010861" y="1008816"/>
-                  </a:lnTo>
-                  <a:lnTo>
-                    <a:pt x="4082483" y="780336"/>
-                  </a:lnTo>
-                  <a:lnTo>
-                    <a:pt x="4154106" y="532111"/>
-                  </a:lnTo>
-                  <a:lnTo>
-                    <a:pt x="4225729" y="262435"/>
-                  </a:lnTo>
-                  <a:lnTo>
-                    <a:pt x="4289884" y="0"/>
+                    <a:pt x="71622" y="3049094"/>
+                  </a:lnTo>
+                  <a:lnTo>
+                    <a:pt x="143245" y="3043769"/>
+                  </a:lnTo>
+                  <a:lnTo>
+                    <a:pt x="214867" y="3038397"/>
+                  </a:lnTo>
+                  <a:lnTo>
+                    <a:pt x="286490" y="3032977"/>
+                  </a:lnTo>
+                  <a:lnTo>
+                    <a:pt x="358112" y="3027510"/>
+                  </a:lnTo>
+                  <a:lnTo>
+                    <a:pt x="429735" y="3021995"/>
+                  </a:lnTo>
+                  <a:lnTo>
+                    <a:pt x="501357" y="3016431"/>
+                  </a:lnTo>
+                  <a:lnTo>
+                    <a:pt x="572980" y="3010818"/>
+                  </a:lnTo>
+                  <a:lnTo>
+                    <a:pt x="644602" y="3005155"/>
+                  </a:lnTo>
+                  <a:lnTo>
+                    <a:pt x="716225" y="2999442"/>
+                  </a:lnTo>
+                  <a:lnTo>
+                    <a:pt x="787847" y="2993679"/>
+                  </a:lnTo>
+                  <a:lnTo>
+                    <a:pt x="859470" y="2987865"/>
+                  </a:lnTo>
+                  <a:lnTo>
+                    <a:pt x="931092" y="2982000"/>
+                  </a:lnTo>
+                  <a:lnTo>
+                    <a:pt x="1002715" y="2976083"/>
+                  </a:lnTo>
+                  <a:lnTo>
+                    <a:pt x="1074337" y="2970114"/>
+                  </a:lnTo>
+                  <a:lnTo>
+                    <a:pt x="1145960" y="2964092"/>
+                  </a:lnTo>
+                  <a:lnTo>
+                    <a:pt x="1217582" y="2958018"/>
+                  </a:lnTo>
+                  <a:lnTo>
+                    <a:pt x="1289205" y="2951889"/>
+                  </a:lnTo>
+                  <a:lnTo>
+                    <a:pt x="1360827" y="2945706"/>
+                  </a:lnTo>
+                  <a:lnTo>
+                    <a:pt x="1432450" y="2939469"/>
+                  </a:lnTo>
+                  <a:lnTo>
+                    <a:pt x="1504073" y="2933177"/>
+                  </a:lnTo>
+                  <a:lnTo>
+                    <a:pt x="1575695" y="2926829"/>
+                  </a:lnTo>
+                  <a:lnTo>
+                    <a:pt x="1647318" y="2920426"/>
+                  </a:lnTo>
+                  <a:lnTo>
+                    <a:pt x="1718940" y="2913966"/>
+                  </a:lnTo>
+                  <a:lnTo>
+                    <a:pt x="1790563" y="2907448"/>
+                  </a:lnTo>
+                  <a:lnTo>
+                    <a:pt x="1862185" y="2900874"/>
+                  </a:lnTo>
+                  <a:lnTo>
+                    <a:pt x="1933808" y="2894241"/>
+                  </a:lnTo>
+                  <a:lnTo>
+                    <a:pt x="2005430" y="2887550"/>
+                  </a:lnTo>
+                  <a:lnTo>
+                    <a:pt x="2077053" y="2880800"/>
+                  </a:lnTo>
+                  <a:lnTo>
+                    <a:pt x="2148675" y="2873990"/>
+                  </a:lnTo>
+                  <a:lnTo>
+                    <a:pt x="2220298" y="2867120"/>
+                  </a:lnTo>
+                  <a:lnTo>
+                    <a:pt x="2291920" y="2860190"/>
+                  </a:lnTo>
+                  <a:lnTo>
+                    <a:pt x="2363543" y="2853198"/>
+                  </a:lnTo>
+                  <a:lnTo>
+                    <a:pt x="2435165" y="2846145"/>
+                  </a:lnTo>
+                  <a:lnTo>
+                    <a:pt x="2506788" y="2839029"/>
+                  </a:lnTo>
+                  <a:lnTo>
+                    <a:pt x="2578410" y="2831851"/>
+                  </a:lnTo>
+                  <a:lnTo>
+                    <a:pt x="2650033" y="2824609"/>
+                  </a:lnTo>
+                  <a:lnTo>
+                    <a:pt x="2721655" y="2817304"/>
+                  </a:lnTo>
+                  <a:lnTo>
+                    <a:pt x="2793278" y="2809934"/>
+                  </a:lnTo>
+                  <a:lnTo>
+                    <a:pt x="2864901" y="2802498"/>
+                  </a:lnTo>
+                  <a:lnTo>
+                    <a:pt x="2936523" y="2794998"/>
+                  </a:lnTo>
+                  <a:lnTo>
+                    <a:pt x="3008146" y="2787431"/>
+                  </a:lnTo>
+                  <a:lnTo>
+                    <a:pt x="3079768" y="2750148"/>
+                  </a:lnTo>
+                  <a:lnTo>
+                    <a:pt x="3151391" y="2665683"/>
+                  </a:lnTo>
+                  <a:lnTo>
+                    <a:pt x="3223013" y="2573314"/>
+                  </a:lnTo>
+                  <a:lnTo>
+                    <a:pt x="3294636" y="2472300"/>
+                  </a:lnTo>
+                  <a:lnTo>
+                    <a:pt x="3366258" y="2361832"/>
+                  </a:lnTo>
+                  <a:lnTo>
+                    <a:pt x="3437881" y="2241026"/>
+                  </a:lnTo>
+                  <a:lnTo>
+                    <a:pt x="3509503" y="2108913"/>
+                  </a:lnTo>
+                  <a:lnTo>
+                    <a:pt x="3581126" y="1964435"/>
+                  </a:lnTo>
+                  <a:lnTo>
+                    <a:pt x="3652748" y="1806437"/>
+                  </a:lnTo>
+                  <a:lnTo>
+                    <a:pt x="3724371" y="1633651"/>
+                  </a:lnTo>
+                  <a:lnTo>
+                    <a:pt x="3795993" y="1444694"/>
+                  </a:lnTo>
+                  <a:lnTo>
+                    <a:pt x="3867616" y="1238053"/>
+                  </a:lnTo>
+                  <a:lnTo>
+                    <a:pt x="3939238" y="1012072"/>
+                  </a:lnTo>
+                  <a:lnTo>
+                    <a:pt x="4010861" y="764942"/>
+                  </a:lnTo>
+                  <a:lnTo>
+                    <a:pt x="4082483" y="494683"/>
+                  </a:lnTo>
+                  <a:lnTo>
+                    <a:pt x="4154106" y="199130"/>
+                  </a:lnTo>
+                  <a:lnTo>
+                    <a:pt x="4198232" y="0"/>
                   </a:lnTo>
                 </a:path>
               </a:pathLst>
@@ -3856,312 +3850,312 @@
           </p:nvSpPr>
           <p:spPr>
             <a:xfrm>
-              <a:off x="1172049" y="3326059"/>
-              <a:ext cx="7090630" cy="2197658"/>
+              <a:off x="1172049" y="4121726"/>
+              <a:ext cx="7090630" cy="1408218"/>
             </a:xfrm>
             <a:custGeom>
               <a:avLst/>
               <a:pathLst>
-                <a:path w="7090630" h="2197658">
+                <a:path w="7090630" h="1408218">
                   <a:moveTo>
                     <a:pt x="7090630" y="0"/>
                   </a:moveTo>
                   <a:lnTo>
-                    <a:pt x="7019007" y="36680"/>
-                  </a:lnTo>
-                  <a:lnTo>
-                    <a:pt x="6947385" y="72755"/>
-                  </a:lnTo>
-                  <a:lnTo>
-                    <a:pt x="6875762" y="108235"/>
-                  </a:lnTo>
-                  <a:lnTo>
-                    <a:pt x="6804139" y="143130"/>
-                  </a:lnTo>
-                  <a:lnTo>
-                    <a:pt x="6732517" y="177449"/>
-                  </a:lnTo>
-                  <a:lnTo>
-                    <a:pt x="6660894" y="211201"/>
-                  </a:lnTo>
-                  <a:lnTo>
-                    <a:pt x="6589272" y="244397"/>
-                  </a:lnTo>
-                  <a:lnTo>
-                    <a:pt x="6517649" y="277045"/>
-                  </a:lnTo>
-                  <a:lnTo>
-                    <a:pt x="6446027" y="309154"/>
-                  </a:lnTo>
-                  <a:lnTo>
-                    <a:pt x="6374404" y="340734"/>
-                  </a:lnTo>
-                  <a:lnTo>
-                    <a:pt x="6302782" y="371792"/>
-                  </a:lnTo>
-                  <a:lnTo>
-                    <a:pt x="6231159" y="402339"/>
-                  </a:lnTo>
-                  <a:lnTo>
-                    <a:pt x="6159537" y="432381"/>
-                  </a:lnTo>
-                  <a:lnTo>
-                    <a:pt x="6087914" y="461927"/>
-                  </a:lnTo>
-                  <a:lnTo>
-                    <a:pt x="6016292" y="490986"/>
-                  </a:lnTo>
-                  <a:lnTo>
-                    <a:pt x="5944669" y="519566"/>
-                  </a:lnTo>
-                  <a:lnTo>
-                    <a:pt x="5873047" y="547673"/>
-                  </a:lnTo>
-                  <a:lnTo>
-                    <a:pt x="5801424" y="575318"/>
-                  </a:lnTo>
-                  <a:lnTo>
-                    <a:pt x="5729802" y="602506"/>
-                  </a:lnTo>
-                  <a:lnTo>
-                    <a:pt x="5658179" y="629245"/>
-                  </a:lnTo>
-                  <a:lnTo>
-                    <a:pt x="5586557" y="655543"/>
-                  </a:lnTo>
-                  <a:lnTo>
-                    <a:pt x="5514934" y="681408"/>
-                  </a:lnTo>
-                  <a:lnTo>
-                    <a:pt x="5443311" y="706845"/>
-                  </a:lnTo>
-                  <a:lnTo>
-                    <a:pt x="5371689" y="731863"/>
-                  </a:lnTo>
-                  <a:lnTo>
-                    <a:pt x="5300066" y="756469"/>
-                  </a:lnTo>
-                  <a:lnTo>
-                    <a:pt x="5228444" y="780668"/>
-                  </a:lnTo>
-                  <a:lnTo>
-                    <a:pt x="5156821" y="804468"/>
-                  </a:lnTo>
-                  <a:lnTo>
-                    <a:pt x="5085199" y="827875"/>
-                  </a:lnTo>
-                  <a:lnTo>
-                    <a:pt x="5013576" y="850896"/>
-                  </a:lnTo>
-                  <a:lnTo>
-                    <a:pt x="4941954" y="873537"/>
-                  </a:lnTo>
-                  <a:lnTo>
-                    <a:pt x="4870331" y="895805"/>
-                  </a:lnTo>
-                  <a:lnTo>
-                    <a:pt x="4798709" y="917705"/>
-                  </a:lnTo>
-                  <a:lnTo>
-                    <a:pt x="4727086" y="939244"/>
-                  </a:lnTo>
-                  <a:lnTo>
-                    <a:pt x="4655464" y="960428"/>
-                  </a:lnTo>
-                  <a:lnTo>
-                    <a:pt x="4583841" y="981262"/>
-                  </a:lnTo>
-                  <a:lnTo>
-                    <a:pt x="4512219" y="1001752"/>
-                  </a:lnTo>
-                  <a:lnTo>
-                    <a:pt x="4440596" y="1021904"/>
-                  </a:lnTo>
-                  <a:lnTo>
-                    <a:pt x="4368974" y="1041724"/>
-                  </a:lnTo>
-                  <a:lnTo>
-                    <a:pt x="4297351" y="1061216"/>
-                  </a:lnTo>
-                  <a:lnTo>
-                    <a:pt x="4225729" y="1080387"/>
-                  </a:lnTo>
-                  <a:lnTo>
-                    <a:pt x="4154106" y="1099242"/>
-                  </a:lnTo>
-                  <a:lnTo>
-                    <a:pt x="4082483" y="1117786"/>
-                  </a:lnTo>
-                  <a:lnTo>
-                    <a:pt x="4010861" y="1136024"/>
-                  </a:lnTo>
-                  <a:lnTo>
-                    <a:pt x="3939238" y="1153960"/>
-                  </a:lnTo>
-                  <a:lnTo>
-                    <a:pt x="3867616" y="1171601"/>
-                  </a:lnTo>
-                  <a:lnTo>
-                    <a:pt x="3795993" y="1188951"/>
-                  </a:lnTo>
-                  <a:lnTo>
-                    <a:pt x="3724371" y="1206015"/>
-                  </a:lnTo>
-                  <a:lnTo>
-                    <a:pt x="3652748" y="1222797"/>
-                  </a:lnTo>
-                  <a:lnTo>
-                    <a:pt x="3581126" y="1239302"/>
-                  </a:lnTo>
-                  <a:lnTo>
-                    <a:pt x="3509503" y="1255534"/>
-                  </a:lnTo>
-                  <a:lnTo>
-                    <a:pt x="3437881" y="1271499"/>
-                  </a:lnTo>
-                  <a:lnTo>
-                    <a:pt x="3366258" y="1287201"/>
-                  </a:lnTo>
-                  <a:lnTo>
-                    <a:pt x="3294636" y="1302643"/>
-                  </a:lnTo>
-                  <a:lnTo>
-                    <a:pt x="3223013" y="1317831"/>
-                  </a:lnTo>
-                  <a:lnTo>
-                    <a:pt x="3151391" y="1332768"/>
-                  </a:lnTo>
-                  <a:lnTo>
-                    <a:pt x="3079768" y="1347459"/>
-                  </a:lnTo>
-                  <a:lnTo>
-                    <a:pt x="3008146" y="1394700"/>
-                  </a:lnTo>
-                  <a:lnTo>
-                    <a:pt x="2936523" y="1460600"/>
-                  </a:lnTo>
-                  <a:lnTo>
-                    <a:pt x="2864901" y="1521257"/>
-                  </a:lnTo>
-                  <a:lnTo>
-                    <a:pt x="2793278" y="1577089"/>
-                  </a:lnTo>
-                  <a:lnTo>
-                    <a:pt x="2721655" y="1628480"/>
-                  </a:lnTo>
-                  <a:lnTo>
-                    <a:pt x="2650033" y="1675784"/>
-                  </a:lnTo>
-                  <a:lnTo>
-                    <a:pt x="2578410" y="1719324"/>
-                  </a:lnTo>
-                  <a:lnTo>
-                    <a:pt x="2506788" y="1759401"/>
-                  </a:lnTo>
-                  <a:lnTo>
-                    <a:pt x="2435165" y="1796290"/>
-                  </a:lnTo>
-                  <a:lnTo>
-                    <a:pt x="2363543" y="1830245"/>
-                  </a:lnTo>
-                  <a:lnTo>
-                    <a:pt x="2291920" y="1861498"/>
-                  </a:lnTo>
-                  <a:lnTo>
-                    <a:pt x="2220298" y="1890266"/>
-                  </a:lnTo>
-                  <a:lnTo>
-                    <a:pt x="2148675" y="1916745"/>
-                  </a:lnTo>
-                  <a:lnTo>
-                    <a:pt x="2077053" y="1941118"/>
-                  </a:lnTo>
-                  <a:lnTo>
-                    <a:pt x="2005430" y="1963552"/>
-                  </a:lnTo>
-                  <a:lnTo>
-                    <a:pt x="1933808" y="1984202"/>
-                  </a:lnTo>
-                  <a:lnTo>
-                    <a:pt x="1862185" y="2003209"/>
-                  </a:lnTo>
-                  <a:lnTo>
-                    <a:pt x="1790563" y="2020704"/>
-                  </a:lnTo>
-                  <a:lnTo>
-                    <a:pt x="1718940" y="2036808"/>
-                  </a:lnTo>
-                  <a:lnTo>
-                    <a:pt x="1647318" y="2051630"/>
-                  </a:lnTo>
-                  <a:lnTo>
-                    <a:pt x="1575695" y="2065274"/>
-                  </a:lnTo>
-                  <a:lnTo>
-                    <a:pt x="1504073" y="2077832"/>
-                  </a:lnTo>
-                  <a:lnTo>
-                    <a:pt x="1432450" y="2089391"/>
-                  </a:lnTo>
-                  <a:lnTo>
-                    <a:pt x="1360827" y="2100031"/>
-                  </a:lnTo>
-                  <a:lnTo>
-                    <a:pt x="1289205" y="2109824"/>
-                  </a:lnTo>
-                  <a:lnTo>
-                    <a:pt x="1217582" y="2118838"/>
-                  </a:lnTo>
-                  <a:lnTo>
-                    <a:pt x="1145960" y="2127136"/>
-                  </a:lnTo>
-                  <a:lnTo>
-                    <a:pt x="1074337" y="2134773"/>
-                  </a:lnTo>
-                  <a:lnTo>
-                    <a:pt x="1002715" y="2141803"/>
-                  </a:lnTo>
-                  <a:lnTo>
-                    <a:pt x="931092" y="2148273"/>
-                  </a:lnTo>
-                  <a:lnTo>
-                    <a:pt x="859470" y="2154229"/>
-                  </a:lnTo>
-                  <a:lnTo>
-                    <a:pt x="787847" y="2159711"/>
-                  </a:lnTo>
-                  <a:lnTo>
-                    <a:pt x="716225" y="2164757"/>
-                  </a:lnTo>
-                  <a:lnTo>
-                    <a:pt x="644602" y="2169402"/>
-                  </a:lnTo>
-                  <a:lnTo>
-                    <a:pt x="572980" y="2173677"/>
-                  </a:lnTo>
-                  <a:lnTo>
-                    <a:pt x="501357" y="2177612"/>
-                  </a:lnTo>
-                  <a:lnTo>
-                    <a:pt x="429735" y="2181234"/>
-                  </a:lnTo>
-                  <a:lnTo>
-                    <a:pt x="358112" y="2184568"/>
-                  </a:lnTo>
-                  <a:lnTo>
-                    <a:pt x="286490" y="2187637"/>
-                  </a:lnTo>
-                  <a:lnTo>
-                    <a:pt x="214867" y="2190462"/>
-                  </a:lnTo>
-                  <a:lnTo>
-                    <a:pt x="143245" y="2193062"/>
-                  </a:lnTo>
-                  <a:lnTo>
-                    <a:pt x="71622" y="2195455"/>
-                  </a:lnTo>
-                  <a:lnTo>
-                    <a:pt x="0" y="2197658"/>
+                    <a:pt x="7019007" y="12484"/>
+                  </a:lnTo>
+                  <a:lnTo>
+                    <a:pt x="6947385" y="24859"/>
+                  </a:lnTo>
+                  <a:lnTo>
+                    <a:pt x="6875762" y="37125"/>
+                  </a:lnTo>
+                  <a:lnTo>
+                    <a:pt x="6804139" y="49285"/>
+                  </a:lnTo>
+                  <a:lnTo>
+                    <a:pt x="6732517" y="61338"/>
+                  </a:lnTo>
+                  <a:lnTo>
+                    <a:pt x="6660894" y="73286"/>
+                  </a:lnTo>
+                  <a:lnTo>
+                    <a:pt x="6589272" y="85129"/>
+                  </a:lnTo>
+                  <a:lnTo>
+                    <a:pt x="6517649" y="96869"/>
+                  </a:lnTo>
+                  <a:lnTo>
+                    <a:pt x="6446027" y="108506"/>
+                  </a:lnTo>
+                  <a:lnTo>
+                    <a:pt x="6374404" y="120041"/>
+                  </a:lnTo>
+                  <a:lnTo>
+                    <a:pt x="6302782" y="131475"/>
+                  </a:lnTo>
+                  <a:lnTo>
+                    <a:pt x="6231159" y="142810"/>
+                  </a:lnTo>
+                  <a:lnTo>
+                    <a:pt x="6159537" y="154045"/>
+                  </a:lnTo>
+                  <a:lnTo>
+                    <a:pt x="6087914" y="165182"/>
+                  </a:lnTo>
+                  <a:lnTo>
+                    <a:pt x="6016292" y="176221"/>
+                  </a:lnTo>
+                  <a:lnTo>
+                    <a:pt x="5944669" y="187164"/>
+                  </a:lnTo>
+                  <a:lnTo>
+                    <a:pt x="5873047" y="198012"/>
+                  </a:lnTo>
+                  <a:lnTo>
+                    <a:pt x="5801424" y="208764"/>
+                  </a:lnTo>
+                  <a:lnTo>
+                    <a:pt x="5729802" y="219422"/>
+                  </a:lnTo>
+                  <a:lnTo>
+                    <a:pt x="5658179" y="229988"/>
+                  </a:lnTo>
+                  <a:lnTo>
+                    <a:pt x="5586557" y="240460"/>
+                  </a:lnTo>
+                  <a:lnTo>
+                    <a:pt x="5514934" y="250842"/>
+                  </a:lnTo>
+                  <a:lnTo>
+                    <a:pt x="5443311" y="261132"/>
+                  </a:lnTo>
+                  <a:lnTo>
+                    <a:pt x="5371689" y="271332"/>
+                  </a:lnTo>
+                  <a:lnTo>
+                    <a:pt x="5300066" y="281444"/>
+                  </a:lnTo>
+                  <a:lnTo>
+                    <a:pt x="5228444" y="291466"/>
+                  </a:lnTo>
+                  <a:lnTo>
+                    <a:pt x="5156821" y="301402"/>
+                  </a:lnTo>
+                  <a:lnTo>
+                    <a:pt x="5085199" y="311250"/>
+                  </a:lnTo>
+                  <a:lnTo>
+                    <a:pt x="5013576" y="321012"/>
+                  </a:lnTo>
+                  <a:lnTo>
+                    <a:pt x="4941954" y="330689"/>
+                  </a:lnTo>
+                  <a:lnTo>
+                    <a:pt x="4870331" y="340281"/>
+                  </a:lnTo>
+                  <a:lnTo>
+                    <a:pt x="4798709" y="349789"/>
+                  </a:lnTo>
+                  <a:lnTo>
+                    <a:pt x="4727086" y="359214"/>
+                  </a:lnTo>
+                  <a:lnTo>
+                    <a:pt x="4655464" y="368557"/>
+                  </a:lnTo>
+                  <a:lnTo>
+                    <a:pt x="4583841" y="377817"/>
+                  </a:lnTo>
+                  <a:lnTo>
+                    <a:pt x="4512219" y="386997"/>
+                  </a:lnTo>
+                  <a:lnTo>
+                    <a:pt x="4440596" y="396097"/>
+                  </a:lnTo>
+                  <a:lnTo>
+                    <a:pt x="4368974" y="405117"/>
+                  </a:lnTo>
+                  <a:lnTo>
+                    <a:pt x="4297351" y="414058"/>
+                  </a:lnTo>
+                  <a:lnTo>
+                    <a:pt x="4225729" y="422921"/>
+                  </a:lnTo>
+                  <a:lnTo>
+                    <a:pt x="4154106" y="431707"/>
+                  </a:lnTo>
+                  <a:lnTo>
+                    <a:pt x="4082483" y="440415"/>
+                  </a:lnTo>
+                  <a:lnTo>
+                    <a:pt x="4010861" y="449048"/>
+                  </a:lnTo>
+                  <a:lnTo>
+                    <a:pt x="3939238" y="457605"/>
+                  </a:lnTo>
+                  <a:lnTo>
+                    <a:pt x="3867616" y="466087"/>
+                  </a:lnTo>
+                  <a:lnTo>
+                    <a:pt x="3795993" y="474495"/>
+                  </a:lnTo>
+                  <a:lnTo>
+                    <a:pt x="3724371" y="482829"/>
+                  </a:lnTo>
+                  <a:lnTo>
+                    <a:pt x="3652748" y="491091"/>
+                  </a:lnTo>
+                  <a:lnTo>
+                    <a:pt x="3581126" y="499280"/>
+                  </a:lnTo>
+                  <a:lnTo>
+                    <a:pt x="3509503" y="507398"/>
+                  </a:lnTo>
+                  <a:lnTo>
+                    <a:pt x="3437881" y="515445"/>
+                  </a:lnTo>
+                  <a:lnTo>
+                    <a:pt x="3366258" y="523421"/>
+                  </a:lnTo>
+                  <a:lnTo>
+                    <a:pt x="3294636" y="531327"/>
+                  </a:lnTo>
+                  <a:lnTo>
+                    <a:pt x="3223013" y="539165"/>
+                  </a:lnTo>
+                  <a:lnTo>
+                    <a:pt x="3151391" y="546934"/>
+                  </a:lnTo>
+                  <a:lnTo>
+                    <a:pt x="3079768" y="554634"/>
+                  </a:lnTo>
+                  <a:lnTo>
+                    <a:pt x="3008146" y="602220"/>
+                  </a:lnTo>
+                  <a:lnTo>
+                    <a:pt x="2936523" y="672846"/>
+                  </a:lnTo>
+                  <a:lnTo>
+                    <a:pt x="2864901" y="737428"/>
+                  </a:lnTo>
+                  <a:lnTo>
+                    <a:pt x="2793278" y="796483"/>
+                  </a:lnTo>
+                  <a:lnTo>
+                    <a:pt x="2721655" y="850484"/>
+                  </a:lnTo>
+                  <a:lnTo>
+                    <a:pt x="2650033" y="899863"/>
+                  </a:lnTo>
+                  <a:lnTo>
+                    <a:pt x="2578410" y="945017"/>
+                  </a:lnTo>
+                  <a:lnTo>
+                    <a:pt x="2506788" y="986306"/>
+                  </a:lnTo>
+                  <a:lnTo>
+                    <a:pt x="2435165" y="1024062"/>
+                  </a:lnTo>
+                  <a:lnTo>
+                    <a:pt x="2363543" y="1058587"/>
+                  </a:lnTo>
+                  <a:lnTo>
+                    <a:pt x="2291920" y="1090157"/>
+                  </a:lnTo>
+                  <a:lnTo>
+                    <a:pt x="2220298" y="1119025"/>
+                  </a:lnTo>
+                  <a:lnTo>
+                    <a:pt x="2148675" y="1145423"/>
+                  </a:lnTo>
+                  <a:lnTo>
+                    <a:pt x="2077053" y="1169561"/>
+                  </a:lnTo>
+                  <a:lnTo>
+                    <a:pt x="2005430" y="1191634"/>
+                  </a:lnTo>
+                  <a:lnTo>
+                    <a:pt x="1933808" y="1211818"/>
+                  </a:lnTo>
+                  <a:lnTo>
+                    <a:pt x="1862185" y="1230274"/>
+                  </a:lnTo>
+                  <a:lnTo>
+                    <a:pt x="1790563" y="1247151"/>
+                  </a:lnTo>
+                  <a:lnTo>
+                    <a:pt x="1718940" y="1262584"/>
+                  </a:lnTo>
+                  <a:lnTo>
+                    <a:pt x="1647318" y="1276696"/>
+                  </a:lnTo>
+                  <a:lnTo>
+                    <a:pt x="1575695" y="1289600"/>
+                  </a:lnTo>
+                  <a:lnTo>
+                    <a:pt x="1504073" y="1301400"/>
+                  </a:lnTo>
+                  <a:lnTo>
+                    <a:pt x="1432450" y="1312190"/>
+                  </a:lnTo>
+                  <a:lnTo>
+                    <a:pt x="1360827" y="1322056"/>
+                  </a:lnTo>
+                  <a:lnTo>
+                    <a:pt x="1289205" y="1331078"/>
+                  </a:lnTo>
+                  <a:lnTo>
+                    <a:pt x="1217582" y="1339329"/>
+                  </a:lnTo>
+                  <a:lnTo>
+                    <a:pt x="1145960" y="1346873"/>
+                  </a:lnTo>
+                  <a:lnTo>
+                    <a:pt x="1074337" y="1353771"/>
+                  </a:lnTo>
+                  <a:lnTo>
+                    <a:pt x="1002715" y="1360079"/>
+                  </a:lnTo>
+                  <a:lnTo>
+                    <a:pt x="931092" y="1365847"/>
+                  </a:lnTo>
+                  <a:lnTo>
+                    <a:pt x="859470" y="1371122"/>
+                  </a:lnTo>
+                  <a:lnTo>
+                    <a:pt x="787847" y="1375945"/>
+                  </a:lnTo>
+                  <a:lnTo>
+                    <a:pt x="716225" y="1380355"/>
+                  </a:lnTo>
+                  <a:lnTo>
+                    <a:pt x="644602" y="1384388"/>
+                  </a:lnTo>
+                  <a:lnTo>
+                    <a:pt x="572980" y="1388076"/>
+                  </a:lnTo>
+                  <a:lnTo>
+                    <a:pt x="501357" y="1391448"/>
+                  </a:lnTo>
+                  <a:lnTo>
+                    <a:pt x="429735" y="1394532"/>
+                  </a:lnTo>
+                  <a:lnTo>
+                    <a:pt x="358112" y="1397352"/>
+                  </a:lnTo>
+                  <a:lnTo>
+                    <a:pt x="286490" y="1399930"/>
+                  </a:lnTo>
+                  <a:lnTo>
+                    <a:pt x="214867" y="1402288"/>
+                  </a:lnTo>
+                  <a:lnTo>
+                    <a:pt x="143245" y="1404444"/>
+                  </a:lnTo>
+                  <a:lnTo>
+                    <a:pt x="71622" y="1406415"/>
+                  </a:lnTo>
+                  <a:lnTo>
+                    <a:pt x="0" y="1408218"/>
                   </a:lnTo>
                 </a:path>
               </a:pathLst>
@@ -4182,230 +4176,230 @@
           <p:spPr>
             <a:xfrm>
               <a:off x="1172049" y="1896563"/>
-              <a:ext cx="5115181" cy="3548169"/>
+              <a:ext cx="5142141" cy="3545293"/>
             </a:xfrm>
             <a:custGeom>
               <a:avLst/>
               <a:pathLst>
-                <a:path w="5115181" h="3548169">
+                <a:path w="5142141" h="3545293">
                   <a:moveTo>
-                    <a:pt x="0" y="3548169"/>
+                    <a:pt x="0" y="3545293"/>
                   </a:moveTo>
                   <a:lnTo>
-                    <a:pt x="71622" y="3542839"/>
-                  </a:lnTo>
-                  <a:lnTo>
-                    <a:pt x="143245" y="3537236"/>
-                  </a:lnTo>
-                  <a:lnTo>
-                    <a:pt x="214867" y="3531348"/>
-                  </a:lnTo>
-                  <a:lnTo>
-                    <a:pt x="286490" y="3525159"/>
-                  </a:lnTo>
-                  <a:lnTo>
-                    <a:pt x="358112" y="3518655"/>
-                  </a:lnTo>
-                  <a:lnTo>
-                    <a:pt x="429735" y="3511819"/>
-                  </a:lnTo>
-                  <a:lnTo>
-                    <a:pt x="501357" y="3504634"/>
-                  </a:lnTo>
-                  <a:lnTo>
-                    <a:pt x="572980" y="3497082"/>
-                  </a:lnTo>
-                  <a:lnTo>
-                    <a:pt x="644602" y="3489145"/>
-                  </a:lnTo>
-                  <a:lnTo>
-                    <a:pt x="716225" y="3480803"/>
-                  </a:lnTo>
-                  <a:lnTo>
-                    <a:pt x="787847" y="3472035"/>
-                  </a:lnTo>
-                  <a:lnTo>
-                    <a:pt x="859470" y="3462821"/>
-                  </a:lnTo>
-                  <a:lnTo>
-                    <a:pt x="931092" y="3453136"/>
-                  </a:lnTo>
-                  <a:lnTo>
-                    <a:pt x="1002715" y="3442956"/>
-                  </a:lnTo>
-                  <a:lnTo>
-                    <a:pt x="1074337" y="3432258"/>
-                  </a:lnTo>
-                  <a:lnTo>
-                    <a:pt x="1145960" y="3421014"/>
-                  </a:lnTo>
-                  <a:lnTo>
-                    <a:pt x="1217582" y="3409196"/>
-                  </a:lnTo>
-                  <a:lnTo>
-                    <a:pt x="1289205" y="3396774"/>
-                  </a:lnTo>
-                  <a:lnTo>
-                    <a:pt x="1360827" y="3383720"/>
-                  </a:lnTo>
-                  <a:lnTo>
-                    <a:pt x="1432450" y="3369999"/>
-                  </a:lnTo>
-                  <a:lnTo>
-                    <a:pt x="1504073" y="3355578"/>
-                  </a:lnTo>
-                  <a:lnTo>
-                    <a:pt x="1575695" y="3340421"/>
-                  </a:lnTo>
-                  <a:lnTo>
-                    <a:pt x="1647318" y="3324491"/>
-                  </a:lnTo>
-                  <a:lnTo>
-                    <a:pt x="1718940" y="3307748"/>
-                  </a:lnTo>
-                  <a:lnTo>
-                    <a:pt x="1790563" y="3290151"/>
-                  </a:lnTo>
-                  <a:lnTo>
-                    <a:pt x="1862185" y="3271657"/>
-                  </a:lnTo>
-                  <a:lnTo>
-                    <a:pt x="1933808" y="3252218"/>
-                  </a:lnTo>
-                  <a:lnTo>
-                    <a:pt x="2005430" y="3231788"/>
-                  </a:lnTo>
-                  <a:lnTo>
-                    <a:pt x="2077053" y="3210315"/>
-                  </a:lnTo>
-                  <a:lnTo>
-                    <a:pt x="2148675" y="3187747"/>
-                  </a:lnTo>
-                  <a:lnTo>
-                    <a:pt x="2220298" y="3164028"/>
-                  </a:lnTo>
-                  <a:lnTo>
-                    <a:pt x="2291920" y="3139098"/>
-                  </a:lnTo>
-                  <a:lnTo>
-                    <a:pt x="2363543" y="3112896"/>
-                  </a:lnTo>
-                  <a:lnTo>
-                    <a:pt x="2435165" y="3085357"/>
-                  </a:lnTo>
-                  <a:lnTo>
-                    <a:pt x="2506788" y="3056414"/>
-                  </a:lnTo>
-                  <a:lnTo>
-                    <a:pt x="2578410" y="3025993"/>
-                  </a:lnTo>
-                  <a:lnTo>
-                    <a:pt x="2650033" y="2994021"/>
-                  </a:lnTo>
-                  <a:lnTo>
-                    <a:pt x="2721655" y="2960417"/>
-                  </a:lnTo>
-                  <a:lnTo>
-                    <a:pt x="2793278" y="2925098"/>
-                  </a:lnTo>
-                  <a:lnTo>
-                    <a:pt x="2864901" y="2887978"/>
-                  </a:lnTo>
-                  <a:lnTo>
-                    <a:pt x="2936523" y="2848964"/>
-                  </a:lnTo>
-                  <a:lnTo>
-                    <a:pt x="3008146" y="2807959"/>
-                  </a:lnTo>
-                  <a:lnTo>
-                    <a:pt x="3079768" y="2764862"/>
-                  </a:lnTo>
-                  <a:lnTo>
-                    <a:pt x="3151391" y="2719566"/>
-                  </a:lnTo>
-                  <a:lnTo>
-                    <a:pt x="3223013" y="2671959"/>
-                  </a:lnTo>
-                  <a:lnTo>
-                    <a:pt x="3294636" y="2621924"/>
-                  </a:lnTo>
-                  <a:lnTo>
-                    <a:pt x="3366258" y="2569335"/>
-                  </a:lnTo>
-                  <a:lnTo>
-                    <a:pt x="3437881" y="2514063"/>
-                  </a:lnTo>
-                  <a:lnTo>
-                    <a:pt x="3509503" y="2455971"/>
-                  </a:lnTo>
-                  <a:lnTo>
-                    <a:pt x="3581126" y="2394915"/>
-                  </a:lnTo>
-                  <a:lnTo>
-                    <a:pt x="3652748" y="2330744"/>
-                  </a:lnTo>
-                  <a:lnTo>
-                    <a:pt x="3724371" y="2263299"/>
-                  </a:lnTo>
-                  <a:lnTo>
-                    <a:pt x="3795993" y="2192413"/>
-                  </a:lnTo>
-                  <a:lnTo>
-                    <a:pt x="3867616" y="2117910"/>
-                  </a:lnTo>
-                  <a:lnTo>
-                    <a:pt x="3939238" y="2039606"/>
-                  </a:lnTo>
-                  <a:lnTo>
-                    <a:pt x="4010861" y="1957306"/>
-                  </a:lnTo>
-                  <a:lnTo>
-                    <a:pt x="4082483" y="1870808"/>
-                  </a:lnTo>
-                  <a:lnTo>
-                    <a:pt x="4154106" y="1779896"/>
-                  </a:lnTo>
-                  <a:lnTo>
-                    <a:pt x="4225729" y="1684346"/>
-                  </a:lnTo>
-                  <a:lnTo>
-                    <a:pt x="4297351" y="1583921"/>
-                  </a:lnTo>
-                  <a:lnTo>
-                    <a:pt x="4368974" y="1478372"/>
-                  </a:lnTo>
-                  <a:lnTo>
-                    <a:pt x="4440596" y="1367438"/>
-                  </a:lnTo>
-                  <a:lnTo>
-                    <a:pt x="4512219" y="1250843"/>
-                  </a:lnTo>
-                  <a:lnTo>
-                    <a:pt x="4583841" y="1128300"/>
-                  </a:lnTo>
-                  <a:lnTo>
-                    <a:pt x="4655464" y="999505"/>
-                  </a:lnTo>
-                  <a:lnTo>
-                    <a:pt x="4727086" y="864138"/>
-                  </a:lnTo>
-                  <a:lnTo>
-                    <a:pt x="4798709" y="721865"/>
-                  </a:lnTo>
-                  <a:lnTo>
-                    <a:pt x="4870331" y="572333"/>
-                  </a:lnTo>
-                  <a:lnTo>
-                    <a:pt x="4941954" y="415171"/>
-                  </a:lnTo>
-                  <a:lnTo>
-                    <a:pt x="5013576" y="249991"/>
-                  </a:lnTo>
-                  <a:lnTo>
-                    <a:pt x="5085199" y="76383"/>
-                  </a:lnTo>
-                  <a:lnTo>
-                    <a:pt x="5115181" y="0"/>
+                    <a:pt x="71622" y="3539888"/>
+                  </a:lnTo>
+                  <a:lnTo>
+                    <a:pt x="143245" y="3534211"/>
+                  </a:lnTo>
+                  <a:lnTo>
+                    <a:pt x="214867" y="3528247"/>
+                  </a:lnTo>
+                  <a:lnTo>
+                    <a:pt x="286490" y="3521984"/>
+                  </a:lnTo>
+                  <a:lnTo>
+                    <a:pt x="358112" y="3515405"/>
+                  </a:lnTo>
+                  <a:lnTo>
+                    <a:pt x="429735" y="3508495"/>
+                  </a:lnTo>
+                  <a:lnTo>
+                    <a:pt x="501357" y="3501237"/>
+                  </a:lnTo>
+                  <a:lnTo>
+                    <a:pt x="572980" y="3493613"/>
+                  </a:lnTo>
+                  <a:lnTo>
+                    <a:pt x="644602" y="3485606"/>
+                  </a:lnTo>
+                  <a:lnTo>
+                    <a:pt x="716225" y="3477195"/>
+                  </a:lnTo>
+                  <a:lnTo>
+                    <a:pt x="787847" y="3468361"/>
+                  </a:lnTo>
+                  <a:lnTo>
+                    <a:pt x="859470" y="3459082"/>
+                  </a:lnTo>
+                  <a:lnTo>
+                    <a:pt x="931092" y="3449336"/>
+                  </a:lnTo>
+                  <a:lnTo>
+                    <a:pt x="1002715" y="3439100"/>
+                  </a:lnTo>
+                  <a:lnTo>
+                    <a:pt x="1074337" y="3428347"/>
+                  </a:lnTo>
+                  <a:lnTo>
+                    <a:pt x="1145960" y="3417054"/>
+                  </a:lnTo>
+                  <a:lnTo>
+                    <a:pt x="1217582" y="3405191"/>
+                  </a:lnTo>
+                  <a:lnTo>
+                    <a:pt x="1289205" y="3392732"/>
+                  </a:lnTo>
+                  <a:lnTo>
+                    <a:pt x="1360827" y="3379645"/>
+                  </a:lnTo>
+                  <a:lnTo>
+                    <a:pt x="1432450" y="3365899"/>
+                  </a:lnTo>
+                  <a:lnTo>
+                    <a:pt x="1504073" y="3351461"/>
+                  </a:lnTo>
+                  <a:lnTo>
+                    <a:pt x="1575695" y="3336296"/>
+                  </a:lnTo>
+                  <a:lnTo>
+                    <a:pt x="1647318" y="3320368"/>
+                  </a:lnTo>
+                  <a:lnTo>
+                    <a:pt x="1718940" y="3303637"/>
+                  </a:lnTo>
+                  <a:lnTo>
+                    <a:pt x="1790563" y="3286064"/>
+                  </a:lnTo>
+                  <a:lnTo>
+                    <a:pt x="1862185" y="3267606"/>
+                  </a:lnTo>
+                  <a:lnTo>
+                    <a:pt x="1933808" y="3248219"/>
+                  </a:lnTo>
+                  <a:lnTo>
+                    <a:pt x="2005430" y="3227856"/>
+                  </a:lnTo>
+                  <a:lnTo>
+                    <a:pt x="2077053" y="3206467"/>
+                  </a:lnTo>
+                  <a:lnTo>
+                    <a:pt x="2148675" y="3184001"/>
+                  </a:lnTo>
+                  <a:lnTo>
+                    <a:pt x="2220298" y="3160405"/>
+                  </a:lnTo>
+                  <a:lnTo>
+                    <a:pt x="2291920" y="3135620"/>
+                  </a:lnTo>
+                  <a:lnTo>
+                    <a:pt x="2363543" y="3109587"/>
+                  </a:lnTo>
+                  <a:lnTo>
+                    <a:pt x="2435165" y="3082243"/>
+                  </a:lnTo>
+                  <a:lnTo>
+                    <a:pt x="2506788" y="3053523"/>
+                  </a:lnTo>
+                  <a:lnTo>
+                    <a:pt x="2578410" y="3023356"/>
+                  </a:lnTo>
+                  <a:lnTo>
+                    <a:pt x="2650033" y="2991671"/>
+                  </a:lnTo>
+                  <a:lnTo>
+                    <a:pt x="2721655" y="2958390"/>
+                  </a:lnTo>
+                  <a:lnTo>
+                    <a:pt x="2793278" y="2923433"/>
+                  </a:lnTo>
+                  <a:lnTo>
+                    <a:pt x="2864901" y="2886716"/>
+                  </a:lnTo>
+                  <a:lnTo>
+                    <a:pt x="2936523" y="2848151"/>
+                  </a:lnTo>
+                  <a:lnTo>
+                    <a:pt x="3008146" y="2807643"/>
+                  </a:lnTo>
+                  <a:lnTo>
+                    <a:pt x="3079768" y="2765096"/>
+                  </a:lnTo>
+                  <a:lnTo>
+                    <a:pt x="3151391" y="2720407"/>
+                  </a:lnTo>
+                  <a:lnTo>
+                    <a:pt x="3223013" y="2673468"/>
+                  </a:lnTo>
+                  <a:lnTo>
+                    <a:pt x="3294636" y="2624165"/>
+                  </a:lnTo>
+                  <a:lnTo>
+                    <a:pt x="3366258" y="2572379"/>
+                  </a:lnTo>
+                  <a:lnTo>
+                    <a:pt x="3437881" y="2517987"/>
+                  </a:lnTo>
+                  <a:lnTo>
+                    <a:pt x="3509503" y="2460855"/>
+                  </a:lnTo>
+                  <a:lnTo>
+                    <a:pt x="3581126" y="2400847"/>
+                  </a:lnTo>
+                  <a:lnTo>
+                    <a:pt x="3652748" y="2337817"/>
+                  </a:lnTo>
+                  <a:lnTo>
+                    <a:pt x="3724371" y="2271614"/>
+                  </a:lnTo>
+                  <a:lnTo>
+                    <a:pt x="3795993" y="2202077"/>
+                  </a:lnTo>
+                  <a:lnTo>
+                    <a:pt x="3867616" y="2129039"/>
+                  </a:lnTo>
+                  <a:lnTo>
+                    <a:pt x="3939238" y="2052323"/>
+                  </a:lnTo>
+                  <a:lnTo>
+                    <a:pt x="4010861" y="1971744"/>
+                  </a:lnTo>
+                  <a:lnTo>
+                    <a:pt x="4082483" y="1887109"/>
+                  </a:lnTo>
+                  <a:lnTo>
+                    <a:pt x="4154106" y="1798212"/>
+                  </a:lnTo>
+                  <a:lnTo>
+                    <a:pt x="4225729" y="1704838"/>
+                  </a:lnTo>
+                  <a:lnTo>
+                    <a:pt x="4297351" y="1606764"/>
+                  </a:lnTo>
+                  <a:lnTo>
+                    <a:pt x="4368974" y="1503751"/>
+                  </a:lnTo>
+                  <a:lnTo>
+                    <a:pt x="4440596" y="1395551"/>
+                  </a:lnTo>
+                  <a:lnTo>
+                    <a:pt x="4512219" y="1281903"/>
+                  </a:lnTo>
+                  <a:lnTo>
+                    <a:pt x="4583841" y="1162533"/>
+                  </a:lnTo>
+                  <a:lnTo>
+                    <a:pt x="4655464" y="1037152"/>
+                  </a:lnTo>
+                  <a:lnTo>
+                    <a:pt x="4727086" y="905458"/>
+                  </a:lnTo>
+                  <a:lnTo>
+                    <a:pt x="4798709" y="767134"/>
+                  </a:lnTo>
+                  <a:lnTo>
+                    <a:pt x="4870331" y="621844"/>
+                  </a:lnTo>
+                  <a:lnTo>
+                    <a:pt x="4941954" y="469239"/>
+                  </a:lnTo>
+                  <a:lnTo>
+                    <a:pt x="5013576" y="308950"/>
+                  </a:lnTo>
+                  <a:lnTo>
+                    <a:pt x="5085199" y="140590"/>
+                  </a:lnTo>
+                  <a:lnTo>
+                    <a:pt x="5142141" y="0"/>
                   </a:lnTo>
                 </a:path>
               </a:pathLst>

--- a/docs/plots/carbo/jx_carbo_linsubhr_dosedisc_throm3.pptx
+++ b/docs/plots/carbo/jx_carbo_linsubhr_dosedisc_throm3.pptx
@@ -3132,494 +3132,503 @@
           <p:spPr>
             <a:xfrm>
               <a:off x="1172049" y="1896563"/>
-              <a:ext cx="7090630" cy="3633381"/>
+              <a:ext cx="7090630" cy="3618079"/>
             </a:xfrm>
             <a:custGeom>
               <a:avLst/>
               <a:pathLst>
-                <a:path w="7090630" h="3633381">
+                <a:path w="7090630" h="3618079">
                   <a:moveTo>
-                    <a:pt x="0" y="3054372"/>
+                    <a:pt x="0" y="3142231"/>
                   </a:moveTo>
                   <a:lnTo>
-                    <a:pt x="71622" y="3049094"/>
-                  </a:lnTo>
-                  <a:lnTo>
-                    <a:pt x="143245" y="3043769"/>
-                  </a:lnTo>
-                  <a:lnTo>
-                    <a:pt x="214867" y="3038397"/>
-                  </a:lnTo>
-                  <a:lnTo>
-                    <a:pt x="286490" y="3032977"/>
-                  </a:lnTo>
-                  <a:lnTo>
-                    <a:pt x="358112" y="3027510"/>
-                  </a:lnTo>
-                  <a:lnTo>
-                    <a:pt x="429735" y="3021995"/>
-                  </a:lnTo>
-                  <a:lnTo>
-                    <a:pt x="501357" y="3016431"/>
-                  </a:lnTo>
-                  <a:lnTo>
-                    <a:pt x="572980" y="3010818"/>
-                  </a:lnTo>
-                  <a:lnTo>
-                    <a:pt x="644602" y="3005155"/>
-                  </a:lnTo>
-                  <a:lnTo>
-                    <a:pt x="716225" y="2999442"/>
-                  </a:lnTo>
-                  <a:lnTo>
-                    <a:pt x="787847" y="2993679"/>
-                  </a:lnTo>
-                  <a:lnTo>
-                    <a:pt x="859470" y="2987865"/>
-                  </a:lnTo>
-                  <a:lnTo>
-                    <a:pt x="931092" y="2982000"/>
-                  </a:lnTo>
-                  <a:lnTo>
-                    <a:pt x="1002715" y="2976083"/>
-                  </a:lnTo>
-                  <a:lnTo>
-                    <a:pt x="1074337" y="2970114"/>
-                  </a:lnTo>
-                  <a:lnTo>
-                    <a:pt x="1145960" y="2964092"/>
-                  </a:lnTo>
-                  <a:lnTo>
-                    <a:pt x="1217582" y="2958018"/>
-                  </a:lnTo>
-                  <a:lnTo>
-                    <a:pt x="1289205" y="2951889"/>
-                  </a:lnTo>
-                  <a:lnTo>
-                    <a:pt x="1360827" y="2945706"/>
-                  </a:lnTo>
-                  <a:lnTo>
-                    <a:pt x="1432450" y="2939469"/>
-                  </a:lnTo>
-                  <a:lnTo>
-                    <a:pt x="1504073" y="2933177"/>
-                  </a:lnTo>
-                  <a:lnTo>
-                    <a:pt x="1575695" y="2926829"/>
-                  </a:lnTo>
-                  <a:lnTo>
-                    <a:pt x="1647318" y="2920426"/>
-                  </a:lnTo>
-                  <a:lnTo>
-                    <a:pt x="1718940" y="2913966"/>
-                  </a:lnTo>
-                  <a:lnTo>
-                    <a:pt x="1790563" y="2907448"/>
-                  </a:lnTo>
-                  <a:lnTo>
-                    <a:pt x="1862185" y="2900874"/>
-                  </a:lnTo>
-                  <a:lnTo>
-                    <a:pt x="1933808" y="2894241"/>
-                  </a:lnTo>
-                  <a:lnTo>
-                    <a:pt x="2005430" y="2887550"/>
-                  </a:lnTo>
-                  <a:lnTo>
-                    <a:pt x="2077053" y="2880800"/>
-                  </a:lnTo>
-                  <a:lnTo>
-                    <a:pt x="2148675" y="2873990"/>
-                  </a:lnTo>
-                  <a:lnTo>
-                    <a:pt x="2220298" y="2867120"/>
-                  </a:lnTo>
-                  <a:lnTo>
-                    <a:pt x="2291920" y="2860190"/>
-                  </a:lnTo>
-                  <a:lnTo>
-                    <a:pt x="2363543" y="2853198"/>
-                  </a:lnTo>
-                  <a:lnTo>
-                    <a:pt x="2435165" y="2846145"/>
-                  </a:lnTo>
-                  <a:lnTo>
-                    <a:pt x="2506788" y="2839029"/>
-                  </a:lnTo>
-                  <a:lnTo>
-                    <a:pt x="2578410" y="2831851"/>
-                  </a:lnTo>
-                  <a:lnTo>
-                    <a:pt x="2650033" y="2824609"/>
-                  </a:lnTo>
-                  <a:lnTo>
-                    <a:pt x="2721655" y="2817304"/>
-                  </a:lnTo>
-                  <a:lnTo>
-                    <a:pt x="2793278" y="2809934"/>
-                  </a:lnTo>
-                  <a:lnTo>
-                    <a:pt x="2864901" y="2802498"/>
-                  </a:lnTo>
-                  <a:lnTo>
-                    <a:pt x="2936523" y="2794998"/>
-                  </a:lnTo>
-                  <a:lnTo>
-                    <a:pt x="3008146" y="2787431"/>
-                  </a:lnTo>
-                  <a:lnTo>
-                    <a:pt x="3079768" y="2750148"/>
-                  </a:lnTo>
-                  <a:lnTo>
-                    <a:pt x="3151391" y="2665683"/>
-                  </a:lnTo>
-                  <a:lnTo>
-                    <a:pt x="3223013" y="2573314"/>
-                  </a:lnTo>
-                  <a:lnTo>
-                    <a:pt x="3294636" y="2472300"/>
-                  </a:lnTo>
-                  <a:lnTo>
-                    <a:pt x="3366258" y="2361832"/>
-                  </a:lnTo>
-                  <a:lnTo>
-                    <a:pt x="3437881" y="2241026"/>
-                  </a:lnTo>
-                  <a:lnTo>
-                    <a:pt x="3509503" y="2108913"/>
-                  </a:lnTo>
-                  <a:lnTo>
-                    <a:pt x="3581126" y="1964435"/>
-                  </a:lnTo>
-                  <a:lnTo>
-                    <a:pt x="3652748" y="1806437"/>
-                  </a:lnTo>
-                  <a:lnTo>
-                    <a:pt x="3724371" y="1633651"/>
-                  </a:lnTo>
-                  <a:lnTo>
-                    <a:pt x="3795993" y="1444694"/>
-                  </a:lnTo>
-                  <a:lnTo>
-                    <a:pt x="3867616" y="1238053"/>
-                  </a:lnTo>
-                  <a:lnTo>
-                    <a:pt x="3939238" y="1012072"/>
-                  </a:lnTo>
-                  <a:lnTo>
-                    <a:pt x="4010861" y="764942"/>
-                  </a:lnTo>
-                  <a:lnTo>
-                    <a:pt x="4082483" y="494683"/>
-                  </a:lnTo>
-                  <a:lnTo>
-                    <a:pt x="4154106" y="199130"/>
-                  </a:lnTo>
-                  <a:lnTo>
-                    <a:pt x="4198232" y="0"/>
+                    <a:pt x="71622" y="3135804"/>
+                  </a:lnTo>
+                  <a:lnTo>
+                    <a:pt x="143245" y="3129295"/>
+                  </a:lnTo>
+                  <a:lnTo>
+                    <a:pt x="214867" y="3122705"/>
+                  </a:lnTo>
+                  <a:lnTo>
+                    <a:pt x="286490" y="3116032"/>
+                  </a:lnTo>
+                  <a:lnTo>
+                    <a:pt x="358112" y="3109275"/>
+                  </a:lnTo>
+                  <a:lnTo>
+                    <a:pt x="429735" y="3102433"/>
+                  </a:lnTo>
+                  <a:lnTo>
+                    <a:pt x="501357" y="3095505"/>
+                  </a:lnTo>
+                  <a:lnTo>
+                    <a:pt x="572980" y="3088489"/>
+                  </a:lnTo>
+                  <a:lnTo>
+                    <a:pt x="644602" y="3081385"/>
+                  </a:lnTo>
+                  <a:lnTo>
+                    <a:pt x="716225" y="3074192"/>
+                  </a:lnTo>
+                  <a:lnTo>
+                    <a:pt x="787847" y="3066908"/>
+                  </a:lnTo>
+                  <a:lnTo>
+                    <a:pt x="859470" y="3059532"/>
+                  </a:lnTo>
+                  <a:lnTo>
+                    <a:pt x="931092" y="3052063"/>
+                  </a:lnTo>
+                  <a:lnTo>
+                    <a:pt x="1002715" y="3044501"/>
+                  </a:lnTo>
+                  <a:lnTo>
+                    <a:pt x="1074337" y="3036843"/>
+                  </a:lnTo>
+                  <a:lnTo>
+                    <a:pt x="1145960" y="3029089"/>
+                  </a:lnTo>
+                  <a:lnTo>
+                    <a:pt x="1217582" y="3021237"/>
+                  </a:lnTo>
+                  <a:lnTo>
+                    <a:pt x="1289205" y="3013286"/>
+                  </a:lnTo>
+                  <a:lnTo>
+                    <a:pt x="1360827" y="3005235"/>
+                  </a:lnTo>
+                  <a:lnTo>
+                    <a:pt x="1432450" y="2997083"/>
+                  </a:lnTo>
+                  <a:lnTo>
+                    <a:pt x="1504073" y="2988828"/>
+                  </a:lnTo>
+                  <a:lnTo>
+                    <a:pt x="1575695" y="2980469"/>
+                  </a:lnTo>
+                  <a:lnTo>
+                    <a:pt x="1647318" y="2972005"/>
+                  </a:lnTo>
+                  <a:lnTo>
+                    <a:pt x="1718940" y="2963434"/>
+                  </a:lnTo>
+                  <a:lnTo>
+                    <a:pt x="1790563" y="2954755"/>
+                  </a:lnTo>
+                  <a:lnTo>
+                    <a:pt x="1862185" y="2945967"/>
+                  </a:lnTo>
+                  <a:lnTo>
+                    <a:pt x="1933808" y="2937069"/>
+                  </a:lnTo>
+                  <a:lnTo>
+                    <a:pt x="2005430" y="2928058"/>
+                  </a:lnTo>
+                  <a:lnTo>
+                    <a:pt x="2077053" y="2918934"/>
+                  </a:lnTo>
+                  <a:lnTo>
+                    <a:pt x="2148675" y="2909695"/>
+                  </a:lnTo>
+                  <a:lnTo>
+                    <a:pt x="2220298" y="2900340"/>
+                  </a:lnTo>
+                  <a:lnTo>
+                    <a:pt x="2291920" y="2890866"/>
+                  </a:lnTo>
+                  <a:lnTo>
+                    <a:pt x="2363543" y="2881274"/>
+                  </a:lnTo>
+                  <a:lnTo>
+                    <a:pt x="2435165" y="2871561"/>
+                  </a:lnTo>
+                  <a:lnTo>
+                    <a:pt x="2506788" y="2861725"/>
+                  </a:lnTo>
+                  <a:lnTo>
+                    <a:pt x="2578410" y="2851766"/>
+                  </a:lnTo>
+                  <a:lnTo>
+                    <a:pt x="2650033" y="2841681"/>
+                  </a:lnTo>
+                  <a:lnTo>
+                    <a:pt x="2721655" y="2831469"/>
+                  </a:lnTo>
+                  <a:lnTo>
+                    <a:pt x="2793278" y="2821129"/>
+                  </a:lnTo>
+                  <a:lnTo>
+                    <a:pt x="2864901" y="2810658"/>
+                  </a:lnTo>
+                  <a:lnTo>
+                    <a:pt x="2936523" y="2800056"/>
+                  </a:lnTo>
+                  <a:lnTo>
+                    <a:pt x="3008146" y="2789320"/>
+                  </a:lnTo>
+                  <a:lnTo>
+                    <a:pt x="3079768" y="2755263"/>
+                  </a:lnTo>
+                  <a:lnTo>
+                    <a:pt x="3151391" y="2684659"/>
+                  </a:lnTo>
+                  <a:lnTo>
+                    <a:pt x="3223013" y="2608499"/>
+                  </a:lnTo>
+                  <a:lnTo>
+                    <a:pt x="3294636" y="2526348"/>
+                  </a:lnTo>
+                  <a:lnTo>
+                    <a:pt x="3366258" y="2437733"/>
+                  </a:lnTo>
+                  <a:lnTo>
+                    <a:pt x="3437881" y="2342146"/>
+                  </a:lnTo>
+                  <a:lnTo>
+                    <a:pt x="3509503" y="2239038"/>
+                  </a:lnTo>
+                  <a:lnTo>
+                    <a:pt x="3581126" y="2127818"/>
+                  </a:lnTo>
+                  <a:lnTo>
+                    <a:pt x="3652748" y="2007847"/>
+                  </a:lnTo>
+                  <a:lnTo>
+                    <a:pt x="3724371" y="1878438"/>
+                  </a:lnTo>
+                  <a:lnTo>
+                    <a:pt x="3795993" y="1738846"/>
+                  </a:lnTo>
+                  <a:lnTo>
+                    <a:pt x="3867616" y="1588272"/>
+                  </a:lnTo>
+                  <a:lnTo>
+                    <a:pt x="3939238" y="1425850"/>
+                  </a:lnTo>
+                  <a:lnTo>
+                    <a:pt x="4010861" y="1250650"/>
+                  </a:lnTo>
+                  <a:lnTo>
+                    <a:pt x="4082483" y="1061665"/>
+                  </a:lnTo>
+                  <a:lnTo>
+                    <a:pt x="4154106" y="857811"/>
+                  </a:lnTo>
+                  <a:lnTo>
+                    <a:pt x="4225729" y="637919"/>
+                  </a:lnTo>
+                  <a:lnTo>
+                    <a:pt x="4297351" y="400725"/>
+                  </a:lnTo>
+                  <a:lnTo>
+                    <a:pt x="4368974" y="144870"/>
+                  </a:lnTo>
+                  <a:lnTo>
+                    <a:pt x="4406570" y="0"/>
                   </a:lnTo>
                   <a:lnTo>
                     <a:pt x="7090630" y="0"/>
                   </a:lnTo>
                   <a:lnTo>
-                    <a:pt x="7090630" y="2225163"/>
-                  </a:lnTo>
-                  <a:lnTo>
-                    <a:pt x="7019007" y="2237647"/>
-                  </a:lnTo>
-                  <a:lnTo>
-                    <a:pt x="6947385" y="2250022"/>
-                  </a:lnTo>
-                  <a:lnTo>
-                    <a:pt x="6875762" y="2262288"/>
-                  </a:lnTo>
-                  <a:lnTo>
-                    <a:pt x="6804139" y="2274448"/>
-                  </a:lnTo>
-                  <a:lnTo>
-                    <a:pt x="6732517" y="2286501"/>
-                  </a:lnTo>
-                  <a:lnTo>
-                    <a:pt x="6660894" y="2298449"/>
-                  </a:lnTo>
-                  <a:lnTo>
-                    <a:pt x="6589272" y="2310292"/>
-                  </a:lnTo>
-                  <a:lnTo>
-                    <a:pt x="6517649" y="2322032"/>
-                  </a:lnTo>
-                  <a:lnTo>
-                    <a:pt x="6446027" y="2333669"/>
-                  </a:lnTo>
-                  <a:lnTo>
-                    <a:pt x="6374404" y="2345204"/>
-                  </a:lnTo>
-                  <a:lnTo>
-                    <a:pt x="6302782" y="2356638"/>
-                  </a:lnTo>
-                  <a:lnTo>
-                    <a:pt x="6231159" y="2367973"/>
-                  </a:lnTo>
-                  <a:lnTo>
-                    <a:pt x="6159537" y="2379208"/>
-                  </a:lnTo>
-                  <a:lnTo>
-                    <a:pt x="6087914" y="2390345"/>
-                  </a:lnTo>
-                  <a:lnTo>
-                    <a:pt x="6016292" y="2401384"/>
-                  </a:lnTo>
-                  <a:lnTo>
-                    <a:pt x="5944669" y="2412327"/>
-                  </a:lnTo>
-                  <a:lnTo>
-                    <a:pt x="5873047" y="2423175"/>
-                  </a:lnTo>
-                  <a:lnTo>
-                    <a:pt x="5801424" y="2433927"/>
-                  </a:lnTo>
-                  <a:lnTo>
-                    <a:pt x="5729802" y="2444585"/>
-                  </a:lnTo>
-                  <a:lnTo>
-                    <a:pt x="5658179" y="2455151"/>
-                  </a:lnTo>
-                  <a:lnTo>
-                    <a:pt x="5586557" y="2465623"/>
-                  </a:lnTo>
-                  <a:lnTo>
-                    <a:pt x="5514934" y="2476005"/>
-                  </a:lnTo>
-                  <a:lnTo>
-                    <a:pt x="5443311" y="2486295"/>
-                  </a:lnTo>
-                  <a:lnTo>
-                    <a:pt x="5371689" y="2496495"/>
-                  </a:lnTo>
-                  <a:lnTo>
-                    <a:pt x="5300066" y="2506607"/>
-                  </a:lnTo>
-                  <a:lnTo>
-                    <a:pt x="5228444" y="2516629"/>
-                  </a:lnTo>
-                  <a:lnTo>
-                    <a:pt x="5156821" y="2526565"/>
-                  </a:lnTo>
-                  <a:lnTo>
-                    <a:pt x="5085199" y="2536413"/>
-                  </a:lnTo>
-                  <a:lnTo>
-                    <a:pt x="5013576" y="2546175"/>
-                  </a:lnTo>
-                  <a:lnTo>
-                    <a:pt x="4941954" y="2555852"/>
-                  </a:lnTo>
-                  <a:lnTo>
-                    <a:pt x="4870331" y="2565444"/>
-                  </a:lnTo>
-                  <a:lnTo>
-                    <a:pt x="4798709" y="2574952"/>
-                  </a:lnTo>
-                  <a:lnTo>
-                    <a:pt x="4727086" y="2584377"/>
-                  </a:lnTo>
-                  <a:lnTo>
-                    <a:pt x="4655464" y="2593720"/>
-                  </a:lnTo>
-                  <a:lnTo>
-                    <a:pt x="4583841" y="2602981"/>
-                  </a:lnTo>
-                  <a:lnTo>
-                    <a:pt x="4512219" y="2612160"/>
-                  </a:lnTo>
-                  <a:lnTo>
-                    <a:pt x="4440596" y="2621260"/>
-                  </a:lnTo>
-                  <a:lnTo>
-                    <a:pt x="4368974" y="2630280"/>
-                  </a:lnTo>
-                  <a:lnTo>
-                    <a:pt x="4297351" y="2639221"/>
-                  </a:lnTo>
-                  <a:lnTo>
-                    <a:pt x="4225729" y="2648084"/>
-                  </a:lnTo>
-                  <a:lnTo>
-                    <a:pt x="4154106" y="2656870"/>
-                  </a:lnTo>
-                  <a:lnTo>
-                    <a:pt x="4082483" y="2665578"/>
-                  </a:lnTo>
-                  <a:lnTo>
-                    <a:pt x="4010861" y="2674211"/>
-                  </a:lnTo>
-                  <a:lnTo>
-                    <a:pt x="3939238" y="2682768"/>
-                  </a:lnTo>
-                  <a:lnTo>
-                    <a:pt x="3867616" y="2691250"/>
-                  </a:lnTo>
-                  <a:lnTo>
-                    <a:pt x="3795993" y="2699658"/>
-                  </a:lnTo>
-                  <a:lnTo>
-                    <a:pt x="3724371" y="2707992"/>
-                  </a:lnTo>
-                  <a:lnTo>
-                    <a:pt x="3652748" y="2716254"/>
-                  </a:lnTo>
-                  <a:lnTo>
-                    <a:pt x="3581126" y="2724443"/>
-                  </a:lnTo>
-                  <a:lnTo>
-                    <a:pt x="3509503" y="2732561"/>
-                  </a:lnTo>
-                  <a:lnTo>
-                    <a:pt x="3437881" y="2740608"/>
-                  </a:lnTo>
-                  <a:lnTo>
-                    <a:pt x="3366258" y="2748584"/>
-                  </a:lnTo>
-                  <a:lnTo>
-                    <a:pt x="3294636" y="2756490"/>
-                  </a:lnTo>
-                  <a:lnTo>
-                    <a:pt x="3223013" y="2764328"/>
-                  </a:lnTo>
-                  <a:lnTo>
-                    <a:pt x="3151391" y="2772097"/>
-                  </a:lnTo>
-                  <a:lnTo>
-                    <a:pt x="3079768" y="2779798"/>
-                  </a:lnTo>
-                  <a:lnTo>
-                    <a:pt x="3008146" y="2827383"/>
-                  </a:lnTo>
-                  <a:lnTo>
-                    <a:pt x="2936523" y="2898009"/>
-                  </a:lnTo>
-                  <a:lnTo>
-                    <a:pt x="2864901" y="2962591"/>
-                  </a:lnTo>
-                  <a:lnTo>
-                    <a:pt x="2793278" y="3021646"/>
-                  </a:lnTo>
-                  <a:lnTo>
-                    <a:pt x="2721655" y="3075647"/>
-                  </a:lnTo>
-                  <a:lnTo>
-                    <a:pt x="2650033" y="3125026"/>
-                  </a:lnTo>
-                  <a:lnTo>
-                    <a:pt x="2578410" y="3170180"/>
-                  </a:lnTo>
-                  <a:lnTo>
-                    <a:pt x="2506788" y="3211469"/>
-                  </a:lnTo>
-                  <a:lnTo>
-                    <a:pt x="2435165" y="3249225"/>
-                  </a:lnTo>
-                  <a:lnTo>
-                    <a:pt x="2363543" y="3283750"/>
-                  </a:lnTo>
-                  <a:lnTo>
-                    <a:pt x="2291920" y="3315320"/>
-                  </a:lnTo>
-                  <a:lnTo>
-                    <a:pt x="2220298" y="3344188"/>
-                  </a:lnTo>
-                  <a:lnTo>
-                    <a:pt x="2148675" y="3370586"/>
-                  </a:lnTo>
-                  <a:lnTo>
-                    <a:pt x="2077053" y="3394724"/>
-                  </a:lnTo>
-                  <a:lnTo>
-                    <a:pt x="2005430" y="3416797"/>
-                  </a:lnTo>
-                  <a:lnTo>
-                    <a:pt x="1933808" y="3436981"/>
-                  </a:lnTo>
-                  <a:lnTo>
-                    <a:pt x="1862185" y="3455437"/>
-                  </a:lnTo>
-                  <a:lnTo>
-                    <a:pt x="1790563" y="3472314"/>
-                  </a:lnTo>
-                  <a:lnTo>
-                    <a:pt x="1718940" y="3487747"/>
-                  </a:lnTo>
-                  <a:lnTo>
-                    <a:pt x="1647318" y="3501859"/>
-                  </a:lnTo>
-                  <a:lnTo>
-                    <a:pt x="1575695" y="3514763"/>
-                  </a:lnTo>
-                  <a:lnTo>
-                    <a:pt x="1504073" y="3526563"/>
-                  </a:lnTo>
-                  <a:lnTo>
-                    <a:pt x="1432450" y="3537353"/>
-                  </a:lnTo>
-                  <a:lnTo>
-                    <a:pt x="1360827" y="3547219"/>
-                  </a:lnTo>
-                  <a:lnTo>
-                    <a:pt x="1289205" y="3556242"/>
-                  </a:lnTo>
-                  <a:lnTo>
-                    <a:pt x="1217582" y="3564492"/>
-                  </a:lnTo>
-                  <a:lnTo>
-                    <a:pt x="1145960" y="3572036"/>
-                  </a:lnTo>
-                  <a:lnTo>
-                    <a:pt x="1074337" y="3578934"/>
-                  </a:lnTo>
-                  <a:lnTo>
-                    <a:pt x="1002715" y="3585242"/>
-                  </a:lnTo>
-                  <a:lnTo>
-                    <a:pt x="931092" y="3591010"/>
-                  </a:lnTo>
-                  <a:lnTo>
-                    <a:pt x="859470" y="3596285"/>
-                  </a:lnTo>
-                  <a:lnTo>
-                    <a:pt x="787847" y="3601108"/>
-                  </a:lnTo>
-                  <a:lnTo>
-                    <a:pt x="716225" y="3605518"/>
-                  </a:lnTo>
-                  <a:lnTo>
-                    <a:pt x="644602" y="3609551"/>
-                  </a:lnTo>
-                  <a:lnTo>
-                    <a:pt x="572980" y="3613239"/>
-                  </a:lnTo>
-                  <a:lnTo>
-                    <a:pt x="501357" y="3616611"/>
-                  </a:lnTo>
-                  <a:lnTo>
-                    <a:pt x="429735" y="3619695"/>
-                  </a:lnTo>
-                  <a:lnTo>
-                    <a:pt x="358112" y="3622515"/>
-                  </a:lnTo>
-                  <a:lnTo>
-                    <a:pt x="286490" y="3625093"/>
-                  </a:lnTo>
-                  <a:lnTo>
-                    <a:pt x="214867" y="3627451"/>
-                  </a:lnTo>
-                  <a:lnTo>
-                    <a:pt x="143245" y="3629607"/>
-                  </a:lnTo>
-                  <a:lnTo>
-                    <a:pt x="71622" y="3631578"/>
-                  </a:lnTo>
-                  <a:lnTo>
-                    <a:pt x="0" y="3633381"/>
+                    <a:pt x="7090630" y="1890893"/>
+                  </a:lnTo>
+                  <a:lnTo>
+                    <a:pt x="7019007" y="1912801"/>
+                  </a:lnTo>
+                  <a:lnTo>
+                    <a:pt x="6947385" y="1934437"/>
+                  </a:lnTo>
+                  <a:lnTo>
+                    <a:pt x="6875762" y="1955804"/>
+                  </a:lnTo>
+                  <a:lnTo>
+                    <a:pt x="6804139" y="1976905"/>
+                  </a:lnTo>
+                  <a:lnTo>
+                    <a:pt x="6732517" y="1997744"/>
+                  </a:lnTo>
+                  <a:lnTo>
+                    <a:pt x="6660894" y="2018324"/>
+                  </a:lnTo>
+                  <a:lnTo>
+                    <a:pt x="6589272" y="2038648"/>
+                  </a:lnTo>
+                  <a:lnTo>
+                    <a:pt x="6517649" y="2058719"/>
+                  </a:lnTo>
+                  <a:lnTo>
+                    <a:pt x="6446027" y="2078540"/>
+                  </a:lnTo>
+                  <a:lnTo>
+                    <a:pt x="6374404" y="2098115"/>
+                  </a:lnTo>
+                  <a:lnTo>
+                    <a:pt x="6302782" y="2117446"/>
+                  </a:lnTo>
+                  <a:lnTo>
+                    <a:pt x="6231159" y="2136538"/>
+                  </a:lnTo>
+                  <a:lnTo>
+                    <a:pt x="6159537" y="2155391"/>
+                  </a:lnTo>
+                  <a:lnTo>
+                    <a:pt x="6087914" y="2174010"/>
+                  </a:lnTo>
+                  <a:lnTo>
+                    <a:pt x="6016292" y="2192398"/>
+                  </a:lnTo>
+                  <a:lnTo>
+                    <a:pt x="5944669" y="2210557"/>
+                  </a:lnTo>
+                  <a:lnTo>
+                    <a:pt x="5873047" y="2228490"/>
+                  </a:lnTo>
+                  <a:lnTo>
+                    <a:pt x="5801424" y="2246201"/>
+                  </a:lnTo>
+                  <a:lnTo>
+                    <a:pt x="5729802" y="2263691"/>
+                  </a:lnTo>
+                  <a:lnTo>
+                    <a:pt x="5658179" y="2280963"/>
+                  </a:lnTo>
+                  <a:lnTo>
+                    <a:pt x="5586557" y="2298021"/>
+                  </a:lnTo>
+                  <a:lnTo>
+                    <a:pt x="5514934" y="2314866"/>
+                  </a:lnTo>
+                  <a:lnTo>
+                    <a:pt x="5443311" y="2331502"/>
+                  </a:lnTo>
+                  <a:lnTo>
+                    <a:pt x="5371689" y="2347932"/>
+                  </a:lnTo>
+                  <a:lnTo>
+                    <a:pt x="5300066" y="2364156"/>
+                  </a:lnTo>
+                  <a:lnTo>
+                    <a:pt x="5228444" y="2380180"/>
+                  </a:lnTo>
+                  <a:lnTo>
+                    <a:pt x="5156821" y="2396003"/>
+                  </a:lnTo>
+                  <a:lnTo>
+                    <a:pt x="5085199" y="2411630"/>
+                  </a:lnTo>
+                  <a:lnTo>
+                    <a:pt x="5013576" y="2427063"/>
+                  </a:lnTo>
+                  <a:lnTo>
+                    <a:pt x="4941954" y="2442304"/>
+                  </a:lnTo>
+                  <a:lnTo>
+                    <a:pt x="4870331" y="2457355"/>
+                  </a:lnTo>
+                  <a:lnTo>
+                    <a:pt x="4798709" y="2472219"/>
+                  </a:lnTo>
+                  <a:lnTo>
+                    <a:pt x="4727086" y="2486899"/>
+                  </a:lnTo>
+                  <a:lnTo>
+                    <a:pt x="4655464" y="2501395"/>
+                  </a:lnTo>
+                  <a:lnTo>
+                    <a:pt x="4583841" y="2515712"/>
+                  </a:lnTo>
+                  <a:lnTo>
+                    <a:pt x="4512219" y="2529850"/>
+                  </a:lnTo>
+                  <a:lnTo>
+                    <a:pt x="4440596" y="2543813"/>
+                  </a:lnTo>
+                  <a:lnTo>
+                    <a:pt x="4368974" y="2557602"/>
+                  </a:lnTo>
+                  <a:lnTo>
+                    <a:pt x="4297351" y="2571219"/>
+                  </a:lnTo>
+                  <a:lnTo>
+                    <a:pt x="4225729" y="2584668"/>
+                  </a:lnTo>
+                  <a:lnTo>
+                    <a:pt x="4154106" y="2597949"/>
+                  </a:lnTo>
+                  <a:lnTo>
+                    <a:pt x="4082483" y="2611064"/>
+                  </a:lnTo>
+                  <a:lnTo>
+                    <a:pt x="4010861" y="2624017"/>
+                  </a:lnTo>
+                  <a:lnTo>
+                    <a:pt x="3939238" y="2636809"/>
+                  </a:lnTo>
+                  <a:lnTo>
+                    <a:pt x="3867616" y="2649441"/>
+                  </a:lnTo>
+                  <a:lnTo>
+                    <a:pt x="3795993" y="2661917"/>
+                  </a:lnTo>
+                  <a:lnTo>
+                    <a:pt x="3724371" y="2674237"/>
+                  </a:lnTo>
+                  <a:lnTo>
+                    <a:pt x="3652748" y="2686404"/>
+                  </a:lnTo>
+                  <a:lnTo>
+                    <a:pt x="3581126" y="2698420"/>
+                  </a:lnTo>
+                  <a:lnTo>
+                    <a:pt x="3509503" y="2710286"/>
+                  </a:lnTo>
+                  <a:lnTo>
+                    <a:pt x="3437881" y="2722005"/>
+                  </a:lnTo>
+                  <a:lnTo>
+                    <a:pt x="3366258" y="2733578"/>
+                  </a:lnTo>
+                  <a:lnTo>
+                    <a:pt x="3294636" y="2745007"/>
+                  </a:lnTo>
+                  <a:lnTo>
+                    <a:pt x="3223013" y="2756294"/>
+                  </a:lnTo>
+                  <a:lnTo>
+                    <a:pt x="3151391" y="2767441"/>
+                  </a:lnTo>
+                  <a:lnTo>
+                    <a:pt x="3079768" y="2778449"/>
+                  </a:lnTo>
+                  <a:lnTo>
+                    <a:pt x="3008146" y="2820718"/>
+                  </a:lnTo>
+                  <a:lnTo>
+                    <a:pt x="2936523" y="2881398"/>
+                  </a:lnTo>
+                  <a:lnTo>
+                    <a:pt x="2864901" y="2937652"/>
+                  </a:lnTo>
+                  <a:lnTo>
+                    <a:pt x="2793278" y="2989803"/>
+                  </a:lnTo>
+                  <a:lnTo>
+                    <a:pt x="2721655" y="3038151"/>
+                  </a:lnTo>
+                  <a:lnTo>
+                    <a:pt x="2650033" y="3082971"/>
+                  </a:lnTo>
+                  <a:lnTo>
+                    <a:pt x="2578410" y="3124523"/>
+                  </a:lnTo>
+                  <a:lnTo>
+                    <a:pt x="2506788" y="3163044"/>
+                  </a:lnTo>
+                  <a:lnTo>
+                    <a:pt x="2435165" y="3198755"/>
+                  </a:lnTo>
+                  <a:lnTo>
+                    <a:pt x="2363543" y="3231861"/>
+                  </a:lnTo>
+                  <a:lnTo>
+                    <a:pt x="2291920" y="3262553"/>
+                  </a:lnTo>
+                  <a:lnTo>
+                    <a:pt x="2220298" y="3291006"/>
+                  </a:lnTo>
+                  <a:lnTo>
+                    <a:pt x="2148675" y="3317384"/>
+                  </a:lnTo>
+                  <a:lnTo>
+                    <a:pt x="2077053" y="3341837"/>
+                  </a:lnTo>
+                  <a:lnTo>
+                    <a:pt x="2005430" y="3364508"/>
+                  </a:lnTo>
+                  <a:lnTo>
+                    <a:pt x="1933808" y="3385524"/>
+                  </a:lnTo>
+                  <a:lnTo>
+                    <a:pt x="1862185" y="3405008"/>
+                  </a:lnTo>
+                  <a:lnTo>
+                    <a:pt x="1790563" y="3423070"/>
+                  </a:lnTo>
+                  <a:lnTo>
+                    <a:pt x="1718940" y="3439815"/>
+                  </a:lnTo>
+                  <a:lnTo>
+                    <a:pt x="1647318" y="3455339"/>
+                  </a:lnTo>
+                  <a:lnTo>
+                    <a:pt x="1575695" y="3469730"/>
+                  </a:lnTo>
+                  <a:lnTo>
+                    <a:pt x="1504073" y="3483072"/>
+                  </a:lnTo>
+                  <a:lnTo>
+                    <a:pt x="1432450" y="3495440"/>
+                  </a:lnTo>
+                  <a:lnTo>
+                    <a:pt x="1360827" y="3506906"/>
+                  </a:lnTo>
+                  <a:lnTo>
+                    <a:pt x="1289205" y="3517536"/>
+                  </a:lnTo>
+                  <a:lnTo>
+                    <a:pt x="1217582" y="3527391"/>
+                  </a:lnTo>
+                  <a:lnTo>
+                    <a:pt x="1145960" y="3536527"/>
+                  </a:lnTo>
+                  <a:lnTo>
+                    <a:pt x="1074337" y="3544996"/>
+                  </a:lnTo>
+                  <a:lnTo>
+                    <a:pt x="1002715" y="3552848"/>
+                  </a:lnTo>
+                  <a:lnTo>
+                    <a:pt x="931092" y="3560127"/>
+                  </a:lnTo>
+                  <a:lnTo>
+                    <a:pt x="859470" y="3566875"/>
+                  </a:lnTo>
+                  <a:lnTo>
+                    <a:pt x="787847" y="3573131"/>
+                  </a:lnTo>
+                  <a:lnTo>
+                    <a:pt x="716225" y="3578931"/>
+                  </a:lnTo>
+                  <a:lnTo>
+                    <a:pt x="644602" y="3584307"/>
+                  </a:lnTo>
+                  <a:lnTo>
+                    <a:pt x="572980" y="3589292"/>
+                  </a:lnTo>
+                  <a:lnTo>
+                    <a:pt x="501357" y="3593912"/>
+                  </a:lnTo>
+                  <a:lnTo>
+                    <a:pt x="429735" y="3598196"/>
+                  </a:lnTo>
+                  <a:lnTo>
+                    <a:pt x="358112" y="3602168"/>
+                  </a:lnTo>
+                  <a:lnTo>
+                    <a:pt x="286490" y="3605849"/>
+                  </a:lnTo>
+                  <a:lnTo>
+                    <a:pt x="214867" y="3609262"/>
+                  </a:lnTo>
+                  <a:lnTo>
+                    <a:pt x="143245" y="3612427"/>
+                  </a:lnTo>
+                  <a:lnTo>
+                    <a:pt x="71622" y="3615360"/>
+                  </a:lnTo>
+                  <a:lnTo>
+                    <a:pt x="0" y="3618079"/>
                   </a:lnTo>
                   <a:close/>
                 </a:path>
@@ -3646,191 +3655,200 @@
           <p:spPr>
             <a:xfrm>
               <a:off x="1172049" y="1896563"/>
-              <a:ext cx="4198232" cy="3054372"/>
+              <a:ext cx="4406570" cy="3142231"/>
             </a:xfrm>
             <a:custGeom>
               <a:avLst/>
               <a:pathLst>
-                <a:path w="4198232" h="3054372">
+                <a:path w="4406570" h="3142231">
                   <a:moveTo>
-                    <a:pt x="0" y="3054372"/>
+                    <a:pt x="0" y="3142231"/>
                   </a:moveTo>
                   <a:lnTo>
-                    <a:pt x="71622" y="3049094"/>
-                  </a:lnTo>
-                  <a:lnTo>
-                    <a:pt x="143245" y="3043769"/>
-                  </a:lnTo>
-                  <a:lnTo>
-                    <a:pt x="214867" y="3038397"/>
-                  </a:lnTo>
-                  <a:lnTo>
-                    <a:pt x="286490" y="3032977"/>
-                  </a:lnTo>
-                  <a:lnTo>
-                    <a:pt x="358112" y="3027510"/>
-                  </a:lnTo>
-                  <a:lnTo>
-                    <a:pt x="429735" y="3021995"/>
-                  </a:lnTo>
-                  <a:lnTo>
-                    <a:pt x="501357" y="3016431"/>
-                  </a:lnTo>
-                  <a:lnTo>
-                    <a:pt x="572980" y="3010818"/>
-                  </a:lnTo>
-                  <a:lnTo>
-                    <a:pt x="644602" y="3005155"/>
-                  </a:lnTo>
-                  <a:lnTo>
-                    <a:pt x="716225" y="2999442"/>
-                  </a:lnTo>
-                  <a:lnTo>
-                    <a:pt x="787847" y="2993679"/>
-                  </a:lnTo>
-                  <a:lnTo>
-                    <a:pt x="859470" y="2987865"/>
-                  </a:lnTo>
-                  <a:lnTo>
-                    <a:pt x="931092" y="2982000"/>
-                  </a:lnTo>
-                  <a:lnTo>
-                    <a:pt x="1002715" y="2976083"/>
-                  </a:lnTo>
-                  <a:lnTo>
-                    <a:pt x="1074337" y="2970114"/>
-                  </a:lnTo>
-                  <a:lnTo>
-                    <a:pt x="1145960" y="2964092"/>
-                  </a:lnTo>
-                  <a:lnTo>
-                    <a:pt x="1217582" y="2958018"/>
-                  </a:lnTo>
-                  <a:lnTo>
-                    <a:pt x="1289205" y="2951889"/>
-                  </a:lnTo>
-                  <a:lnTo>
-                    <a:pt x="1360827" y="2945706"/>
-                  </a:lnTo>
-                  <a:lnTo>
-                    <a:pt x="1432450" y="2939469"/>
-                  </a:lnTo>
-                  <a:lnTo>
-                    <a:pt x="1504073" y="2933177"/>
-                  </a:lnTo>
-                  <a:lnTo>
-                    <a:pt x="1575695" y="2926829"/>
-                  </a:lnTo>
-                  <a:lnTo>
-                    <a:pt x="1647318" y="2920426"/>
-                  </a:lnTo>
-                  <a:lnTo>
-                    <a:pt x="1718940" y="2913966"/>
-                  </a:lnTo>
-                  <a:lnTo>
-                    <a:pt x="1790563" y="2907448"/>
-                  </a:lnTo>
-                  <a:lnTo>
-                    <a:pt x="1862185" y="2900874"/>
-                  </a:lnTo>
-                  <a:lnTo>
-                    <a:pt x="1933808" y="2894241"/>
-                  </a:lnTo>
-                  <a:lnTo>
-                    <a:pt x="2005430" y="2887550"/>
-                  </a:lnTo>
-                  <a:lnTo>
-                    <a:pt x="2077053" y="2880800"/>
-                  </a:lnTo>
-                  <a:lnTo>
-                    <a:pt x="2148675" y="2873990"/>
-                  </a:lnTo>
-                  <a:lnTo>
-                    <a:pt x="2220298" y="2867120"/>
-                  </a:lnTo>
-                  <a:lnTo>
-                    <a:pt x="2291920" y="2860190"/>
-                  </a:lnTo>
-                  <a:lnTo>
-                    <a:pt x="2363543" y="2853198"/>
-                  </a:lnTo>
-                  <a:lnTo>
-                    <a:pt x="2435165" y="2846145"/>
-                  </a:lnTo>
-                  <a:lnTo>
-                    <a:pt x="2506788" y="2839029"/>
-                  </a:lnTo>
-                  <a:lnTo>
-                    <a:pt x="2578410" y="2831851"/>
-                  </a:lnTo>
-                  <a:lnTo>
-                    <a:pt x="2650033" y="2824609"/>
-                  </a:lnTo>
-                  <a:lnTo>
-                    <a:pt x="2721655" y="2817304"/>
-                  </a:lnTo>
-                  <a:lnTo>
-                    <a:pt x="2793278" y="2809934"/>
-                  </a:lnTo>
-                  <a:lnTo>
-                    <a:pt x="2864901" y="2802498"/>
-                  </a:lnTo>
-                  <a:lnTo>
-                    <a:pt x="2936523" y="2794998"/>
-                  </a:lnTo>
-                  <a:lnTo>
-                    <a:pt x="3008146" y="2787431"/>
-                  </a:lnTo>
-                  <a:lnTo>
-                    <a:pt x="3079768" y="2750148"/>
-                  </a:lnTo>
-                  <a:lnTo>
-                    <a:pt x="3151391" y="2665683"/>
-                  </a:lnTo>
-                  <a:lnTo>
-                    <a:pt x="3223013" y="2573314"/>
-                  </a:lnTo>
-                  <a:lnTo>
-                    <a:pt x="3294636" y="2472300"/>
-                  </a:lnTo>
-                  <a:lnTo>
-                    <a:pt x="3366258" y="2361832"/>
-                  </a:lnTo>
-                  <a:lnTo>
-                    <a:pt x="3437881" y="2241026"/>
-                  </a:lnTo>
-                  <a:lnTo>
-                    <a:pt x="3509503" y="2108913"/>
-                  </a:lnTo>
-                  <a:lnTo>
-                    <a:pt x="3581126" y="1964435"/>
-                  </a:lnTo>
-                  <a:lnTo>
-                    <a:pt x="3652748" y="1806437"/>
-                  </a:lnTo>
-                  <a:lnTo>
-                    <a:pt x="3724371" y="1633651"/>
-                  </a:lnTo>
-                  <a:lnTo>
-                    <a:pt x="3795993" y="1444694"/>
-                  </a:lnTo>
-                  <a:lnTo>
-                    <a:pt x="3867616" y="1238053"/>
-                  </a:lnTo>
-                  <a:lnTo>
-                    <a:pt x="3939238" y="1012072"/>
-                  </a:lnTo>
-                  <a:lnTo>
-                    <a:pt x="4010861" y="764942"/>
-                  </a:lnTo>
-                  <a:lnTo>
-                    <a:pt x="4082483" y="494683"/>
-                  </a:lnTo>
-                  <a:lnTo>
-                    <a:pt x="4154106" y="199130"/>
-                  </a:lnTo>
-                  <a:lnTo>
-                    <a:pt x="4198232" y="0"/>
+                    <a:pt x="71622" y="3135804"/>
+                  </a:lnTo>
+                  <a:lnTo>
+                    <a:pt x="143245" y="3129295"/>
+                  </a:lnTo>
+                  <a:lnTo>
+                    <a:pt x="214867" y="3122705"/>
+                  </a:lnTo>
+                  <a:lnTo>
+                    <a:pt x="286490" y="3116032"/>
+                  </a:lnTo>
+                  <a:lnTo>
+                    <a:pt x="358112" y="3109275"/>
+                  </a:lnTo>
+                  <a:lnTo>
+                    <a:pt x="429735" y="3102433"/>
+                  </a:lnTo>
+                  <a:lnTo>
+                    <a:pt x="501357" y="3095505"/>
+                  </a:lnTo>
+                  <a:lnTo>
+                    <a:pt x="572980" y="3088489"/>
+                  </a:lnTo>
+                  <a:lnTo>
+                    <a:pt x="644602" y="3081385"/>
+                  </a:lnTo>
+                  <a:lnTo>
+                    <a:pt x="716225" y="3074192"/>
+                  </a:lnTo>
+                  <a:lnTo>
+                    <a:pt x="787847" y="3066908"/>
+                  </a:lnTo>
+                  <a:lnTo>
+                    <a:pt x="859470" y="3059532"/>
+                  </a:lnTo>
+                  <a:lnTo>
+                    <a:pt x="931092" y="3052063"/>
+                  </a:lnTo>
+                  <a:lnTo>
+                    <a:pt x="1002715" y="3044501"/>
+                  </a:lnTo>
+                  <a:lnTo>
+                    <a:pt x="1074337" y="3036843"/>
+                  </a:lnTo>
+                  <a:lnTo>
+                    <a:pt x="1145960" y="3029089"/>
+                  </a:lnTo>
+                  <a:lnTo>
+                    <a:pt x="1217582" y="3021237"/>
+                  </a:lnTo>
+                  <a:lnTo>
+                    <a:pt x="1289205" y="3013286"/>
+                  </a:lnTo>
+                  <a:lnTo>
+                    <a:pt x="1360827" y="3005235"/>
+                  </a:lnTo>
+                  <a:lnTo>
+                    <a:pt x="1432450" y="2997083"/>
+                  </a:lnTo>
+                  <a:lnTo>
+                    <a:pt x="1504073" y="2988828"/>
+                  </a:lnTo>
+                  <a:lnTo>
+                    <a:pt x="1575695" y="2980469"/>
+                  </a:lnTo>
+                  <a:lnTo>
+                    <a:pt x="1647318" y="2972005"/>
+                  </a:lnTo>
+                  <a:lnTo>
+                    <a:pt x="1718940" y="2963434"/>
+                  </a:lnTo>
+                  <a:lnTo>
+                    <a:pt x="1790563" y="2954755"/>
+                  </a:lnTo>
+                  <a:lnTo>
+                    <a:pt x="1862185" y="2945967"/>
+                  </a:lnTo>
+                  <a:lnTo>
+                    <a:pt x="1933808" y="2937069"/>
+                  </a:lnTo>
+                  <a:lnTo>
+                    <a:pt x="2005430" y="2928058"/>
+                  </a:lnTo>
+                  <a:lnTo>
+                    <a:pt x="2077053" y="2918934"/>
+                  </a:lnTo>
+                  <a:lnTo>
+                    <a:pt x="2148675" y="2909695"/>
+                  </a:lnTo>
+                  <a:lnTo>
+                    <a:pt x="2220298" y="2900340"/>
+                  </a:lnTo>
+                  <a:lnTo>
+                    <a:pt x="2291920" y="2890866"/>
+                  </a:lnTo>
+                  <a:lnTo>
+                    <a:pt x="2363543" y="2881274"/>
+                  </a:lnTo>
+                  <a:lnTo>
+                    <a:pt x="2435165" y="2871561"/>
+                  </a:lnTo>
+                  <a:lnTo>
+                    <a:pt x="2506788" y="2861725"/>
+                  </a:lnTo>
+                  <a:lnTo>
+                    <a:pt x="2578410" y="2851766"/>
+                  </a:lnTo>
+                  <a:lnTo>
+                    <a:pt x="2650033" y="2841681"/>
+                  </a:lnTo>
+                  <a:lnTo>
+                    <a:pt x="2721655" y="2831469"/>
+                  </a:lnTo>
+                  <a:lnTo>
+                    <a:pt x="2793278" y="2821129"/>
+                  </a:lnTo>
+                  <a:lnTo>
+                    <a:pt x="2864901" y="2810658"/>
+                  </a:lnTo>
+                  <a:lnTo>
+                    <a:pt x="2936523" y="2800056"/>
+                  </a:lnTo>
+                  <a:lnTo>
+                    <a:pt x="3008146" y="2789320"/>
+                  </a:lnTo>
+                  <a:lnTo>
+                    <a:pt x="3079768" y="2755263"/>
+                  </a:lnTo>
+                  <a:lnTo>
+                    <a:pt x="3151391" y="2684659"/>
+                  </a:lnTo>
+                  <a:lnTo>
+                    <a:pt x="3223013" y="2608499"/>
+                  </a:lnTo>
+                  <a:lnTo>
+                    <a:pt x="3294636" y="2526348"/>
+                  </a:lnTo>
+                  <a:lnTo>
+                    <a:pt x="3366258" y="2437733"/>
+                  </a:lnTo>
+                  <a:lnTo>
+                    <a:pt x="3437881" y="2342146"/>
+                  </a:lnTo>
+                  <a:lnTo>
+                    <a:pt x="3509503" y="2239038"/>
+                  </a:lnTo>
+                  <a:lnTo>
+                    <a:pt x="3581126" y="2127818"/>
+                  </a:lnTo>
+                  <a:lnTo>
+                    <a:pt x="3652748" y="2007847"/>
+                  </a:lnTo>
+                  <a:lnTo>
+                    <a:pt x="3724371" y="1878438"/>
+                  </a:lnTo>
+                  <a:lnTo>
+                    <a:pt x="3795993" y="1738846"/>
+                  </a:lnTo>
+                  <a:lnTo>
+                    <a:pt x="3867616" y="1588272"/>
+                  </a:lnTo>
+                  <a:lnTo>
+                    <a:pt x="3939238" y="1425850"/>
+                  </a:lnTo>
+                  <a:lnTo>
+                    <a:pt x="4010861" y="1250650"/>
+                  </a:lnTo>
+                  <a:lnTo>
+                    <a:pt x="4082483" y="1061665"/>
+                  </a:lnTo>
+                  <a:lnTo>
+                    <a:pt x="4154106" y="857811"/>
+                  </a:lnTo>
+                  <a:lnTo>
+                    <a:pt x="4225729" y="637919"/>
+                  </a:lnTo>
+                  <a:lnTo>
+                    <a:pt x="4297351" y="400725"/>
+                  </a:lnTo>
+                  <a:lnTo>
+                    <a:pt x="4368974" y="144870"/>
+                  </a:lnTo>
+                  <a:lnTo>
+                    <a:pt x="4406570" y="0"/>
                   </a:lnTo>
                 </a:path>
               </a:pathLst>
@@ -3850,312 +3868,312 @@
           </p:nvSpPr>
           <p:spPr>
             <a:xfrm>
-              <a:off x="1172049" y="4121726"/>
-              <a:ext cx="7090630" cy="1408218"/>
+              <a:off x="1172049" y="3787456"/>
+              <a:ext cx="7090630" cy="1727186"/>
             </a:xfrm>
             <a:custGeom>
               <a:avLst/>
               <a:pathLst>
-                <a:path w="7090630" h="1408218">
+                <a:path w="7090630" h="1727186">
                   <a:moveTo>
                     <a:pt x="7090630" y="0"/>
                   </a:moveTo>
                   <a:lnTo>
-                    <a:pt x="7019007" y="12484"/>
-                  </a:lnTo>
-                  <a:lnTo>
-                    <a:pt x="6947385" y="24859"/>
-                  </a:lnTo>
-                  <a:lnTo>
-                    <a:pt x="6875762" y="37125"/>
-                  </a:lnTo>
-                  <a:lnTo>
-                    <a:pt x="6804139" y="49285"/>
-                  </a:lnTo>
-                  <a:lnTo>
-                    <a:pt x="6732517" y="61338"/>
-                  </a:lnTo>
-                  <a:lnTo>
-                    <a:pt x="6660894" y="73286"/>
-                  </a:lnTo>
-                  <a:lnTo>
-                    <a:pt x="6589272" y="85129"/>
-                  </a:lnTo>
-                  <a:lnTo>
-                    <a:pt x="6517649" y="96869"/>
-                  </a:lnTo>
-                  <a:lnTo>
-                    <a:pt x="6446027" y="108506"/>
-                  </a:lnTo>
-                  <a:lnTo>
-                    <a:pt x="6374404" y="120041"/>
-                  </a:lnTo>
-                  <a:lnTo>
-                    <a:pt x="6302782" y="131475"/>
-                  </a:lnTo>
-                  <a:lnTo>
-                    <a:pt x="6231159" y="142810"/>
-                  </a:lnTo>
-                  <a:lnTo>
-                    <a:pt x="6159537" y="154045"/>
-                  </a:lnTo>
-                  <a:lnTo>
-                    <a:pt x="6087914" y="165182"/>
-                  </a:lnTo>
-                  <a:lnTo>
-                    <a:pt x="6016292" y="176221"/>
-                  </a:lnTo>
-                  <a:lnTo>
-                    <a:pt x="5944669" y="187164"/>
-                  </a:lnTo>
-                  <a:lnTo>
-                    <a:pt x="5873047" y="198012"/>
-                  </a:lnTo>
-                  <a:lnTo>
-                    <a:pt x="5801424" y="208764"/>
-                  </a:lnTo>
-                  <a:lnTo>
-                    <a:pt x="5729802" y="219422"/>
-                  </a:lnTo>
-                  <a:lnTo>
-                    <a:pt x="5658179" y="229988"/>
-                  </a:lnTo>
-                  <a:lnTo>
-                    <a:pt x="5586557" y="240460"/>
-                  </a:lnTo>
-                  <a:lnTo>
-                    <a:pt x="5514934" y="250842"/>
-                  </a:lnTo>
-                  <a:lnTo>
-                    <a:pt x="5443311" y="261132"/>
-                  </a:lnTo>
-                  <a:lnTo>
-                    <a:pt x="5371689" y="271332"/>
-                  </a:lnTo>
-                  <a:lnTo>
-                    <a:pt x="5300066" y="281444"/>
-                  </a:lnTo>
-                  <a:lnTo>
-                    <a:pt x="5228444" y="291466"/>
-                  </a:lnTo>
-                  <a:lnTo>
-                    <a:pt x="5156821" y="301402"/>
-                  </a:lnTo>
-                  <a:lnTo>
-                    <a:pt x="5085199" y="311250"/>
-                  </a:lnTo>
-                  <a:lnTo>
-                    <a:pt x="5013576" y="321012"/>
-                  </a:lnTo>
-                  <a:lnTo>
-                    <a:pt x="4941954" y="330689"/>
-                  </a:lnTo>
-                  <a:lnTo>
-                    <a:pt x="4870331" y="340281"/>
-                  </a:lnTo>
-                  <a:lnTo>
-                    <a:pt x="4798709" y="349789"/>
-                  </a:lnTo>
-                  <a:lnTo>
-                    <a:pt x="4727086" y="359214"/>
-                  </a:lnTo>
-                  <a:lnTo>
-                    <a:pt x="4655464" y="368557"/>
-                  </a:lnTo>
-                  <a:lnTo>
-                    <a:pt x="4583841" y="377817"/>
-                  </a:lnTo>
-                  <a:lnTo>
-                    <a:pt x="4512219" y="386997"/>
-                  </a:lnTo>
-                  <a:lnTo>
-                    <a:pt x="4440596" y="396097"/>
-                  </a:lnTo>
-                  <a:lnTo>
-                    <a:pt x="4368974" y="405117"/>
-                  </a:lnTo>
-                  <a:lnTo>
-                    <a:pt x="4297351" y="414058"/>
-                  </a:lnTo>
-                  <a:lnTo>
-                    <a:pt x="4225729" y="422921"/>
-                  </a:lnTo>
-                  <a:lnTo>
-                    <a:pt x="4154106" y="431707"/>
-                  </a:lnTo>
-                  <a:lnTo>
-                    <a:pt x="4082483" y="440415"/>
-                  </a:lnTo>
-                  <a:lnTo>
-                    <a:pt x="4010861" y="449048"/>
-                  </a:lnTo>
-                  <a:lnTo>
-                    <a:pt x="3939238" y="457605"/>
-                  </a:lnTo>
-                  <a:lnTo>
-                    <a:pt x="3867616" y="466087"/>
-                  </a:lnTo>
-                  <a:lnTo>
-                    <a:pt x="3795993" y="474495"/>
-                  </a:lnTo>
-                  <a:lnTo>
-                    <a:pt x="3724371" y="482829"/>
-                  </a:lnTo>
-                  <a:lnTo>
-                    <a:pt x="3652748" y="491091"/>
-                  </a:lnTo>
-                  <a:lnTo>
-                    <a:pt x="3581126" y="499280"/>
-                  </a:lnTo>
-                  <a:lnTo>
-                    <a:pt x="3509503" y="507398"/>
-                  </a:lnTo>
-                  <a:lnTo>
-                    <a:pt x="3437881" y="515445"/>
-                  </a:lnTo>
-                  <a:lnTo>
-                    <a:pt x="3366258" y="523421"/>
-                  </a:lnTo>
-                  <a:lnTo>
-                    <a:pt x="3294636" y="531327"/>
-                  </a:lnTo>
-                  <a:lnTo>
-                    <a:pt x="3223013" y="539165"/>
-                  </a:lnTo>
-                  <a:lnTo>
-                    <a:pt x="3151391" y="546934"/>
-                  </a:lnTo>
-                  <a:lnTo>
-                    <a:pt x="3079768" y="554634"/>
-                  </a:lnTo>
-                  <a:lnTo>
-                    <a:pt x="3008146" y="602220"/>
-                  </a:lnTo>
-                  <a:lnTo>
-                    <a:pt x="2936523" y="672846"/>
-                  </a:lnTo>
-                  <a:lnTo>
-                    <a:pt x="2864901" y="737428"/>
-                  </a:lnTo>
-                  <a:lnTo>
-                    <a:pt x="2793278" y="796483"/>
-                  </a:lnTo>
-                  <a:lnTo>
-                    <a:pt x="2721655" y="850484"/>
-                  </a:lnTo>
-                  <a:lnTo>
-                    <a:pt x="2650033" y="899863"/>
-                  </a:lnTo>
-                  <a:lnTo>
-                    <a:pt x="2578410" y="945017"/>
-                  </a:lnTo>
-                  <a:lnTo>
-                    <a:pt x="2506788" y="986306"/>
-                  </a:lnTo>
-                  <a:lnTo>
-                    <a:pt x="2435165" y="1024062"/>
-                  </a:lnTo>
-                  <a:lnTo>
-                    <a:pt x="2363543" y="1058587"/>
-                  </a:lnTo>
-                  <a:lnTo>
-                    <a:pt x="2291920" y="1090157"/>
-                  </a:lnTo>
-                  <a:lnTo>
-                    <a:pt x="2220298" y="1119025"/>
-                  </a:lnTo>
-                  <a:lnTo>
-                    <a:pt x="2148675" y="1145423"/>
-                  </a:lnTo>
-                  <a:lnTo>
-                    <a:pt x="2077053" y="1169561"/>
-                  </a:lnTo>
-                  <a:lnTo>
-                    <a:pt x="2005430" y="1191634"/>
-                  </a:lnTo>
-                  <a:lnTo>
-                    <a:pt x="1933808" y="1211818"/>
-                  </a:lnTo>
-                  <a:lnTo>
-                    <a:pt x="1862185" y="1230274"/>
-                  </a:lnTo>
-                  <a:lnTo>
-                    <a:pt x="1790563" y="1247151"/>
-                  </a:lnTo>
-                  <a:lnTo>
-                    <a:pt x="1718940" y="1262584"/>
-                  </a:lnTo>
-                  <a:lnTo>
-                    <a:pt x="1647318" y="1276696"/>
-                  </a:lnTo>
-                  <a:lnTo>
-                    <a:pt x="1575695" y="1289600"/>
-                  </a:lnTo>
-                  <a:lnTo>
-                    <a:pt x="1504073" y="1301400"/>
-                  </a:lnTo>
-                  <a:lnTo>
-                    <a:pt x="1432450" y="1312190"/>
-                  </a:lnTo>
-                  <a:lnTo>
-                    <a:pt x="1360827" y="1322056"/>
-                  </a:lnTo>
-                  <a:lnTo>
-                    <a:pt x="1289205" y="1331078"/>
-                  </a:lnTo>
-                  <a:lnTo>
-                    <a:pt x="1217582" y="1339329"/>
-                  </a:lnTo>
-                  <a:lnTo>
-                    <a:pt x="1145960" y="1346873"/>
-                  </a:lnTo>
-                  <a:lnTo>
-                    <a:pt x="1074337" y="1353771"/>
-                  </a:lnTo>
-                  <a:lnTo>
-                    <a:pt x="1002715" y="1360079"/>
-                  </a:lnTo>
-                  <a:lnTo>
-                    <a:pt x="931092" y="1365847"/>
-                  </a:lnTo>
-                  <a:lnTo>
-                    <a:pt x="859470" y="1371122"/>
-                  </a:lnTo>
-                  <a:lnTo>
-                    <a:pt x="787847" y="1375945"/>
-                  </a:lnTo>
-                  <a:lnTo>
-                    <a:pt x="716225" y="1380355"/>
-                  </a:lnTo>
-                  <a:lnTo>
-                    <a:pt x="644602" y="1384388"/>
-                  </a:lnTo>
-                  <a:lnTo>
-                    <a:pt x="572980" y="1388076"/>
-                  </a:lnTo>
-                  <a:lnTo>
-                    <a:pt x="501357" y="1391448"/>
-                  </a:lnTo>
-                  <a:lnTo>
-                    <a:pt x="429735" y="1394532"/>
-                  </a:lnTo>
-                  <a:lnTo>
-                    <a:pt x="358112" y="1397352"/>
-                  </a:lnTo>
-                  <a:lnTo>
-                    <a:pt x="286490" y="1399930"/>
-                  </a:lnTo>
-                  <a:lnTo>
-                    <a:pt x="214867" y="1402288"/>
-                  </a:lnTo>
-                  <a:lnTo>
-                    <a:pt x="143245" y="1404444"/>
-                  </a:lnTo>
-                  <a:lnTo>
-                    <a:pt x="71622" y="1406415"/>
-                  </a:lnTo>
-                  <a:lnTo>
-                    <a:pt x="0" y="1408218"/>
+                    <a:pt x="7019007" y="21908"/>
+                  </a:lnTo>
+                  <a:lnTo>
+                    <a:pt x="6947385" y="43544"/>
+                  </a:lnTo>
+                  <a:lnTo>
+                    <a:pt x="6875762" y="64911"/>
+                  </a:lnTo>
+                  <a:lnTo>
+                    <a:pt x="6804139" y="86012"/>
+                  </a:lnTo>
+                  <a:lnTo>
+                    <a:pt x="6732517" y="106851"/>
+                  </a:lnTo>
+                  <a:lnTo>
+                    <a:pt x="6660894" y="127431"/>
+                  </a:lnTo>
+                  <a:lnTo>
+                    <a:pt x="6589272" y="147754"/>
+                  </a:lnTo>
+                  <a:lnTo>
+                    <a:pt x="6517649" y="167825"/>
+                  </a:lnTo>
+                  <a:lnTo>
+                    <a:pt x="6446027" y="187647"/>
+                  </a:lnTo>
+                  <a:lnTo>
+                    <a:pt x="6374404" y="207222"/>
+                  </a:lnTo>
+                  <a:lnTo>
+                    <a:pt x="6302782" y="226553"/>
+                  </a:lnTo>
+                  <a:lnTo>
+                    <a:pt x="6231159" y="245644"/>
+                  </a:lnTo>
+                  <a:lnTo>
+                    <a:pt x="6159537" y="264498"/>
+                  </a:lnTo>
+                  <a:lnTo>
+                    <a:pt x="6087914" y="283117"/>
+                  </a:lnTo>
+                  <a:lnTo>
+                    <a:pt x="6016292" y="301505"/>
+                  </a:lnTo>
+                  <a:lnTo>
+                    <a:pt x="5944669" y="319664"/>
+                  </a:lnTo>
+                  <a:lnTo>
+                    <a:pt x="5873047" y="337597"/>
+                  </a:lnTo>
+                  <a:lnTo>
+                    <a:pt x="5801424" y="355307"/>
+                  </a:lnTo>
+                  <a:lnTo>
+                    <a:pt x="5729802" y="372797"/>
+                  </a:lnTo>
+                  <a:lnTo>
+                    <a:pt x="5658179" y="390070"/>
+                  </a:lnTo>
+                  <a:lnTo>
+                    <a:pt x="5586557" y="407127"/>
+                  </a:lnTo>
+                  <a:lnTo>
+                    <a:pt x="5514934" y="423973"/>
+                  </a:lnTo>
+                  <a:lnTo>
+                    <a:pt x="5443311" y="440609"/>
+                  </a:lnTo>
+                  <a:lnTo>
+                    <a:pt x="5371689" y="457038"/>
+                  </a:lnTo>
+                  <a:lnTo>
+                    <a:pt x="5300066" y="473263"/>
+                  </a:lnTo>
+                  <a:lnTo>
+                    <a:pt x="5228444" y="489286"/>
+                  </a:lnTo>
+                  <a:lnTo>
+                    <a:pt x="5156821" y="505110"/>
+                  </a:lnTo>
+                  <a:lnTo>
+                    <a:pt x="5085199" y="520737"/>
+                  </a:lnTo>
+                  <a:lnTo>
+                    <a:pt x="5013576" y="536170"/>
+                  </a:lnTo>
+                  <a:lnTo>
+                    <a:pt x="4941954" y="551411"/>
+                  </a:lnTo>
+                  <a:lnTo>
+                    <a:pt x="4870331" y="566462"/>
+                  </a:lnTo>
+                  <a:lnTo>
+                    <a:pt x="4798709" y="581326"/>
+                  </a:lnTo>
+                  <a:lnTo>
+                    <a:pt x="4727086" y="596006"/>
+                  </a:lnTo>
+                  <a:lnTo>
+                    <a:pt x="4655464" y="610502"/>
+                  </a:lnTo>
+                  <a:lnTo>
+                    <a:pt x="4583841" y="624819"/>
+                  </a:lnTo>
+                  <a:lnTo>
+                    <a:pt x="4512219" y="638957"/>
+                  </a:lnTo>
+                  <a:lnTo>
+                    <a:pt x="4440596" y="652920"/>
+                  </a:lnTo>
+                  <a:lnTo>
+                    <a:pt x="4368974" y="666709"/>
+                  </a:lnTo>
+                  <a:lnTo>
+                    <a:pt x="4297351" y="680326"/>
+                  </a:lnTo>
+                  <a:lnTo>
+                    <a:pt x="4225729" y="693774"/>
+                  </a:lnTo>
+                  <a:lnTo>
+                    <a:pt x="4154106" y="707055"/>
+                  </a:lnTo>
+                  <a:lnTo>
+                    <a:pt x="4082483" y="720171"/>
+                  </a:lnTo>
+                  <a:lnTo>
+                    <a:pt x="4010861" y="733124"/>
+                  </a:lnTo>
+                  <a:lnTo>
+                    <a:pt x="3939238" y="745915"/>
+                  </a:lnTo>
+                  <a:lnTo>
+                    <a:pt x="3867616" y="758548"/>
+                  </a:lnTo>
+                  <a:lnTo>
+                    <a:pt x="3795993" y="771023"/>
+                  </a:lnTo>
+                  <a:lnTo>
+                    <a:pt x="3724371" y="783344"/>
+                  </a:lnTo>
+                  <a:lnTo>
+                    <a:pt x="3652748" y="795511"/>
+                  </a:lnTo>
+                  <a:lnTo>
+                    <a:pt x="3581126" y="807526"/>
+                  </a:lnTo>
+                  <a:lnTo>
+                    <a:pt x="3509503" y="819393"/>
+                  </a:lnTo>
+                  <a:lnTo>
+                    <a:pt x="3437881" y="831112"/>
+                  </a:lnTo>
+                  <a:lnTo>
+                    <a:pt x="3366258" y="842685"/>
+                  </a:lnTo>
+                  <a:lnTo>
+                    <a:pt x="3294636" y="854114"/>
+                  </a:lnTo>
+                  <a:lnTo>
+                    <a:pt x="3223013" y="865401"/>
+                  </a:lnTo>
+                  <a:lnTo>
+                    <a:pt x="3151391" y="876547"/>
+                  </a:lnTo>
+                  <a:lnTo>
+                    <a:pt x="3079768" y="887555"/>
+                  </a:lnTo>
+                  <a:lnTo>
+                    <a:pt x="3008146" y="929824"/>
+                  </a:lnTo>
+                  <a:lnTo>
+                    <a:pt x="2936523" y="990505"/>
+                  </a:lnTo>
+                  <a:lnTo>
+                    <a:pt x="2864901" y="1046759"/>
+                  </a:lnTo>
+                  <a:lnTo>
+                    <a:pt x="2793278" y="1098910"/>
+                  </a:lnTo>
+                  <a:lnTo>
+                    <a:pt x="2721655" y="1147257"/>
+                  </a:lnTo>
+                  <a:lnTo>
+                    <a:pt x="2650033" y="1192078"/>
+                  </a:lnTo>
+                  <a:lnTo>
+                    <a:pt x="2578410" y="1233630"/>
+                  </a:lnTo>
+                  <a:lnTo>
+                    <a:pt x="2506788" y="1272151"/>
+                  </a:lnTo>
+                  <a:lnTo>
+                    <a:pt x="2435165" y="1307862"/>
+                  </a:lnTo>
+                  <a:lnTo>
+                    <a:pt x="2363543" y="1340968"/>
+                  </a:lnTo>
+                  <a:lnTo>
+                    <a:pt x="2291920" y="1371660"/>
+                  </a:lnTo>
+                  <a:lnTo>
+                    <a:pt x="2220298" y="1400113"/>
+                  </a:lnTo>
+                  <a:lnTo>
+                    <a:pt x="2148675" y="1426491"/>
+                  </a:lnTo>
+                  <a:lnTo>
+                    <a:pt x="2077053" y="1450944"/>
+                  </a:lnTo>
+                  <a:lnTo>
+                    <a:pt x="2005430" y="1473614"/>
+                  </a:lnTo>
+                  <a:lnTo>
+                    <a:pt x="1933808" y="1494631"/>
+                  </a:lnTo>
+                  <a:lnTo>
+                    <a:pt x="1862185" y="1514114"/>
+                  </a:lnTo>
+                  <a:lnTo>
+                    <a:pt x="1790563" y="1532177"/>
+                  </a:lnTo>
+                  <a:lnTo>
+                    <a:pt x="1718940" y="1548922"/>
+                  </a:lnTo>
+                  <a:lnTo>
+                    <a:pt x="1647318" y="1564445"/>
+                  </a:lnTo>
+                  <a:lnTo>
+                    <a:pt x="1575695" y="1578837"/>
+                  </a:lnTo>
+                  <a:lnTo>
+                    <a:pt x="1504073" y="1592178"/>
+                  </a:lnTo>
+                  <a:lnTo>
+                    <a:pt x="1432450" y="1604547"/>
+                  </a:lnTo>
+                  <a:lnTo>
+                    <a:pt x="1360827" y="1616013"/>
+                  </a:lnTo>
+                  <a:lnTo>
+                    <a:pt x="1289205" y="1626643"/>
+                  </a:lnTo>
+                  <a:lnTo>
+                    <a:pt x="1217582" y="1636498"/>
+                  </a:lnTo>
+                  <a:lnTo>
+                    <a:pt x="1145960" y="1645634"/>
+                  </a:lnTo>
+                  <a:lnTo>
+                    <a:pt x="1074337" y="1654103"/>
+                  </a:lnTo>
+                  <a:lnTo>
+                    <a:pt x="1002715" y="1661955"/>
+                  </a:lnTo>
+                  <a:lnTo>
+                    <a:pt x="931092" y="1669234"/>
+                  </a:lnTo>
+                  <a:lnTo>
+                    <a:pt x="859470" y="1675982"/>
+                  </a:lnTo>
+                  <a:lnTo>
+                    <a:pt x="787847" y="1682238"/>
+                  </a:lnTo>
+                  <a:lnTo>
+                    <a:pt x="716225" y="1688037"/>
+                  </a:lnTo>
+                  <a:lnTo>
+                    <a:pt x="644602" y="1693414"/>
+                  </a:lnTo>
+                  <a:lnTo>
+                    <a:pt x="572980" y="1698398"/>
+                  </a:lnTo>
+                  <a:lnTo>
+                    <a:pt x="501357" y="1703019"/>
+                  </a:lnTo>
+                  <a:lnTo>
+                    <a:pt x="429735" y="1707303"/>
+                  </a:lnTo>
+                  <a:lnTo>
+                    <a:pt x="358112" y="1711274"/>
+                  </a:lnTo>
+                  <a:lnTo>
+                    <a:pt x="286490" y="1714956"/>
+                  </a:lnTo>
+                  <a:lnTo>
+                    <a:pt x="214867" y="1718369"/>
+                  </a:lnTo>
+                  <a:lnTo>
+                    <a:pt x="143245" y="1721533"/>
+                  </a:lnTo>
+                  <a:lnTo>
+                    <a:pt x="71622" y="1724467"/>
+                  </a:lnTo>
+                  <a:lnTo>
+                    <a:pt x="0" y="1727186"/>
                   </a:lnTo>
                 </a:path>
               </a:pathLst>
@@ -4176,230 +4194,242 @@
           <p:spPr>
             <a:xfrm>
               <a:off x="1172049" y="1896563"/>
-              <a:ext cx="5142141" cy="3545293"/>
+              <a:ext cx="5379350" cy="3519821"/>
             </a:xfrm>
             <a:custGeom>
               <a:avLst/>
               <a:pathLst>
-                <a:path w="5142141" h="3545293">
+                <a:path w="5379350" h="3519821">
                   <a:moveTo>
-                    <a:pt x="0" y="3545293"/>
+                    <a:pt x="0" y="3519821"/>
                   </a:moveTo>
                   <a:lnTo>
-                    <a:pt x="71622" y="3539888"/>
-                  </a:lnTo>
-                  <a:lnTo>
-                    <a:pt x="143245" y="3534211"/>
-                  </a:lnTo>
-                  <a:lnTo>
-                    <a:pt x="214867" y="3528247"/>
-                  </a:lnTo>
-                  <a:lnTo>
-                    <a:pt x="286490" y="3521984"/>
-                  </a:lnTo>
-                  <a:lnTo>
-                    <a:pt x="358112" y="3515405"/>
-                  </a:lnTo>
-                  <a:lnTo>
-                    <a:pt x="429735" y="3508495"/>
-                  </a:lnTo>
-                  <a:lnTo>
-                    <a:pt x="501357" y="3501237"/>
-                  </a:lnTo>
-                  <a:lnTo>
-                    <a:pt x="572980" y="3493613"/>
-                  </a:lnTo>
-                  <a:lnTo>
-                    <a:pt x="644602" y="3485606"/>
-                  </a:lnTo>
-                  <a:lnTo>
-                    <a:pt x="716225" y="3477195"/>
-                  </a:lnTo>
-                  <a:lnTo>
-                    <a:pt x="787847" y="3468361"/>
-                  </a:lnTo>
-                  <a:lnTo>
-                    <a:pt x="859470" y="3459082"/>
-                  </a:lnTo>
-                  <a:lnTo>
-                    <a:pt x="931092" y="3449336"/>
-                  </a:lnTo>
-                  <a:lnTo>
-                    <a:pt x="1002715" y="3439100"/>
-                  </a:lnTo>
-                  <a:lnTo>
-                    <a:pt x="1074337" y="3428347"/>
-                  </a:lnTo>
-                  <a:lnTo>
-                    <a:pt x="1145960" y="3417054"/>
-                  </a:lnTo>
-                  <a:lnTo>
-                    <a:pt x="1217582" y="3405191"/>
-                  </a:lnTo>
-                  <a:lnTo>
-                    <a:pt x="1289205" y="3392732"/>
-                  </a:lnTo>
-                  <a:lnTo>
-                    <a:pt x="1360827" y="3379645"/>
-                  </a:lnTo>
-                  <a:lnTo>
-                    <a:pt x="1432450" y="3365899"/>
-                  </a:lnTo>
-                  <a:lnTo>
-                    <a:pt x="1504073" y="3351461"/>
-                  </a:lnTo>
-                  <a:lnTo>
-                    <a:pt x="1575695" y="3336296"/>
-                  </a:lnTo>
-                  <a:lnTo>
-                    <a:pt x="1647318" y="3320368"/>
-                  </a:lnTo>
-                  <a:lnTo>
-                    <a:pt x="1718940" y="3303637"/>
-                  </a:lnTo>
-                  <a:lnTo>
-                    <a:pt x="1790563" y="3286064"/>
-                  </a:lnTo>
-                  <a:lnTo>
-                    <a:pt x="1862185" y="3267606"/>
-                  </a:lnTo>
-                  <a:lnTo>
-                    <a:pt x="1933808" y="3248219"/>
-                  </a:lnTo>
-                  <a:lnTo>
-                    <a:pt x="2005430" y="3227856"/>
-                  </a:lnTo>
-                  <a:lnTo>
-                    <a:pt x="2077053" y="3206467"/>
-                  </a:lnTo>
-                  <a:lnTo>
-                    <a:pt x="2148675" y="3184001"/>
-                  </a:lnTo>
-                  <a:lnTo>
-                    <a:pt x="2220298" y="3160405"/>
-                  </a:lnTo>
-                  <a:lnTo>
-                    <a:pt x="2291920" y="3135620"/>
-                  </a:lnTo>
-                  <a:lnTo>
-                    <a:pt x="2363543" y="3109587"/>
-                  </a:lnTo>
-                  <a:lnTo>
-                    <a:pt x="2435165" y="3082243"/>
-                  </a:lnTo>
-                  <a:lnTo>
-                    <a:pt x="2506788" y="3053523"/>
-                  </a:lnTo>
-                  <a:lnTo>
-                    <a:pt x="2578410" y="3023356"/>
-                  </a:lnTo>
-                  <a:lnTo>
-                    <a:pt x="2650033" y="2991671"/>
-                  </a:lnTo>
-                  <a:lnTo>
-                    <a:pt x="2721655" y="2958390"/>
-                  </a:lnTo>
-                  <a:lnTo>
-                    <a:pt x="2793278" y="2923433"/>
-                  </a:lnTo>
-                  <a:lnTo>
-                    <a:pt x="2864901" y="2886716"/>
-                  </a:lnTo>
-                  <a:lnTo>
-                    <a:pt x="2936523" y="2848151"/>
-                  </a:lnTo>
-                  <a:lnTo>
-                    <a:pt x="3008146" y="2807643"/>
-                  </a:lnTo>
-                  <a:lnTo>
-                    <a:pt x="3079768" y="2765096"/>
-                  </a:lnTo>
-                  <a:lnTo>
-                    <a:pt x="3151391" y="2720407"/>
-                  </a:lnTo>
-                  <a:lnTo>
-                    <a:pt x="3223013" y="2673468"/>
-                  </a:lnTo>
-                  <a:lnTo>
-                    <a:pt x="3294636" y="2624165"/>
-                  </a:lnTo>
-                  <a:lnTo>
-                    <a:pt x="3366258" y="2572379"/>
-                  </a:lnTo>
-                  <a:lnTo>
-                    <a:pt x="3437881" y="2517987"/>
-                  </a:lnTo>
-                  <a:lnTo>
-                    <a:pt x="3509503" y="2460855"/>
-                  </a:lnTo>
-                  <a:lnTo>
-                    <a:pt x="3581126" y="2400847"/>
-                  </a:lnTo>
-                  <a:lnTo>
-                    <a:pt x="3652748" y="2337817"/>
-                  </a:lnTo>
-                  <a:lnTo>
-                    <a:pt x="3724371" y="2271614"/>
-                  </a:lnTo>
-                  <a:lnTo>
-                    <a:pt x="3795993" y="2202077"/>
-                  </a:lnTo>
-                  <a:lnTo>
-                    <a:pt x="3867616" y="2129039"/>
-                  </a:lnTo>
-                  <a:lnTo>
-                    <a:pt x="3939238" y="2052323"/>
-                  </a:lnTo>
-                  <a:lnTo>
-                    <a:pt x="4010861" y="1971744"/>
-                  </a:lnTo>
-                  <a:lnTo>
-                    <a:pt x="4082483" y="1887109"/>
-                  </a:lnTo>
-                  <a:lnTo>
-                    <a:pt x="4154106" y="1798212"/>
-                  </a:lnTo>
-                  <a:lnTo>
-                    <a:pt x="4225729" y="1704838"/>
-                  </a:lnTo>
-                  <a:lnTo>
-                    <a:pt x="4297351" y="1606764"/>
-                  </a:lnTo>
-                  <a:lnTo>
-                    <a:pt x="4368974" y="1503751"/>
-                  </a:lnTo>
-                  <a:lnTo>
-                    <a:pt x="4440596" y="1395551"/>
-                  </a:lnTo>
-                  <a:lnTo>
-                    <a:pt x="4512219" y="1281903"/>
-                  </a:lnTo>
-                  <a:lnTo>
-                    <a:pt x="4583841" y="1162533"/>
-                  </a:lnTo>
-                  <a:lnTo>
-                    <a:pt x="4655464" y="1037152"/>
-                  </a:lnTo>
-                  <a:lnTo>
-                    <a:pt x="4727086" y="905458"/>
-                  </a:lnTo>
-                  <a:lnTo>
-                    <a:pt x="4798709" y="767134"/>
-                  </a:lnTo>
-                  <a:lnTo>
-                    <a:pt x="4870331" y="621844"/>
-                  </a:lnTo>
-                  <a:lnTo>
-                    <a:pt x="4941954" y="469239"/>
-                  </a:lnTo>
-                  <a:lnTo>
-                    <a:pt x="5013576" y="308950"/>
-                  </a:lnTo>
-                  <a:lnTo>
-                    <a:pt x="5085199" y="140590"/>
-                  </a:lnTo>
-                  <a:lnTo>
-                    <a:pt x="5142141" y="0"/>
+                    <a:pt x="71622" y="3513829"/>
+                  </a:lnTo>
+                  <a:lnTo>
+                    <a:pt x="143245" y="3507566"/>
+                  </a:lnTo>
+                  <a:lnTo>
+                    <a:pt x="214867" y="3501021"/>
+                  </a:lnTo>
+                  <a:lnTo>
+                    <a:pt x="286490" y="3494181"/>
+                  </a:lnTo>
+                  <a:lnTo>
+                    <a:pt x="358112" y="3487033"/>
+                  </a:lnTo>
+                  <a:lnTo>
+                    <a:pt x="429735" y="3479561"/>
+                  </a:lnTo>
+                  <a:lnTo>
+                    <a:pt x="501357" y="3471753"/>
+                  </a:lnTo>
+                  <a:lnTo>
+                    <a:pt x="572980" y="3463593"/>
+                  </a:lnTo>
+                  <a:lnTo>
+                    <a:pt x="644602" y="3455064"/>
+                  </a:lnTo>
+                  <a:lnTo>
+                    <a:pt x="716225" y="3446151"/>
+                  </a:lnTo>
+                  <a:lnTo>
+                    <a:pt x="787847" y="3436835"/>
+                  </a:lnTo>
+                  <a:lnTo>
+                    <a:pt x="859470" y="3427099"/>
+                  </a:lnTo>
+                  <a:lnTo>
+                    <a:pt x="931092" y="3416924"/>
+                  </a:lnTo>
+                  <a:lnTo>
+                    <a:pt x="1002715" y="3406290"/>
+                  </a:lnTo>
+                  <a:lnTo>
+                    <a:pt x="1074337" y="3395177"/>
+                  </a:lnTo>
+                  <a:lnTo>
+                    <a:pt x="1145960" y="3383562"/>
+                  </a:lnTo>
+                  <a:lnTo>
+                    <a:pt x="1217582" y="3371422"/>
+                  </a:lnTo>
+                  <a:lnTo>
+                    <a:pt x="1289205" y="3358736"/>
+                  </a:lnTo>
+                  <a:lnTo>
+                    <a:pt x="1360827" y="3345477"/>
+                  </a:lnTo>
+                  <a:lnTo>
+                    <a:pt x="1432450" y="3331619"/>
+                  </a:lnTo>
+                  <a:lnTo>
+                    <a:pt x="1504073" y="3317137"/>
+                  </a:lnTo>
+                  <a:lnTo>
+                    <a:pt x="1575695" y="3302001"/>
+                  </a:lnTo>
+                  <a:lnTo>
+                    <a:pt x="1647318" y="3286183"/>
+                  </a:lnTo>
+                  <a:lnTo>
+                    <a:pt x="1718940" y="3269651"/>
+                  </a:lnTo>
+                  <a:lnTo>
+                    <a:pt x="1790563" y="3252373"/>
+                  </a:lnTo>
+                  <a:lnTo>
+                    <a:pt x="1862185" y="3234315"/>
+                  </a:lnTo>
+                  <a:lnTo>
+                    <a:pt x="1933808" y="3215443"/>
+                  </a:lnTo>
+                  <a:lnTo>
+                    <a:pt x="2005430" y="3195720"/>
+                  </a:lnTo>
+                  <a:lnTo>
+                    <a:pt x="2077053" y="3175107"/>
+                  </a:lnTo>
+                  <a:lnTo>
+                    <a:pt x="2148675" y="3153564"/>
+                  </a:lnTo>
+                  <a:lnTo>
+                    <a:pt x="2220298" y="3131049"/>
+                  </a:lnTo>
+                  <a:lnTo>
+                    <a:pt x="2291920" y="3107518"/>
+                  </a:lnTo>
+                  <a:lnTo>
+                    <a:pt x="2363543" y="3082926"/>
+                  </a:lnTo>
+                  <a:lnTo>
+                    <a:pt x="2435165" y="3057224"/>
+                  </a:lnTo>
+                  <a:lnTo>
+                    <a:pt x="2506788" y="3030363"/>
+                  </a:lnTo>
+                  <a:lnTo>
+                    <a:pt x="2578410" y="3002290"/>
+                  </a:lnTo>
+                  <a:lnTo>
+                    <a:pt x="2650033" y="2972950"/>
+                  </a:lnTo>
+                  <a:lnTo>
+                    <a:pt x="2721655" y="2942287"/>
+                  </a:lnTo>
+                  <a:lnTo>
+                    <a:pt x="2793278" y="2910241"/>
+                  </a:lnTo>
+                  <a:lnTo>
+                    <a:pt x="2864901" y="2876749"/>
+                  </a:lnTo>
+                  <a:lnTo>
+                    <a:pt x="2936523" y="2841746"/>
+                  </a:lnTo>
+                  <a:lnTo>
+                    <a:pt x="3008146" y="2805164"/>
+                  </a:lnTo>
+                  <a:lnTo>
+                    <a:pt x="3079768" y="2766932"/>
+                  </a:lnTo>
+                  <a:lnTo>
+                    <a:pt x="3151391" y="2726975"/>
+                  </a:lnTo>
+                  <a:lnTo>
+                    <a:pt x="3223013" y="2685215"/>
+                  </a:lnTo>
+                  <a:lnTo>
+                    <a:pt x="3294636" y="2641571"/>
+                  </a:lnTo>
+                  <a:lnTo>
+                    <a:pt x="3366258" y="2595959"/>
+                  </a:lnTo>
+                  <a:lnTo>
+                    <a:pt x="3437881" y="2548289"/>
+                  </a:lnTo>
+                  <a:lnTo>
+                    <a:pt x="3509503" y="2498468"/>
+                  </a:lnTo>
+                  <a:lnTo>
+                    <a:pt x="3581126" y="2446399"/>
+                  </a:lnTo>
+                  <a:lnTo>
+                    <a:pt x="3652748" y="2391982"/>
+                  </a:lnTo>
+                  <a:lnTo>
+                    <a:pt x="3724371" y="2335110"/>
+                  </a:lnTo>
+                  <a:lnTo>
+                    <a:pt x="3795993" y="2275672"/>
+                  </a:lnTo>
+                  <a:lnTo>
+                    <a:pt x="3867616" y="2213553"/>
+                  </a:lnTo>
+                  <a:lnTo>
+                    <a:pt x="3939238" y="2148631"/>
+                  </a:lnTo>
+                  <a:lnTo>
+                    <a:pt x="4010861" y="2080780"/>
+                  </a:lnTo>
+                  <a:lnTo>
+                    <a:pt x="4082483" y="2009869"/>
+                  </a:lnTo>
+                  <a:lnTo>
+                    <a:pt x="4154106" y="1935758"/>
+                  </a:lnTo>
+                  <a:lnTo>
+                    <a:pt x="4225729" y="1858304"/>
+                  </a:lnTo>
+                  <a:lnTo>
+                    <a:pt x="4297351" y="1777356"/>
+                  </a:lnTo>
+                  <a:lnTo>
+                    <a:pt x="4368974" y="1692756"/>
+                  </a:lnTo>
+                  <a:lnTo>
+                    <a:pt x="4440596" y="1604340"/>
+                  </a:lnTo>
+                  <a:lnTo>
+                    <a:pt x="4512219" y="1511935"/>
+                  </a:lnTo>
+                  <a:lnTo>
+                    <a:pt x="4583841" y="1415361"/>
+                  </a:lnTo>
+                  <a:lnTo>
+                    <a:pt x="4655464" y="1314430"/>
+                  </a:lnTo>
+                  <a:lnTo>
+                    <a:pt x="4727086" y="1208946"/>
+                  </a:lnTo>
+                  <a:lnTo>
+                    <a:pt x="4798709" y="1098704"/>
+                  </a:lnTo>
+                  <a:lnTo>
+                    <a:pt x="4870331" y="983488"/>
+                  </a:lnTo>
+                  <a:lnTo>
+                    <a:pt x="4941954" y="863074"/>
+                  </a:lnTo>
+                  <a:lnTo>
+                    <a:pt x="5013576" y="737228"/>
+                  </a:lnTo>
+                  <a:lnTo>
+                    <a:pt x="5085199" y="605705"/>
+                  </a:lnTo>
+                  <a:lnTo>
+                    <a:pt x="5156821" y="468248"/>
+                  </a:lnTo>
+                  <a:lnTo>
+                    <a:pt x="5228444" y="324591"/>
+                  </a:lnTo>
+                  <a:lnTo>
+                    <a:pt x="5300066" y="174452"/>
+                  </a:lnTo>
+                  <a:lnTo>
+                    <a:pt x="5371689" y="17540"/>
+                  </a:lnTo>
+                  <a:lnTo>
+                    <a:pt x="5379350" y="0"/>
                   </a:lnTo>
                 </a:path>
               </a:pathLst>

--- a/docs/plots/carbo/jx_carbo_linsubhr_dosedisc_throm3.pptx
+++ b/docs/plots/carbo/jx_carbo_linsubhr_dosedisc_throm3.pptx
@@ -3132,503 +3132,494 @@
           <p:spPr>
             <a:xfrm>
               <a:off x="1172049" y="1896563"/>
-              <a:ext cx="7090630" cy="3618079"/>
+              <a:ext cx="7090630" cy="3633381"/>
             </a:xfrm>
             <a:custGeom>
               <a:avLst/>
               <a:pathLst>
-                <a:path w="7090630" h="3618079">
+                <a:path w="7090630" h="3633381">
                   <a:moveTo>
-                    <a:pt x="0" y="3142231"/>
+                    <a:pt x="0" y="3054372"/>
                   </a:moveTo>
                   <a:lnTo>
-                    <a:pt x="71622" y="3135804"/>
-                  </a:lnTo>
-                  <a:lnTo>
-                    <a:pt x="143245" y="3129295"/>
-                  </a:lnTo>
-                  <a:lnTo>
-                    <a:pt x="214867" y="3122705"/>
-                  </a:lnTo>
-                  <a:lnTo>
-                    <a:pt x="286490" y="3116032"/>
-                  </a:lnTo>
-                  <a:lnTo>
-                    <a:pt x="358112" y="3109275"/>
-                  </a:lnTo>
-                  <a:lnTo>
-                    <a:pt x="429735" y="3102433"/>
-                  </a:lnTo>
-                  <a:lnTo>
-                    <a:pt x="501357" y="3095505"/>
-                  </a:lnTo>
-                  <a:lnTo>
-                    <a:pt x="572980" y="3088489"/>
-                  </a:lnTo>
-                  <a:lnTo>
-                    <a:pt x="644602" y="3081385"/>
-                  </a:lnTo>
-                  <a:lnTo>
-                    <a:pt x="716225" y="3074192"/>
-                  </a:lnTo>
-                  <a:lnTo>
-                    <a:pt x="787847" y="3066908"/>
-                  </a:lnTo>
-                  <a:lnTo>
-                    <a:pt x="859470" y="3059532"/>
-                  </a:lnTo>
-                  <a:lnTo>
-                    <a:pt x="931092" y="3052063"/>
-                  </a:lnTo>
-                  <a:lnTo>
-                    <a:pt x="1002715" y="3044501"/>
-                  </a:lnTo>
-                  <a:lnTo>
-                    <a:pt x="1074337" y="3036843"/>
-                  </a:lnTo>
-                  <a:lnTo>
-                    <a:pt x="1145960" y="3029089"/>
-                  </a:lnTo>
-                  <a:lnTo>
-                    <a:pt x="1217582" y="3021237"/>
-                  </a:lnTo>
-                  <a:lnTo>
-                    <a:pt x="1289205" y="3013286"/>
-                  </a:lnTo>
-                  <a:lnTo>
-                    <a:pt x="1360827" y="3005235"/>
-                  </a:lnTo>
-                  <a:lnTo>
-                    <a:pt x="1432450" y="2997083"/>
-                  </a:lnTo>
-                  <a:lnTo>
-                    <a:pt x="1504073" y="2988828"/>
-                  </a:lnTo>
-                  <a:lnTo>
-                    <a:pt x="1575695" y="2980469"/>
-                  </a:lnTo>
-                  <a:lnTo>
-                    <a:pt x="1647318" y="2972005"/>
-                  </a:lnTo>
-                  <a:lnTo>
-                    <a:pt x="1718940" y="2963434"/>
-                  </a:lnTo>
-                  <a:lnTo>
-                    <a:pt x="1790563" y="2954755"/>
-                  </a:lnTo>
-                  <a:lnTo>
-                    <a:pt x="1862185" y="2945967"/>
-                  </a:lnTo>
-                  <a:lnTo>
-                    <a:pt x="1933808" y="2937069"/>
-                  </a:lnTo>
-                  <a:lnTo>
-                    <a:pt x="2005430" y="2928058"/>
-                  </a:lnTo>
-                  <a:lnTo>
-                    <a:pt x="2077053" y="2918934"/>
-                  </a:lnTo>
-                  <a:lnTo>
-                    <a:pt x="2148675" y="2909695"/>
-                  </a:lnTo>
-                  <a:lnTo>
-                    <a:pt x="2220298" y="2900340"/>
-                  </a:lnTo>
-                  <a:lnTo>
-                    <a:pt x="2291920" y="2890866"/>
-                  </a:lnTo>
-                  <a:lnTo>
-                    <a:pt x="2363543" y="2881274"/>
-                  </a:lnTo>
-                  <a:lnTo>
-                    <a:pt x="2435165" y="2871561"/>
-                  </a:lnTo>
-                  <a:lnTo>
-                    <a:pt x="2506788" y="2861725"/>
-                  </a:lnTo>
-                  <a:lnTo>
-                    <a:pt x="2578410" y="2851766"/>
-                  </a:lnTo>
-                  <a:lnTo>
-                    <a:pt x="2650033" y="2841681"/>
-                  </a:lnTo>
-                  <a:lnTo>
-                    <a:pt x="2721655" y="2831469"/>
-                  </a:lnTo>
-                  <a:lnTo>
-                    <a:pt x="2793278" y="2821129"/>
-                  </a:lnTo>
-                  <a:lnTo>
-                    <a:pt x="2864901" y="2810658"/>
-                  </a:lnTo>
-                  <a:lnTo>
-                    <a:pt x="2936523" y="2800056"/>
-                  </a:lnTo>
-                  <a:lnTo>
-                    <a:pt x="3008146" y="2789320"/>
-                  </a:lnTo>
-                  <a:lnTo>
-                    <a:pt x="3079768" y="2755263"/>
-                  </a:lnTo>
-                  <a:lnTo>
-                    <a:pt x="3151391" y="2684659"/>
-                  </a:lnTo>
-                  <a:lnTo>
-                    <a:pt x="3223013" y="2608499"/>
-                  </a:lnTo>
-                  <a:lnTo>
-                    <a:pt x="3294636" y="2526348"/>
-                  </a:lnTo>
-                  <a:lnTo>
-                    <a:pt x="3366258" y="2437733"/>
-                  </a:lnTo>
-                  <a:lnTo>
-                    <a:pt x="3437881" y="2342146"/>
-                  </a:lnTo>
-                  <a:lnTo>
-                    <a:pt x="3509503" y="2239038"/>
-                  </a:lnTo>
-                  <a:lnTo>
-                    <a:pt x="3581126" y="2127818"/>
-                  </a:lnTo>
-                  <a:lnTo>
-                    <a:pt x="3652748" y="2007847"/>
-                  </a:lnTo>
-                  <a:lnTo>
-                    <a:pt x="3724371" y="1878438"/>
-                  </a:lnTo>
-                  <a:lnTo>
-                    <a:pt x="3795993" y="1738846"/>
-                  </a:lnTo>
-                  <a:lnTo>
-                    <a:pt x="3867616" y="1588272"/>
-                  </a:lnTo>
-                  <a:lnTo>
-                    <a:pt x="3939238" y="1425850"/>
-                  </a:lnTo>
-                  <a:lnTo>
-                    <a:pt x="4010861" y="1250650"/>
-                  </a:lnTo>
-                  <a:lnTo>
-                    <a:pt x="4082483" y="1061665"/>
-                  </a:lnTo>
-                  <a:lnTo>
-                    <a:pt x="4154106" y="857811"/>
-                  </a:lnTo>
-                  <a:lnTo>
-                    <a:pt x="4225729" y="637919"/>
-                  </a:lnTo>
-                  <a:lnTo>
-                    <a:pt x="4297351" y="400725"/>
-                  </a:lnTo>
-                  <a:lnTo>
-                    <a:pt x="4368974" y="144870"/>
-                  </a:lnTo>
-                  <a:lnTo>
-                    <a:pt x="4406570" y="0"/>
+                    <a:pt x="71622" y="3049094"/>
+                  </a:lnTo>
+                  <a:lnTo>
+                    <a:pt x="143245" y="3043769"/>
+                  </a:lnTo>
+                  <a:lnTo>
+                    <a:pt x="214867" y="3038397"/>
+                  </a:lnTo>
+                  <a:lnTo>
+                    <a:pt x="286490" y="3032977"/>
+                  </a:lnTo>
+                  <a:lnTo>
+                    <a:pt x="358112" y="3027510"/>
+                  </a:lnTo>
+                  <a:lnTo>
+                    <a:pt x="429735" y="3021995"/>
+                  </a:lnTo>
+                  <a:lnTo>
+                    <a:pt x="501357" y="3016431"/>
+                  </a:lnTo>
+                  <a:lnTo>
+                    <a:pt x="572980" y="3010818"/>
+                  </a:lnTo>
+                  <a:lnTo>
+                    <a:pt x="644602" y="3005155"/>
+                  </a:lnTo>
+                  <a:lnTo>
+                    <a:pt x="716225" y="2999442"/>
+                  </a:lnTo>
+                  <a:lnTo>
+                    <a:pt x="787847" y="2993679"/>
+                  </a:lnTo>
+                  <a:lnTo>
+                    <a:pt x="859470" y="2987865"/>
+                  </a:lnTo>
+                  <a:lnTo>
+                    <a:pt x="931092" y="2982000"/>
+                  </a:lnTo>
+                  <a:lnTo>
+                    <a:pt x="1002715" y="2976083"/>
+                  </a:lnTo>
+                  <a:lnTo>
+                    <a:pt x="1074337" y="2970114"/>
+                  </a:lnTo>
+                  <a:lnTo>
+                    <a:pt x="1145960" y="2964092"/>
+                  </a:lnTo>
+                  <a:lnTo>
+                    <a:pt x="1217582" y="2958018"/>
+                  </a:lnTo>
+                  <a:lnTo>
+                    <a:pt x="1289205" y="2951889"/>
+                  </a:lnTo>
+                  <a:lnTo>
+                    <a:pt x="1360827" y="2945706"/>
+                  </a:lnTo>
+                  <a:lnTo>
+                    <a:pt x="1432450" y="2939469"/>
+                  </a:lnTo>
+                  <a:lnTo>
+                    <a:pt x="1504073" y="2933177"/>
+                  </a:lnTo>
+                  <a:lnTo>
+                    <a:pt x="1575695" y="2926829"/>
+                  </a:lnTo>
+                  <a:lnTo>
+                    <a:pt x="1647318" y="2920426"/>
+                  </a:lnTo>
+                  <a:lnTo>
+                    <a:pt x="1718940" y="2913966"/>
+                  </a:lnTo>
+                  <a:lnTo>
+                    <a:pt x="1790563" y="2907448"/>
+                  </a:lnTo>
+                  <a:lnTo>
+                    <a:pt x="1862185" y="2900874"/>
+                  </a:lnTo>
+                  <a:lnTo>
+                    <a:pt x="1933808" y="2894241"/>
+                  </a:lnTo>
+                  <a:lnTo>
+                    <a:pt x="2005430" y="2887550"/>
+                  </a:lnTo>
+                  <a:lnTo>
+                    <a:pt x="2077053" y="2880800"/>
+                  </a:lnTo>
+                  <a:lnTo>
+                    <a:pt x="2148675" y="2873990"/>
+                  </a:lnTo>
+                  <a:lnTo>
+                    <a:pt x="2220298" y="2867120"/>
+                  </a:lnTo>
+                  <a:lnTo>
+                    <a:pt x="2291920" y="2860190"/>
+                  </a:lnTo>
+                  <a:lnTo>
+                    <a:pt x="2363543" y="2853198"/>
+                  </a:lnTo>
+                  <a:lnTo>
+                    <a:pt x="2435165" y="2846145"/>
+                  </a:lnTo>
+                  <a:lnTo>
+                    <a:pt x="2506788" y="2839029"/>
+                  </a:lnTo>
+                  <a:lnTo>
+                    <a:pt x="2578410" y="2831851"/>
+                  </a:lnTo>
+                  <a:lnTo>
+                    <a:pt x="2650033" y="2824609"/>
+                  </a:lnTo>
+                  <a:lnTo>
+                    <a:pt x="2721655" y="2817304"/>
+                  </a:lnTo>
+                  <a:lnTo>
+                    <a:pt x="2793278" y="2809934"/>
+                  </a:lnTo>
+                  <a:lnTo>
+                    <a:pt x="2864901" y="2802498"/>
+                  </a:lnTo>
+                  <a:lnTo>
+                    <a:pt x="2936523" y="2794998"/>
+                  </a:lnTo>
+                  <a:lnTo>
+                    <a:pt x="3008146" y="2787431"/>
+                  </a:lnTo>
+                  <a:lnTo>
+                    <a:pt x="3079768" y="2750148"/>
+                  </a:lnTo>
+                  <a:lnTo>
+                    <a:pt x="3151391" y="2665683"/>
+                  </a:lnTo>
+                  <a:lnTo>
+                    <a:pt x="3223013" y="2573314"/>
+                  </a:lnTo>
+                  <a:lnTo>
+                    <a:pt x="3294636" y="2472300"/>
+                  </a:lnTo>
+                  <a:lnTo>
+                    <a:pt x="3366258" y="2361832"/>
+                  </a:lnTo>
+                  <a:lnTo>
+                    <a:pt x="3437881" y="2241026"/>
+                  </a:lnTo>
+                  <a:lnTo>
+                    <a:pt x="3509503" y="2108913"/>
+                  </a:lnTo>
+                  <a:lnTo>
+                    <a:pt x="3581126" y="1964435"/>
+                  </a:lnTo>
+                  <a:lnTo>
+                    <a:pt x="3652748" y="1806437"/>
+                  </a:lnTo>
+                  <a:lnTo>
+                    <a:pt x="3724371" y="1633651"/>
+                  </a:lnTo>
+                  <a:lnTo>
+                    <a:pt x="3795993" y="1444694"/>
+                  </a:lnTo>
+                  <a:lnTo>
+                    <a:pt x="3867616" y="1238053"/>
+                  </a:lnTo>
+                  <a:lnTo>
+                    <a:pt x="3939238" y="1012072"/>
+                  </a:lnTo>
+                  <a:lnTo>
+                    <a:pt x="4010861" y="764942"/>
+                  </a:lnTo>
+                  <a:lnTo>
+                    <a:pt x="4082483" y="494683"/>
+                  </a:lnTo>
+                  <a:lnTo>
+                    <a:pt x="4154106" y="199130"/>
+                  </a:lnTo>
+                  <a:lnTo>
+                    <a:pt x="4198232" y="0"/>
                   </a:lnTo>
                   <a:lnTo>
                     <a:pt x="7090630" y="0"/>
                   </a:lnTo>
                   <a:lnTo>
-                    <a:pt x="7090630" y="1890893"/>
-                  </a:lnTo>
-                  <a:lnTo>
-                    <a:pt x="7019007" y="1912801"/>
-                  </a:lnTo>
-                  <a:lnTo>
-                    <a:pt x="6947385" y="1934437"/>
-                  </a:lnTo>
-                  <a:lnTo>
-                    <a:pt x="6875762" y="1955804"/>
-                  </a:lnTo>
-                  <a:lnTo>
-                    <a:pt x="6804139" y="1976905"/>
-                  </a:lnTo>
-                  <a:lnTo>
-                    <a:pt x="6732517" y="1997744"/>
-                  </a:lnTo>
-                  <a:lnTo>
-                    <a:pt x="6660894" y="2018324"/>
-                  </a:lnTo>
-                  <a:lnTo>
-                    <a:pt x="6589272" y="2038648"/>
-                  </a:lnTo>
-                  <a:lnTo>
-                    <a:pt x="6517649" y="2058719"/>
-                  </a:lnTo>
-                  <a:lnTo>
-                    <a:pt x="6446027" y="2078540"/>
-                  </a:lnTo>
-                  <a:lnTo>
-                    <a:pt x="6374404" y="2098115"/>
-                  </a:lnTo>
-                  <a:lnTo>
-                    <a:pt x="6302782" y="2117446"/>
-                  </a:lnTo>
-                  <a:lnTo>
-                    <a:pt x="6231159" y="2136538"/>
-                  </a:lnTo>
-                  <a:lnTo>
-                    <a:pt x="6159537" y="2155391"/>
-                  </a:lnTo>
-                  <a:lnTo>
-                    <a:pt x="6087914" y="2174010"/>
-                  </a:lnTo>
-                  <a:lnTo>
-                    <a:pt x="6016292" y="2192398"/>
-                  </a:lnTo>
-                  <a:lnTo>
-                    <a:pt x="5944669" y="2210557"/>
-                  </a:lnTo>
-                  <a:lnTo>
-                    <a:pt x="5873047" y="2228490"/>
-                  </a:lnTo>
-                  <a:lnTo>
-                    <a:pt x="5801424" y="2246201"/>
-                  </a:lnTo>
-                  <a:lnTo>
-                    <a:pt x="5729802" y="2263691"/>
-                  </a:lnTo>
-                  <a:lnTo>
-                    <a:pt x="5658179" y="2280963"/>
-                  </a:lnTo>
-                  <a:lnTo>
-                    <a:pt x="5586557" y="2298021"/>
-                  </a:lnTo>
-                  <a:lnTo>
-                    <a:pt x="5514934" y="2314866"/>
-                  </a:lnTo>
-                  <a:lnTo>
-                    <a:pt x="5443311" y="2331502"/>
-                  </a:lnTo>
-                  <a:lnTo>
-                    <a:pt x="5371689" y="2347932"/>
-                  </a:lnTo>
-                  <a:lnTo>
-                    <a:pt x="5300066" y="2364156"/>
-                  </a:lnTo>
-                  <a:lnTo>
-                    <a:pt x="5228444" y="2380180"/>
-                  </a:lnTo>
-                  <a:lnTo>
-                    <a:pt x="5156821" y="2396003"/>
-                  </a:lnTo>
-                  <a:lnTo>
-                    <a:pt x="5085199" y="2411630"/>
-                  </a:lnTo>
-                  <a:lnTo>
-                    <a:pt x="5013576" y="2427063"/>
-                  </a:lnTo>
-                  <a:lnTo>
-                    <a:pt x="4941954" y="2442304"/>
-                  </a:lnTo>
-                  <a:lnTo>
-                    <a:pt x="4870331" y="2457355"/>
-                  </a:lnTo>
-                  <a:lnTo>
-                    <a:pt x="4798709" y="2472219"/>
-                  </a:lnTo>
-                  <a:lnTo>
-                    <a:pt x="4727086" y="2486899"/>
-                  </a:lnTo>
-                  <a:lnTo>
-                    <a:pt x="4655464" y="2501395"/>
-                  </a:lnTo>
-                  <a:lnTo>
-                    <a:pt x="4583841" y="2515712"/>
-                  </a:lnTo>
-                  <a:lnTo>
-                    <a:pt x="4512219" y="2529850"/>
-                  </a:lnTo>
-                  <a:lnTo>
-                    <a:pt x="4440596" y="2543813"/>
-                  </a:lnTo>
-                  <a:lnTo>
-                    <a:pt x="4368974" y="2557602"/>
-                  </a:lnTo>
-                  <a:lnTo>
-                    <a:pt x="4297351" y="2571219"/>
-                  </a:lnTo>
-                  <a:lnTo>
-                    <a:pt x="4225729" y="2584668"/>
-                  </a:lnTo>
-                  <a:lnTo>
-                    <a:pt x="4154106" y="2597949"/>
-                  </a:lnTo>
-                  <a:lnTo>
-                    <a:pt x="4082483" y="2611064"/>
-                  </a:lnTo>
-                  <a:lnTo>
-                    <a:pt x="4010861" y="2624017"/>
-                  </a:lnTo>
-                  <a:lnTo>
-                    <a:pt x="3939238" y="2636809"/>
-                  </a:lnTo>
-                  <a:lnTo>
-                    <a:pt x="3867616" y="2649441"/>
-                  </a:lnTo>
-                  <a:lnTo>
-                    <a:pt x="3795993" y="2661917"/>
-                  </a:lnTo>
-                  <a:lnTo>
-                    <a:pt x="3724371" y="2674237"/>
-                  </a:lnTo>
-                  <a:lnTo>
-                    <a:pt x="3652748" y="2686404"/>
-                  </a:lnTo>
-                  <a:lnTo>
-                    <a:pt x="3581126" y="2698420"/>
-                  </a:lnTo>
-                  <a:lnTo>
-                    <a:pt x="3509503" y="2710286"/>
-                  </a:lnTo>
-                  <a:lnTo>
-                    <a:pt x="3437881" y="2722005"/>
-                  </a:lnTo>
-                  <a:lnTo>
-                    <a:pt x="3366258" y="2733578"/>
-                  </a:lnTo>
-                  <a:lnTo>
-                    <a:pt x="3294636" y="2745007"/>
-                  </a:lnTo>
-                  <a:lnTo>
-                    <a:pt x="3223013" y="2756294"/>
-                  </a:lnTo>
-                  <a:lnTo>
-                    <a:pt x="3151391" y="2767441"/>
-                  </a:lnTo>
-                  <a:lnTo>
-                    <a:pt x="3079768" y="2778449"/>
-                  </a:lnTo>
-                  <a:lnTo>
-                    <a:pt x="3008146" y="2820718"/>
-                  </a:lnTo>
-                  <a:lnTo>
-                    <a:pt x="2936523" y="2881398"/>
-                  </a:lnTo>
-                  <a:lnTo>
-                    <a:pt x="2864901" y="2937652"/>
-                  </a:lnTo>
-                  <a:lnTo>
-                    <a:pt x="2793278" y="2989803"/>
-                  </a:lnTo>
-                  <a:lnTo>
-                    <a:pt x="2721655" y="3038151"/>
-                  </a:lnTo>
-                  <a:lnTo>
-                    <a:pt x="2650033" y="3082971"/>
-                  </a:lnTo>
-                  <a:lnTo>
-                    <a:pt x="2578410" y="3124523"/>
-                  </a:lnTo>
-                  <a:lnTo>
-                    <a:pt x="2506788" y="3163044"/>
-                  </a:lnTo>
-                  <a:lnTo>
-                    <a:pt x="2435165" y="3198755"/>
-                  </a:lnTo>
-                  <a:lnTo>
-                    <a:pt x="2363543" y="3231861"/>
-                  </a:lnTo>
-                  <a:lnTo>
-                    <a:pt x="2291920" y="3262553"/>
-                  </a:lnTo>
-                  <a:lnTo>
-                    <a:pt x="2220298" y="3291006"/>
-                  </a:lnTo>
-                  <a:lnTo>
-                    <a:pt x="2148675" y="3317384"/>
-                  </a:lnTo>
-                  <a:lnTo>
-                    <a:pt x="2077053" y="3341837"/>
-                  </a:lnTo>
-                  <a:lnTo>
-                    <a:pt x="2005430" y="3364508"/>
-                  </a:lnTo>
-                  <a:lnTo>
-                    <a:pt x="1933808" y="3385524"/>
-                  </a:lnTo>
-                  <a:lnTo>
-                    <a:pt x="1862185" y="3405008"/>
-                  </a:lnTo>
-                  <a:lnTo>
-                    <a:pt x="1790563" y="3423070"/>
-                  </a:lnTo>
-                  <a:lnTo>
-                    <a:pt x="1718940" y="3439815"/>
-                  </a:lnTo>
-                  <a:lnTo>
-                    <a:pt x="1647318" y="3455339"/>
-                  </a:lnTo>
-                  <a:lnTo>
-                    <a:pt x="1575695" y="3469730"/>
-                  </a:lnTo>
-                  <a:lnTo>
-                    <a:pt x="1504073" y="3483072"/>
-                  </a:lnTo>
-                  <a:lnTo>
-                    <a:pt x="1432450" y="3495440"/>
-                  </a:lnTo>
-                  <a:lnTo>
-                    <a:pt x="1360827" y="3506906"/>
-                  </a:lnTo>
-                  <a:lnTo>
-                    <a:pt x="1289205" y="3517536"/>
-                  </a:lnTo>
-                  <a:lnTo>
-                    <a:pt x="1217582" y="3527391"/>
-                  </a:lnTo>
-                  <a:lnTo>
-                    <a:pt x="1145960" y="3536527"/>
-                  </a:lnTo>
-                  <a:lnTo>
-                    <a:pt x="1074337" y="3544996"/>
-                  </a:lnTo>
-                  <a:lnTo>
-                    <a:pt x="1002715" y="3552848"/>
-                  </a:lnTo>
-                  <a:lnTo>
-                    <a:pt x="931092" y="3560127"/>
-                  </a:lnTo>
-                  <a:lnTo>
-                    <a:pt x="859470" y="3566875"/>
-                  </a:lnTo>
-                  <a:lnTo>
-                    <a:pt x="787847" y="3573131"/>
-                  </a:lnTo>
-                  <a:lnTo>
-                    <a:pt x="716225" y="3578931"/>
-                  </a:lnTo>
-                  <a:lnTo>
-                    <a:pt x="644602" y="3584307"/>
-                  </a:lnTo>
-                  <a:lnTo>
-                    <a:pt x="572980" y="3589292"/>
-                  </a:lnTo>
-                  <a:lnTo>
-                    <a:pt x="501357" y="3593912"/>
-                  </a:lnTo>
-                  <a:lnTo>
-                    <a:pt x="429735" y="3598196"/>
-                  </a:lnTo>
-                  <a:lnTo>
-                    <a:pt x="358112" y="3602168"/>
-                  </a:lnTo>
-                  <a:lnTo>
-                    <a:pt x="286490" y="3605849"/>
-                  </a:lnTo>
-                  <a:lnTo>
-                    <a:pt x="214867" y="3609262"/>
-                  </a:lnTo>
-                  <a:lnTo>
-                    <a:pt x="143245" y="3612427"/>
-                  </a:lnTo>
-                  <a:lnTo>
-                    <a:pt x="71622" y="3615360"/>
-                  </a:lnTo>
-                  <a:lnTo>
-                    <a:pt x="0" y="3618079"/>
+                    <a:pt x="7090630" y="2225163"/>
+                  </a:lnTo>
+                  <a:lnTo>
+                    <a:pt x="7019007" y="2237647"/>
+                  </a:lnTo>
+                  <a:lnTo>
+                    <a:pt x="6947385" y="2250022"/>
+                  </a:lnTo>
+                  <a:lnTo>
+                    <a:pt x="6875762" y="2262288"/>
+                  </a:lnTo>
+                  <a:lnTo>
+                    <a:pt x="6804139" y="2274448"/>
+                  </a:lnTo>
+                  <a:lnTo>
+                    <a:pt x="6732517" y="2286501"/>
+                  </a:lnTo>
+                  <a:lnTo>
+                    <a:pt x="6660894" y="2298449"/>
+                  </a:lnTo>
+                  <a:lnTo>
+                    <a:pt x="6589272" y="2310292"/>
+                  </a:lnTo>
+                  <a:lnTo>
+                    <a:pt x="6517649" y="2322032"/>
+                  </a:lnTo>
+                  <a:lnTo>
+                    <a:pt x="6446027" y="2333669"/>
+                  </a:lnTo>
+                  <a:lnTo>
+                    <a:pt x="6374404" y="2345204"/>
+                  </a:lnTo>
+                  <a:lnTo>
+                    <a:pt x="6302782" y="2356638"/>
+                  </a:lnTo>
+                  <a:lnTo>
+                    <a:pt x="6231159" y="2367973"/>
+                  </a:lnTo>
+                  <a:lnTo>
+                    <a:pt x="6159537" y="2379208"/>
+                  </a:lnTo>
+                  <a:lnTo>
+                    <a:pt x="6087914" y="2390345"/>
+                  </a:lnTo>
+                  <a:lnTo>
+                    <a:pt x="6016292" y="2401384"/>
+                  </a:lnTo>
+                  <a:lnTo>
+                    <a:pt x="5944669" y="2412327"/>
+                  </a:lnTo>
+                  <a:lnTo>
+                    <a:pt x="5873047" y="2423175"/>
+                  </a:lnTo>
+                  <a:lnTo>
+                    <a:pt x="5801424" y="2433927"/>
+                  </a:lnTo>
+                  <a:lnTo>
+                    <a:pt x="5729802" y="2444585"/>
+                  </a:lnTo>
+                  <a:lnTo>
+                    <a:pt x="5658179" y="2455151"/>
+                  </a:lnTo>
+                  <a:lnTo>
+                    <a:pt x="5586557" y="2465623"/>
+                  </a:lnTo>
+                  <a:lnTo>
+                    <a:pt x="5514934" y="2476005"/>
+                  </a:lnTo>
+                  <a:lnTo>
+                    <a:pt x="5443311" y="2486295"/>
+                  </a:lnTo>
+                  <a:lnTo>
+                    <a:pt x="5371689" y="2496495"/>
+                  </a:lnTo>
+                  <a:lnTo>
+                    <a:pt x="5300066" y="2506607"/>
+                  </a:lnTo>
+                  <a:lnTo>
+                    <a:pt x="5228444" y="2516629"/>
+                  </a:lnTo>
+                  <a:lnTo>
+                    <a:pt x="5156821" y="2526565"/>
+                  </a:lnTo>
+                  <a:lnTo>
+                    <a:pt x="5085199" y="2536413"/>
+                  </a:lnTo>
+                  <a:lnTo>
+                    <a:pt x="5013576" y="2546175"/>
+                  </a:lnTo>
+                  <a:lnTo>
+                    <a:pt x="4941954" y="2555852"/>
+                  </a:lnTo>
+                  <a:lnTo>
+                    <a:pt x="4870331" y="2565444"/>
+                  </a:lnTo>
+                  <a:lnTo>
+                    <a:pt x="4798709" y="2574952"/>
+                  </a:lnTo>
+                  <a:lnTo>
+                    <a:pt x="4727086" y="2584377"/>
+                  </a:lnTo>
+                  <a:lnTo>
+                    <a:pt x="4655464" y="2593720"/>
+                  </a:lnTo>
+                  <a:lnTo>
+                    <a:pt x="4583841" y="2602981"/>
+                  </a:lnTo>
+                  <a:lnTo>
+                    <a:pt x="4512219" y="2612160"/>
+                  </a:lnTo>
+                  <a:lnTo>
+                    <a:pt x="4440596" y="2621260"/>
+                  </a:lnTo>
+                  <a:lnTo>
+                    <a:pt x="4368974" y="2630280"/>
+                  </a:lnTo>
+                  <a:lnTo>
+                    <a:pt x="4297351" y="2639221"/>
+                  </a:lnTo>
+                  <a:lnTo>
+                    <a:pt x="4225729" y="2648084"/>
+                  </a:lnTo>
+                  <a:lnTo>
+                    <a:pt x="4154106" y="2656870"/>
+                  </a:lnTo>
+                  <a:lnTo>
+                    <a:pt x="4082483" y="2665578"/>
+                  </a:lnTo>
+                  <a:lnTo>
+                    <a:pt x="4010861" y="2674211"/>
+                  </a:lnTo>
+                  <a:lnTo>
+                    <a:pt x="3939238" y="2682768"/>
+                  </a:lnTo>
+                  <a:lnTo>
+                    <a:pt x="3867616" y="2691250"/>
+                  </a:lnTo>
+                  <a:lnTo>
+                    <a:pt x="3795993" y="2699658"/>
+                  </a:lnTo>
+                  <a:lnTo>
+                    <a:pt x="3724371" y="2707992"/>
+                  </a:lnTo>
+                  <a:lnTo>
+                    <a:pt x="3652748" y="2716254"/>
+                  </a:lnTo>
+                  <a:lnTo>
+                    <a:pt x="3581126" y="2724443"/>
+                  </a:lnTo>
+                  <a:lnTo>
+                    <a:pt x="3509503" y="2732561"/>
+                  </a:lnTo>
+                  <a:lnTo>
+                    <a:pt x="3437881" y="2740608"/>
+                  </a:lnTo>
+                  <a:lnTo>
+                    <a:pt x="3366258" y="2748584"/>
+                  </a:lnTo>
+                  <a:lnTo>
+                    <a:pt x="3294636" y="2756490"/>
+                  </a:lnTo>
+                  <a:lnTo>
+                    <a:pt x="3223013" y="2764328"/>
+                  </a:lnTo>
+                  <a:lnTo>
+                    <a:pt x="3151391" y="2772097"/>
+                  </a:lnTo>
+                  <a:lnTo>
+                    <a:pt x="3079768" y="2779798"/>
+                  </a:lnTo>
+                  <a:lnTo>
+                    <a:pt x="3008146" y="2827383"/>
+                  </a:lnTo>
+                  <a:lnTo>
+                    <a:pt x="2936523" y="2898009"/>
+                  </a:lnTo>
+                  <a:lnTo>
+                    <a:pt x="2864901" y="2962591"/>
+                  </a:lnTo>
+                  <a:lnTo>
+                    <a:pt x="2793278" y="3021646"/>
+                  </a:lnTo>
+                  <a:lnTo>
+                    <a:pt x="2721655" y="3075647"/>
+                  </a:lnTo>
+                  <a:lnTo>
+                    <a:pt x="2650033" y="3125026"/>
+                  </a:lnTo>
+                  <a:lnTo>
+                    <a:pt x="2578410" y="3170180"/>
+                  </a:lnTo>
+                  <a:lnTo>
+                    <a:pt x="2506788" y="3211469"/>
+                  </a:lnTo>
+                  <a:lnTo>
+                    <a:pt x="2435165" y="3249225"/>
+                  </a:lnTo>
+                  <a:lnTo>
+                    <a:pt x="2363543" y="3283750"/>
+                  </a:lnTo>
+                  <a:lnTo>
+                    <a:pt x="2291920" y="3315320"/>
+                  </a:lnTo>
+                  <a:lnTo>
+                    <a:pt x="2220298" y="3344188"/>
+                  </a:lnTo>
+                  <a:lnTo>
+                    <a:pt x="2148675" y="3370586"/>
+                  </a:lnTo>
+                  <a:lnTo>
+                    <a:pt x="2077053" y="3394724"/>
+                  </a:lnTo>
+                  <a:lnTo>
+                    <a:pt x="2005430" y="3416797"/>
+                  </a:lnTo>
+                  <a:lnTo>
+                    <a:pt x="1933808" y="3436981"/>
+                  </a:lnTo>
+                  <a:lnTo>
+                    <a:pt x="1862185" y="3455437"/>
+                  </a:lnTo>
+                  <a:lnTo>
+                    <a:pt x="1790563" y="3472314"/>
+                  </a:lnTo>
+                  <a:lnTo>
+                    <a:pt x="1718940" y="3487747"/>
+                  </a:lnTo>
+                  <a:lnTo>
+                    <a:pt x="1647318" y="3501859"/>
+                  </a:lnTo>
+                  <a:lnTo>
+                    <a:pt x="1575695" y="3514763"/>
+                  </a:lnTo>
+                  <a:lnTo>
+                    <a:pt x="1504073" y="3526563"/>
+                  </a:lnTo>
+                  <a:lnTo>
+                    <a:pt x="1432450" y="3537353"/>
+                  </a:lnTo>
+                  <a:lnTo>
+                    <a:pt x="1360827" y="3547219"/>
+                  </a:lnTo>
+                  <a:lnTo>
+                    <a:pt x="1289205" y="3556242"/>
+                  </a:lnTo>
+                  <a:lnTo>
+                    <a:pt x="1217582" y="3564492"/>
+                  </a:lnTo>
+                  <a:lnTo>
+                    <a:pt x="1145960" y="3572036"/>
+                  </a:lnTo>
+                  <a:lnTo>
+                    <a:pt x="1074337" y="3578934"/>
+                  </a:lnTo>
+                  <a:lnTo>
+                    <a:pt x="1002715" y="3585242"/>
+                  </a:lnTo>
+                  <a:lnTo>
+                    <a:pt x="931092" y="3591010"/>
+                  </a:lnTo>
+                  <a:lnTo>
+                    <a:pt x="859470" y="3596285"/>
+                  </a:lnTo>
+                  <a:lnTo>
+                    <a:pt x="787847" y="3601108"/>
+                  </a:lnTo>
+                  <a:lnTo>
+                    <a:pt x="716225" y="3605518"/>
+                  </a:lnTo>
+                  <a:lnTo>
+                    <a:pt x="644602" y="3609551"/>
+                  </a:lnTo>
+                  <a:lnTo>
+                    <a:pt x="572980" y="3613239"/>
+                  </a:lnTo>
+                  <a:lnTo>
+                    <a:pt x="501357" y="3616611"/>
+                  </a:lnTo>
+                  <a:lnTo>
+                    <a:pt x="429735" y="3619695"/>
+                  </a:lnTo>
+                  <a:lnTo>
+                    <a:pt x="358112" y="3622515"/>
+                  </a:lnTo>
+                  <a:lnTo>
+                    <a:pt x="286490" y="3625093"/>
+                  </a:lnTo>
+                  <a:lnTo>
+                    <a:pt x="214867" y="3627451"/>
+                  </a:lnTo>
+                  <a:lnTo>
+                    <a:pt x="143245" y="3629607"/>
+                  </a:lnTo>
+                  <a:lnTo>
+                    <a:pt x="71622" y="3631578"/>
+                  </a:lnTo>
+                  <a:lnTo>
+                    <a:pt x="0" y="3633381"/>
                   </a:lnTo>
                   <a:close/>
                 </a:path>
@@ -3655,200 +3646,191 @@
           <p:spPr>
             <a:xfrm>
               <a:off x="1172049" y="1896563"/>
-              <a:ext cx="4406570" cy="3142231"/>
+              <a:ext cx="4198232" cy="3054372"/>
             </a:xfrm>
             <a:custGeom>
               <a:avLst/>
               <a:pathLst>
-                <a:path w="4406570" h="3142231">
+                <a:path w="4198232" h="3054372">
                   <a:moveTo>
-                    <a:pt x="0" y="3142231"/>
+                    <a:pt x="0" y="3054372"/>
                   </a:moveTo>
                   <a:lnTo>
-                    <a:pt x="71622" y="3135804"/>
-                  </a:lnTo>
-                  <a:lnTo>
-                    <a:pt x="143245" y="3129295"/>
-                  </a:lnTo>
-                  <a:lnTo>
-                    <a:pt x="214867" y="3122705"/>
-                  </a:lnTo>
-                  <a:lnTo>
-                    <a:pt x="286490" y="3116032"/>
-                  </a:lnTo>
-                  <a:lnTo>
-                    <a:pt x="358112" y="3109275"/>
-                  </a:lnTo>
-                  <a:lnTo>
-                    <a:pt x="429735" y="3102433"/>
-                  </a:lnTo>
-                  <a:lnTo>
-                    <a:pt x="501357" y="3095505"/>
-                  </a:lnTo>
-                  <a:lnTo>
-                    <a:pt x="572980" y="3088489"/>
-                  </a:lnTo>
-                  <a:lnTo>
-                    <a:pt x="644602" y="3081385"/>
-                  </a:lnTo>
-                  <a:lnTo>
-                    <a:pt x="716225" y="3074192"/>
-                  </a:lnTo>
-                  <a:lnTo>
-                    <a:pt x="787847" y="3066908"/>
-                  </a:lnTo>
-                  <a:lnTo>
-                    <a:pt x="859470" y="3059532"/>
-                  </a:lnTo>
-                  <a:lnTo>
-                    <a:pt x="931092" y="3052063"/>
-                  </a:lnTo>
-                  <a:lnTo>
-                    <a:pt x="1002715" y="3044501"/>
-                  </a:lnTo>
-                  <a:lnTo>
-                    <a:pt x="1074337" y="3036843"/>
-                  </a:lnTo>
-                  <a:lnTo>
-                    <a:pt x="1145960" y="3029089"/>
-                  </a:lnTo>
-                  <a:lnTo>
-                    <a:pt x="1217582" y="3021237"/>
-                  </a:lnTo>
-                  <a:lnTo>
-                    <a:pt x="1289205" y="3013286"/>
-                  </a:lnTo>
-                  <a:lnTo>
-                    <a:pt x="1360827" y="3005235"/>
-                  </a:lnTo>
-                  <a:lnTo>
-                    <a:pt x="1432450" y="2997083"/>
-                  </a:lnTo>
-                  <a:lnTo>
-                    <a:pt x="1504073" y="2988828"/>
-                  </a:lnTo>
-                  <a:lnTo>
-                    <a:pt x="1575695" y="2980469"/>
-                  </a:lnTo>
-                  <a:lnTo>
-                    <a:pt x="1647318" y="2972005"/>
-                  </a:lnTo>
-                  <a:lnTo>
-                    <a:pt x="1718940" y="2963434"/>
-                  </a:lnTo>
-                  <a:lnTo>
-                    <a:pt x="1790563" y="2954755"/>
-                  </a:lnTo>
-                  <a:lnTo>
-                    <a:pt x="1862185" y="2945967"/>
-                  </a:lnTo>
-                  <a:lnTo>
-                    <a:pt x="1933808" y="2937069"/>
-                  </a:lnTo>
-                  <a:lnTo>
-                    <a:pt x="2005430" y="2928058"/>
-                  </a:lnTo>
-                  <a:lnTo>
-                    <a:pt x="2077053" y="2918934"/>
-                  </a:lnTo>
-                  <a:lnTo>
-                    <a:pt x="2148675" y="2909695"/>
-                  </a:lnTo>
-                  <a:lnTo>
-                    <a:pt x="2220298" y="2900340"/>
-                  </a:lnTo>
-                  <a:lnTo>
-                    <a:pt x="2291920" y="2890866"/>
-                  </a:lnTo>
-                  <a:lnTo>
-                    <a:pt x="2363543" y="2881274"/>
-                  </a:lnTo>
-                  <a:lnTo>
-                    <a:pt x="2435165" y="2871561"/>
-                  </a:lnTo>
-                  <a:lnTo>
-                    <a:pt x="2506788" y="2861725"/>
-                  </a:lnTo>
-                  <a:lnTo>
-                    <a:pt x="2578410" y="2851766"/>
-                  </a:lnTo>
-                  <a:lnTo>
-                    <a:pt x="2650033" y="2841681"/>
-                  </a:lnTo>
-                  <a:lnTo>
-                    <a:pt x="2721655" y="2831469"/>
-                  </a:lnTo>
-                  <a:lnTo>
-                    <a:pt x="2793278" y="2821129"/>
-                  </a:lnTo>
-                  <a:lnTo>
-                    <a:pt x="2864901" y="2810658"/>
-                  </a:lnTo>
-                  <a:lnTo>
-                    <a:pt x="2936523" y="2800056"/>
-                  </a:lnTo>
-                  <a:lnTo>
-                    <a:pt x="3008146" y="2789320"/>
-                  </a:lnTo>
-                  <a:lnTo>
-                    <a:pt x="3079768" y="2755263"/>
-                  </a:lnTo>
-                  <a:lnTo>
-                    <a:pt x="3151391" y="2684659"/>
-                  </a:lnTo>
-                  <a:lnTo>
-                    <a:pt x="3223013" y="2608499"/>
-                  </a:lnTo>
-                  <a:lnTo>
-                    <a:pt x="3294636" y="2526348"/>
-                  </a:lnTo>
-                  <a:lnTo>
-                    <a:pt x="3366258" y="2437733"/>
-                  </a:lnTo>
-                  <a:lnTo>
-                    <a:pt x="3437881" y="2342146"/>
-                  </a:lnTo>
-                  <a:lnTo>
-                    <a:pt x="3509503" y="2239038"/>
-                  </a:lnTo>
-                  <a:lnTo>
-                    <a:pt x="3581126" y="2127818"/>
-                  </a:lnTo>
-                  <a:lnTo>
-                    <a:pt x="3652748" y="2007847"/>
-                  </a:lnTo>
-                  <a:lnTo>
-                    <a:pt x="3724371" y="1878438"/>
-                  </a:lnTo>
-                  <a:lnTo>
-                    <a:pt x="3795993" y="1738846"/>
-                  </a:lnTo>
-                  <a:lnTo>
-                    <a:pt x="3867616" y="1588272"/>
-                  </a:lnTo>
-                  <a:lnTo>
-                    <a:pt x="3939238" y="1425850"/>
-                  </a:lnTo>
-                  <a:lnTo>
-                    <a:pt x="4010861" y="1250650"/>
-                  </a:lnTo>
-                  <a:lnTo>
-                    <a:pt x="4082483" y="1061665"/>
-                  </a:lnTo>
-                  <a:lnTo>
-                    <a:pt x="4154106" y="857811"/>
-                  </a:lnTo>
-                  <a:lnTo>
-                    <a:pt x="4225729" y="637919"/>
-                  </a:lnTo>
-                  <a:lnTo>
-                    <a:pt x="4297351" y="400725"/>
-                  </a:lnTo>
-                  <a:lnTo>
-                    <a:pt x="4368974" y="144870"/>
-                  </a:lnTo>
-                  <a:lnTo>
-                    <a:pt x="4406570" y="0"/>
+                    <a:pt x="71622" y="3049094"/>
+                  </a:lnTo>
+                  <a:lnTo>
+                    <a:pt x="143245" y="3043769"/>
+                  </a:lnTo>
+                  <a:lnTo>
+                    <a:pt x="214867" y="3038397"/>
+                  </a:lnTo>
+                  <a:lnTo>
+                    <a:pt x="286490" y="3032977"/>
+                  </a:lnTo>
+                  <a:lnTo>
+                    <a:pt x="358112" y="3027510"/>
+                  </a:lnTo>
+                  <a:lnTo>
+                    <a:pt x="429735" y="3021995"/>
+                  </a:lnTo>
+                  <a:lnTo>
+                    <a:pt x="501357" y="3016431"/>
+                  </a:lnTo>
+                  <a:lnTo>
+                    <a:pt x="572980" y="3010818"/>
+                  </a:lnTo>
+                  <a:lnTo>
+                    <a:pt x="644602" y="3005155"/>
+                  </a:lnTo>
+                  <a:lnTo>
+                    <a:pt x="716225" y="2999442"/>
+                  </a:lnTo>
+                  <a:lnTo>
+                    <a:pt x="787847" y="2993679"/>
+                  </a:lnTo>
+                  <a:lnTo>
+                    <a:pt x="859470" y="2987865"/>
+                  </a:lnTo>
+                  <a:lnTo>
+                    <a:pt x="931092" y="2982000"/>
+                  </a:lnTo>
+                  <a:lnTo>
+                    <a:pt x="1002715" y="2976083"/>
+                  </a:lnTo>
+                  <a:lnTo>
+                    <a:pt x="1074337" y="2970114"/>
+                  </a:lnTo>
+                  <a:lnTo>
+                    <a:pt x="1145960" y="2964092"/>
+                  </a:lnTo>
+                  <a:lnTo>
+                    <a:pt x="1217582" y="2958018"/>
+                  </a:lnTo>
+                  <a:lnTo>
+                    <a:pt x="1289205" y="2951889"/>
+                  </a:lnTo>
+                  <a:lnTo>
+                    <a:pt x="1360827" y="2945706"/>
+                  </a:lnTo>
+                  <a:lnTo>
+                    <a:pt x="1432450" y="2939469"/>
+                  </a:lnTo>
+                  <a:lnTo>
+                    <a:pt x="1504073" y="2933177"/>
+                  </a:lnTo>
+                  <a:lnTo>
+                    <a:pt x="1575695" y="2926829"/>
+                  </a:lnTo>
+                  <a:lnTo>
+                    <a:pt x="1647318" y="2920426"/>
+                  </a:lnTo>
+                  <a:lnTo>
+                    <a:pt x="1718940" y="2913966"/>
+                  </a:lnTo>
+                  <a:lnTo>
+                    <a:pt x="1790563" y="2907448"/>
+                  </a:lnTo>
+                  <a:lnTo>
+                    <a:pt x="1862185" y="2900874"/>
+                  </a:lnTo>
+                  <a:lnTo>
+                    <a:pt x="1933808" y="2894241"/>
+                  </a:lnTo>
+                  <a:lnTo>
+                    <a:pt x="2005430" y="2887550"/>
+                  </a:lnTo>
+                  <a:lnTo>
+                    <a:pt x="2077053" y="2880800"/>
+                  </a:lnTo>
+                  <a:lnTo>
+                    <a:pt x="2148675" y="2873990"/>
+                  </a:lnTo>
+                  <a:lnTo>
+                    <a:pt x="2220298" y="2867120"/>
+                  </a:lnTo>
+                  <a:lnTo>
+                    <a:pt x="2291920" y="2860190"/>
+                  </a:lnTo>
+                  <a:lnTo>
+                    <a:pt x="2363543" y="2853198"/>
+                  </a:lnTo>
+                  <a:lnTo>
+                    <a:pt x="2435165" y="2846145"/>
+                  </a:lnTo>
+                  <a:lnTo>
+                    <a:pt x="2506788" y="2839029"/>
+                  </a:lnTo>
+                  <a:lnTo>
+                    <a:pt x="2578410" y="2831851"/>
+                  </a:lnTo>
+                  <a:lnTo>
+                    <a:pt x="2650033" y="2824609"/>
+                  </a:lnTo>
+                  <a:lnTo>
+                    <a:pt x="2721655" y="2817304"/>
+                  </a:lnTo>
+                  <a:lnTo>
+                    <a:pt x="2793278" y="2809934"/>
+                  </a:lnTo>
+                  <a:lnTo>
+                    <a:pt x="2864901" y="2802498"/>
+                  </a:lnTo>
+                  <a:lnTo>
+                    <a:pt x="2936523" y="2794998"/>
+                  </a:lnTo>
+                  <a:lnTo>
+                    <a:pt x="3008146" y="2787431"/>
+                  </a:lnTo>
+                  <a:lnTo>
+                    <a:pt x="3079768" y="2750148"/>
+                  </a:lnTo>
+                  <a:lnTo>
+                    <a:pt x="3151391" y="2665683"/>
+                  </a:lnTo>
+                  <a:lnTo>
+                    <a:pt x="3223013" y="2573314"/>
+                  </a:lnTo>
+                  <a:lnTo>
+                    <a:pt x="3294636" y="2472300"/>
+                  </a:lnTo>
+                  <a:lnTo>
+                    <a:pt x="3366258" y="2361832"/>
+                  </a:lnTo>
+                  <a:lnTo>
+                    <a:pt x="3437881" y="2241026"/>
+                  </a:lnTo>
+                  <a:lnTo>
+                    <a:pt x="3509503" y="2108913"/>
+                  </a:lnTo>
+                  <a:lnTo>
+                    <a:pt x="3581126" y="1964435"/>
+                  </a:lnTo>
+                  <a:lnTo>
+                    <a:pt x="3652748" y="1806437"/>
+                  </a:lnTo>
+                  <a:lnTo>
+                    <a:pt x="3724371" y="1633651"/>
+                  </a:lnTo>
+                  <a:lnTo>
+                    <a:pt x="3795993" y="1444694"/>
+                  </a:lnTo>
+                  <a:lnTo>
+                    <a:pt x="3867616" y="1238053"/>
+                  </a:lnTo>
+                  <a:lnTo>
+                    <a:pt x="3939238" y="1012072"/>
+                  </a:lnTo>
+                  <a:lnTo>
+                    <a:pt x="4010861" y="764942"/>
+                  </a:lnTo>
+                  <a:lnTo>
+                    <a:pt x="4082483" y="494683"/>
+                  </a:lnTo>
+                  <a:lnTo>
+                    <a:pt x="4154106" y="199130"/>
+                  </a:lnTo>
+                  <a:lnTo>
+                    <a:pt x="4198232" y="0"/>
                   </a:lnTo>
                 </a:path>
               </a:pathLst>
@@ -3868,312 +3850,312 @@
           </p:nvSpPr>
           <p:spPr>
             <a:xfrm>
-              <a:off x="1172049" y="3787456"/>
-              <a:ext cx="7090630" cy="1727186"/>
+              <a:off x="1172049" y="4121726"/>
+              <a:ext cx="7090630" cy="1408218"/>
             </a:xfrm>
             <a:custGeom>
               <a:avLst/>
               <a:pathLst>
-                <a:path w="7090630" h="1727186">
+                <a:path w="7090630" h="1408218">
                   <a:moveTo>
                     <a:pt x="7090630" y="0"/>
                   </a:moveTo>
                   <a:lnTo>
-                    <a:pt x="7019007" y="21908"/>
-                  </a:lnTo>
-                  <a:lnTo>
-                    <a:pt x="6947385" y="43544"/>
-                  </a:lnTo>
-                  <a:lnTo>
-                    <a:pt x="6875762" y="64911"/>
-                  </a:lnTo>
-                  <a:lnTo>
-                    <a:pt x="6804139" y="86012"/>
-                  </a:lnTo>
-                  <a:lnTo>
-                    <a:pt x="6732517" y="106851"/>
-                  </a:lnTo>
-                  <a:lnTo>
-                    <a:pt x="6660894" y="127431"/>
-                  </a:lnTo>
-                  <a:lnTo>
-                    <a:pt x="6589272" y="147754"/>
-                  </a:lnTo>
-                  <a:lnTo>
-                    <a:pt x="6517649" y="167825"/>
-                  </a:lnTo>
-                  <a:lnTo>
-                    <a:pt x="6446027" y="187647"/>
-                  </a:lnTo>
-                  <a:lnTo>
-                    <a:pt x="6374404" y="207222"/>
-                  </a:lnTo>
-                  <a:lnTo>
-                    <a:pt x="6302782" y="226553"/>
-                  </a:lnTo>
-                  <a:lnTo>
-                    <a:pt x="6231159" y="245644"/>
-                  </a:lnTo>
-                  <a:lnTo>
-                    <a:pt x="6159537" y="264498"/>
-                  </a:lnTo>
-                  <a:lnTo>
-                    <a:pt x="6087914" y="283117"/>
-                  </a:lnTo>
-                  <a:lnTo>
-                    <a:pt x="6016292" y="301505"/>
-                  </a:lnTo>
-                  <a:lnTo>
-                    <a:pt x="5944669" y="319664"/>
-                  </a:lnTo>
-                  <a:lnTo>
-                    <a:pt x="5873047" y="337597"/>
-                  </a:lnTo>
-                  <a:lnTo>
-                    <a:pt x="5801424" y="355307"/>
-                  </a:lnTo>
-                  <a:lnTo>
-                    <a:pt x="5729802" y="372797"/>
-                  </a:lnTo>
-                  <a:lnTo>
-                    <a:pt x="5658179" y="390070"/>
-                  </a:lnTo>
-                  <a:lnTo>
-                    <a:pt x="5586557" y="407127"/>
-                  </a:lnTo>
-                  <a:lnTo>
-                    <a:pt x="5514934" y="423973"/>
-                  </a:lnTo>
-                  <a:lnTo>
-                    <a:pt x="5443311" y="440609"/>
-                  </a:lnTo>
-                  <a:lnTo>
-                    <a:pt x="5371689" y="457038"/>
-                  </a:lnTo>
-                  <a:lnTo>
-                    <a:pt x="5300066" y="473263"/>
-                  </a:lnTo>
-                  <a:lnTo>
-                    <a:pt x="5228444" y="489286"/>
-                  </a:lnTo>
-                  <a:lnTo>
-                    <a:pt x="5156821" y="505110"/>
-                  </a:lnTo>
-                  <a:lnTo>
-                    <a:pt x="5085199" y="520737"/>
-                  </a:lnTo>
-                  <a:lnTo>
-                    <a:pt x="5013576" y="536170"/>
-                  </a:lnTo>
-                  <a:lnTo>
-                    <a:pt x="4941954" y="551411"/>
-                  </a:lnTo>
-                  <a:lnTo>
-                    <a:pt x="4870331" y="566462"/>
-                  </a:lnTo>
-                  <a:lnTo>
-                    <a:pt x="4798709" y="581326"/>
-                  </a:lnTo>
-                  <a:lnTo>
-                    <a:pt x="4727086" y="596006"/>
-                  </a:lnTo>
-                  <a:lnTo>
-                    <a:pt x="4655464" y="610502"/>
-                  </a:lnTo>
-                  <a:lnTo>
-                    <a:pt x="4583841" y="624819"/>
-                  </a:lnTo>
-                  <a:lnTo>
-                    <a:pt x="4512219" y="638957"/>
-                  </a:lnTo>
-                  <a:lnTo>
-                    <a:pt x="4440596" y="652920"/>
-                  </a:lnTo>
-                  <a:lnTo>
-                    <a:pt x="4368974" y="666709"/>
-                  </a:lnTo>
-                  <a:lnTo>
-                    <a:pt x="4297351" y="680326"/>
-                  </a:lnTo>
-                  <a:lnTo>
-                    <a:pt x="4225729" y="693774"/>
-                  </a:lnTo>
-                  <a:lnTo>
-                    <a:pt x="4154106" y="707055"/>
-                  </a:lnTo>
-                  <a:lnTo>
-                    <a:pt x="4082483" y="720171"/>
-                  </a:lnTo>
-                  <a:lnTo>
-                    <a:pt x="4010861" y="733124"/>
-                  </a:lnTo>
-                  <a:lnTo>
-                    <a:pt x="3939238" y="745915"/>
-                  </a:lnTo>
-                  <a:lnTo>
-                    <a:pt x="3867616" y="758548"/>
-                  </a:lnTo>
-                  <a:lnTo>
-                    <a:pt x="3795993" y="771023"/>
-                  </a:lnTo>
-                  <a:lnTo>
-                    <a:pt x="3724371" y="783344"/>
-                  </a:lnTo>
-                  <a:lnTo>
-                    <a:pt x="3652748" y="795511"/>
-                  </a:lnTo>
-                  <a:lnTo>
-                    <a:pt x="3581126" y="807526"/>
-                  </a:lnTo>
-                  <a:lnTo>
-                    <a:pt x="3509503" y="819393"/>
-                  </a:lnTo>
-                  <a:lnTo>
-                    <a:pt x="3437881" y="831112"/>
-                  </a:lnTo>
-                  <a:lnTo>
-                    <a:pt x="3366258" y="842685"/>
-                  </a:lnTo>
-                  <a:lnTo>
-                    <a:pt x="3294636" y="854114"/>
-                  </a:lnTo>
-                  <a:lnTo>
-                    <a:pt x="3223013" y="865401"/>
-                  </a:lnTo>
-                  <a:lnTo>
-                    <a:pt x="3151391" y="876547"/>
-                  </a:lnTo>
-                  <a:lnTo>
-                    <a:pt x="3079768" y="887555"/>
-                  </a:lnTo>
-                  <a:lnTo>
-                    <a:pt x="3008146" y="929824"/>
-                  </a:lnTo>
-                  <a:lnTo>
-                    <a:pt x="2936523" y="990505"/>
-                  </a:lnTo>
-                  <a:lnTo>
-                    <a:pt x="2864901" y="1046759"/>
-                  </a:lnTo>
-                  <a:lnTo>
-                    <a:pt x="2793278" y="1098910"/>
-                  </a:lnTo>
-                  <a:lnTo>
-                    <a:pt x="2721655" y="1147257"/>
-                  </a:lnTo>
-                  <a:lnTo>
-                    <a:pt x="2650033" y="1192078"/>
-                  </a:lnTo>
-                  <a:lnTo>
-                    <a:pt x="2578410" y="1233630"/>
-                  </a:lnTo>
-                  <a:lnTo>
-                    <a:pt x="2506788" y="1272151"/>
-                  </a:lnTo>
-                  <a:lnTo>
-                    <a:pt x="2435165" y="1307862"/>
-                  </a:lnTo>
-                  <a:lnTo>
-                    <a:pt x="2363543" y="1340968"/>
-                  </a:lnTo>
-                  <a:lnTo>
-                    <a:pt x="2291920" y="1371660"/>
-                  </a:lnTo>
-                  <a:lnTo>
-                    <a:pt x="2220298" y="1400113"/>
-                  </a:lnTo>
-                  <a:lnTo>
-                    <a:pt x="2148675" y="1426491"/>
-                  </a:lnTo>
-                  <a:lnTo>
-                    <a:pt x="2077053" y="1450944"/>
-                  </a:lnTo>
-                  <a:lnTo>
-                    <a:pt x="2005430" y="1473614"/>
-                  </a:lnTo>
-                  <a:lnTo>
-                    <a:pt x="1933808" y="1494631"/>
-                  </a:lnTo>
-                  <a:lnTo>
-                    <a:pt x="1862185" y="1514114"/>
-                  </a:lnTo>
-                  <a:lnTo>
-                    <a:pt x="1790563" y="1532177"/>
-                  </a:lnTo>
-                  <a:lnTo>
-                    <a:pt x="1718940" y="1548922"/>
-                  </a:lnTo>
-                  <a:lnTo>
-                    <a:pt x="1647318" y="1564445"/>
-                  </a:lnTo>
-                  <a:lnTo>
-                    <a:pt x="1575695" y="1578837"/>
-                  </a:lnTo>
-                  <a:lnTo>
-                    <a:pt x="1504073" y="1592178"/>
-                  </a:lnTo>
-                  <a:lnTo>
-                    <a:pt x="1432450" y="1604547"/>
-                  </a:lnTo>
-                  <a:lnTo>
-                    <a:pt x="1360827" y="1616013"/>
-                  </a:lnTo>
-                  <a:lnTo>
-                    <a:pt x="1289205" y="1626643"/>
-                  </a:lnTo>
-                  <a:lnTo>
-                    <a:pt x="1217582" y="1636498"/>
-                  </a:lnTo>
-                  <a:lnTo>
-                    <a:pt x="1145960" y="1645634"/>
-                  </a:lnTo>
-                  <a:lnTo>
-                    <a:pt x="1074337" y="1654103"/>
-                  </a:lnTo>
-                  <a:lnTo>
-                    <a:pt x="1002715" y="1661955"/>
-                  </a:lnTo>
-                  <a:lnTo>
-                    <a:pt x="931092" y="1669234"/>
-                  </a:lnTo>
-                  <a:lnTo>
-                    <a:pt x="859470" y="1675982"/>
-                  </a:lnTo>
-                  <a:lnTo>
-                    <a:pt x="787847" y="1682238"/>
-                  </a:lnTo>
-                  <a:lnTo>
-                    <a:pt x="716225" y="1688037"/>
-                  </a:lnTo>
-                  <a:lnTo>
-                    <a:pt x="644602" y="1693414"/>
-                  </a:lnTo>
-                  <a:lnTo>
-                    <a:pt x="572980" y="1698398"/>
-                  </a:lnTo>
-                  <a:lnTo>
-                    <a:pt x="501357" y="1703019"/>
-                  </a:lnTo>
-                  <a:lnTo>
-                    <a:pt x="429735" y="1707303"/>
-                  </a:lnTo>
-                  <a:lnTo>
-                    <a:pt x="358112" y="1711274"/>
-                  </a:lnTo>
-                  <a:lnTo>
-                    <a:pt x="286490" y="1714956"/>
-                  </a:lnTo>
-                  <a:lnTo>
-                    <a:pt x="214867" y="1718369"/>
-                  </a:lnTo>
-                  <a:lnTo>
-                    <a:pt x="143245" y="1721533"/>
-                  </a:lnTo>
-                  <a:lnTo>
-                    <a:pt x="71622" y="1724467"/>
-                  </a:lnTo>
-                  <a:lnTo>
-                    <a:pt x="0" y="1727186"/>
+                    <a:pt x="7019007" y="12484"/>
+                  </a:lnTo>
+                  <a:lnTo>
+                    <a:pt x="6947385" y="24859"/>
+                  </a:lnTo>
+                  <a:lnTo>
+                    <a:pt x="6875762" y="37125"/>
+                  </a:lnTo>
+                  <a:lnTo>
+                    <a:pt x="6804139" y="49285"/>
+                  </a:lnTo>
+                  <a:lnTo>
+                    <a:pt x="6732517" y="61338"/>
+                  </a:lnTo>
+                  <a:lnTo>
+                    <a:pt x="6660894" y="73286"/>
+                  </a:lnTo>
+                  <a:lnTo>
+                    <a:pt x="6589272" y="85129"/>
+                  </a:lnTo>
+                  <a:lnTo>
+                    <a:pt x="6517649" y="96869"/>
+                  </a:lnTo>
+                  <a:lnTo>
+                    <a:pt x="6446027" y="108506"/>
+                  </a:lnTo>
+                  <a:lnTo>
+                    <a:pt x="6374404" y="120041"/>
+                  </a:lnTo>
+                  <a:lnTo>
+                    <a:pt x="6302782" y="131475"/>
+                  </a:lnTo>
+                  <a:lnTo>
+                    <a:pt x="6231159" y="142810"/>
+                  </a:lnTo>
+                  <a:lnTo>
+                    <a:pt x="6159537" y="154045"/>
+                  </a:lnTo>
+                  <a:lnTo>
+                    <a:pt x="6087914" y="165182"/>
+                  </a:lnTo>
+                  <a:lnTo>
+                    <a:pt x="6016292" y="176221"/>
+                  </a:lnTo>
+                  <a:lnTo>
+                    <a:pt x="5944669" y="187164"/>
+                  </a:lnTo>
+                  <a:lnTo>
+                    <a:pt x="5873047" y="198012"/>
+                  </a:lnTo>
+                  <a:lnTo>
+                    <a:pt x="5801424" y="208764"/>
+                  </a:lnTo>
+                  <a:lnTo>
+                    <a:pt x="5729802" y="219422"/>
+                  </a:lnTo>
+                  <a:lnTo>
+                    <a:pt x="5658179" y="229988"/>
+                  </a:lnTo>
+                  <a:lnTo>
+                    <a:pt x="5586557" y="240460"/>
+                  </a:lnTo>
+                  <a:lnTo>
+                    <a:pt x="5514934" y="250842"/>
+                  </a:lnTo>
+                  <a:lnTo>
+                    <a:pt x="5443311" y="261132"/>
+                  </a:lnTo>
+                  <a:lnTo>
+                    <a:pt x="5371689" y="271332"/>
+                  </a:lnTo>
+                  <a:lnTo>
+                    <a:pt x="5300066" y="281444"/>
+                  </a:lnTo>
+                  <a:lnTo>
+                    <a:pt x="5228444" y="291466"/>
+                  </a:lnTo>
+                  <a:lnTo>
+                    <a:pt x="5156821" y="301402"/>
+                  </a:lnTo>
+                  <a:lnTo>
+                    <a:pt x="5085199" y="311250"/>
+                  </a:lnTo>
+                  <a:lnTo>
+                    <a:pt x="5013576" y="321012"/>
+                  </a:lnTo>
+                  <a:lnTo>
+                    <a:pt x="4941954" y="330689"/>
+                  </a:lnTo>
+                  <a:lnTo>
+                    <a:pt x="4870331" y="340281"/>
+                  </a:lnTo>
+                  <a:lnTo>
+                    <a:pt x="4798709" y="349789"/>
+                  </a:lnTo>
+                  <a:lnTo>
+                    <a:pt x="4727086" y="359214"/>
+                  </a:lnTo>
+                  <a:lnTo>
+                    <a:pt x="4655464" y="368557"/>
+                  </a:lnTo>
+                  <a:lnTo>
+                    <a:pt x="4583841" y="377817"/>
+                  </a:lnTo>
+                  <a:lnTo>
+                    <a:pt x="4512219" y="386997"/>
+                  </a:lnTo>
+                  <a:lnTo>
+                    <a:pt x="4440596" y="396097"/>
+                  </a:lnTo>
+                  <a:lnTo>
+                    <a:pt x="4368974" y="405117"/>
+                  </a:lnTo>
+                  <a:lnTo>
+                    <a:pt x="4297351" y="414058"/>
+                  </a:lnTo>
+                  <a:lnTo>
+                    <a:pt x="4225729" y="422921"/>
+                  </a:lnTo>
+                  <a:lnTo>
+                    <a:pt x="4154106" y="431707"/>
+                  </a:lnTo>
+                  <a:lnTo>
+                    <a:pt x="4082483" y="440415"/>
+                  </a:lnTo>
+                  <a:lnTo>
+                    <a:pt x="4010861" y="449048"/>
+                  </a:lnTo>
+                  <a:lnTo>
+                    <a:pt x="3939238" y="457605"/>
+                  </a:lnTo>
+                  <a:lnTo>
+                    <a:pt x="3867616" y="466087"/>
+                  </a:lnTo>
+                  <a:lnTo>
+                    <a:pt x="3795993" y="474495"/>
+                  </a:lnTo>
+                  <a:lnTo>
+                    <a:pt x="3724371" y="482829"/>
+                  </a:lnTo>
+                  <a:lnTo>
+                    <a:pt x="3652748" y="491091"/>
+                  </a:lnTo>
+                  <a:lnTo>
+                    <a:pt x="3581126" y="499280"/>
+                  </a:lnTo>
+                  <a:lnTo>
+                    <a:pt x="3509503" y="507398"/>
+                  </a:lnTo>
+                  <a:lnTo>
+                    <a:pt x="3437881" y="515445"/>
+                  </a:lnTo>
+                  <a:lnTo>
+                    <a:pt x="3366258" y="523421"/>
+                  </a:lnTo>
+                  <a:lnTo>
+                    <a:pt x="3294636" y="531327"/>
+                  </a:lnTo>
+                  <a:lnTo>
+                    <a:pt x="3223013" y="539165"/>
+                  </a:lnTo>
+                  <a:lnTo>
+                    <a:pt x="3151391" y="546934"/>
+                  </a:lnTo>
+                  <a:lnTo>
+                    <a:pt x="3079768" y="554634"/>
+                  </a:lnTo>
+                  <a:lnTo>
+                    <a:pt x="3008146" y="602220"/>
+                  </a:lnTo>
+                  <a:lnTo>
+                    <a:pt x="2936523" y="672846"/>
+                  </a:lnTo>
+                  <a:lnTo>
+                    <a:pt x="2864901" y="737428"/>
+                  </a:lnTo>
+                  <a:lnTo>
+                    <a:pt x="2793278" y="796483"/>
+                  </a:lnTo>
+                  <a:lnTo>
+                    <a:pt x="2721655" y="850484"/>
+                  </a:lnTo>
+                  <a:lnTo>
+                    <a:pt x="2650033" y="899863"/>
+                  </a:lnTo>
+                  <a:lnTo>
+                    <a:pt x="2578410" y="945017"/>
+                  </a:lnTo>
+                  <a:lnTo>
+                    <a:pt x="2506788" y="986306"/>
+                  </a:lnTo>
+                  <a:lnTo>
+                    <a:pt x="2435165" y="1024062"/>
+                  </a:lnTo>
+                  <a:lnTo>
+                    <a:pt x="2363543" y="1058587"/>
+                  </a:lnTo>
+                  <a:lnTo>
+                    <a:pt x="2291920" y="1090157"/>
+                  </a:lnTo>
+                  <a:lnTo>
+                    <a:pt x="2220298" y="1119025"/>
+                  </a:lnTo>
+                  <a:lnTo>
+                    <a:pt x="2148675" y="1145423"/>
+                  </a:lnTo>
+                  <a:lnTo>
+                    <a:pt x="2077053" y="1169561"/>
+                  </a:lnTo>
+                  <a:lnTo>
+                    <a:pt x="2005430" y="1191634"/>
+                  </a:lnTo>
+                  <a:lnTo>
+                    <a:pt x="1933808" y="1211818"/>
+                  </a:lnTo>
+                  <a:lnTo>
+                    <a:pt x="1862185" y="1230274"/>
+                  </a:lnTo>
+                  <a:lnTo>
+                    <a:pt x="1790563" y="1247151"/>
+                  </a:lnTo>
+                  <a:lnTo>
+                    <a:pt x="1718940" y="1262584"/>
+                  </a:lnTo>
+                  <a:lnTo>
+                    <a:pt x="1647318" y="1276696"/>
+                  </a:lnTo>
+                  <a:lnTo>
+                    <a:pt x="1575695" y="1289600"/>
+                  </a:lnTo>
+                  <a:lnTo>
+                    <a:pt x="1504073" y="1301400"/>
+                  </a:lnTo>
+                  <a:lnTo>
+                    <a:pt x="1432450" y="1312190"/>
+                  </a:lnTo>
+                  <a:lnTo>
+                    <a:pt x="1360827" y="1322056"/>
+                  </a:lnTo>
+                  <a:lnTo>
+                    <a:pt x="1289205" y="1331078"/>
+                  </a:lnTo>
+                  <a:lnTo>
+                    <a:pt x="1217582" y="1339329"/>
+                  </a:lnTo>
+                  <a:lnTo>
+                    <a:pt x="1145960" y="1346873"/>
+                  </a:lnTo>
+                  <a:lnTo>
+                    <a:pt x="1074337" y="1353771"/>
+                  </a:lnTo>
+                  <a:lnTo>
+                    <a:pt x="1002715" y="1360079"/>
+                  </a:lnTo>
+                  <a:lnTo>
+                    <a:pt x="931092" y="1365847"/>
+                  </a:lnTo>
+                  <a:lnTo>
+                    <a:pt x="859470" y="1371122"/>
+                  </a:lnTo>
+                  <a:lnTo>
+                    <a:pt x="787847" y="1375945"/>
+                  </a:lnTo>
+                  <a:lnTo>
+                    <a:pt x="716225" y="1380355"/>
+                  </a:lnTo>
+                  <a:lnTo>
+                    <a:pt x="644602" y="1384388"/>
+                  </a:lnTo>
+                  <a:lnTo>
+                    <a:pt x="572980" y="1388076"/>
+                  </a:lnTo>
+                  <a:lnTo>
+                    <a:pt x="501357" y="1391448"/>
+                  </a:lnTo>
+                  <a:lnTo>
+                    <a:pt x="429735" y="1394532"/>
+                  </a:lnTo>
+                  <a:lnTo>
+                    <a:pt x="358112" y="1397352"/>
+                  </a:lnTo>
+                  <a:lnTo>
+                    <a:pt x="286490" y="1399930"/>
+                  </a:lnTo>
+                  <a:lnTo>
+                    <a:pt x="214867" y="1402288"/>
+                  </a:lnTo>
+                  <a:lnTo>
+                    <a:pt x="143245" y="1404444"/>
+                  </a:lnTo>
+                  <a:lnTo>
+                    <a:pt x="71622" y="1406415"/>
+                  </a:lnTo>
+                  <a:lnTo>
+                    <a:pt x="0" y="1408218"/>
                   </a:lnTo>
                 </a:path>
               </a:pathLst>
@@ -4194,242 +4176,230 @@
           <p:spPr>
             <a:xfrm>
               <a:off x="1172049" y="1896563"/>
-              <a:ext cx="5379350" cy="3519821"/>
+              <a:ext cx="5142141" cy="3545293"/>
             </a:xfrm>
             <a:custGeom>
               <a:avLst/>
               <a:pathLst>
-                <a:path w="5379350" h="3519821">
+                <a:path w="5142141" h="3545293">
                   <a:moveTo>
-                    <a:pt x="0" y="3519821"/>
+                    <a:pt x="0" y="3545293"/>
                   </a:moveTo>
                   <a:lnTo>
-                    <a:pt x="71622" y="3513829"/>
-                  </a:lnTo>
-                  <a:lnTo>
-                    <a:pt x="143245" y="3507566"/>
-                  </a:lnTo>
-                  <a:lnTo>
-                    <a:pt x="214867" y="3501021"/>
-                  </a:lnTo>
-                  <a:lnTo>
-                    <a:pt x="286490" y="3494181"/>
-                  </a:lnTo>
-                  <a:lnTo>
-                    <a:pt x="358112" y="3487033"/>
-                  </a:lnTo>
-                  <a:lnTo>
-                    <a:pt x="429735" y="3479561"/>
-                  </a:lnTo>
-                  <a:lnTo>
-                    <a:pt x="501357" y="3471753"/>
-                  </a:lnTo>
-                  <a:lnTo>
-                    <a:pt x="572980" y="3463593"/>
-                  </a:lnTo>
-                  <a:lnTo>
-                    <a:pt x="644602" y="3455064"/>
-                  </a:lnTo>
-                  <a:lnTo>
-                    <a:pt x="716225" y="3446151"/>
-                  </a:lnTo>
-                  <a:lnTo>
-                    <a:pt x="787847" y="3436835"/>
-                  </a:lnTo>
-                  <a:lnTo>
-                    <a:pt x="859470" y="3427099"/>
-                  </a:lnTo>
-                  <a:lnTo>
-                    <a:pt x="931092" y="3416924"/>
-                  </a:lnTo>
-                  <a:lnTo>
-                    <a:pt x="1002715" y="3406290"/>
-                  </a:lnTo>
-                  <a:lnTo>
-                    <a:pt x="1074337" y="3395177"/>
-                  </a:lnTo>
-                  <a:lnTo>
-                    <a:pt x="1145960" y="3383562"/>
-                  </a:lnTo>
-                  <a:lnTo>
-                    <a:pt x="1217582" y="3371422"/>
-                  </a:lnTo>
-                  <a:lnTo>
-                    <a:pt x="1289205" y="3358736"/>
-                  </a:lnTo>
-                  <a:lnTo>
-                    <a:pt x="1360827" y="3345477"/>
-                  </a:lnTo>
-                  <a:lnTo>
-                    <a:pt x="1432450" y="3331619"/>
-                  </a:lnTo>
-                  <a:lnTo>
-                    <a:pt x="1504073" y="3317137"/>
-                  </a:lnTo>
-                  <a:lnTo>
-                    <a:pt x="1575695" y="3302001"/>
-                  </a:lnTo>
-                  <a:lnTo>
-                    <a:pt x="1647318" y="3286183"/>
-                  </a:lnTo>
-                  <a:lnTo>
-                    <a:pt x="1718940" y="3269651"/>
-                  </a:lnTo>
-                  <a:lnTo>
-                    <a:pt x="1790563" y="3252373"/>
-                  </a:lnTo>
-                  <a:lnTo>
-                    <a:pt x="1862185" y="3234315"/>
-                  </a:lnTo>
-                  <a:lnTo>
-                    <a:pt x="1933808" y="3215443"/>
-                  </a:lnTo>
-                  <a:lnTo>
-                    <a:pt x="2005430" y="3195720"/>
-                  </a:lnTo>
-                  <a:lnTo>
-                    <a:pt x="2077053" y="3175107"/>
-                  </a:lnTo>
-                  <a:lnTo>
-                    <a:pt x="2148675" y="3153564"/>
-                  </a:lnTo>
-                  <a:lnTo>
-                    <a:pt x="2220298" y="3131049"/>
-                  </a:lnTo>
-                  <a:lnTo>
-                    <a:pt x="2291920" y="3107518"/>
-                  </a:lnTo>
-                  <a:lnTo>
-                    <a:pt x="2363543" y="3082926"/>
-                  </a:lnTo>
-                  <a:lnTo>
-                    <a:pt x="2435165" y="3057224"/>
-                  </a:lnTo>
-                  <a:lnTo>
-                    <a:pt x="2506788" y="3030363"/>
-                  </a:lnTo>
-                  <a:lnTo>
-                    <a:pt x="2578410" y="3002290"/>
-                  </a:lnTo>
-                  <a:lnTo>
-                    <a:pt x="2650033" y="2972950"/>
-                  </a:lnTo>
-                  <a:lnTo>
-                    <a:pt x="2721655" y="2942287"/>
-                  </a:lnTo>
-                  <a:lnTo>
-                    <a:pt x="2793278" y="2910241"/>
-                  </a:lnTo>
-                  <a:lnTo>
-                    <a:pt x="2864901" y="2876749"/>
-                  </a:lnTo>
-                  <a:lnTo>
-                    <a:pt x="2936523" y="2841746"/>
-                  </a:lnTo>
-                  <a:lnTo>
-                    <a:pt x="3008146" y="2805164"/>
-                  </a:lnTo>
-                  <a:lnTo>
-                    <a:pt x="3079768" y="2766932"/>
-                  </a:lnTo>
-                  <a:lnTo>
-                    <a:pt x="3151391" y="2726975"/>
-                  </a:lnTo>
-                  <a:lnTo>
-                    <a:pt x="3223013" y="2685215"/>
-                  </a:lnTo>
-                  <a:lnTo>
-                    <a:pt x="3294636" y="2641571"/>
-                  </a:lnTo>
-                  <a:lnTo>
-                    <a:pt x="3366258" y="2595959"/>
-                  </a:lnTo>
-                  <a:lnTo>
-                    <a:pt x="3437881" y="2548289"/>
-                  </a:lnTo>
-                  <a:lnTo>
-                    <a:pt x="3509503" y="2498468"/>
-                  </a:lnTo>
-                  <a:lnTo>
-                    <a:pt x="3581126" y="2446399"/>
-                  </a:lnTo>
-                  <a:lnTo>
-                    <a:pt x="3652748" y="2391982"/>
-                  </a:lnTo>
-                  <a:lnTo>
-                    <a:pt x="3724371" y="2335110"/>
-                  </a:lnTo>
-                  <a:lnTo>
-                    <a:pt x="3795993" y="2275672"/>
-                  </a:lnTo>
-                  <a:lnTo>
-                    <a:pt x="3867616" y="2213553"/>
-                  </a:lnTo>
-                  <a:lnTo>
-                    <a:pt x="3939238" y="2148631"/>
-                  </a:lnTo>
-                  <a:lnTo>
-                    <a:pt x="4010861" y="2080780"/>
-                  </a:lnTo>
-                  <a:lnTo>
-                    <a:pt x="4082483" y="2009869"/>
-                  </a:lnTo>
-                  <a:lnTo>
-                    <a:pt x="4154106" y="1935758"/>
-                  </a:lnTo>
-                  <a:lnTo>
-                    <a:pt x="4225729" y="1858304"/>
-                  </a:lnTo>
-                  <a:lnTo>
-                    <a:pt x="4297351" y="1777356"/>
-                  </a:lnTo>
-                  <a:lnTo>
-                    <a:pt x="4368974" y="1692756"/>
-                  </a:lnTo>
-                  <a:lnTo>
-                    <a:pt x="4440596" y="1604340"/>
-                  </a:lnTo>
-                  <a:lnTo>
-                    <a:pt x="4512219" y="1511935"/>
-                  </a:lnTo>
-                  <a:lnTo>
-                    <a:pt x="4583841" y="1415361"/>
-                  </a:lnTo>
-                  <a:lnTo>
-                    <a:pt x="4655464" y="1314430"/>
-                  </a:lnTo>
-                  <a:lnTo>
-                    <a:pt x="4727086" y="1208946"/>
-                  </a:lnTo>
-                  <a:lnTo>
-                    <a:pt x="4798709" y="1098704"/>
-                  </a:lnTo>
-                  <a:lnTo>
-                    <a:pt x="4870331" y="983488"/>
-                  </a:lnTo>
-                  <a:lnTo>
-                    <a:pt x="4941954" y="863074"/>
-                  </a:lnTo>
-                  <a:lnTo>
-                    <a:pt x="5013576" y="737228"/>
-                  </a:lnTo>
-                  <a:lnTo>
-                    <a:pt x="5085199" y="605705"/>
-                  </a:lnTo>
-                  <a:lnTo>
-                    <a:pt x="5156821" y="468248"/>
-                  </a:lnTo>
-                  <a:lnTo>
-                    <a:pt x="5228444" y="324591"/>
-                  </a:lnTo>
-                  <a:lnTo>
-                    <a:pt x="5300066" y="174452"/>
-                  </a:lnTo>
-                  <a:lnTo>
-                    <a:pt x="5371689" y="17540"/>
-                  </a:lnTo>
-                  <a:lnTo>
-                    <a:pt x="5379350" y="0"/>
+                    <a:pt x="71622" y="3539888"/>
+                  </a:lnTo>
+                  <a:lnTo>
+                    <a:pt x="143245" y="3534211"/>
+                  </a:lnTo>
+                  <a:lnTo>
+                    <a:pt x="214867" y="3528247"/>
+                  </a:lnTo>
+                  <a:lnTo>
+                    <a:pt x="286490" y="3521984"/>
+                  </a:lnTo>
+                  <a:lnTo>
+                    <a:pt x="358112" y="3515405"/>
+                  </a:lnTo>
+                  <a:lnTo>
+                    <a:pt x="429735" y="3508495"/>
+                  </a:lnTo>
+                  <a:lnTo>
+                    <a:pt x="501357" y="3501237"/>
+                  </a:lnTo>
+                  <a:lnTo>
+                    <a:pt x="572980" y="3493613"/>
+                  </a:lnTo>
+                  <a:lnTo>
+                    <a:pt x="644602" y="3485606"/>
+                  </a:lnTo>
+                  <a:lnTo>
+                    <a:pt x="716225" y="3477195"/>
+                  </a:lnTo>
+                  <a:lnTo>
+                    <a:pt x="787847" y="3468361"/>
+                  </a:lnTo>
+                  <a:lnTo>
+                    <a:pt x="859470" y="3459082"/>
+                  </a:lnTo>
+                  <a:lnTo>
+                    <a:pt x="931092" y="3449336"/>
+                  </a:lnTo>
+                  <a:lnTo>
+                    <a:pt x="1002715" y="3439100"/>
+                  </a:lnTo>
+                  <a:lnTo>
+                    <a:pt x="1074337" y="3428347"/>
+                  </a:lnTo>
+                  <a:lnTo>
+                    <a:pt x="1145960" y="3417054"/>
+                  </a:lnTo>
+                  <a:lnTo>
+                    <a:pt x="1217582" y="3405191"/>
+                  </a:lnTo>
+                  <a:lnTo>
+                    <a:pt x="1289205" y="3392732"/>
+                  </a:lnTo>
+                  <a:lnTo>
+                    <a:pt x="1360827" y="3379645"/>
+                  </a:lnTo>
+                  <a:lnTo>
+                    <a:pt x="1432450" y="3365899"/>
+                  </a:lnTo>
+                  <a:lnTo>
+                    <a:pt x="1504073" y="3351461"/>
+                  </a:lnTo>
+                  <a:lnTo>
+                    <a:pt x="1575695" y="3336296"/>
+                  </a:lnTo>
+                  <a:lnTo>
+                    <a:pt x="1647318" y="3320368"/>
+                  </a:lnTo>
+                  <a:lnTo>
+                    <a:pt x="1718940" y="3303637"/>
+                  </a:lnTo>
+                  <a:lnTo>
+                    <a:pt x="1790563" y="3286064"/>
+                  </a:lnTo>
+                  <a:lnTo>
+                    <a:pt x="1862185" y="3267606"/>
+                  </a:lnTo>
+                  <a:lnTo>
+                    <a:pt x="1933808" y="3248219"/>
+                  </a:lnTo>
+                  <a:lnTo>
+                    <a:pt x="2005430" y="3227856"/>
+                  </a:lnTo>
+                  <a:lnTo>
+                    <a:pt x="2077053" y="3206467"/>
+                  </a:lnTo>
+                  <a:lnTo>
+                    <a:pt x="2148675" y="3184001"/>
+                  </a:lnTo>
+                  <a:lnTo>
+                    <a:pt x="2220298" y="3160405"/>
+                  </a:lnTo>
+                  <a:lnTo>
+                    <a:pt x="2291920" y="3135620"/>
+                  </a:lnTo>
+                  <a:lnTo>
+                    <a:pt x="2363543" y="3109587"/>
+                  </a:lnTo>
+                  <a:lnTo>
+                    <a:pt x="2435165" y="3082243"/>
+                  </a:lnTo>
+                  <a:lnTo>
+                    <a:pt x="2506788" y="3053523"/>
+                  </a:lnTo>
+                  <a:lnTo>
+                    <a:pt x="2578410" y="3023356"/>
+                  </a:lnTo>
+                  <a:lnTo>
+                    <a:pt x="2650033" y="2991671"/>
+                  </a:lnTo>
+                  <a:lnTo>
+                    <a:pt x="2721655" y="2958390"/>
+                  </a:lnTo>
+                  <a:lnTo>
+                    <a:pt x="2793278" y="2923433"/>
+                  </a:lnTo>
+                  <a:lnTo>
+                    <a:pt x="2864901" y="2886716"/>
+                  </a:lnTo>
+                  <a:lnTo>
+                    <a:pt x="2936523" y="2848151"/>
+                  </a:lnTo>
+                  <a:lnTo>
+                    <a:pt x="3008146" y="2807643"/>
+                  </a:lnTo>
+                  <a:lnTo>
+                    <a:pt x="3079768" y="2765096"/>
+                  </a:lnTo>
+                  <a:lnTo>
+                    <a:pt x="3151391" y="2720407"/>
+                  </a:lnTo>
+                  <a:lnTo>
+                    <a:pt x="3223013" y="2673468"/>
+                  </a:lnTo>
+                  <a:lnTo>
+                    <a:pt x="3294636" y="2624165"/>
+                  </a:lnTo>
+                  <a:lnTo>
+                    <a:pt x="3366258" y="2572379"/>
+                  </a:lnTo>
+                  <a:lnTo>
+                    <a:pt x="3437881" y="2517987"/>
+                  </a:lnTo>
+                  <a:lnTo>
+                    <a:pt x="3509503" y="2460855"/>
+                  </a:lnTo>
+                  <a:lnTo>
+                    <a:pt x="3581126" y="2400847"/>
+                  </a:lnTo>
+                  <a:lnTo>
+                    <a:pt x="3652748" y="2337817"/>
+                  </a:lnTo>
+                  <a:lnTo>
+                    <a:pt x="3724371" y="2271614"/>
+                  </a:lnTo>
+                  <a:lnTo>
+                    <a:pt x="3795993" y="2202077"/>
+                  </a:lnTo>
+                  <a:lnTo>
+                    <a:pt x="3867616" y="2129039"/>
+                  </a:lnTo>
+                  <a:lnTo>
+                    <a:pt x="3939238" y="2052323"/>
+                  </a:lnTo>
+                  <a:lnTo>
+                    <a:pt x="4010861" y="1971744"/>
+                  </a:lnTo>
+                  <a:lnTo>
+                    <a:pt x="4082483" y="1887109"/>
+                  </a:lnTo>
+                  <a:lnTo>
+                    <a:pt x="4154106" y="1798212"/>
+                  </a:lnTo>
+                  <a:lnTo>
+                    <a:pt x="4225729" y="1704838"/>
+                  </a:lnTo>
+                  <a:lnTo>
+                    <a:pt x="4297351" y="1606764"/>
+                  </a:lnTo>
+                  <a:lnTo>
+                    <a:pt x="4368974" y="1503751"/>
+                  </a:lnTo>
+                  <a:lnTo>
+                    <a:pt x="4440596" y="1395551"/>
+                  </a:lnTo>
+                  <a:lnTo>
+                    <a:pt x="4512219" y="1281903"/>
+                  </a:lnTo>
+                  <a:lnTo>
+                    <a:pt x="4583841" y="1162533"/>
+                  </a:lnTo>
+                  <a:lnTo>
+                    <a:pt x="4655464" y="1037152"/>
+                  </a:lnTo>
+                  <a:lnTo>
+                    <a:pt x="4727086" y="905458"/>
+                  </a:lnTo>
+                  <a:lnTo>
+                    <a:pt x="4798709" y="767134"/>
+                  </a:lnTo>
+                  <a:lnTo>
+                    <a:pt x="4870331" y="621844"/>
+                  </a:lnTo>
+                  <a:lnTo>
+                    <a:pt x="4941954" y="469239"/>
+                  </a:lnTo>
+                  <a:lnTo>
+                    <a:pt x="5013576" y="308950"/>
+                  </a:lnTo>
+                  <a:lnTo>
+                    <a:pt x="5085199" y="140590"/>
+                  </a:lnTo>
+                  <a:lnTo>
+                    <a:pt x="5142141" y="0"/>
                   </a:lnTo>
                 </a:path>
               </a:pathLst>

--- a/docs/plots/carbo/jx_carbo_linsubhr_dosedisc_throm3.pptx
+++ b/docs/plots/carbo/jx_carbo_linsubhr_dosedisc_throm3.pptx
@@ -3151,10 +3151,10 @@
                     <a:pt x="214867" y="3038397"/>
                   </a:lnTo>
                   <a:lnTo>
-                    <a:pt x="286490" y="3032977"/>
-                  </a:lnTo>
-                  <a:lnTo>
-                    <a:pt x="358112" y="3027510"/>
+                    <a:pt x="286490" y="3032978"/>
+                  </a:lnTo>
+                  <a:lnTo>
+                    <a:pt x="358112" y="3027511"/>
                   </a:lnTo>
                   <a:lnTo>
                     <a:pt x="429735" y="3021995"/>
@@ -3169,25 +3169,25 @@
                     <a:pt x="644602" y="3005155"/>
                   </a:lnTo>
                   <a:lnTo>
-                    <a:pt x="716225" y="2999442"/>
-                  </a:lnTo>
-                  <a:lnTo>
-                    <a:pt x="787847" y="2993679"/>
-                  </a:lnTo>
-                  <a:lnTo>
-                    <a:pt x="859470" y="2987865"/>
-                  </a:lnTo>
-                  <a:lnTo>
-                    <a:pt x="931092" y="2982000"/>
-                  </a:lnTo>
-                  <a:lnTo>
-                    <a:pt x="1002715" y="2976083"/>
+                    <a:pt x="716225" y="2999443"/>
+                  </a:lnTo>
+                  <a:lnTo>
+                    <a:pt x="787847" y="2993680"/>
+                  </a:lnTo>
+                  <a:lnTo>
+                    <a:pt x="859470" y="2987866"/>
+                  </a:lnTo>
+                  <a:lnTo>
+                    <a:pt x="931092" y="2982001"/>
+                  </a:lnTo>
+                  <a:lnTo>
+                    <a:pt x="1002715" y="2976084"/>
                   </a:lnTo>
                   <a:lnTo>
                     <a:pt x="1074337" y="2970114"/>
                   </a:lnTo>
                   <a:lnTo>
-                    <a:pt x="1145960" y="2964092"/>
+                    <a:pt x="1145960" y="2964093"/>
                   </a:lnTo>
                   <a:lnTo>
                     <a:pt x="1217582" y="2958018"/>
@@ -3196,16 +3196,16 @@
                     <a:pt x="1289205" y="2951889"/>
                   </a:lnTo>
                   <a:lnTo>
-                    <a:pt x="1360827" y="2945706"/>
-                  </a:lnTo>
-                  <a:lnTo>
-                    <a:pt x="1432450" y="2939469"/>
+                    <a:pt x="1360827" y="2945707"/>
+                  </a:lnTo>
+                  <a:lnTo>
+                    <a:pt x="1432450" y="2939470"/>
                   </a:lnTo>
                   <a:lnTo>
                     <a:pt x="1504073" y="2933177"/>
                   </a:lnTo>
                   <a:lnTo>
-                    <a:pt x="1575695" y="2926829"/>
+                    <a:pt x="1575695" y="2926830"/>
                   </a:lnTo>
                   <a:lnTo>
                     <a:pt x="1647318" y="2920426"/>
@@ -3214,7 +3214,7 @@
                     <a:pt x="1718940" y="2913966"/>
                   </a:lnTo>
                   <a:lnTo>
-                    <a:pt x="1790563" y="2907448"/>
+                    <a:pt x="1790563" y="2907449"/>
                   </a:lnTo>
                   <a:lnTo>
                     <a:pt x="1862185" y="2900874"/>
@@ -3259,7 +3259,7 @@
                     <a:pt x="2793278" y="2809934"/>
                   </a:lnTo>
                   <a:lnTo>
-                    <a:pt x="2864901" y="2802498"/>
+                    <a:pt x="2864901" y="2802499"/>
                   </a:lnTo>
                   <a:lnTo>
                     <a:pt x="2936523" y="2794998"/>
@@ -3283,37 +3283,37 @@
                     <a:pt x="3366258" y="2361832"/>
                   </a:lnTo>
                   <a:lnTo>
-                    <a:pt x="3437881" y="2241026"/>
-                  </a:lnTo>
-                  <a:lnTo>
-                    <a:pt x="3509503" y="2108913"/>
+                    <a:pt x="3437881" y="2241025"/>
+                  </a:lnTo>
+                  <a:lnTo>
+                    <a:pt x="3509503" y="2108912"/>
                   </a:lnTo>
                   <a:lnTo>
                     <a:pt x="3581126" y="1964435"/>
                   </a:lnTo>
                   <a:lnTo>
-                    <a:pt x="3652748" y="1806437"/>
-                  </a:lnTo>
-                  <a:lnTo>
-                    <a:pt x="3724371" y="1633651"/>
-                  </a:lnTo>
-                  <a:lnTo>
-                    <a:pt x="3795993" y="1444694"/>
-                  </a:lnTo>
-                  <a:lnTo>
-                    <a:pt x="3867616" y="1238053"/>
-                  </a:lnTo>
-                  <a:lnTo>
-                    <a:pt x="3939238" y="1012072"/>
-                  </a:lnTo>
-                  <a:lnTo>
-                    <a:pt x="4010861" y="764942"/>
-                  </a:lnTo>
-                  <a:lnTo>
-                    <a:pt x="4082483" y="494683"/>
-                  </a:lnTo>
-                  <a:lnTo>
-                    <a:pt x="4154106" y="199130"/>
+                    <a:pt x="3652748" y="1806436"/>
+                  </a:lnTo>
+                  <a:lnTo>
+                    <a:pt x="3724371" y="1633650"/>
+                  </a:lnTo>
+                  <a:lnTo>
+                    <a:pt x="3795993" y="1444693"/>
+                  </a:lnTo>
+                  <a:lnTo>
+                    <a:pt x="3867616" y="1238051"/>
+                  </a:lnTo>
+                  <a:lnTo>
+                    <a:pt x="3939238" y="1012070"/>
+                  </a:lnTo>
+                  <a:lnTo>
+                    <a:pt x="4010861" y="764940"/>
+                  </a:lnTo>
+                  <a:lnTo>
+                    <a:pt x="4082483" y="494680"/>
+                  </a:lnTo>
+                  <a:lnTo>
+                    <a:pt x="4154106" y="199128"/>
                   </a:lnTo>
                   <a:lnTo>
                     <a:pt x="4198232" y="0"/>
@@ -3322,49 +3322,49 @@
                     <a:pt x="7090630" y="0"/>
                   </a:lnTo>
                   <a:lnTo>
-                    <a:pt x="7090630" y="2225163"/>
-                  </a:lnTo>
-                  <a:lnTo>
-                    <a:pt x="7019007" y="2237647"/>
-                  </a:lnTo>
-                  <a:lnTo>
-                    <a:pt x="6947385" y="2250022"/>
-                  </a:lnTo>
-                  <a:lnTo>
-                    <a:pt x="6875762" y="2262288"/>
-                  </a:lnTo>
-                  <a:lnTo>
-                    <a:pt x="6804139" y="2274448"/>
-                  </a:lnTo>
-                  <a:lnTo>
-                    <a:pt x="6732517" y="2286501"/>
-                  </a:lnTo>
-                  <a:lnTo>
-                    <a:pt x="6660894" y="2298449"/>
-                  </a:lnTo>
-                  <a:lnTo>
-                    <a:pt x="6589272" y="2310292"/>
-                  </a:lnTo>
-                  <a:lnTo>
-                    <a:pt x="6517649" y="2322032"/>
-                  </a:lnTo>
-                  <a:lnTo>
-                    <a:pt x="6446027" y="2333669"/>
-                  </a:lnTo>
-                  <a:lnTo>
-                    <a:pt x="6374404" y="2345204"/>
-                  </a:lnTo>
-                  <a:lnTo>
-                    <a:pt x="6302782" y="2356638"/>
-                  </a:lnTo>
-                  <a:lnTo>
-                    <a:pt x="6231159" y="2367973"/>
-                  </a:lnTo>
-                  <a:lnTo>
-                    <a:pt x="6159537" y="2379208"/>
-                  </a:lnTo>
-                  <a:lnTo>
-                    <a:pt x="6087914" y="2390345"/>
+                    <a:pt x="7090630" y="2225161"/>
+                  </a:lnTo>
+                  <a:lnTo>
+                    <a:pt x="7019007" y="2237646"/>
+                  </a:lnTo>
+                  <a:lnTo>
+                    <a:pt x="6947385" y="2250021"/>
+                  </a:lnTo>
+                  <a:lnTo>
+                    <a:pt x="6875762" y="2262287"/>
+                  </a:lnTo>
+                  <a:lnTo>
+                    <a:pt x="6804139" y="2274447"/>
+                  </a:lnTo>
+                  <a:lnTo>
+                    <a:pt x="6732517" y="2286500"/>
+                  </a:lnTo>
+                  <a:lnTo>
+                    <a:pt x="6660894" y="2298448"/>
+                  </a:lnTo>
+                  <a:lnTo>
+                    <a:pt x="6589272" y="2310291"/>
+                  </a:lnTo>
+                  <a:lnTo>
+                    <a:pt x="6517649" y="2322031"/>
+                  </a:lnTo>
+                  <a:lnTo>
+                    <a:pt x="6446027" y="2333668"/>
+                  </a:lnTo>
+                  <a:lnTo>
+                    <a:pt x="6374404" y="2345203"/>
+                  </a:lnTo>
+                  <a:lnTo>
+                    <a:pt x="6302782" y="2356637"/>
+                  </a:lnTo>
+                  <a:lnTo>
+                    <a:pt x="6231159" y="2367972"/>
+                  </a:lnTo>
+                  <a:lnTo>
+                    <a:pt x="6159537" y="2379207"/>
+                  </a:lnTo>
+                  <a:lnTo>
+                    <a:pt x="6087914" y="2390344"/>
                   </a:lnTo>
                   <a:lnTo>
                     <a:pt x="6016292" y="2401384"/>
@@ -3373,22 +3373,22 @@
                     <a:pt x="5944669" y="2412327"/>
                   </a:lnTo>
                   <a:lnTo>
-                    <a:pt x="5873047" y="2423175"/>
-                  </a:lnTo>
-                  <a:lnTo>
-                    <a:pt x="5801424" y="2433927"/>
+                    <a:pt x="5873047" y="2423174"/>
+                  </a:lnTo>
+                  <a:lnTo>
+                    <a:pt x="5801424" y="2433926"/>
                   </a:lnTo>
                   <a:lnTo>
                     <a:pt x="5729802" y="2444585"/>
                   </a:lnTo>
                   <a:lnTo>
-                    <a:pt x="5658179" y="2455151"/>
+                    <a:pt x="5658179" y="2455150"/>
                   </a:lnTo>
                   <a:lnTo>
                     <a:pt x="5586557" y="2465623"/>
                   </a:lnTo>
                   <a:lnTo>
-                    <a:pt x="5514934" y="2476005"/>
+                    <a:pt x="5514934" y="2476004"/>
                   </a:lnTo>
                   <a:lnTo>
                     <a:pt x="5443311" y="2486295"/>
@@ -3397,25 +3397,25 @@
                     <a:pt x="5371689" y="2496495"/>
                   </a:lnTo>
                   <a:lnTo>
-                    <a:pt x="5300066" y="2506607"/>
+                    <a:pt x="5300066" y="2506606"/>
                   </a:lnTo>
                   <a:lnTo>
                     <a:pt x="5228444" y="2516629"/>
                   </a:lnTo>
                   <a:lnTo>
-                    <a:pt x="5156821" y="2526565"/>
-                  </a:lnTo>
-                  <a:lnTo>
-                    <a:pt x="5085199" y="2536413"/>
-                  </a:lnTo>
-                  <a:lnTo>
-                    <a:pt x="5013576" y="2546175"/>
-                  </a:lnTo>
-                  <a:lnTo>
-                    <a:pt x="4941954" y="2555852"/>
-                  </a:lnTo>
-                  <a:lnTo>
-                    <a:pt x="4870331" y="2565444"/>
+                    <a:pt x="5156821" y="2526564"/>
+                  </a:lnTo>
+                  <a:lnTo>
+                    <a:pt x="5085199" y="2536412"/>
+                  </a:lnTo>
+                  <a:lnTo>
+                    <a:pt x="5013576" y="2546174"/>
+                  </a:lnTo>
+                  <a:lnTo>
+                    <a:pt x="4941954" y="2555851"/>
+                  </a:lnTo>
+                  <a:lnTo>
+                    <a:pt x="4870331" y="2565443"/>
                   </a:lnTo>
                   <a:lnTo>
                     <a:pt x="4798709" y="2574952"/>
@@ -3424,10 +3424,10 @@
                     <a:pt x="4727086" y="2584377"/>
                   </a:lnTo>
                   <a:lnTo>
-                    <a:pt x="4655464" y="2593720"/>
-                  </a:lnTo>
-                  <a:lnTo>
-                    <a:pt x="4583841" y="2602981"/>
+                    <a:pt x="4655464" y="2593719"/>
+                  </a:lnTo>
+                  <a:lnTo>
+                    <a:pt x="4583841" y="2602980"/>
                   </a:lnTo>
                   <a:lnTo>
                     <a:pt x="4512219" y="2612160"/>
@@ -3475,7 +3475,7 @@
                     <a:pt x="3509503" y="2732561"/>
                   </a:lnTo>
                   <a:lnTo>
-                    <a:pt x="3437881" y="2740608"/>
+                    <a:pt x="3437881" y="2740607"/>
                   </a:lnTo>
                   <a:lnTo>
                     <a:pt x="3366258" y="2748584"/>
@@ -3508,7 +3508,7 @@
                     <a:pt x="2721655" y="3075647"/>
                   </a:lnTo>
                   <a:lnTo>
-                    <a:pt x="2650033" y="3125026"/>
+                    <a:pt x="2650033" y="3125027"/>
                   </a:lnTo>
                   <a:lnTo>
                     <a:pt x="2578410" y="3170180"/>
@@ -3589,7 +3589,7 @@
                     <a:pt x="787847" y="3601108"/>
                   </a:lnTo>
                   <a:lnTo>
-                    <a:pt x="716225" y="3605518"/>
+                    <a:pt x="716225" y="3605519"/>
                   </a:lnTo>
                   <a:lnTo>
                     <a:pt x="644602" y="3609551"/>
@@ -3598,7 +3598,7 @@
                     <a:pt x="572980" y="3613239"/>
                   </a:lnTo>
                   <a:lnTo>
-                    <a:pt x="501357" y="3616611"/>
+                    <a:pt x="501357" y="3616612"/>
                   </a:lnTo>
                   <a:lnTo>
                     <a:pt x="429735" y="3619695"/>
@@ -3665,10 +3665,10 @@
                     <a:pt x="214867" y="3038397"/>
                   </a:lnTo>
                   <a:lnTo>
-                    <a:pt x="286490" y="3032977"/>
-                  </a:lnTo>
-                  <a:lnTo>
-                    <a:pt x="358112" y="3027510"/>
+                    <a:pt x="286490" y="3032978"/>
+                  </a:lnTo>
+                  <a:lnTo>
+                    <a:pt x="358112" y="3027511"/>
                   </a:lnTo>
                   <a:lnTo>
                     <a:pt x="429735" y="3021995"/>
@@ -3683,25 +3683,25 @@
                     <a:pt x="644602" y="3005155"/>
                   </a:lnTo>
                   <a:lnTo>
-                    <a:pt x="716225" y="2999442"/>
-                  </a:lnTo>
-                  <a:lnTo>
-                    <a:pt x="787847" y="2993679"/>
-                  </a:lnTo>
-                  <a:lnTo>
-                    <a:pt x="859470" y="2987865"/>
-                  </a:lnTo>
-                  <a:lnTo>
-                    <a:pt x="931092" y="2982000"/>
-                  </a:lnTo>
-                  <a:lnTo>
-                    <a:pt x="1002715" y="2976083"/>
+                    <a:pt x="716225" y="2999443"/>
+                  </a:lnTo>
+                  <a:lnTo>
+                    <a:pt x="787847" y="2993680"/>
+                  </a:lnTo>
+                  <a:lnTo>
+                    <a:pt x="859470" y="2987866"/>
+                  </a:lnTo>
+                  <a:lnTo>
+                    <a:pt x="931092" y="2982001"/>
+                  </a:lnTo>
+                  <a:lnTo>
+                    <a:pt x="1002715" y="2976084"/>
                   </a:lnTo>
                   <a:lnTo>
                     <a:pt x="1074337" y="2970114"/>
                   </a:lnTo>
                   <a:lnTo>
-                    <a:pt x="1145960" y="2964092"/>
+                    <a:pt x="1145960" y="2964093"/>
                   </a:lnTo>
                   <a:lnTo>
                     <a:pt x="1217582" y="2958018"/>
@@ -3710,16 +3710,16 @@
                     <a:pt x="1289205" y="2951889"/>
                   </a:lnTo>
                   <a:lnTo>
-                    <a:pt x="1360827" y="2945706"/>
-                  </a:lnTo>
-                  <a:lnTo>
-                    <a:pt x="1432450" y="2939469"/>
+                    <a:pt x="1360827" y="2945707"/>
+                  </a:lnTo>
+                  <a:lnTo>
+                    <a:pt x="1432450" y="2939470"/>
                   </a:lnTo>
                   <a:lnTo>
                     <a:pt x="1504073" y="2933177"/>
                   </a:lnTo>
                   <a:lnTo>
-                    <a:pt x="1575695" y="2926829"/>
+                    <a:pt x="1575695" y="2926830"/>
                   </a:lnTo>
                   <a:lnTo>
                     <a:pt x="1647318" y="2920426"/>
@@ -3728,7 +3728,7 @@
                     <a:pt x="1718940" y="2913966"/>
                   </a:lnTo>
                   <a:lnTo>
-                    <a:pt x="1790563" y="2907448"/>
+                    <a:pt x="1790563" y="2907449"/>
                   </a:lnTo>
                   <a:lnTo>
                     <a:pt x="1862185" y="2900874"/>
@@ -3773,7 +3773,7 @@
                     <a:pt x="2793278" y="2809934"/>
                   </a:lnTo>
                   <a:lnTo>
-                    <a:pt x="2864901" y="2802498"/>
+                    <a:pt x="2864901" y="2802499"/>
                   </a:lnTo>
                   <a:lnTo>
                     <a:pt x="2936523" y="2794998"/>
@@ -3797,37 +3797,37 @@
                     <a:pt x="3366258" y="2361832"/>
                   </a:lnTo>
                   <a:lnTo>
-                    <a:pt x="3437881" y="2241026"/>
-                  </a:lnTo>
-                  <a:lnTo>
-                    <a:pt x="3509503" y="2108913"/>
+                    <a:pt x="3437881" y="2241025"/>
+                  </a:lnTo>
+                  <a:lnTo>
+                    <a:pt x="3509503" y="2108912"/>
                   </a:lnTo>
                   <a:lnTo>
                     <a:pt x="3581126" y="1964435"/>
                   </a:lnTo>
                   <a:lnTo>
-                    <a:pt x="3652748" y="1806437"/>
-                  </a:lnTo>
-                  <a:lnTo>
-                    <a:pt x="3724371" y="1633651"/>
-                  </a:lnTo>
-                  <a:lnTo>
-                    <a:pt x="3795993" y="1444694"/>
-                  </a:lnTo>
-                  <a:lnTo>
-                    <a:pt x="3867616" y="1238053"/>
-                  </a:lnTo>
-                  <a:lnTo>
-                    <a:pt x="3939238" y="1012072"/>
-                  </a:lnTo>
-                  <a:lnTo>
-                    <a:pt x="4010861" y="764942"/>
-                  </a:lnTo>
-                  <a:lnTo>
-                    <a:pt x="4082483" y="494683"/>
-                  </a:lnTo>
-                  <a:lnTo>
-                    <a:pt x="4154106" y="199130"/>
+                    <a:pt x="3652748" y="1806436"/>
+                  </a:lnTo>
+                  <a:lnTo>
+                    <a:pt x="3724371" y="1633650"/>
+                  </a:lnTo>
+                  <a:lnTo>
+                    <a:pt x="3795993" y="1444693"/>
+                  </a:lnTo>
+                  <a:lnTo>
+                    <a:pt x="3867616" y="1238051"/>
+                  </a:lnTo>
+                  <a:lnTo>
+                    <a:pt x="3939238" y="1012070"/>
+                  </a:lnTo>
+                  <a:lnTo>
+                    <a:pt x="4010861" y="764940"/>
+                  </a:lnTo>
+                  <a:lnTo>
+                    <a:pt x="4082483" y="494680"/>
+                  </a:lnTo>
+                  <a:lnTo>
+                    <a:pt x="4154106" y="199128"/>
                   </a:lnTo>
                   <a:lnTo>
                     <a:pt x="4198232" y="0"/>
@@ -3850,13 +3850,13 @@
           </p:nvSpPr>
           <p:spPr>
             <a:xfrm>
-              <a:off x="1172049" y="4121726"/>
-              <a:ext cx="7090630" cy="1408218"/>
+              <a:off x="1172049" y="4121725"/>
+              <a:ext cx="7090630" cy="1408219"/>
             </a:xfrm>
             <a:custGeom>
               <a:avLst/>
               <a:pathLst>
-                <a:path w="7090630" h="1408218">
+                <a:path w="7090630" h="1408219">
                   <a:moveTo>
                     <a:pt x="7090630" y="0"/>
                   </a:moveTo>
@@ -3867,7 +3867,7 @@
                     <a:pt x="6947385" y="24859"/>
                   </a:lnTo>
                   <a:lnTo>
-                    <a:pt x="6875762" y="37125"/>
+                    <a:pt x="6875762" y="37126"/>
                   </a:lnTo>
                   <a:lnTo>
                     <a:pt x="6804139" y="49285"/>
@@ -3891,7 +3891,7 @@
                     <a:pt x="6374404" y="120041"/>
                   </a:lnTo>
                   <a:lnTo>
-                    <a:pt x="6302782" y="131475"/>
+                    <a:pt x="6302782" y="131476"/>
                   </a:lnTo>
                   <a:lnTo>
                     <a:pt x="6231159" y="142810"/>
@@ -3903,10 +3903,10 @@
                     <a:pt x="6087914" y="165182"/>
                   </a:lnTo>
                   <a:lnTo>
-                    <a:pt x="6016292" y="176221"/>
-                  </a:lnTo>
-                  <a:lnTo>
-                    <a:pt x="5944669" y="187164"/>
+                    <a:pt x="6016292" y="176222"/>
+                  </a:lnTo>
+                  <a:lnTo>
+                    <a:pt x="5944669" y="187165"/>
                   </a:lnTo>
                   <a:lnTo>
                     <a:pt x="5873047" y="198012"/>
@@ -3915,28 +3915,28 @@
                     <a:pt x="5801424" y="208764"/>
                   </a:lnTo>
                   <a:lnTo>
-                    <a:pt x="5729802" y="219422"/>
+                    <a:pt x="5729802" y="219423"/>
                   </a:lnTo>
                   <a:lnTo>
                     <a:pt x="5658179" y="229988"/>
                   </a:lnTo>
                   <a:lnTo>
-                    <a:pt x="5586557" y="240460"/>
+                    <a:pt x="5586557" y="240461"/>
                   </a:lnTo>
                   <a:lnTo>
                     <a:pt x="5514934" y="250842"/>
                   </a:lnTo>
                   <a:lnTo>
-                    <a:pt x="5443311" y="261132"/>
-                  </a:lnTo>
-                  <a:lnTo>
-                    <a:pt x="5371689" y="271332"/>
+                    <a:pt x="5443311" y="261133"/>
+                  </a:lnTo>
+                  <a:lnTo>
+                    <a:pt x="5371689" y="271333"/>
                   </a:lnTo>
                   <a:lnTo>
                     <a:pt x="5300066" y="281444"/>
                   </a:lnTo>
                   <a:lnTo>
-                    <a:pt x="5228444" y="291466"/>
+                    <a:pt x="5228444" y="291467"/>
                   </a:lnTo>
                   <a:lnTo>
                     <a:pt x="5156821" y="301402"/>
@@ -3954,208 +3954,208 @@
                     <a:pt x="4870331" y="340281"/>
                   </a:lnTo>
                   <a:lnTo>
-                    <a:pt x="4798709" y="349789"/>
-                  </a:lnTo>
-                  <a:lnTo>
-                    <a:pt x="4727086" y="359214"/>
+                    <a:pt x="4798709" y="349790"/>
+                  </a:lnTo>
+                  <a:lnTo>
+                    <a:pt x="4727086" y="359215"/>
                   </a:lnTo>
                   <a:lnTo>
                     <a:pt x="4655464" y="368557"/>
                   </a:lnTo>
                   <a:lnTo>
-                    <a:pt x="4583841" y="377817"/>
-                  </a:lnTo>
-                  <a:lnTo>
-                    <a:pt x="4512219" y="386997"/>
-                  </a:lnTo>
-                  <a:lnTo>
-                    <a:pt x="4440596" y="396097"/>
-                  </a:lnTo>
-                  <a:lnTo>
-                    <a:pt x="4368974" y="405117"/>
-                  </a:lnTo>
-                  <a:lnTo>
-                    <a:pt x="4297351" y="414058"/>
-                  </a:lnTo>
-                  <a:lnTo>
-                    <a:pt x="4225729" y="422921"/>
-                  </a:lnTo>
-                  <a:lnTo>
-                    <a:pt x="4154106" y="431707"/>
-                  </a:lnTo>
-                  <a:lnTo>
-                    <a:pt x="4082483" y="440415"/>
-                  </a:lnTo>
-                  <a:lnTo>
-                    <a:pt x="4010861" y="449048"/>
-                  </a:lnTo>
-                  <a:lnTo>
-                    <a:pt x="3939238" y="457605"/>
-                  </a:lnTo>
-                  <a:lnTo>
-                    <a:pt x="3867616" y="466087"/>
-                  </a:lnTo>
-                  <a:lnTo>
-                    <a:pt x="3795993" y="474495"/>
-                  </a:lnTo>
-                  <a:lnTo>
-                    <a:pt x="3724371" y="482829"/>
-                  </a:lnTo>
-                  <a:lnTo>
-                    <a:pt x="3652748" y="491091"/>
-                  </a:lnTo>
-                  <a:lnTo>
-                    <a:pt x="3581126" y="499280"/>
-                  </a:lnTo>
-                  <a:lnTo>
-                    <a:pt x="3509503" y="507398"/>
+                    <a:pt x="4583841" y="377818"/>
+                  </a:lnTo>
+                  <a:lnTo>
+                    <a:pt x="4512219" y="386998"/>
+                  </a:lnTo>
+                  <a:lnTo>
+                    <a:pt x="4440596" y="396098"/>
+                  </a:lnTo>
+                  <a:lnTo>
+                    <a:pt x="4368974" y="405118"/>
+                  </a:lnTo>
+                  <a:lnTo>
+                    <a:pt x="4297351" y="414059"/>
+                  </a:lnTo>
+                  <a:lnTo>
+                    <a:pt x="4225729" y="422922"/>
+                  </a:lnTo>
+                  <a:lnTo>
+                    <a:pt x="4154106" y="431708"/>
+                  </a:lnTo>
+                  <a:lnTo>
+                    <a:pt x="4082483" y="440416"/>
+                  </a:lnTo>
+                  <a:lnTo>
+                    <a:pt x="4010861" y="449049"/>
+                  </a:lnTo>
+                  <a:lnTo>
+                    <a:pt x="3939238" y="457606"/>
+                  </a:lnTo>
+                  <a:lnTo>
+                    <a:pt x="3867616" y="466088"/>
+                  </a:lnTo>
+                  <a:lnTo>
+                    <a:pt x="3795993" y="474496"/>
+                  </a:lnTo>
+                  <a:lnTo>
+                    <a:pt x="3724371" y="482830"/>
+                  </a:lnTo>
+                  <a:lnTo>
+                    <a:pt x="3652748" y="491092"/>
+                  </a:lnTo>
+                  <a:lnTo>
+                    <a:pt x="3581126" y="499281"/>
+                  </a:lnTo>
+                  <a:lnTo>
+                    <a:pt x="3509503" y="507399"/>
                   </a:lnTo>
                   <a:lnTo>
                     <a:pt x="3437881" y="515445"/>
                   </a:lnTo>
                   <a:lnTo>
-                    <a:pt x="3366258" y="523421"/>
-                  </a:lnTo>
-                  <a:lnTo>
-                    <a:pt x="3294636" y="531327"/>
-                  </a:lnTo>
-                  <a:lnTo>
-                    <a:pt x="3223013" y="539165"/>
-                  </a:lnTo>
-                  <a:lnTo>
-                    <a:pt x="3151391" y="546934"/>
-                  </a:lnTo>
-                  <a:lnTo>
-                    <a:pt x="3079768" y="554634"/>
-                  </a:lnTo>
-                  <a:lnTo>
-                    <a:pt x="3008146" y="602220"/>
-                  </a:lnTo>
-                  <a:lnTo>
-                    <a:pt x="2936523" y="672846"/>
-                  </a:lnTo>
-                  <a:lnTo>
-                    <a:pt x="2864901" y="737428"/>
-                  </a:lnTo>
-                  <a:lnTo>
-                    <a:pt x="2793278" y="796483"/>
-                  </a:lnTo>
-                  <a:lnTo>
-                    <a:pt x="2721655" y="850484"/>
-                  </a:lnTo>
-                  <a:lnTo>
-                    <a:pt x="2650033" y="899863"/>
-                  </a:lnTo>
-                  <a:lnTo>
-                    <a:pt x="2578410" y="945017"/>
-                  </a:lnTo>
-                  <a:lnTo>
-                    <a:pt x="2506788" y="986306"/>
-                  </a:lnTo>
-                  <a:lnTo>
-                    <a:pt x="2435165" y="1024062"/>
-                  </a:lnTo>
-                  <a:lnTo>
-                    <a:pt x="2363543" y="1058587"/>
-                  </a:lnTo>
-                  <a:lnTo>
-                    <a:pt x="2291920" y="1090157"/>
-                  </a:lnTo>
-                  <a:lnTo>
-                    <a:pt x="2220298" y="1119025"/>
-                  </a:lnTo>
-                  <a:lnTo>
-                    <a:pt x="2148675" y="1145423"/>
-                  </a:lnTo>
-                  <a:lnTo>
-                    <a:pt x="2077053" y="1169561"/>
-                  </a:lnTo>
-                  <a:lnTo>
-                    <a:pt x="2005430" y="1191634"/>
-                  </a:lnTo>
-                  <a:lnTo>
-                    <a:pt x="1933808" y="1211818"/>
-                  </a:lnTo>
-                  <a:lnTo>
-                    <a:pt x="1862185" y="1230274"/>
-                  </a:lnTo>
-                  <a:lnTo>
-                    <a:pt x="1790563" y="1247151"/>
-                  </a:lnTo>
-                  <a:lnTo>
-                    <a:pt x="1718940" y="1262584"/>
-                  </a:lnTo>
-                  <a:lnTo>
-                    <a:pt x="1647318" y="1276696"/>
-                  </a:lnTo>
-                  <a:lnTo>
-                    <a:pt x="1575695" y="1289600"/>
-                  </a:lnTo>
-                  <a:lnTo>
-                    <a:pt x="1504073" y="1301400"/>
-                  </a:lnTo>
-                  <a:lnTo>
-                    <a:pt x="1432450" y="1312190"/>
-                  </a:lnTo>
-                  <a:lnTo>
-                    <a:pt x="1360827" y="1322056"/>
-                  </a:lnTo>
-                  <a:lnTo>
-                    <a:pt x="1289205" y="1331078"/>
-                  </a:lnTo>
-                  <a:lnTo>
-                    <a:pt x="1217582" y="1339329"/>
-                  </a:lnTo>
-                  <a:lnTo>
-                    <a:pt x="1145960" y="1346873"/>
-                  </a:lnTo>
-                  <a:lnTo>
-                    <a:pt x="1074337" y="1353771"/>
-                  </a:lnTo>
-                  <a:lnTo>
-                    <a:pt x="1002715" y="1360079"/>
-                  </a:lnTo>
-                  <a:lnTo>
-                    <a:pt x="931092" y="1365847"/>
-                  </a:lnTo>
-                  <a:lnTo>
-                    <a:pt x="859470" y="1371122"/>
-                  </a:lnTo>
-                  <a:lnTo>
-                    <a:pt x="787847" y="1375945"/>
-                  </a:lnTo>
-                  <a:lnTo>
-                    <a:pt x="716225" y="1380355"/>
-                  </a:lnTo>
-                  <a:lnTo>
-                    <a:pt x="644602" y="1384388"/>
-                  </a:lnTo>
-                  <a:lnTo>
-                    <a:pt x="572980" y="1388076"/>
-                  </a:lnTo>
-                  <a:lnTo>
-                    <a:pt x="501357" y="1391448"/>
-                  </a:lnTo>
-                  <a:lnTo>
-                    <a:pt x="429735" y="1394532"/>
-                  </a:lnTo>
-                  <a:lnTo>
-                    <a:pt x="358112" y="1397352"/>
-                  </a:lnTo>
-                  <a:lnTo>
-                    <a:pt x="286490" y="1399930"/>
-                  </a:lnTo>
-                  <a:lnTo>
-                    <a:pt x="214867" y="1402288"/>
-                  </a:lnTo>
-                  <a:lnTo>
-                    <a:pt x="143245" y="1404444"/>
-                  </a:lnTo>
-                  <a:lnTo>
-                    <a:pt x="71622" y="1406415"/>
-                  </a:lnTo>
-                  <a:lnTo>
-                    <a:pt x="0" y="1408218"/>
+                    <a:pt x="3366258" y="523422"/>
+                  </a:lnTo>
+                  <a:lnTo>
+                    <a:pt x="3294636" y="531328"/>
+                  </a:lnTo>
+                  <a:lnTo>
+                    <a:pt x="3223013" y="539166"/>
+                  </a:lnTo>
+                  <a:lnTo>
+                    <a:pt x="3151391" y="546935"/>
+                  </a:lnTo>
+                  <a:lnTo>
+                    <a:pt x="3079768" y="554636"/>
+                  </a:lnTo>
+                  <a:lnTo>
+                    <a:pt x="3008146" y="602221"/>
+                  </a:lnTo>
+                  <a:lnTo>
+                    <a:pt x="2936523" y="672847"/>
+                  </a:lnTo>
+                  <a:lnTo>
+                    <a:pt x="2864901" y="737429"/>
+                  </a:lnTo>
+                  <a:lnTo>
+                    <a:pt x="2793278" y="796484"/>
+                  </a:lnTo>
+                  <a:lnTo>
+                    <a:pt x="2721655" y="850485"/>
+                  </a:lnTo>
+                  <a:lnTo>
+                    <a:pt x="2650033" y="899865"/>
+                  </a:lnTo>
+                  <a:lnTo>
+                    <a:pt x="2578410" y="945018"/>
+                  </a:lnTo>
+                  <a:lnTo>
+                    <a:pt x="2506788" y="986307"/>
+                  </a:lnTo>
+                  <a:lnTo>
+                    <a:pt x="2435165" y="1024063"/>
+                  </a:lnTo>
+                  <a:lnTo>
+                    <a:pt x="2363543" y="1058588"/>
+                  </a:lnTo>
+                  <a:lnTo>
+                    <a:pt x="2291920" y="1090158"/>
+                  </a:lnTo>
+                  <a:lnTo>
+                    <a:pt x="2220298" y="1119026"/>
+                  </a:lnTo>
+                  <a:lnTo>
+                    <a:pt x="2148675" y="1145424"/>
+                  </a:lnTo>
+                  <a:lnTo>
+                    <a:pt x="2077053" y="1169562"/>
+                  </a:lnTo>
+                  <a:lnTo>
+                    <a:pt x="2005430" y="1191635"/>
+                  </a:lnTo>
+                  <a:lnTo>
+                    <a:pt x="1933808" y="1211819"/>
+                  </a:lnTo>
+                  <a:lnTo>
+                    <a:pt x="1862185" y="1230275"/>
+                  </a:lnTo>
+                  <a:lnTo>
+                    <a:pt x="1790563" y="1247152"/>
+                  </a:lnTo>
+                  <a:lnTo>
+                    <a:pt x="1718940" y="1262585"/>
+                  </a:lnTo>
+                  <a:lnTo>
+                    <a:pt x="1647318" y="1276697"/>
+                  </a:lnTo>
+                  <a:lnTo>
+                    <a:pt x="1575695" y="1289601"/>
+                  </a:lnTo>
+                  <a:lnTo>
+                    <a:pt x="1504073" y="1301401"/>
+                  </a:lnTo>
+                  <a:lnTo>
+                    <a:pt x="1432450" y="1312191"/>
+                  </a:lnTo>
+                  <a:lnTo>
+                    <a:pt x="1360827" y="1322057"/>
+                  </a:lnTo>
+                  <a:lnTo>
+                    <a:pt x="1289205" y="1331080"/>
+                  </a:lnTo>
+                  <a:lnTo>
+                    <a:pt x="1217582" y="1339330"/>
+                  </a:lnTo>
+                  <a:lnTo>
+                    <a:pt x="1145960" y="1346874"/>
+                  </a:lnTo>
+                  <a:lnTo>
+                    <a:pt x="1074337" y="1353772"/>
+                  </a:lnTo>
+                  <a:lnTo>
+                    <a:pt x="1002715" y="1360080"/>
+                  </a:lnTo>
+                  <a:lnTo>
+                    <a:pt x="931092" y="1365848"/>
+                  </a:lnTo>
+                  <a:lnTo>
+                    <a:pt x="859470" y="1371123"/>
+                  </a:lnTo>
+                  <a:lnTo>
+                    <a:pt x="787847" y="1375946"/>
+                  </a:lnTo>
+                  <a:lnTo>
+                    <a:pt x="716225" y="1380357"/>
+                  </a:lnTo>
+                  <a:lnTo>
+                    <a:pt x="644602" y="1384389"/>
+                  </a:lnTo>
+                  <a:lnTo>
+                    <a:pt x="572980" y="1388077"/>
+                  </a:lnTo>
+                  <a:lnTo>
+                    <a:pt x="501357" y="1391450"/>
+                  </a:lnTo>
+                  <a:lnTo>
+                    <a:pt x="429735" y="1394533"/>
+                  </a:lnTo>
+                  <a:lnTo>
+                    <a:pt x="358112" y="1397353"/>
+                  </a:lnTo>
+                  <a:lnTo>
+                    <a:pt x="286490" y="1399931"/>
+                  </a:lnTo>
+                  <a:lnTo>
+                    <a:pt x="214867" y="1402289"/>
+                  </a:lnTo>
+                  <a:lnTo>
+                    <a:pt x="143245" y="1404445"/>
+                  </a:lnTo>
+                  <a:lnTo>
+                    <a:pt x="71622" y="1406416"/>
+                  </a:lnTo>
+                  <a:lnTo>
+                    <a:pt x="0" y="1408219"/>
                   </a:lnTo>
                 </a:path>
               </a:pathLst>
@@ -4176,12 +4176,12 @@
           <p:spPr>
             <a:xfrm>
               <a:off x="1172049" y="1896563"/>
-              <a:ext cx="5142141" cy="3545293"/>
+              <a:ext cx="5142139" cy="3545293"/>
             </a:xfrm>
             <a:custGeom>
               <a:avLst/>
               <a:pathLst>
-                <a:path w="5142141" h="3545293">
+                <a:path w="5142139" h="3545293">
                   <a:moveTo>
                     <a:pt x="0" y="3545293"/>
                   </a:moveTo>
@@ -4192,7 +4192,7 @@
                     <a:pt x="143245" y="3534211"/>
                   </a:lnTo>
                   <a:lnTo>
-                    <a:pt x="214867" y="3528247"/>
+                    <a:pt x="214867" y="3528248"/>
                   </a:lnTo>
                   <a:lnTo>
                     <a:pt x="286490" y="3521984"/>
@@ -4213,16 +4213,16 @@
                     <a:pt x="644602" y="3485606"/>
                   </a:lnTo>
                   <a:lnTo>
-                    <a:pt x="716225" y="3477195"/>
+                    <a:pt x="716225" y="3477196"/>
                   </a:lnTo>
                   <a:lnTo>
                     <a:pt x="787847" y="3468361"/>
                   </a:lnTo>
                   <a:lnTo>
-                    <a:pt x="859470" y="3459082"/>
-                  </a:lnTo>
-                  <a:lnTo>
-                    <a:pt x="931092" y="3449336"/>
+                    <a:pt x="859470" y="3459083"/>
+                  </a:lnTo>
+                  <a:lnTo>
+                    <a:pt x="931092" y="3449337"/>
                   </a:lnTo>
                   <a:lnTo>
                     <a:pt x="1002715" y="3439100"/>
@@ -4234,7 +4234,7 @@
                     <a:pt x="1145960" y="3417054"/>
                   </a:lnTo>
                   <a:lnTo>
-                    <a:pt x="1217582" y="3405191"/>
+                    <a:pt x="1217582" y="3405192"/>
                   </a:lnTo>
                   <a:lnTo>
                     <a:pt x="1289205" y="3392732"/>
@@ -4273,7 +4273,7 @@
                     <a:pt x="2077053" y="3206467"/>
                   </a:lnTo>
                   <a:lnTo>
-                    <a:pt x="2148675" y="3184001"/>
+                    <a:pt x="2148675" y="3184002"/>
                   </a:lnTo>
                   <a:lnTo>
                     <a:pt x="2220298" y="3160405"/>
@@ -4327,79 +4327,79 @@
                     <a:pt x="3366258" y="2572379"/>
                   </a:lnTo>
                   <a:lnTo>
-                    <a:pt x="3437881" y="2517987"/>
+                    <a:pt x="3437881" y="2517986"/>
                   </a:lnTo>
                   <a:lnTo>
                     <a:pt x="3509503" y="2460855"/>
                   </a:lnTo>
                   <a:lnTo>
-                    <a:pt x="3581126" y="2400847"/>
+                    <a:pt x="3581126" y="2400846"/>
                   </a:lnTo>
                   <a:lnTo>
                     <a:pt x="3652748" y="2337817"/>
                   </a:lnTo>
                   <a:lnTo>
-                    <a:pt x="3724371" y="2271614"/>
-                  </a:lnTo>
-                  <a:lnTo>
-                    <a:pt x="3795993" y="2202077"/>
-                  </a:lnTo>
-                  <a:lnTo>
-                    <a:pt x="3867616" y="2129039"/>
-                  </a:lnTo>
-                  <a:lnTo>
-                    <a:pt x="3939238" y="2052323"/>
+                    <a:pt x="3724371" y="2271613"/>
+                  </a:lnTo>
+                  <a:lnTo>
+                    <a:pt x="3795993" y="2202076"/>
+                  </a:lnTo>
+                  <a:lnTo>
+                    <a:pt x="3867616" y="2129038"/>
+                  </a:lnTo>
+                  <a:lnTo>
+                    <a:pt x="3939238" y="2052322"/>
                   </a:lnTo>
                   <a:lnTo>
                     <a:pt x="4010861" y="1971744"/>
                   </a:lnTo>
                   <a:lnTo>
-                    <a:pt x="4082483" y="1887109"/>
-                  </a:lnTo>
-                  <a:lnTo>
-                    <a:pt x="4154106" y="1798212"/>
-                  </a:lnTo>
-                  <a:lnTo>
-                    <a:pt x="4225729" y="1704838"/>
-                  </a:lnTo>
-                  <a:lnTo>
-                    <a:pt x="4297351" y="1606764"/>
-                  </a:lnTo>
-                  <a:lnTo>
-                    <a:pt x="4368974" y="1503751"/>
-                  </a:lnTo>
-                  <a:lnTo>
-                    <a:pt x="4440596" y="1395551"/>
-                  </a:lnTo>
-                  <a:lnTo>
-                    <a:pt x="4512219" y="1281903"/>
-                  </a:lnTo>
-                  <a:lnTo>
-                    <a:pt x="4583841" y="1162533"/>
-                  </a:lnTo>
-                  <a:lnTo>
-                    <a:pt x="4655464" y="1037152"/>
-                  </a:lnTo>
-                  <a:lnTo>
-                    <a:pt x="4727086" y="905458"/>
-                  </a:lnTo>
-                  <a:lnTo>
-                    <a:pt x="4798709" y="767134"/>
-                  </a:lnTo>
-                  <a:lnTo>
-                    <a:pt x="4870331" y="621844"/>
-                  </a:lnTo>
-                  <a:lnTo>
-                    <a:pt x="4941954" y="469239"/>
-                  </a:lnTo>
-                  <a:lnTo>
-                    <a:pt x="5013576" y="308950"/>
-                  </a:lnTo>
-                  <a:lnTo>
-                    <a:pt x="5085199" y="140590"/>
-                  </a:lnTo>
-                  <a:lnTo>
-                    <a:pt x="5142141" y="0"/>
+                    <a:pt x="4082483" y="1887108"/>
+                  </a:lnTo>
+                  <a:lnTo>
+                    <a:pt x="4154106" y="1798211"/>
+                  </a:lnTo>
+                  <a:lnTo>
+                    <a:pt x="4225729" y="1704837"/>
+                  </a:lnTo>
+                  <a:lnTo>
+                    <a:pt x="4297351" y="1606762"/>
+                  </a:lnTo>
+                  <a:lnTo>
+                    <a:pt x="4368974" y="1503749"/>
+                  </a:lnTo>
+                  <a:lnTo>
+                    <a:pt x="4440596" y="1395549"/>
+                  </a:lnTo>
+                  <a:lnTo>
+                    <a:pt x="4512219" y="1281901"/>
+                  </a:lnTo>
+                  <a:lnTo>
+                    <a:pt x="4583841" y="1162531"/>
+                  </a:lnTo>
+                  <a:lnTo>
+                    <a:pt x="4655464" y="1037150"/>
+                  </a:lnTo>
+                  <a:lnTo>
+                    <a:pt x="4727086" y="905456"/>
+                  </a:lnTo>
+                  <a:lnTo>
+                    <a:pt x="4798709" y="767131"/>
+                  </a:lnTo>
+                  <a:lnTo>
+                    <a:pt x="4870331" y="621841"/>
+                  </a:lnTo>
+                  <a:lnTo>
+                    <a:pt x="4941954" y="469236"/>
+                  </a:lnTo>
+                  <a:lnTo>
+                    <a:pt x="5013576" y="308947"/>
+                  </a:lnTo>
+                  <a:lnTo>
+                    <a:pt x="5085199" y="140587"/>
+                  </a:lnTo>
+                  <a:lnTo>
+                    <a:pt x="5142139" y="0"/>
                   </a:lnTo>
                 </a:path>
               </a:pathLst>

--- a/docs/plots/carbo/jx_carbo_linsubhr_dosedisc_throm3.pptx
+++ b/docs/plots/carbo/jx_carbo_linsubhr_dosedisc_throm3.pptx
@@ -2271,7 +2271,7 @@
           </p:nvSpPr>
           <p:spPr>
             <a:xfrm>
-              <a:off x="817517" y="5114368"/>
+              <a:off x="817517" y="5142518"/>
               <a:ext cx="7799693" cy="0"/>
             </a:xfrm>
             <a:custGeom>
@@ -2314,7 +2314,7 @@
           </p:nvSpPr>
           <p:spPr>
             <a:xfrm>
-              <a:off x="817517" y="4244691"/>
+              <a:off x="817517" y="4313054"/>
               <a:ext cx="7799693" cy="0"/>
             </a:xfrm>
             <a:custGeom>
@@ -2357,7 +2357,7 @@
           </p:nvSpPr>
           <p:spPr>
             <a:xfrm>
-              <a:off x="817517" y="3375014"/>
+              <a:off x="817517" y="3483591"/>
               <a:ext cx="7799693" cy="0"/>
             </a:xfrm>
             <a:custGeom>
@@ -2400,7 +2400,7 @@
           </p:nvSpPr>
           <p:spPr>
             <a:xfrm>
-              <a:off x="817517" y="2505337"/>
+              <a:off x="817517" y="2654127"/>
               <a:ext cx="7799693" cy="0"/>
             </a:xfrm>
             <a:custGeom>
@@ -2443,15 +2443,15 @@
           </p:nvSpPr>
           <p:spPr>
             <a:xfrm>
-              <a:off x="2122745" y="1896563"/>
-              <a:ext cx="0" cy="3826579"/>
+              <a:off x="2122745" y="2073503"/>
+              <a:ext cx="0" cy="3649639"/>
             </a:xfrm>
             <a:custGeom>
               <a:avLst/>
               <a:pathLst>
-                <a:path w="0" h="3826579">
+                <a:path w="0" h="3649639">
                   <a:moveTo>
-                    <a:pt x="0" y="3826579"/>
+                    <a:pt x="0" y="3649639"/>
                   </a:moveTo>
                   <a:lnTo>
                     <a:pt x="0" y="0"/>
@@ -2486,15 +2486,15 @@
           </p:nvSpPr>
           <p:spPr>
             <a:xfrm>
-              <a:off x="3487174" y="1896563"/>
-              <a:ext cx="0" cy="3826579"/>
+              <a:off x="3487174" y="2073503"/>
+              <a:ext cx="0" cy="3649639"/>
             </a:xfrm>
             <a:custGeom>
               <a:avLst/>
               <a:pathLst>
-                <a:path w="0" h="3826579">
+                <a:path w="0" h="3649639">
                   <a:moveTo>
-                    <a:pt x="0" y="3826579"/>
+                    <a:pt x="0" y="3649639"/>
                   </a:moveTo>
                   <a:lnTo>
                     <a:pt x="0" y="0"/>
@@ -2529,15 +2529,15 @@
           </p:nvSpPr>
           <p:spPr>
             <a:xfrm>
-              <a:off x="4851604" y="1896563"/>
-              <a:ext cx="0" cy="3826579"/>
+              <a:off x="4851604" y="2073503"/>
+              <a:ext cx="0" cy="3649639"/>
             </a:xfrm>
             <a:custGeom>
               <a:avLst/>
               <a:pathLst>
-                <a:path w="0" h="3826579">
+                <a:path w="0" h="3649639">
                   <a:moveTo>
-                    <a:pt x="0" y="3826579"/>
+                    <a:pt x="0" y="3649639"/>
                   </a:moveTo>
                   <a:lnTo>
                     <a:pt x="0" y="0"/>
@@ -2572,15 +2572,15 @@
           </p:nvSpPr>
           <p:spPr>
             <a:xfrm>
-              <a:off x="6216034" y="1896563"/>
-              <a:ext cx="0" cy="3826579"/>
+              <a:off x="6216034" y="2073503"/>
+              <a:ext cx="0" cy="3649639"/>
             </a:xfrm>
             <a:custGeom>
               <a:avLst/>
               <a:pathLst>
-                <a:path w="0" h="3826579">
+                <a:path w="0" h="3649639">
                   <a:moveTo>
-                    <a:pt x="0" y="3826579"/>
+                    <a:pt x="0" y="3649639"/>
                   </a:moveTo>
                   <a:lnTo>
                     <a:pt x="0" y="0"/>
@@ -2615,15 +2615,15 @@
           </p:nvSpPr>
           <p:spPr>
             <a:xfrm>
-              <a:off x="7580464" y="1896563"/>
-              <a:ext cx="0" cy="3826579"/>
+              <a:off x="7580464" y="2073503"/>
+              <a:ext cx="0" cy="3649639"/>
             </a:xfrm>
             <a:custGeom>
               <a:avLst/>
               <a:pathLst>
-                <a:path w="0" h="3826579">
+                <a:path w="0" h="3649639">
                   <a:moveTo>
-                    <a:pt x="0" y="3826579"/>
+                    <a:pt x="0" y="3649639"/>
                   </a:moveTo>
                   <a:lnTo>
                     <a:pt x="0" y="0"/>
@@ -2658,7 +2658,7 @@
           </p:nvSpPr>
           <p:spPr>
             <a:xfrm>
-              <a:off x="817517" y="5549207"/>
+              <a:off x="817517" y="5557249"/>
               <a:ext cx="7799693" cy="0"/>
             </a:xfrm>
             <a:custGeom>
@@ -2701,7 +2701,7 @@
           </p:nvSpPr>
           <p:spPr>
             <a:xfrm>
-              <a:off x="817517" y="4679530"/>
+              <a:off x="817517" y="4727786"/>
               <a:ext cx="7799693" cy="0"/>
             </a:xfrm>
             <a:custGeom>
@@ -2744,7 +2744,7 @@
           </p:nvSpPr>
           <p:spPr>
             <a:xfrm>
-              <a:off x="817517" y="3809853"/>
+              <a:off x="817517" y="3898322"/>
               <a:ext cx="7799693" cy="0"/>
             </a:xfrm>
             <a:custGeom>
@@ -2787,7 +2787,7 @@
           </p:nvSpPr>
           <p:spPr>
             <a:xfrm>
-              <a:off x="817517" y="2940175"/>
+              <a:off x="817517" y="3068859"/>
               <a:ext cx="7799693" cy="0"/>
             </a:xfrm>
             <a:custGeom>
@@ -2830,7 +2830,7 @@
           </p:nvSpPr>
           <p:spPr>
             <a:xfrm>
-              <a:off x="817517" y="2070498"/>
+              <a:off x="817517" y="2239395"/>
               <a:ext cx="7799693" cy="0"/>
             </a:xfrm>
             <a:custGeom>
@@ -2873,15 +2873,15 @@
           </p:nvSpPr>
           <p:spPr>
             <a:xfrm>
-              <a:off x="1440530" y="1896563"/>
-              <a:ext cx="0" cy="3826579"/>
+              <a:off x="1440530" y="2073503"/>
+              <a:ext cx="0" cy="3649639"/>
             </a:xfrm>
             <a:custGeom>
               <a:avLst/>
               <a:pathLst>
-                <a:path w="0" h="3826579">
+                <a:path w="0" h="3649639">
                   <a:moveTo>
-                    <a:pt x="0" y="3826579"/>
+                    <a:pt x="0" y="3649639"/>
                   </a:moveTo>
                   <a:lnTo>
                     <a:pt x="0" y="0"/>
@@ -2916,15 +2916,15 @@
           </p:nvSpPr>
           <p:spPr>
             <a:xfrm>
-              <a:off x="2804959" y="1896563"/>
-              <a:ext cx="0" cy="3826579"/>
+              <a:off x="2804959" y="2073503"/>
+              <a:ext cx="0" cy="3649639"/>
             </a:xfrm>
             <a:custGeom>
               <a:avLst/>
               <a:pathLst>
-                <a:path w="0" h="3826579">
+                <a:path w="0" h="3649639">
                   <a:moveTo>
-                    <a:pt x="0" y="3826579"/>
+                    <a:pt x="0" y="3649639"/>
                   </a:moveTo>
                   <a:lnTo>
                     <a:pt x="0" y="0"/>
@@ -2959,15 +2959,15 @@
           </p:nvSpPr>
           <p:spPr>
             <a:xfrm>
-              <a:off x="4169389" y="1896563"/>
-              <a:ext cx="0" cy="3826579"/>
+              <a:off x="4169389" y="2073503"/>
+              <a:ext cx="0" cy="3649639"/>
             </a:xfrm>
             <a:custGeom>
               <a:avLst/>
               <a:pathLst>
-                <a:path w="0" h="3826579">
+                <a:path w="0" h="3649639">
                   <a:moveTo>
-                    <a:pt x="0" y="3826579"/>
+                    <a:pt x="0" y="3649639"/>
                   </a:moveTo>
                   <a:lnTo>
                     <a:pt x="0" y="0"/>
@@ -3002,15 +3002,15 @@
           </p:nvSpPr>
           <p:spPr>
             <a:xfrm>
-              <a:off x="5533819" y="1896563"/>
-              <a:ext cx="0" cy="3826579"/>
+              <a:off x="5533819" y="2073503"/>
+              <a:ext cx="0" cy="3649639"/>
             </a:xfrm>
             <a:custGeom>
               <a:avLst/>
               <a:pathLst>
-                <a:path w="0" h="3826579">
+                <a:path w="0" h="3649639">
                   <a:moveTo>
-                    <a:pt x="0" y="3826579"/>
+                    <a:pt x="0" y="3649639"/>
                   </a:moveTo>
                   <a:lnTo>
                     <a:pt x="0" y="0"/>
@@ -3045,15 +3045,15 @@
           </p:nvSpPr>
           <p:spPr>
             <a:xfrm>
-              <a:off x="6898249" y="1896563"/>
-              <a:ext cx="0" cy="3826579"/>
+              <a:off x="6898249" y="2073503"/>
+              <a:ext cx="0" cy="3649639"/>
             </a:xfrm>
             <a:custGeom>
               <a:avLst/>
               <a:pathLst>
-                <a:path w="0" h="3826579">
+                <a:path w="0" h="3649639">
                   <a:moveTo>
-                    <a:pt x="0" y="3826579"/>
+                    <a:pt x="0" y="3649639"/>
                   </a:moveTo>
                   <a:lnTo>
                     <a:pt x="0" y="0"/>
@@ -3088,15 +3088,15 @@
           </p:nvSpPr>
           <p:spPr>
             <a:xfrm>
-              <a:off x="8262679" y="1896563"/>
-              <a:ext cx="0" cy="3826579"/>
+              <a:off x="8262679" y="2073503"/>
+              <a:ext cx="0" cy="3649639"/>
             </a:xfrm>
             <a:custGeom>
               <a:avLst/>
               <a:pathLst>
-                <a:path w="0" h="3826579">
+                <a:path w="0" h="3649639">
                   <a:moveTo>
-                    <a:pt x="0" y="3826579"/>
+                    <a:pt x="0" y="3649639"/>
                   </a:moveTo>
                   <a:lnTo>
                     <a:pt x="0" y="0"/>
@@ -3131,189 +3131,189 @@
           </p:nvSpPr>
           <p:spPr>
             <a:xfrm>
-              <a:off x="1172049" y="1896563"/>
-              <a:ext cx="7090630" cy="3633381"/>
+              <a:off x="1172049" y="2073503"/>
+              <a:ext cx="7090630" cy="3465375"/>
             </a:xfrm>
             <a:custGeom>
               <a:avLst/>
               <a:pathLst>
-                <a:path w="7090630" h="3633381">
+                <a:path w="7090630" h="3465375">
                   <a:moveTo>
-                    <a:pt x="0" y="3054372"/>
+                    <a:pt x="0" y="2913139"/>
                   </a:moveTo>
                   <a:lnTo>
-                    <a:pt x="71622" y="3049094"/>
-                  </a:lnTo>
-                  <a:lnTo>
-                    <a:pt x="143245" y="3043769"/>
-                  </a:lnTo>
-                  <a:lnTo>
-                    <a:pt x="214867" y="3038397"/>
-                  </a:lnTo>
-                  <a:lnTo>
-                    <a:pt x="286490" y="3032978"/>
-                  </a:lnTo>
-                  <a:lnTo>
-                    <a:pt x="358112" y="3027511"/>
-                  </a:lnTo>
-                  <a:lnTo>
-                    <a:pt x="429735" y="3021995"/>
-                  </a:lnTo>
-                  <a:lnTo>
-                    <a:pt x="501357" y="3016431"/>
-                  </a:lnTo>
-                  <a:lnTo>
-                    <a:pt x="572980" y="3010818"/>
-                  </a:lnTo>
-                  <a:lnTo>
-                    <a:pt x="644602" y="3005155"/>
-                  </a:lnTo>
-                  <a:lnTo>
-                    <a:pt x="716225" y="2999443"/>
-                  </a:lnTo>
-                  <a:lnTo>
-                    <a:pt x="787847" y="2993680"/>
-                  </a:lnTo>
-                  <a:lnTo>
-                    <a:pt x="859470" y="2987866"/>
-                  </a:lnTo>
-                  <a:lnTo>
-                    <a:pt x="931092" y="2982001"/>
-                  </a:lnTo>
-                  <a:lnTo>
-                    <a:pt x="1002715" y="2976084"/>
-                  </a:lnTo>
-                  <a:lnTo>
-                    <a:pt x="1074337" y="2970114"/>
-                  </a:lnTo>
-                  <a:lnTo>
-                    <a:pt x="1145960" y="2964093"/>
-                  </a:lnTo>
-                  <a:lnTo>
-                    <a:pt x="1217582" y="2958018"/>
-                  </a:lnTo>
-                  <a:lnTo>
-                    <a:pt x="1289205" y="2951889"/>
-                  </a:lnTo>
-                  <a:lnTo>
-                    <a:pt x="1360827" y="2945707"/>
-                  </a:lnTo>
-                  <a:lnTo>
-                    <a:pt x="1432450" y="2939470"/>
-                  </a:lnTo>
-                  <a:lnTo>
-                    <a:pt x="1504073" y="2933177"/>
-                  </a:lnTo>
-                  <a:lnTo>
-                    <a:pt x="1575695" y="2926830"/>
-                  </a:lnTo>
-                  <a:lnTo>
-                    <a:pt x="1647318" y="2920426"/>
-                  </a:lnTo>
-                  <a:lnTo>
-                    <a:pt x="1718940" y="2913966"/>
-                  </a:lnTo>
-                  <a:lnTo>
-                    <a:pt x="1790563" y="2907449"/>
-                  </a:lnTo>
-                  <a:lnTo>
-                    <a:pt x="1862185" y="2900874"/>
-                  </a:lnTo>
-                  <a:lnTo>
-                    <a:pt x="1933808" y="2894241"/>
-                  </a:lnTo>
-                  <a:lnTo>
-                    <a:pt x="2005430" y="2887550"/>
-                  </a:lnTo>
-                  <a:lnTo>
-                    <a:pt x="2077053" y="2880800"/>
-                  </a:lnTo>
-                  <a:lnTo>
-                    <a:pt x="2148675" y="2873990"/>
-                  </a:lnTo>
-                  <a:lnTo>
-                    <a:pt x="2220298" y="2867120"/>
-                  </a:lnTo>
-                  <a:lnTo>
-                    <a:pt x="2291920" y="2860190"/>
-                  </a:lnTo>
-                  <a:lnTo>
-                    <a:pt x="2363543" y="2853198"/>
-                  </a:lnTo>
-                  <a:lnTo>
-                    <a:pt x="2435165" y="2846145"/>
-                  </a:lnTo>
-                  <a:lnTo>
-                    <a:pt x="2506788" y="2839029"/>
-                  </a:lnTo>
-                  <a:lnTo>
-                    <a:pt x="2578410" y="2831851"/>
-                  </a:lnTo>
-                  <a:lnTo>
-                    <a:pt x="2650033" y="2824609"/>
-                  </a:lnTo>
-                  <a:lnTo>
-                    <a:pt x="2721655" y="2817304"/>
-                  </a:lnTo>
-                  <a:lnTo>
-                    <a:pt x="2793278" y="2809934"/>
-                  </a:lnTo>
-                  <a:lnTo>
-                    <a:pt x="2864901" y="2802499"/>
-                  </a:lnTo>
-                  <a:lnTo>
-                    <a:pt x="2936523" y="2794998"/>
-                  </a:lnTo>
-                  <a:lnTo>
-                    <a:pt x="3008146" y="2787431"/>
-                  </a:lnTo>
-                  <a:lnTo>
-                    <a:pt x="3079768" y="2750148"/>
-                  </a:lnTo>
-                  <a:lnTo>
-                    <a:pt x="3151391" y="2665683"/>
-                  </a:lnTo>
-                  <a:lnTo>
-                    <a:pt x="3223013" y="2573314"/>
-                  </a:lnTo>
-                  <a:lnTo>
-                    <a:pt x="3294636" y="2472300"/>
-                  </a:lnTo>
-                  <a:lnTo>
-                    <a:pt x="3366258" y="2361832"/>
-                  </a:lnTo>
-                  <a:lnTo>
-                    <a:pt x="3437881" y="2241025"/>
-                  </a:lnTo>
-                  <a:lnTo>
-                    <a:pt x="3509503" y="2108912"/>
-                  </a:lnTo>
-                  <a:lnTo>
-                    <a:pt x="3581126" y="1964435"/>
-                  </a:lnTo>
-                  <a:lnTo>
-                    <a:pt x="3652748" y="1806436"/>
-                  </a:lnTo>
-                  <a:lnTo>
-                    <a:pt x="3724371" y="1633650"/>
-                  </a:lnTo>
-                  <a:lnTo>
-                    <a:pt x="3795993" y="1444693"/>
-                  </a:lnTo>
-                  <a:lnTo>
-                    <a:pt x="3867616" y="1238051"/>
-                  </a:lnTo>
-                  <a:lnTo>
-                    <a:pt x="3939238" y="1012070"/>
-                  </a:lnTo>
-                  <a:lnTo>
-                    <a:pt x="4010861" y="764940"/>
-                  </a:lnTo>
-                  <a:lnTo>
-                    <a:pt x="4082483" y="494680"/>
-                  </a:lnTo>
-                  <a:lnTo>
-                    <a:pt x="4154106" y="199128"/>
+                    <a:pt x="71622" y="2908105"/>
+                  </a:lnTo>
+                  <a:lnTo>
+                    <a:pt x="143245" y="2903026"/>
+                  </a:lnTo>
+                  <a:lnTo>
+                    <a:pt x="214867" y="2897903"/>
+                  </a:lnTo>
+                  <a:lnTo>
+                    <a:pt x="286490" y="2892734"/>
+                  </a:lnTo>
+                  <a:lnTo>
+                    <a:pt x="358112" y="2887520"/>
+                  </a:lnTo>
+                  <a:lnTo>
+                    <a:pt x="429735" y="2882259"/>
+                  </a:lnTo>
+                  <a:lnTo>
+                    <a:pt x="501357" y="2876952"/>
+                  </a:lnTo>
+                  <a:lnTo>
+                    <a:pt x="572980" y="2871599"/>
+                  </a:lnTo>
+                  <a:lnTo>
+                    <a:pt x="644602" y="2866198"/>
+                  </a:lnTo>
+                  <a:lnTo>
+                    <a:pt x="716225" y="2860750"/>
+                  </a:lnTo>
+                  <a:lnTo>
+                    <a:pt x="787847" y="2855253"/>
+                  </a:lnTo>
+                  <a:lnTo>
+                    <a:pt x="859470" y="2849708"/>
+                  </a:lnTo>
+                  <a:lnTo>
+                    <a:pt x="931092" y="2844114"/>
+                  </a:lnTo>
+                  <a:lnTo>
+                    <a:pt x="1002715" y="2838471"/>
+                  </a:lnTo>
+                  <a:lnTo>
+                    <a:pt x="1074337" y="2832777"/>
+                  </a:lnTo>
+                  <a:lnTo>
+                    <a:pt x="1145960" y="2827034"/>
+                  </a:lnTo>
+                  <a:lnTo>
+                    <a:pt x="1217582" y="2821240"/>
+                  </a:lnTo>
+                  <a:lnTo>
+                    <a:pt x="1289205" y="2815395"/>
+                  </a:lnTo>
+                  <a:lnTo>
+                    <a:pt x="1360827" y="2809498"/>
+                  </a:lnTo>
+                  <a:lnTo>
+                    <a:pt x="1432450" y="2803550"/>
+                  </a:lnTo>
+                  <a:lnTo>
+                    <a:pt x="1504073" y="2797548"/>
+                  </a:lnTo>
+                  <a:lnTo>
+                    <a:pt x="1575695" y="2791494"/>
+                  </a:lnTo>
+                  <a:lnTo>
+                    <a:pt x="1647318" y="2785387"/>
+                  </a:lnTo>
+                  <a:lnTo>
+                    <a:pt x="1718940" y="2779225"/>
+                  </a:lnTo>
+                  <a:lnTo>
+                    <a:pt x="1790563" y="2773009"/>
+                  </a:lnTo>
+                  <a:lnTo>
+                    <a:pt x="1862185" y="2766739"/>
+                  </a:lnTo>
+                  <a:lnTo>
+                    <a:pt x="1933808" y="2760413"/>
+                  </a:lnTo>
+                  <a:lnTo>
+                    <a:pt x="2005430" y="2754031"/>
+                  </a:lnTo>
+                  <a:lnTo>
+                    <a:pt x="2077053" y="2747593"/>
+                  </a:lnTo>
+                  <a:lnTo>
+                    <a:pt x="2148675" y="2741098"/>
+                  </a:lnTo>
+                  <a:lnTo>
+                    <a:pt x="2220298" y="2734546"/>
+                  </a:lnTo>
+                  <a:lnTo>
+                    <a:pt x="2291920" y="2727935"/>
+                  </a:lnTo>
+                  <a:lnTo>
+                    <a:pt x="2363543" y="2721267"/>
+                  </a:lnTo>
+                  <a:lnTo>
+                    <a:pt x="2435165" y="2714540"/>
+                  </a:lnTo>
+                  <a:lnTo>
+                    <a:pt x="2506788" y="2707753"/>
+                  </a:lnTo>
+                  <a:lnTo>
+                    <a:pt x="2578410" y="2700907"/>
+                  </a:lnTo>
+                  <a:lnTo>
+                    <a:pt x="2650033" y="2694000"/>
+                  </a:lnTo>
+                  <a:lnTo>
+                    <a:pt x="2721655" y="2687032"/>
+                  </a:lnTo>
+                  <a:lnTo>
+                    <a:pt x="2793278" y="2680003"/>
+                  </a:lnTo>
+                  <a:lnTo>
+                    <a:pt x="2864901" y="2672912"/>
+                  </a:lnTo>
+                  <a:lnTo>
+                    <a:pt x="2936523" y="2665758"/>
+                  </a:lnTo>
+                  <a:lnTo>
+                    <a:pt x="3008146" y="2658541"/>
+                  </a:lnTo>
+                  <a:lnTo>
+                    <a:pt x="3079768" y="2622982"/>
+                  </a:lnTo>
+                  <a:lnTo>
+                    <a:pt x="3151391" y="2542423"/>
+                  </a:lnTo>
+                  <a:lnTo>
+                    <a:pt x="3223013" y="2454325"/>
+                  </a:lnTo>
+                  <a:lnTo>
+                    <a:pt x="3294636" y="2357982"/>
+                  </a:lnTo>
+                  <a:lnTo>
+                    <a:pt x="3366258" y="2252622"/>
+                  </a:lnTo>
+                  <a:lnTo>
+                    <a:pt x="3437881" y="2137401"/>
+                  </a:lnTo>
+                  <a:lnTo>
+                    <a:pt x="3509503" y="2011397"/>
+                  </a:lnTo>
+                  <a:lnTo>
+                    <a:pt x="3581126" y="1873600"/>
+                  </a:lnTo>
+                  <a:lnTo>
+                    <a:pt x="3652748" y="1722907"/>
+                  </a:lnTo>
+                  <a:lnTo>
+                    <a:pt x="3724371" y="1558110"/>
+                  </a:lnTo>
+                  <a:lnTo>
+                    <a:pt x="3795993" y="1377891"/>
+                  </a:lnTo>
+                  <a:lnTo>
+                    <a:pt x="3867616" y="1180804"/>
+                  </a:lnTo>
+                  <a:lnTo>
+                    <a:pt x="3939238" y="965273"/>
+                  </a:lnTo>
+                  <a:lnTo>
+                    <a:pt x="4010861" y="729569"/>
+                  </a:lnTo>
+                  <a:lnTo>
+                    <a:pt x="4082483" y="471807"/>
+                  </a:lnTo>
+                  <a:lnTo>
+                    <a:pt x="4154106" y="189920"/>
                   </a:lnTo>
                   <a:lnTo>
                     <a:pt x="4198232" y="0"/>
@@ -3322,304 +3322,304 @@
                     <a:pt x="7090630" y="0"/>
                   </a:lnTo>
                   <a:lnTo>
-                    <a:pt x="7090630" y="2225161"/>
-                  </a:lnTo>
-                  <a:lnTo>
-                    <a:pt x="7019007" y="2237646"/>
-                  </a:lnTo>
-                  <a:lnTo>
-                    <a:pt x="6947385" y="2250021"/>
-                  </a:lnTo>
-                  <a:lnTo>
-                    <a:pt x="6875762" y="2262287"/>
-                  </a:lnTo>
-                  <a:lnTo>
-                    <a:pt x="6804139" y="2274447"/>
-                  </a:lnTo>
-                  <a:lnTo>
-                    <a:pt x="6732517" y="2286500"/>
-                  </a:lnTo>
-                  <a:lnTo>
-                    <a:pt x="6660894" y="2298448"/>
-                  </a:lnTo>
-                  <a:lnTo>
-                    <a:pt x="6589272" y="2310291"/>
-                  </a:lnTo>
-                  <a:lnTo>
-                    <a:pt x="6517649" y="2322031"/>
-                  </a:lnTo>
-                  <a:lnTo>
-                    <a:pt x="6446027" y="2333668"/>
-                  </a:lnTo>
-                  <a:lnTo>
-                    <a:pt x="6374404" y="2345203"/>
-                  </a:lnTo>
-                  <a:lnTo>
-                    <a:pt x="6302782" y="2356637"/>
-                  </a:lnTo>
-                  <a:lnTo>
-                    <a:pt x="6231159" y="2367972"/>
-                  </a:lnTo>
-                  <a:lnTo>
-                    <a:pt x="6159537" y="2379207"/>
-                  </a:lnTo>
-                  <a:lnTo>
-                    <a:pt x="6087914" y="2390344"/>
-                  </a:lnTo>
-                  <a:lnTo>
-                    <a:pt x="6016292" y="2401384"/>
-                  </a:lnTo>
-                  <a:lnTo>
-                    <a:pt x="5944669" y="2412327"/>
-                  </a:lnTo>
-                  <a:lnTo>
-                    <a:pt x="5873047" y="2423174"/>
-                  </a:lnTo>
-                  <a:lnTo>
-                    <a:pt x="5801424" y="2433926"/>
-                  </a:lnTo>
-                  <a:lnTo>
-                    <a:pt x="5729802" y="2444585"/>
-                  </a:lnTo>
-                  <a:lnTo>
-                    <a:pt x="5658179" y="2455150"/>
-                  </a:lnTo>
-                  <a:lnTo>
-                    <a:pt x="5586557" y="2465623"/>
-                  </a:lnTo>
-                  <a:lnTo>
-                    <a:pt x="5514934" y="2476004"/>
-                  </a:lnTo>
-                  <a:lnTo>
-                    <a:pt x="5443311" y="2486295"/>
-                  </a:lnTo>
-                  <a:lnTo>
-                    <a:pt x="5371689" y="2496495"/>
-                  </a:lnTo>
-                  <a:lnTo>
-                    <a:pt x="5300066" y="2506606"/>
-                  </a:lnTo>
-                  <a:lnTo>
-                    <a:pt x="5228444" y="2516629"/>
-                  </a:lnTo>
-                  <a:lnTo>
-                    <a:pt x="5156821" y="2526564"/>
-                  </a:lnTo>
-                  <a:lnTo>
-                    <a:pt x="5085199" y="2536412"/>
-                  </a:lnTo>
-                  <a:lnTo>
-                    <a:pt x="5013576" y="2546174"/>
-                  </a:lnTo>
-                  <a:lnTo>
-                    <a:pt x="4941954" y="2555851"/>
-                  </a:lnTo>
-                  <a:lnTo>
-                    <a:pt x="4870331" y="2565443"/>
-                  </a:lnTo>
-                  <a:lnTo>
-                    <a:pt x="4798709" y="2574952"/>
-                  </a:lnTo>
-                  <a:lnTo>
-                    <a:pt x="4727086" y="2584377"/>
-                  </a:lnTo>
-                  <a:lnTo>
-                    <a:pt x="4655464" y="2593719"/>
-                  </a:lnTo>
-                  <a:lnTo>
-                    <a:pt x="4583841" y="2602980"/>
-                  </a:lnTo>
-                  <a:lnTo>
-                    <a:pt x="4512219" y="2612160"/>
-                  </a:lnTo>
-                  <a:lnTo>
-                    <a:pt x="4440596" y="2621260"/>
-                  </a:lnTo>
-                  <a:lnTo>
-                    <a:pt x="4368974" y="2630280"/>
-                  </a:lnTo>
-                  <a:lnTo>
-                    <a:pt x="4297351" y="2639221"/>
-                  </a:lnTo>
-                  <a:lnTo>
-                    <a:pt x="4225729" y="2648084"/>
-                  </a:lnTo>
-                  <a:lnTo>
-                    <a:pt x="4154106" y="2656870"/>
-                  </a:lnTo>
-                  <a:lnTo>
-                    <a:pt x="4082483" y="2665578"/>
-                  </a:lnTo>
-                  <a:lnTo>
-                    <a:pt x="4010861" y="2674211"/>
-                  </a:lnTo>
-                  <a:lnTo>
-                    <a:pt x="3939238" y="2682768"/>
-                  </a:lnTo>
-                  <a:lnTo>
-                    <a:pt x="3867616" y="2691250"/>
-                  </a:lnTo>
-                  <a:lnTo>
-                    <a:pt x="3795993" y="2699658"/>
-                  </a:lnTo>
-                  <a:lnTo>
-                    <a:pt x="3724371" y="2707992"/>
-                  </a:lnTo>
-                  <a:lnTo>
-                    <a:pt x="3652748" y="2716254"/>
-                  </a:lnTo>
-                  <a:lnTo>
-                    <a:pt x="3581126" y="2724443"/>
-                  </a:lnTo>
-                  <a:lnTo>
-                    <a:pt x="3509503" y="2732561"/>
-                  </a:lnTo>
-                  <a:lnTo>
-                    <a:pt x="3437881" y="2740607"/>
-                  </a:lnTo>
-                  <a:lnTo>
-                    <a:pt x="3366258" y="2748584"/>
-                  </a:lnTo>
-                  <a:lnTo>
-                    <a:pt x="3294636" y="2756490"/>
-                  </a:lnTo>
-                  <a:lnTo>
-                    <a:pt x="3223013" y="2764328"/>
-                  </a:lnTo>
-                  <a:lnTo>
-                    <a:pt x="3151391" y="2772097"/>
-                  </a:lnTo>
-                  <a:lnTo>
-                    <a:pt x="3079768" y="2779798"/>
-                  </a:lnTo>
-                  <a:lnTo>
-                    <a:pt x="3008146" y="2827383"/>
-                  </a:lnTo>
-                  <a:lnTo>
-                    <a:pt x="2936523" y="2898009"/>
-                  </a:lnTo>
-                  <a:lnTo>
-                    <a:pt x="2864901" y="2962591"/>
-                  </a:lnTo>
-                  <a:lnTo>
-                    <a:pt x="2793278" y="3021646"/>
-                  </a:lnTo>
-                  <a:lnTo>
-                    <a:pt x="2721655" y="3075647"/>
-                  </a:lnTo>
-                  <a:lnTo>
-                    <a:pt x="2650033" y="3125027"/>
-                  </a:lnTo>
-                  <a:lnTo>
-                    <a:pt x="2578410" y="3170180"/>
-                  </a:lnTo>
-                  <a:lnTo>
-                    <a:pt x="2506788" y="3211469"/>
-                  </a:lnTo>
-                  <a:lnTo>
-                    <a:pt x="2435165" y="3249225"/>
-                  </a:lnTo>
-                  <a:lnTo>
-                    <a:pt x="2363543" y="3283750"/>
-                  </a:lnTo>
-                  <a:lnTo>
-                    <a:pt x="2291920" y="3315320"/>
-                  </a:lnTo>
-                  <a:lnTo>
-                    <a:pt x="2220298" y="3344188"/>
-                  </a:lnTo>
-                  <a:lnTo>
-                    <a:pt x="2148675" y="3370586"/>
-                  </a:lnTo>
-                  <a:lnTo>
-                    <a:pt x="2077053" y="3394724"/>
-                  </a:lnTo>
-                  <a:lnTo>
-                    <a:pt x="2005430" y="3416797"/>
-                  </a:lnTo>
-                  <a:lnTo>
-                    <a:pt x="1933808" y="3436981"/>
-                  </a:lnTo>
-                  <a:lnTo>
-                    <a:pt x="1862185" y="3455437"/>
-                  </a:lnTo>
-                  <a:lnTo>
-                    <a:pt x="1790563" y="3472314"/>
-                  </a:lnTo>
-                  <a:lnTo>
-                    <a:pt x="1718940" y="3487747"/>
-                  </a:lnTo>
-                  <a:lnTo>
-                    <a:pt x="1647318" y="3501859"/>
-                  </a:lnTo>
-                  <a:lnTo>
-                    <a:pt x="1575695" y="3514763"/>
-                  </a:lnTo>
-                  <a:lnTo>
-                    <a:pt x="1504073" y="3526563"/>
-                  </a:lnTo>
-                  <a:lnTo>
-                    <a:pt x="1432450" y="3537353"/>
-                  </a:lnTo>
-                  <a:lnTo>
-                    <a:pt x="1360827" y="3547219"/>
-                  </a:lnTo>
-                  <a:lnTo>
-                    <a:pt x="1289205" y="3556242"/>
-                  </a:lnTo>
-                  <a:lnTo>
-                    <a:pt x="1217582" y="3564492"/>
-                  </a:lnTo>
-                  <a:lnTo>
-                    <a:pt x="1145960" y="3572036"/>
-                  </a:lnTo>
-                  <a:lnTo>
-                    <a:pt x="1074337" y="3578934"/>
-                  </a:lnTo>
-                  <a:lnTo>
-                    <a:pt x="1002715" y="3585242"/>
-                  </a:lnTo>
-                  <a:lnTo>
-                    <a:pt x="931092" y="3591010"/>
-                  </a:lnTo>
-                  <a:lnTo>
-                    <a:pt x="859470" y="3596285"/>
-                  </a:lnTo>
-                  <a:lnTo>
-                    <a:pt x="787847" y="3601108"/>
-                  </a:lnTo>
-                  <a:lnTo>
-                    <a:pt x="716225" y="3605519"/>
-                  </a:lnTo>
-                  <a:lnTo>
-                    <a:pt x="644602" y="3609551"/>
-                  </a:lnTo>
-                  <a:lnTo>
-                    <a:pt x="572980" y="3613239"/>
-                  </a:lnTo>
-                  <a:lnTo>
-                    <a:pt x="501357" y="3616612"/>
-                  </a:lnTo>
-                  <a:lnTo>
-                    <a:pt x="429735" y="3619695"/>
-                  </a:lnTo>
-                  <a:lnTo>
-                    <a:pt x="358112" y="3622515"/>
-                  </a:lnTo>
-                  <a:lnTo>
-                    <a:pt x="286490" y="3625093"/>
-                  </a:lnTo>
-                  <a:lnTo>
-                    <a:pt x="214867" y="3627451"/>
-                  </a:lnTo>
-                  <a:lnTo>
-                    <a:pt x="143245" y="3629607"/>
-                  </a:lnTo>
-                  <a:lnTo>
-                    <a:pt x="71622" y="3631578"/>
-                  </a:lnTo>
-                  <a:lnTo>
-                    <a:pt x="0" y="3633381"/>
+                    <a:pt x="7090630" y="2122271"/>
+                  </a:lnTo>
+                  <a:lnTo>
+                    <a:pt x="7019007" y="2134178"/>
+                  </a:lnTo>
+                  <a:lnTo>
+                    <a:pt x="6947385" y="2145981"/>
+                  </a:lnTo>
+                  <a:lnTo>
+                    <a:pt x="6875762" y="2157680"/>
+                  </a:lnTo>
+                  <a:lnTo>
+                    <a:pt x="6804139" y="2169277"/>
+                  </a:lnTo>
+                  <a:lnTo>
+                    <a:pt x="6732517" y="2180773"/>
+                  </a:lnTo>
+                  <a:lnTo>
+                    <a:pt x="6660894" y="2192169"/>
+                  </a:lnTo>
+                  <a:lnTo>
+                    <a:pt x="6589272" y="2203464"/>
+                  </a:lnTo>
+                  <a:lnTo>
+                    <a:pt x="6517649" y="2214661"/>
+                  </a:lnTo>
+                  <a:lnTo>
+                    <a:pt x="6446027" y="2225760"/>
+                  </a:lnTo>
+                  <a:lnTo>
+                    <a:pt x="6374404" y="2236762"/>
+                  </a:lnTo>
+                  <a:lnTo>
+                    <a:pt x="6302782" y="2247667"/>
+                  </a:lnTo>
+                  <a:lnTo>
+                    <a:pt x="6231159" y="2258478"/>
+                  </a:lnTo>
+                  <a:lnTo>
+                    <a:pt x="6159537" y="2269193"/>
+                  </a:lnTo>
+                  <a:lnTo>
+                    <a:pt x="6087914" y="2279815"/>
+                  </a:lnTo>
+                  <a:lnTo>
+                    <a:pt x="6016292" y="2290345"/>
+                  </a:lnTo>
+                  <a:lnTo>
+                    <a:pt x="5944669" y="2300782"/>
+                  </a:lnTo>
+                  <a:lnTo>
+                    <a:pt x="5873047" y="2311127"/>
+                  </a:lnTo>
+                  <a:lnTo>
+                    <a:pt x="5801424" y="2321383"/>
+                  </a:lnTo>
+                  <a:lnTo>
+                    <a:pt x="5729802" y="2331548"/>
+                  </a:lnTo>
+                  <a:lnTo>
+                    <a:pt x="5658179" y="2341625"/>
+                  </a:lnTo>
+                  <a:lnTo>
+                    <a:pt x="5586557" y="2351613"/>
+                  </a:lnTo>
+                  <a:lnTo>
+                    <a:pt x="5514934" y="2361515"/>
+                  </a:lnTo>
+                  <a:lnTo>
+                    <a:pt x="5443311" y="2371329"/>
+                  </a:lnTo>
+                  <a:lnTo>
+                    <a:pt x="5371689" y="2381058"/>
+                  </a:lnTo>
+                  <a:lnTo>
+                    <a:pt x="5300066" y="2390702"/>
+                  </a:lnTo>
+                  <a:lnTo>
+                    <a:pt x="5228444" y="2400261"/>
+                  </a:lnTo>
+                  <a:lnTo>
+                    <a:pt x="5156821" y="2409737"/>
+                  </a:lnTo>
+                  <a:lnTo>
+                    <a:pt x="5085199" y="2419130"/>
+                  </a:lnTo>
+                  <a:lnTo>
+                    <a:pt x="5013576" y="2428440"/>
+                  </a:lnTo>
+                  <a:lnTo>
+                    <a:pt x="4941954" y="2437670"/>
+                  </a:lnTo>
+                  <a:lnTo>
+                    <a:pt x="4870331" y="2446818"/>
+                  </a:lnTo>
+                  <a:lnTo>
+                    <a:pt x="4798709" y="2455887"/>
+                  </a:lnTo>
+                  <a:lnTo>
+                    <a:pt x="4727086" y="2464876"/>
+                  </a:lnTo>
+                  <a:lnTo>
+                    <a:pt x="4655464" y="2473787"/>
+                  </a:lnTo>
+                  <a:lnTo>
+                    <a:pt x="4583841" y="2482619"/>
+                  </a:lnTo>
+                  <a:lnTo>
+                    <a:pt x="4512219" y="2491375"/>
+                  </a:lnTo>
+                  <a:lnTo>
+                    <a:pt x="4440596" y="2500054"/>
+                  </a:lnTo>
+                  <a:lnTo>
+                    <a:pt x="4368974" y="2508657"/>
+                  </a:lnTo>
+                  <a:lnTo>
+                    <a:pt x="4297351" y="2517184"/>
+                  </a:lnTo>
+                  <a:lnTo>
+                    <a:pt x="4225729" y="2525638"/>
+                  </a:lnTo>
+                  <a:lnTo>
+                    <a:pt x="4154106" y="2534017"/>
+                  </a:lnTo>
+                  <a:lnTo>
+                    <a:pt x="4082483" y="2542323"/>
+                  </a:lnTo>
+                  <a:lnTo>
+                    <a:pt x="4010861" y="2550556"/>
+                  </a:lnTo>
+                  <a:lnTo>
+                    <a:pt x="3939238" y="2558717"/>
+                  </a:lnTo>
+                  <a:lnTo>
+                    <a:pt x="3867616" y="2566807"/>
+                  </a:lnTo>
+                  <a:lnTo>
+                    <a:pt x="3795993" y="2574827"/>
+                  </a:lnTo>
+                  <a:lnTo>
+                    <a:pt x="3724371" y="2582776"/>
+                  </a:lnTo>
+                  <a:lnTo>
+                    <a:pt x="3652748" y="2590655"/>
+                  </a:lnTo>
+                  <a:lnTo>
+                    <a:pt x="3581126" y="2598466"/>
+                  </a:lnTo>
+                  <a:lnTo>
+                    <a:pt x="3509503" y="2606208"/>
+                  </a:lnTo>
+                  <a:lnTo>
+                    <a:pt x="3437881" y="2613883"/>
+                  </a:lnTo>
+                  <a:lnTo>
+                    <a:pt x="3366258" y="2621490"/>
+                  </a:lnTo>
+                  <a:lnTo>
+                    <a:pt x="3294636" y="2629031"/>
+                  </a:lnTo>
+                  <a:lnTo>
+                    <a:pt x="3223013" y="2636506"/>
+                  </a:lnTo>
+                  <a:lnTo>
+                    <a:pt x="3151391" y="2643916"/>
+                  </a:lnTo>
+                  <a:lnTo>
+                    <a:pt x="3079768" y="2651261"/>
+                  </a:lnTo>
+                  <a:lnTo>
+                    <a:pt x="3008146" y="2696646"/>
+                  </a:lnTo>
+                  <a:lnTo>
+                    <a:pt x="2936523" y="2764007"/>
+                  </a:lnTo>
+                  <a:lnTo>
+                    <a:pt x="2864901" y="2825602"/>
+                  </a:lnTo>
+                  <a:lnTo>
+                    <a:pt x="2793278" y="2881926"/>
+                  </a:lnTo>
+                  <a:lnTo>
+                    <a:pt x="2721655" y="2933430"/>
+                  </a:lnTo>
+                  <a:lnTo>
+                    <a:pt x="2650033" y="2980526"/>
+                  </a:lnTo>
+                  <a:lnTo>
+                    <a:pt x="2578410" y="3023592"/>
+                  </a:lnTo>
+                  <a:lnTo>
+                    <a:pt x="2506788" y="3062972"/>
+                  </a:lnTo>
+                  <a:lnTo>
+                    <a:pt x="2435165" y="3098982"/>
+                  </a:lnTo>
+                  <a:lnTo>
+                    <a:pt x="2363543" y="3131910"/>
+                  </a:lnTo>
+                  <a:lnTo>
+                    <a:pt x="2291920" y="3162021"/>
+                  </a:lnTo>
+                  <a:lnTo>
+                    <a:pt x="2220298" y="3189554"/>
+                  </a:lnTo>
+                  <a:lnTo>
+                    <a:pt x="2148675" y="3214731"/>
+                  </a:lnTo>
+                  <a:lnTo>
+                    <a:pt x="2077053" y="3237754"/>
+                  </a:lnTo>
+                  <a:lnTo>
+                    <a:pt x="2005430" y="3258806"/>
+                  </a:lnTo>
+                  <a:lnTo>
+                    <a:pt x="1933808" y="3278056"/>
+                  </a:lnTo>
+                  <a:lnTo>
+                    <a:pt x="1862185" y="3295659"/>
+                  </a:lnTo>
+                  <a:lnTo>
+                    <a:pt x="1790563" y="3311756"/>
+                  </a:lnTo>
+                  <a:lnTo>
+                    <a:pt x="1718940" y="3326475"/>
+                  </a:lnTo>
+                  <a:lnTo>
+                    <a:pt x="1647318" y="3339934"/>
+                  </a:lnTo>
+                  <a:lnTo>
+                    <a:pt x="1575695" y="3352242"/>
+                  </a:lnTo>
+                  <a:lnTo>
+                    <a:pt x="1504073" y="3363496"/>
+                  </a:lnTo>
+                  <a:lnTo>
+                    <a:pt x="1432450" y="3373787"/>
+                  </a:lnTo>
+                  <a:lnTo>
+                    <a:pt x="1360827" y="3383197"/>
+                  </a:lnTo>
+                  <a:lnTo>
+                    <a:pt x="1289205" y="3391802"/>
+                  </a:lnTo>
+                  <a:lnTo>
+                    <a:pt x="1217582" y="3399671"/>
+                  </a:lnTo>
+                  <a:lnTo>
+                    <a:pt x="1145960" y="3406866"/>
+                  </a:lnTo>
+                  <a:lnTo>
+                    <a:pt x="1074337" y="3413446"/>
+                  </a:lnTo>
+                  <a:lnTo>
+                    <a:pt x="1002715" y="3419462"/>
+                  </a:lnTo>
+                  <a:lnTo>
+                    <a:pt x="931092" y="3424963"/>
+                  </a:lnTo>
+                  <a:lnTo>
+                    <a:pt x="859470" y="3429994"/>
+                  </a:lnTo>
+                  <a:lnTo>
+                    <a:pt x="787847" y="3434594"/>
+                  </a:lnTo>
+                  <a:lnTo>
+                    <a:pt x="716225" y="3438801"/>
+                  </a:lnTo>
+                  <a:lnTo>
+                    <a:pt x="644602" y="3442647"/>
+                  </a:lnTo>
+                  <a:lnTo>
+                    <a:pt x="572980" y="3446164"/>
+                  </a:lnTo>
+                  <a:lnTo>
+                    <a:pt x="501357" y="3449381"/>
+                  </a:lnTo>
+                  <a:lnTo>
+                    <a:pt x="429735" y="3452322"/>
+                  </a:lnTo>
+                  <a:lnTo>
+                    <a:pt x="358112" y="3455011"/>
+                  </a:lnTo>
+                  <a:lnTo>
+                    <a:pt x="286490" y="3457470"/>
+                  </a:lnTo>
+                  <a:lnTo>
+                    <a:pt x="214867" y="3459719"/>
+                  </a:lnTo>
+                  <a:lnTo>
+                    <a:pt x="143245" y="3461775"/>
+                  </a:lnTo>
+                  <a:lnTo>
+                    <a:pt x="71622" y="3463656"/>
+                  </a:lnTo>
+                  <a:lnTo>
+                    <a:pt x="0" y="3465375"/>
                   </a:lnTo>
                   <a:close/>
                 </a:path>
@@ -3645,189 +3645,189 @@
           </p:nvSpPr>
           <p:spPr>
             <a:xfrm>
-              <a:off x="1172049" y="1896563"/>
-              <a:ext cx="4198232" cy="3054372"/>
+              <a:off x="1172049" y="2073503"/>
+              <a:ext cx="4198232" cy="2913139"/>
             </a:xfrm>
             <a:custGeom>
               <a:avLst/>
               <a:pathLst>
-                <a:path w="4198232" h="3054372">
+                <a:path w="4198232" h="2913139">
                   <a:moveTo>
-                    <a:pt x="0" y="3054372"/>
+                    <a:pt x="0" y="2913139"/>
                   </a:moveTo>
                   <a:lnTo>
-                    <a:pt x="71622" y="3049094"/>
-                  </a:lnTo>
-                  <a:lnTo>
-                    <a:pt x="143245" y="3043769"/>
-                  </a:lnTo>
-                  <a:lnTo>
-                    <a:pt x="214867" y="3038397"/>
-                  </a:lnTo>
-                  <a:lnTo>
-                    <a:pt x="286490" y="3032978"/>
-                  </a:lnTo>
-                  <a:lnTo>
-                    <a:pt x="358112" y="3027511"/>
-                  </a:lnTo>
-                  <a:lnTo>
-                    <a:pt x="429735" y="3021995"/>
-                  </a:lnTo>
-                  <a:lnTo>
-                    <a:pt x="501357" y="3016431"/>
-                  </a:lnTo>
-                  <a:lnTo>
-                    <a:pt x="572980" y="3010818"/>
-                  </a:lnTo>
-                  <a:lnTo>
-                    <a:pt x="644602" y="3005155"/>
-                  </a:lnTo>
-                  <a:lnTo>
-                    <a:pt x="716225" y="2999443"/>
-                  </a:lnTo>
-                  <a:lnTo>
-                    <a:pt x="787847" y="2993680"/>
-                  </a:lnTo>
-                  <a:lnTo>
-                    <a:pt x="859470" y="2987866"/>
-                  </a:lnTo>
-                  <a:lnTo>
-                    <a:pt x="931092" y="2982001"/>
-                  </a:lnTo>
-                  <a:lnTo>
-                    <a:pt x="1002715" y="2976084"/>
-                  </a:lnTo>
-                  <a:lnTo>
-                    <a:pt x="1074337" y="2970114"/>
-                  </a:lnTo>
-                  <a:lnTo>
-                    <a:pt x="1145960" y="2964093"/>
-                  </a:lnTo>
-                  <a:lnTo>
-                    <a:pt x="1217582" y="2958018"/>
-                  </a:lnTo>
-                  <a:lnTo>
-                    <a:pt x="1289205" y="2951889"/>
-                  </a:lnTo>
-                  <a:lnTo>
-                    <a:pt x="1360827" y="2945707"/>
-                  </a:lnTo>
-                  <a:lnTo>
-                    <a:pt x="1432450" y="2939470"/>
-                  </a:lnTo>
-                  <a:lnTo>
-                    <a:pt x="1504073" y="2933177"/>
-                  </a:lnTo>
-                  <a:lnTo>
-                    <a:pt x="1575695" y="2926830"/>
-                  </a:lnTo>
-                  <a:lnTo>
-                    <a:pt x="1647318" y="2920426"/>
-                  </a:lnTo>
-                  <a:lnTo>
-                    <a:pt x="1718940" y="2913966"/>
-                  </a:lnTo>
-                  <a:lnTo>
-                    <a:pt x="1790563" y="2907449"/>
-                  </a:lnTo>
-                  <a:lnTo>
-                    <a:pt x="1862185" y="2900874"/>
-                  </a:lnTo>
-                  <a:lnTo>
-                    <a:pt x="1933808" y="2894241"/>
-                  </a:lnTo>
-                  <a:lnTo>
-                    <a:pt x="2005430" y="2887550"/>
-                  </a:lnTo>
-                  <a:lnTo>
-                    <a:pt x="2077053" y="2880800"/>
-                  </a:lnTo>
-                  <a:lnTo>
-                    <a:pt x="2148675" y="2873990"/>
-                  </a:lnTo>
-                  <a:lnTo>
-                    <a:pt x="2220298" y="2867120"/>
-                  </a:lnTo>
-                  <a:lnTo>
-                    <a:pt x="2291920" y="2860190"/>
-                  </a:lnTo>
-                  <a:lnTo>
-                    <a:pt x="2363543" y="2853198"/>
-                  </a:lnTo>
-                  <a:lnTo>
-                    <a:pt x="2435165" y="2846145"/>
-                  </a:lnTo>
-                  <a:lnTo>
-                    <a:pt x="2506788" y="2839029"/>
-                  </a:lnTo>
-                  <a:lnTo>
-                    <a:pt x="2578410" y="2831851"/>
-                  </a:lnTo>
-                  <a:lnTo>
-                    <a:pt x="2650033" y="2824609"/>
-                  </a:lnTo>
-                  <a:lnTo>
-                    <a:pt x="2721655" y="2817304"/>
-                  </a:lnTo>
-                  <a:lnTo>
-                    <a:pt x="2793278" y="2809934"/>
-                  </a:lnTo>
-                  <a:lnTo>
-                    <a:pt x="2864901" y="2802499"/>
-                  </a:lnTo>
-                  <a:lnTo>
-                    <a:pt x="2936523" y="2794998"/>
-                  </a:lnTo>
-                  <a:lnTo>
-                    <a:pt x="3008146" y="2787431"/>
-                  </a:lnTo>
-                  <a:lnTo>
-                    <a:pt x="3079768" y="2750148"/>
-                  </a:lnTo>
-                  <a:lnTo>
-                    <a:pt x="3151391" y="2665683"/>
-                  </a:lnTo>
-                  <a:lnTo>
-                    <a:pt x="3223013" y="2573314"/>
-                  </a:lnTo>
-                  <a:lnTo>
-                    <a:pt x="3294636" y="2472300"/>
-                  </a:lnTo>
-                  <a:lnTo>
-                    <a:pt x="3366258" y="2361832"/>
-                  </a:lnTo>
-                  <a:lnTo>
-                    <a:pt x="3437881" y="2241025"/>
-                  </a:lnTo>
-                  <a:lnTo>
-                    <a:pt x="3509503" y="2108912"/>
-                  </a:lnTo>
-                  <a:lnTo>
-                    <a:pt x="3581126" y="1964435"/>
-                  </a:lnTo>
-                  <a:lnTo>
-                    <a:pt x="3652748" y="1806436"/>
-                  </a:lnTo>
-                  <a:lnTo>
-                    <a:pt x="3724371" y="1633650"/>
-                  </a:lnTo>
-                  <a:lnTo>
-                    <a:pt x="3795993" y="1444693"/>
-                  </a:lnTo>
-                  <a:lnTo>
-                    <a:pt x="3867616" y="1238051"/>
-                  </a:lnTo>
-                  <a:lnTo>
-                    <a:pt x="3939238" y="1012070"/>
-                  </a:lnTo>
-                  <a:lnTo>
-                    <a:pt x="4010861" y="764940"/>
-                  </a:lnTo>
-                  <a:lnTo>
-                    <a:pt x="4082483" y="494680"/>
-                  </a:lnTo>
-                  <a:lnTo>
-                    <a:pt x="4154106" y="199128"/>
+                    <a:pt x="71622" y="2908105"/>
+                  </a:lnTo>
+                  <a:lnTo>
+                    <a:pt x="143245" y="2903026"/>
+                  </a:lnTo>
+                  <a:lnTo>
+                    <a:pt x="214867" y="2897903"/>
+                  </a:lnTo>
+                  <a:lnTo>
+                    <a:pt x="286490" y="2892734"/>
+                  </a:lnTo>
+                  <a:lnTo>
+                    <a:pt x="358112" y="2887520"/>
+                  </a:lnTo>
+                  <a:lnTo>
+                    <a:pt x="429735" y="2882259"/>
+                  </a:lnTo>
+                  <a:lnTo>
+                    <a:pt x="501357" y="2876952"/>
+                  </a:lnTo>
+                  <a:lnTo>
+                    <a:pt x="572980" y="2871599"/>
+                  </a:lnTo>
+                  <a:lnTo>
+                    <a:pt x="644602" y="2866198"/>
+                  </a:lnTo>
+                  <a:lnTo>
+                    <a:pt x="716225" y="2860750"/>
+                  </a:lnTo>
+                  <a:lnTo>
+                    <a:pt x="787847" y="2855253"/>
+                  </a:lnTo>
+                  <a:lnTo>
+                    <a:pt x="859470" y="2849708"/>
+                  </a:lnTo>
+                  <a:lnTo>
+                    <a:pt x="931092" y="2844114"/>
+                  </a:lnTo>
+                  <a:lnTo>
+                    <a:pt x="1002715" y="2838471"/>
+                  </a:lnTo>
+                  <a:lnTo>
+                    <a:pt x="1074337" y="2832777"/>
+                  </a:lnTo>
+                  <a:lnTo>
+                    <a:pt x="1145960" y="2827034"/>
+                  </a:lnTo>
+                  <a:lnTo>
+                    <a:pt x="1217582" y="2821240"/>
+                  </a:lnTo>
+                  <a:lnTo>
+                    <a:pt x="1289205" y="2815395"/>
+                  </a:lnTo>
+                  <a:lnTo>
+                    <a:pt x="1360827" y="2809498"/>
+                  </a:lnTo>
+                  <a:lnTo>
+                    <a:pt x="1432450" y="2803550"/>
+                  </a:lnTo>
+                  <a:lnTo>
+                    <a:pt x="1504073" y="2797548"/>
+                  </a:lnTo>
+                  <a:lnTo>
+                    <a:pt x="1575695" y="2791494"/>
+                  </a:lnTo>
+                  <a:lnTo>
+                    <a:pt x="1647318" y="2785387"/>
+                  </a:lnTo>
+                  <a:lnTo>
+                    <a:pt x="1718940" y="2779225"/>
+                  </a:lnTo>
+                  <a:lnTo>
+                    <a:pt x="1790563" y="2773009"/>
+                  </a:lnTo>
+                  <a:lnTo>
+                    <a:pt x="1862185" y="2766739"/>
+                  </a:lnTo>
+                  <a:lnTo>
+                    <a:pt x="1933808" y="2760413"/>
+                  </a:lnTo>
+                  <a:lnTo>
+                    <a:pt x="2005430" y="2754031"/>
+                  </a:lnTo>
+                  <a:lnTo>
+                    <a:pt x="2077053" y="2747593"/>
+                  </a:lnTo>
+                  <a:lnTo>
+                    <a:pt x="2148675" y="2741098"/>
+                  </a:lnTo>
+                  <a:lnTo>
+                    <a:pt x="2220298" y="2734546"/>
+                  </a:lnTo>
+                  <a:lnTo>
+                    <a:pt x="2291920" y="2727935"/>
+                  </a:lnTo>
+                  <a:lnTo>
+                    <a:pt x="2363543" y="2721267"/>
+                  </a:lnTo>
+                  <a:lnTo>
+                    <a:pt x="2435165" y="2714540"/>
+                  </a:lnTo>
+                  <a:lnTo>
+                    <a:pt x="2506788" y="2707753"/>
+                  </a:lnTo>
+                  <a:lnTo>
+                    <a:pt x="2578410" y="2700907"/>
+                  </a:lnTo>
+                  <a:lnTo>
+                    <a:pt x="2650033" y="2694000"/>
+                  </a:lnTo>
+                  <a:lnTo>
+                    <a:pt x="2721655" y="2687032"/>
+                  </a:lnTo>
+                  <a:lnTo>
+                    <a:pt x="2793278" y="2680003"/>
+                  </a:lnTo>
+                  <a:lnTo>
+                    <a:pt x="2864901" y="2672912"/>
+                  </a:lnTo>
+                  <a:lnTo>
+                    <a:pt x="2936523" y="2665758"/>
+                  </a:lnTo>
+                  <a:lnTo>
+                    <a:pt x="3008146" y="2658541"/>
+                  </a:lnTo>
+                  <a:lnTo>
+                    <a:pt x="3079768" y="2622982"/>
+                  </a:lnTo>
+                  <a:lnTo>
+                    <a:pt x="3151391" y="2542423"/>
+                  </a:lnTo>
+                  <a:lnTo>
+                    <a:pt x="3223013" y="2454325"/>
+                  </a:lnTo>
+                  <a:lnTo>
+                    <a:pt x="3294636" y="2357982"/>
+                  </a:lnTo>
+                  <a:lnTo>
+                    <a:pt x="3366258" y="2252622"/>
+                  </a:lnTo>
+                  <a:lnTo>
+                    <a:pt x="3437881" y="2137401"/>
+                  </a:lnTo>
+                  <a:lnTo>
+                    <a:pt x="3509503" y="2011397"/>
+                  </a:lnTo>
+                  <a:lnTo>
+                    <a:pt x="3581126" y="1873600"/>
+                  </a:lnTo>
+                  <a:lnTo>
+                    <a:pt x="3652748" y="1722907"/>
+                  </a:lnTo>
+                  <a:lnTo>
+                    <a:pt x="3724371" y="1558110"/>
+                  </a:lnTo>
+                  <a:lnTo>
+                    <a:pt x="3795993" y="1377891"/>
+                  </a:lnTo>
+                  <a:lnTo>
+                    <a:pt x="3867616" y="1180804"/>
+                  </a:lnTo>
+                  <a:lnTo>
+                    <a:pt x="3939238" y="965273"/>
+                  </a:lnTo>
+                  <a:lnTo>
+                    <a:pt x="4010861" y="729569"/>
+                  </a:lnTo>
+                  <a:lnTo>
+                    <a:pt x="4082483" y="471807"/>
+                  </a:lnTo>
+                  <a:lnTo>
+                    <a:pt x="4154106" y="189920"/>
                   </a:lnTo>
                   <a:lnTo>
                     <a:pt x="4198232" y="0"/>
@@ -3850,312 +3850,312 @@
           </p:nvSpPr>
           <p:spPr>
             <a:xfrm>
-              <a:off x="1172049" y="4121725"/>
-              <a:ext cx="7090630" cy="1408219"/>
+              <a:off x="1172049" y="4195774"/>
+              <a:ext cx="7090630" cy="1343104"/>
             </a:xfrm>
             <a:custGeom>
               <a:avLst/>
               <a:pathLst>
-                <a:path w="7090630" h="1408219">
+                <a:path w="7090630" h="1343104">
                   <a:moveTo>
                     <a:pt x="7090630" y="0"/>
                   </a:moveTo>
                   <a:lnTo>
-                    <a:pt x="7019007" y="12484"/>
-                  </a:lnTo>
-                  <a:lnTo>
-                    <a:pt x="6947385" y="24859"/>
-                  </a:lnTo>
-                  <a:lnTo>
-                    <a:pt x="6875762" y="37126"/>
-                  </a:lnTo>
-                  <a:lnTo>
-                    <a:pt x="6804139" y="49285"/>
-                  </a:lnTo>
-                  <a:lnTo>
-                    <a:pt x="6732517" y="61338"/>
-                  </a:lnTo>
-                  <a:lnTo>
-                    <a:pt x="6660894" y="73286"/>
-                  </a:lnTo>
-                  <a:lnTo>
-                    <a:pt x="6589272" y="85129"/>
-                  </a:lnTo>
-                  <a:lnTo>
-                    <a:pt x="6517649" y="96869"/>
-                  </a:lnTo>
-                  <a:lnTo>
-                    <a:pt x="6446027" y="108506"/>
-                  </a:lnTo>
-                  <a:lnTo>
-                    <a:pt x="6374404" y="120041"/>
-                  </a:lnTo>
-                  <a:lnTo>
-                    <a:pt x="6302782" y="131476"/>
-                  </a:lnTo>
-                  <a:lnTo>
-                    <a:pt x="6231159" y="142810"/>
-                  </a:lnTo>
-                  <a:lnTo>
-                    <a:pt x="6159537" y="154045"/>
-                  </a:lnTo>
-                  <a:lnTo>
-                    <a:pt x="6087914" y="165182"/>
-                  </a:lnTo>
-                  <a:lnTo>
-                    <a:pt x="6016292" y="176222"/>
-                  </a:lnTo>
-                  <a:lnTo>
-                    <a:pt x="5944669" y="187165"/>
-                  </a:lnTo>
-                  <a:lnTo>
-                    <a:pt x="5873047" y="198012"/>
-                  </a:lnTo>
-                  <a:lnTo>
-                    <a:pt x="5801424" y="208764"/>
-                  </a:lnTo>
-                  <a:lnTo>
-                    <a:pt x="5729802" y="219423"/>
-                  </a:lnTo>
-                  <a:lnTo>
-                    <a:pt x="5658179" y="229988"/>
-                  </a:lnTo>
-                  <a:lnTo>
-                    <a:pt x="5586557" y="240461"/>
-                  </a:lnTo>
-                  <a:lnTo>
-                    <a:pt x="5514934" y="250842"/>
-                  </a:lnTo>
-                  <a:lnTo>
-                    <a:pt x="5443311" y="261133"/>
-                  </a:lnTo>
-                  <a:lnTo>
-                    <a:pt x="5371689" y="271333"/>
-                  </a:lnTo>
-                  <a:lnTo>
-                    <a:pt x="5300066" y="281444"/>
-                  </a:lnTo>
-                  <a:lnTo>
-                    <a:pt x="5228444" y="291467"/>
-                  </a:lnTo>
-                  <a:lnTo>
-                    <a:pt x="5156821" y="301402"/>
-                  </a:lnTo>
-                  <a:lnTo>
-                    <a:pt x="5085199" y="311250"/>
-                  </a:lnTo>
-                  <a:lnTo>
-                    <a:pt x="5013576" y="321012"/>
-                  </a:lnTo>
-                  <a:lnTo>
-                    <a:pt x="4941954" y="330689"/>
-                  </a:lnTo>
-                  <a:lnTo>
-                    <a:pt x="4870331" y="340281"/>
-                  </a:lnTo>
-                  <a:lnTo>
-                    <a:pt x="4798709" y="349790"/>
-                  </a:lnTo>
-                  <a:lnTo>
-                    <a:pt x="4727086" y="359215"/>
-                  </a:lnTo>
-                  <a:lnTo>
-                    <a:pt x="4655464" y="368557"/>
-                  </a:lnTo>
-                  <a:lnTo>
-                    <a:pt x="4583841" y="377818"/>
-                  </a:lnTo>
-                  <a:lnTo>
-                    <a:pt x="4512219" y="386998"/>
-                  </a:lnTo>
-                  <a:lnTo>
-                    <a:pt x="4440596" y="396098"/>
-                  </a:lnTo>
-                  <a:lnTo>
-                    <a:pt x="4368974" y="405118"/>
-                  </a:lnTo>
-                  <a:lnTo>
-                    <a:pt x="4297351" y="414059"/>
-                  </a:lnTo>
-                  <a:lnTo>
-                    <a:pt x="4225729" y="422922"/>
-                  </a:lnTo>
-                  <a:lnTo>
-                    <a:pt x="4154106" y="431708"/>
-                  </a:lnTo>
-                  <a:lnTo>
-                    <a:pt x="4082483" y="440416"/>
-                  </a:lnTo>
-                  <a:lnTo>
-                    <a:pt x="4010861" y="449049"/>
-                  </a:lnTo>
-                  <a:lnTo>
-                    <a:pt x="3939238" y="457606"/>
-                  </a:lnTo>
-                  <a:lnTo>
-                    <a:pt x="3867616" y="466088"/>
-                  </a:lnTo>
-                  <a:lnTo>
-                    <a:pt x="3795993" y="474496"/>
-                  </a:lnTo>
-                  <a:lnTo>
-                    <a:pt x="3724371" y="482830"/>
-                  </a:lnTo>
-                  <a:lnTo>
-                    <a:pt x="3652748" y="491092"/>
-                  </a:lnTo>
-                  <a:lnTo>
-                    <a:pt x="3581126" y="499281"/>
-                  </a:lnTo>
-                  <a:lnTo>
-                    <a:pt x="3509503" y="507399"/>
-                  </a:lnTo>
-                  <a:lnTo>
-                    <a:pt x="3437881" y="515445"/>
-                  </a:lnTo>
-                  <a:lnTo>
-                    <a:pt x="3366258" y="523422"/>
-                  </a:lnTo>
-                  <a:lnTo>
-                    <a:pt x="3294636" y="531328"/>
-                  </a:lnTo>
-                  <a:lnTo>
-                    <a:pt x="3223013" y="539166"/>
-                  </a:lnTo>
-                  <a:lnTo>
-                    <a:pt x="3151391" y="546935"/>
-                  </a:lnTo>
-                  <a:lnTo>
-                    <a:pt x="3079768" y="554636"/>
-                  </a:lnTo>
-                  <a:lnTo>
-                    <a:pt x="3008146" y="602221"/>
-                  </a:lnTo>
-                  <a:lnTo>
-                    <a:pt x="2936523" y="672847"/>
-                  </a:lnTo>
-                  <a:lnTo>
-                    <a:pt x="2864901" y="737429"/>
-                  </a:lnTo>
-                  <a:lnTo>
-                    <a:pt x="2793278" y="796484"/>
-                  </a:lnTo>
-                  <a:lnTo>
-                    <a:pt x="2721655" y="850485"/>
-                  </a:lnTo>
-                  <a:lnTo>
-                    <a:pt x="2650033" y="899865"/>
-                  </a:lnTo>
-                  <a:lnTo>
-                    <a:pt x="2578410" y="945018"/>
-                  </a:lnTo>
-                  <a:lnTo>
-                    <a:pt x="2506788" y="986307"/>
-                  </a:lnTo>
-                  <a:lnTo>
-                    <a:pt x="2435165" y="1024063"/>
-                  </a:lnTo>
-                  <a:lnTo>
-                    <a:pt x="2363543" y="1058588"/>
-                  </a:lnTo>
-                  <a:lnTo>
-                    <a:pt x="2291920" y="1090158"/>
-                  </a:lnTo>
-                  <a:lnTo>
-                    <a:pt x="2220298" y="1119026"/>
-                  </a:lnTo>
-                  <a:lnTo>
-                    <a:pt x="2148675" y="1145424"/>
-                  </a:lnTo>
-                  <a:lnTo>
-                    <a:pt x="2077053" y="1169562"/>
-                  </a:lnTo>
-                  <a:lnTo>
-                    <a:pt x="2005430" y="1191635"/>
-                  </a:lnTo>
-                  <a:lnTo>
-                    <a:pt x="1933808" y="1211819"/>
-                  </a:lnTo>
-                  <a:lnTo>
-                    <a:pt x="1862185" y="1230275"/>
-                  </a:lnTo>
-                  <a:lnTo>
-                    <a:pt x="1790563" y="1247152"/>
-                  </a:lnTo>
-                  <a:lnTo>
-                    <a:pt x="1718940" y="1262585"/>
-                  </a:lnTo>
-                  <a:lnTo>
-                    <a:pt x="1647318" y="1276697"/>
-                  </a:lnTo>
-                  <a:lnTo>
-                    <a:pt x="1575695" y="1289601"/>
-                  </a:lnTo>
-                  <a:lnTo>
-                    <a:pt x="1504073" y="1301401"/>
-                  </a:lnTo>
-                  <a:lnTo>
-                    <a:pt x="1432450" y="1312191"/>
-                  </a:lnTo>
-                  <a:lnTo>
-                    <a:pt x="1360827" y="1322057"/>
-                  </a:lnTo>
-                  <a:lnTo>
-                    <a:pt x="1289205" y="1331080"/>
-                  </a:lnTo>
-                  <a:lnTo>
-                    <a:pt x="1217582" y="1339330"/>
-                  </a:lnTo>
-                  <a:lnTo>
-                    <a:pt x="1145960" y="1346874"/>
-                  </a:lnTo>
-                  <a:lnTo>
-                    <a:pt x="1074337" y="1353772"/>
-                  </a:lnTo>
-                  <a:lnTo>
-                    <a:pt x="1002715" y="1360080"/>
-                  </a:lnTo>
-                  <a:lnTo>
-                    <a:pt x="931092" y="1365848"/>
-                  </a:lnTo>
-                  <a:lnTo>
-                    <a:pt x="859470" y="1371123"/>
-                  </a:lnTo>
-                  <a:lnTo>
-                    <a:pt x="787847" y="1375946"/>
-                  </a:lnTo>
-                  <a:lnTo>
-                    <a:pt x="716225" y="1380357"/>
-                  </a:lnTo>
-                  <a:lnTo>
-                    <a:pt x="644602" y="1384389"/>
-                  </a:lnTo>
-                  <a:lnTo>
-                    <a:pt x="572980" y="1388077"/>
-                  </a:lnTo>
-                  <a:lnTo>
-                    <a:pt x="501357" y="1391450"/>
-                  </a:lnTo>
-                  <a:lnTo>
-                    <a:pt x="429735" y="1394533"/>
-                  </a:lnTo>
-                  <a:lnTo>
-                    <a:pt x="358112" y="1397353"/>
-                  </a:lnTo>
-                  <a:lnTo>
-                    <a:pt x="286490" y="1399931"/>
-                  </a:lnTo>
-                  <a:lnTo>
-                    <a:pt x="214867" y="1402289"/>
-                  </a:lnTo>
-                  <a:lnTo>
-                    <a:pt x="143245" y="1404445"/>
-                  </a:lnTo>
-                  <a:lnTo>
-                    <a:pt x="71622" y="1406416"/>
-                  </a:lnTo>
-                  <a:lnTo>
-                    <a:pt x="0" y="1408219"/>
+                    <a:pt x="7019007" y="11906"/>
+                  </a:lnTo>
+                  <a:lnTo>
+                    <a:pt x="6947385" y="23709"/>
+                  </a:lnTo>
+                  <a:lnTo>
+                    <a:pt x="6875762" y="35409"/>
+                  </a:lnTo>
+                  <a:lnTo>
+                    <a:pt x="6804139" y="47006"/>
+                  </a:lnTo>
+                  <a:lnTo>
+                    <a:pt x="6732517" y="58502"/>
+                  </a:lnTo>
+                  <a:lnTo>
+                    <a:pt x="6660894" y="69897"/>
+                  </a:lnTo>
+                  <a:lnTo>
+                    <a:pt x="6589272" y="81193"/>
+                  </a:lnTo>
+                  <a:lnTo>
+                    <a:pt x="6517649" y="92390"/>
+                  </a:lnTo>
+                  <a:lnTo>
+                    <a:pt x="6446027" y="103489"/>
+                  </a:lnTo>
+                  <a:lnTo>
+                    <a:pt x="6374404" y="114490"/>
+                  </a:lnTo>
+                  <a:lnTo>
+                    <a:pt x="6302782" y="125396"/>
+                  </a:lnTo>
+                  <a:lnTo>
+                    <a:pt x="6231159" y="136206"/>
+                  </a:lnTo>
+                  <a:lnTo>
+                    <a:pt x="6159537" y="146922"/>
+                  </a:lnTo>
+                  <a:lnTo>
+                    <a:pt x="6087914" y="157544"/>
+                  </a:lnTo>
+                  <a:lnTo>
+                    <a:pt x="6016292" y="168073"/>
+                  </a:lnTo>
+                  <a:lnTo>
+                    <a:pt x="5944669" y="178510"/>
+                  </a:lnTo>
+                  <a:lnTo>
+                    <a:pt x="5873047" y="188856"/>
+                  </a:lnTo>
+                  <a:lnTo>
+                    <a:pt x="5801424" y="199111"/>
+                  </a:lnTo>
+                  <a:lnTo>
+                    <a:pt x="5729802" y="209277"/>
+                  </a:lnTo>
+                  <a:lnTo>
+                    <a:pt x="5658179" y="219354"/>
+                  </a:lnTo>
+                  <a:lnTo>
+                    <a:pt x="5586557" y="229342"/>
+                  </a:lnTo>
+                  <a:lnTo>
+                    <a:pt x="5514934" y="239243"/>
+                  </a:lnTo>
+                  <a:lnTo>
+                    <a:pt x="5443311" y="249058"/>
+                  </a:lnTo>
+                  <a:lnTo>
+                    <a:pt x="5371689" y="258787"/>
+                  </a:lnTo>
+                  <a:lnTo>
+                    <a:pt x="5300066" y="268430"/>
+                  </a:lnTo>
+                  <a:lnTo>
+                    <a:pt x="5228444" y="277990"/>
+                  </a:lnTo>
+                  <a:lnTo>
+                    <a:pt x="5156821" y="287465"/>
+                  </a:lnTo>
+                  <a:lnTo>
+                    <a:pt x="5085199" y="296858"/>
+                  </a:lnTo>
+                  <a:lnTo>
+                    <a:pt x="5013576" y="306169"/>
+                  </a:lnTo>
+                  <a:lnTo>
+                    <a:pt x="4941954" y="315398"/>
+                  </a:lnTo>
+                  <a:lnTo>
+                    <a:pt x="4870331" y="324547"/>
+                  </a:lnTo>
+                  <a:lnTo>
+                    <a:pt x="4798709" y="333615"/>
+                  </a:lnTo>
+                  <a:lnTo>
+                    <a:pt x="4727086" y="342605"/>
+                  </a:lnTo>
+                  <a:lnTo>
+                    <a:pt x="4655464" y="351515"/>
+                  </a:lnTo>
+                  <a:lnTo>
+                    <a:pt x="4583841" y="360348"/>
+                  </a:lnTo>
+                  <a:lnTo>
+                    <a:pt x="4512219" y="369103"/>
+                  </a:lnTo>
+                  <a:lnTo>
+                    <a:pt x="4440596" y="377782"/>
+                  </a:lnTo>
+                  <a:lnTo>
+                    <a:pt x="4368974" y="386385"/>
+                  </a:lnTo>
+                  <a:lnTo>
+                    <a:pt x="4297351" y="394913"/>
+                  </a:lnTo>
+                  <a:lnTo>
+                    <a:pt x="4225729" y="403366"/>
+                  </a:lnTo>
+                  <a:lnTo>
+                    <a:pt x="4154106" y="411746"/>
+                  </a:lnTo>
+                  <a:lnTo>
+                    <a:pt x="4082483" y="420052"/>
+                  </a:lnTo>
+                  <a:lnTo>
+                    <a:pt x="4010861" y="428285"/>
+                  </a:lnTo>
+                  <a:lnTo>
+                    <a:pt x="3939238" y="436446"/>
+                  </a:lnTo>
+                  <a:lnTo>
+                    <a:pt x="3867616" y="444536"/>
+                  </a:lnTo>
+                  <a:lnTo>
+                    <a:pt x="3795993" y="452555"/>
+                  </a:lnTo>
+                  <a:lnTo>
+                    <a:pt x="3724371" y="460504"/>
+                  </a:lnTo>
+                  <a:lnTo>
+                    <a:pt x="3652748" y="468384"/>
+                  </a:lnTo>
+                  <a:lnTo>
+                    <a:pt x="3581126" y="476195"/>
+                  </a:lnTo>
+                  <a:lnTo>
+                    <a:pt x="3509503" y="483937"/>
+                  </a:lnTo>
+                  <a:lnTo>
+                    <a:pt x="3437881" y="491611"/>
+                  </a:lnTo>
+                  <a:lnTo>
+                    <a:pt x="3366258" y="499219"/>
+                  </a:lnTo>
+                  <a:lnTo>
+                    <a:pt x="3294636" y="506760"/>
+                  </a:lnTo>
+                  <a:lnTo>
+                    <a:pt x="3223013" y="514235"/>
+                  </a:lnTo>
+                  <a:lnTo>
+                    <a:pt x="3151391" y="521645"/>
+                  </a:lnTo>
+                  <a:lnTo>
+                    <a:pt x="3079768" y="528989"/>
+                  </a:lnTo>
+                  <a:lnTo>
+                    <a:pt x="3008146" y="574375"/>
+                  </a:lnTo>
+                  <a:lnTo>
+                    <a:pt x="2936523" y="641735"/>
+                  </a:lnTo>
+                  <a:lnTo>
+                    <a:pt x="2864901" y="703331"/>
+                  </a:lnTo>
+                  <a:lnTo>
+                    <a:pt x="2793278" y="759655"/>
+                  </a:lnTo>
+                  <a:lnTo>
+                    <a:pt x="2721655" y="811159"/>
+                  </a:lnTo>
+                  <a:lnTo>
+                    <a:pt x="2650033" y="858255"/>
+                  </a:lnTo>
+                  <a:lnTo>
+                    <a:pt x="2578410" y="901321"/>
+                  </a:lnTo>
+                  <a:lnTo>
+                    <a:pt x="2506788" y="940701"/>
+                  </a:lnTo>
+                  <a:lnTo>
+                    <a:pt x="2435165" y="976711"/>
+                  </a:lnTo>
+                  <a:lnTo>
+                    <a:pt x="2363543" y="1009639"/>
+                  </a:lnTo>
+                  <a:lnTo>
+                    <a:pt x="2291920" y="1039749"/>
+                  </a:lnTo>
+                  <a:lnTo>
+                    <a:pt x="2220298" y="1067283"/>
+                  </a:lnTo>
+                  <a:lnTo>
+                    <a:pt x="2148675" y="1092460"/>
+                  </a:lnTo>
+                  <a:lnTo>
+                    <a:pt x="2077053" y="1115482"/>
+                  </a:lnTo>
+                  <a:lnTo>
+                    <a:pt x="2005430" y="1136534"/>
+                  </a:lnTo>
+                  <a:lnTo>
+                    <a:pt x="1933808" y="1155785"/>
+                  </a:lnTo>
+                  <a:lnTo>
+                    <a:pt x="1862185" y="1173388"/>
+                  </a:lnTo>
+                  <a:lnTo>
+                    <a:pt x="1790563" y="1189484"/>
+                  </a:lnTo>
+                  <a:lnTo>
+                    <a:pt x="1718940" y="1204203"/>
+                  </a:lnTo>
+                  <a:lnTo>
+                    <a:pt x="1647318" y="1217663"/>
+                  </a:lnTo>
+                  <a:lnTo>
+                    <a:pt x="1575695" y="1229970"/>
+                  </a:lnTo>
+                  <a:lnTo>
+                    <a:pt x="1504073" y="1241225"/>
+                  </a:lnTo>
+                  <a:lnTo>
+                    <a:pt x="1432450" y="1251516"/>
+                  </a:lnTo>
+                  <a:lnTo>
+                    <a:pt x="1360827" y="1260926"/>
+                  </a:lnTo>
+                  <a:lnTo>
+                    <a:pt x="1289205" y="1269531"/>
+                  </a:lnTo>
+                  <a:lnTo>
+                    <a:pt x="1217582" y="1277400"/>
+                  </a:lnTo>
+                  <a:lnTo>
+                    <a:pt x="1145960" y="1284595"/>
+                  </a:lnTo>
+                  <a:lnTo>
+                    <a:pt x="1074337" y="1291174"/>
+                  </a:lnTo>
+                  <a:lnTo>
+                    <a:pt x="1002715" y="1297191"/>
+                  </a:lnTo>
+                  <a:lnTo>
+                    <a:pt x="931092" y="1302692"/>
+                  </a:lnTo>
+                  <a:lnTo>
+                    <a:pt x="859470" y="1307723"/>
+                  </a:lnTo>
+                  <a:lnTo>
+                    <a:pt x="787847" y="1312323"/>
+                  </a:lnTo>
+                  <a:lnTo>
+                    <a:pt x="716225" y="1316529"/>
+                  </a:lnTo>
+                  <a:lnTo>
+                    <a:pt x="644602" y="1320376"/>
+                  </a:lnTo>
+                  <a:lnTo>
+                    <a:pt x="572980" y="1323893"/>
+                  </a:lnTo>
+                  <a:lnTo>
+                    <a:pt x="501357" y="1327109"/>
+                  </a:lnTo>
+                  <a:lnTo>
+                    <a:pt x="429735" y="1330050"/>
+                  </a:lnTo>
+                  <a:lnTo>
+                    <a:pt x="358112" y="1332740"/>
+                  </a:lnTo>
+                  <a:lnTo>
+                    <a:pt x="286490" y="1335199"/>
+                  </a:lnTo>
+                  <a:lnTo>
+                    <a:pt x="214867" y="1337448"/>
+                  </a:lnTo>
+                  <a:lnTo>
+                    <a:pt x="143245" y="1339504"/>
+                  </a:lnTo>
+                  <a:lnTo>
+                    <a:pt x="71622" y="1341384"/>
+                  </a:lnTo>
+                  <a:lnTo>
+                    <a:pt x="0" y="1343104"/>
                   </a:lnTo>
                 </a:path>
               </a:pathLst>
@@ -4175,228 +4175,228 @@
           </p:nvSpPr>
           <p:spPr>
             <a:xfrm>
-              <a:off x="1172049" y="1896563"/>
-              <a:ext cx="5142139" cy="3545293"/>
+              <a:off x="1172049" y="2073503"/>
+              <a:ext cx="5142139" cy="3381360"/>
             </a:xfrm>
             <a:custGeom>
               <a:avLst/>
               <a:pathLst>
-                <a:path w="5142139" h="3545293">
+                <a:path w="5142139" h="3381360">
                   <a:moveTo>
-                    <a:pt x="0" y="3545293"/>
+                    <a:pt x="0" y="3381360"/>
                   </a:moveTo>
                   <a:lnTo>
-                    <a:pt x="71622" y="3539888"/>
-                  </a:lnTo>
-                  <a:lnTo>
-                    <a:pt x="143245" y="3534211"/>
-                  </a:lnTo>
-                  <a:lnTo>
-                    <a:pt x="214867" y="3528248"/>
-                  </a:lnTo>
-                  <a:lnTo>
-                    <a:pt x="286490" y="3521984"/>
-                  </a:lnTo>
-                  <a:lnTo>
-                    <a:pt x="358112" y="3515405"/>
-                  </a:lnTo>
-                  <a:lnTo>
-                    <a:pt x="429735" y="3508495"/>
-                  </a:lnTo>
-                  <a:lnTo>
-                    <a:pt x="501357" y="3501237"/>
-                  </a:lnTo>
-                  <a:lnTo>
-                    <a:pt x="572980" y="3493613"/>
-                  </a:lnTo>
-                  <a:lnTo>
-                    <a:pt x="644602" y="3485606"/>
-                  </a:lnTo>
-                  <a:lnTo>
-                    <a:pt x="716225" y="3477196"/>
-                  </a:lnTo>
-                  <a:lnTo>
-                    <a:pt x="787847" y="3468361"/>
-                  </a:lnTo>
-                  <a:lnTo>
-                    <a:pt x="859470" y="3459083"/>
-                  </a:lnTo>
-                  <a:lnTo>
-                    <a:pt x="931092" y="3449337"/>
-                  </a:lnTo>
-                  <a:lnTo>
-                    <a:pt x="1002715" y="3439100"/>
-                  </a:lnTo>
-                  <a:lnTo>
-                    <a:pt x="1074337" y="3428347"/>
-                  </a:lnTo>
-                  <a:lnTo>
-                    <a:pt x="1145960" y="3417054"/>
-                  </a:lnTo>
-                  <a:lnTo>
-                    <a:pt x="1217582" y="3405192"/>
-                  </a:lnTo>
-                  <a:lnTo>
-                    <a:pt x="1289205" y="3392732"/>
-                  </a:lnTo>
-                  <a:lnTo>
-                    <a:pt x="1360827" y="3379645"/>
-                  </a:lnTo>
-                  <a:lnTo>
-                    <a:pt x="1432450" y="3365899"/>
-                  </a:lnTo>
-                  <a:lnTo>
-                    <a:pt x="1504073" y="3351461"/>
-                  </a:lnTo>
-                  <a:lnTo>
-                    <a:pt x="1575695" y="3336296"/>
-                  </a:lnTo>
-                  <a:lnTo>
-                    <a:pt x="1647318" y="3320368"/>
-                  </a:lnTo>
-                  <a:lnTo>
-                    <a:pt x="1718940" y="3303637"/>
-                  </a:lnTo>
-                  <a:lnTo>
-                    <a:pt x="1790563" y="3286064"/>
-                  </a:lnTo>
-                  <a:lnTo>
-                    <a:pt x="1862185" y="3267606"/>
-                  </a:lnTo>
-                  <a:lnTo>
-                    <a:pt x="1933808" y="3248219"/>
-                  </a:lnTo>
-                  <a:lnTo>
-                    <a:pt x="2005430" y="3227856"/>
-                  </a:lnTo>
-                  <a:lnTo>
-                    <a:pt x="2077053" y="3206467"/>
-                  </a:lnTo>
-                  <a:lnTo>
-                    <a:pt x="2148675" y="3184002"/>
-                  </a:lnTo>
-                  <a:lnTo>
-                    <a:pt x="2220298" y="3160405"/>
-                  </a:lnTo>
-                  <a:lnTo>
-                    <a:pt x="2291920" y="3135620"/>
-                  </a:lnTo>
-                  <a:lnTo>
-                    <a:pt x="2363543" y="3109587"/>
-                  </a:lnTo>
-                  <a:lnTo>
-                    <a:pt x="2435165" y="3082243"/>
-                  </a:lnTo>
-                  <a:lnTo>
-                    <a:pt x="2506788" y="3053523"/>
-                  </a:lnTo>
-                  <a:lnTo>
-                    <a:pt x="2578410" y="3023356"/>
-                  </a:lnTo>
-                  <a:lnTo>
-                    <a:pt x="2650033" y="2991671"/>
-                  </a:lnTo>
-                  <a:lnTo>
-                    <a:pt x="2721655" y="2958390"/>
-                  </a:lnTo>
-                  <a:lnTo>
-                    <a:pt x="2793278" y="2923433"/>
-                  </a:lnTo>
-                  <a:lnTo>
-                    <a:pt x="2864901" y="2886716"/>
-                  </a:lnTo>
-                  <a:lnTo>
-                    <a:pt x="2936523" y="2848151"/>
-                  </a:lnTo>
-                  <a:lnTo>
-                    <a:pt x="3008146" y="2807643"/>
-                  </a:lnTo>
-                  <a:lnTo>
-                    <a:pt x="3079768" y="2765096"/>
-                  </a:lnTo>
-                  <a:lnTo>
-                    <a:pt x="3151391" y="2720407"/>
-                  </a:lnTo>
-                  <a:lnTo>
-                    <a:pt x="3223013" y="2673468"/>
-                  </a:lnTo>
-                  <a:lnTo>
-                    <a:pt x="3294636" y="2624165"/>
-                  </a:lnTo>
-                  <a:lnTo>
-                    <a:pt x="3366258" y="2572379"/>
-                  </a:lnTo>
-                  <a:lnTo>
-                    <a:pt x="3437881" y="2517986"/>
-                  </a:lnTo>
-                  <a:lnTo>
-                    <a:pt x="3509503" y="2460855"/>
-                  </a:lnTo>
-                  <a:lnTo>
-                    <a:pt x="3581126" y="2400846"/>
-                  </a:lnTo>
-                  <a:lnTo>
-                    <a:pt x="3652748" y="2337817"/>
-                  </a:lnTo>
-                  <a:lnTo>
-                    <a:pt x="3724371" y="2271613"/>
-                  </a:lnTo>
-                  <a:lnTo>
-                    <a:pt x="3795993" y="2202076"/>
-                  </a:lnTo>
-                  <a:lnTo>
-                    <a:pt x="3867616" y="2129038"/>
-                  </a:lnTo>
-                  <a:lnTo>
-                    <a:pt x="3939238" y="2052322"/>
-                  </a:lnTo>
-                  <a:lnTo>
-                    <a:pt x="4010861" y="1971744"/>
-                  </a:lnTo>
-                  <a:lnTo>
-                    <a:pt x="4082483" y="1887108"/>
-                  </a:lnTo>
-                  <a:lnTo>
-                    <a:pt x="4154106" y="1798211"/>
-                  </a:lnTo>
-                  <a:lnTo>
-                    <a:pt x="4225729" y="1704837"/>
-                  </a:lnTo>
-                  <a:lnTo>
-                    <a:pt x="4297351" y="1606762"/>
-                  </a:lnTo>
-                  <a:lnTo>
-                    <a:pt x="4368974" y="1503749"/>
-                  </a:lnTo>
-                  <a:lnTo>
-                    <a:pt x="4440596" y="1395549"/>
-                  </a:lnTo>
-                  <a:lnTo>
-                    <a:pt x="4512219" y="1281901"/>
-                  </a:lnTo>
-                  <a:lnTo>
-                    <a:pt x="4583841" y="1162531"/>
-                  </a:lnTo>
-                  <a:lnTo>
-                    <a:pt x="4655464" y="1037150"/>
-                  </a:lnTo>
-                  <a:lnTo>
-                    <a:pt x="4727086" y="905456"/>
-                  </a:lnTo>
-                  <a:lnTo>
-                    <a:pt x="4798709" y="767131"/>
-                  </a:lnTo>
-                  <a:lnTo>
-                    <a:pt x="4870331" y="621841"/>
-                  </a:lnTo>
-                  <a:lnTo>
-                    <a:pt x="4941954" y="469236"/>
-                  </a:lnTo>
-                  <a:lnTo>
-                    <a:pt x="5013576" y="308947"/>
-                  </a:lnTo>
-                  <a:lnTo>
-                    <a:pt x="5085199" y="140587"/>
+                    <a:pt x="71622" y="3376205"/>
+                  </a:lnTo>
+                  <a:lnTo>
+                    <a:pt x="143245" y="3370790"/>
+                  </a:lnTo>
+                  <a:lnTo>
+                    <a:pt x="214867" y="3365103"/>
+                  </a:lnTo>
+                  <a:lnTo>
+                    <a:pt x="286490" y="3359129"/>
+                  </a:lnTo>
+                  <a:lnTo>
+                    <a:pt x="358112" y="3352854"/>
+                  </a:lnTo>
+                  <a:lnTo>
+                    <a:pt x="429735" y="3346264"/>
+                  </a:lnTo>
+                  <a:lnTo>
+                    <a:pt x="501357" y="3339341"/>
+                  </a:lnTo>
+                  <a:lnTo>
+                    <a:pt x="572980" y="3332070"/>
+                  </a:lnTo>
+                  <a:lnTo>
+                    <a:pt x="644602" y="3324433"/>
+                  </a:lnTo>
+                  <a:lnTo>
+                    <a:pt x="716225" y="3316411"/>
+                  </a:lnTo>
+                  <a:lnTo>
+                    <a:pt x="787847" y="3307986"/>
+                  </a:lnTo>
+                  <a:lnTo>
+                    <a:pt x="859470" y="3299136"/>
+                  </a:lnTo>
+                  <a:lnTo>
+                    <a:pt x="931092" y="3289840"/>
+                  </a:lnTo>
+                  <a:lnTo>
+                    <a:pt x="1002715" y="3280077"/>
+                  </a:lnTo>
+                  <a:lnTo>
+                    <a:pt x="1074337" y="3269822"/>
+                  </a:lnTo>
+                  <a:lnTo>
+                    <a:pt x="1145960" y="3259051"/>
+                  </a:lnTo>
+                  <a:lnTo>
+                    <a:pt x="1217582" y="3247737"/>
+                  </a:lnTo>
+                  <a:lnTo>
+                    <a:pt x="1289205" y="3235853"/>
+                  </a:lnTo>
+                  <a:lnTo>
+                    <a:pt x="1360827" y="3223372"/>
+                  </a:lnTo>
+                  <a:lnTo>
+                    <a:pt x="1432450" y="3210261"/>
+                  </a:lnTo>
+                  <a:lnTo>
+                    <a:pt x="1504073" y="3196491"/>
+                  </a:lnTo>
+                  <a:lnTo>
+                    <a:pt x="1575695" y="3182027"/>
+                  </a:lnTo>
+                  <a:lnTo>
+                    <a:pt x="1647318" y="3166835"/>
+                  </a:lnTo>
+                  <a:lnTo>
+                    <a:pt x="1718940" y="3150878"/>
+                  </a:lnTo>
+                  <a:lnTo>
+                    <a:pt x="1790563" y="3134118"/>
+                  </a:lnTo>
+                  <a:lnTo>
+                    <a:pt x="1862185" y="3116514"/>
+                  </a:lnTo>
+                  <a:lnTo>
+                    <a:pt x="1933808" y="3098023"/>
+                  </a:lnTo>
+                  <a:lnTo>
+                    <a:pt x="2005430" y="3078601"/>
+                  </a:lnTo>
+                  <a:lnTo>
+                    <a:pt x="2077053" y="3058201"/>
+                  </a:lnTo>
+                  <a:lnTo>
+                    <a:pt x="2148675" y="3036775"/>
+                  </a:lnTo>
+                  <a:lnTo>
+                    <a:pt x="2220298" y="3014269"/>
+                  </a:lnTo>
+                  <a:lnTo>
+                    <a:pt x="2291920" y="2990630"/>
+                  </a:lnTo>
+                  <a:lnTo>
+                    <a:pt x="2363543" y="2965801"/>
+                  </a:lnTo>
+                  <a:lnTo>
+                    <a:pt x="2435165" y="2939722"/>
+                  </a:lnTo>
+                  <a:lnTo>
+                    <a:pt x="2506788" y="2912329"/>
+                  </a:lnTo>
+                  <a:lnTo>
+                    <a:pt x="2578410" y="2883557"/>
+                  </a:lnTo>
+                  <a:lnTo>
+                    <a:pt x="2650033" y="2853337"/>
+                  </a:lnTo>
+                  <a:lnTo>
+                    <a:pt x="2721655" y="2821595"/>
+                  </a:lnTo>
+                  <a:lnTo>
+                    <a:pt x="2793278" y="2788255"/>
+                  </a:lnTo>
+                  <a:lnTo>
+                    <a:pt x="2864901" y="2753236"/>
+                  </a:lnTo>
+                  <a:lnTo>
+                    <a:pt x="2936523" y="2716453"/>
+                  </a:lnTo>
+                  <a:lnTo>
+                    <a:pt x="3008146" y="2677819"/>
+                  </a:lnTo>
+                  <a:lnTo>
+                    <a:pt x="3079768" y="2637239"/>
+                  </a:lnTo>
+                  <a:lnTo>
+                    <a:pt x="3151391" y="2594616"/>
+                  </a:lnTo>
+                  <a:lnTo>
+                    <a:pt x="3223013" y="2549847"/>
+                  </a:lnTo>
+                  <a:lnTo>
+                    <a:pt x="3294636" y="2502824"/>
+                  </a:lnTo>
+                  <a:lnTo>
+                    <a:pt x="3366258" y="2453433"/>
+                  </a:lnTo>
+                  <a:lnTo>
+                    <a:pt x="3437881" y="2401556"/>
+                  </a:lnTo>
+                  <a:lnTo>
+                    <a:pt x="3509503" y="2347066"/>
+                  </a:lnTo>
+                  <a:lnTo>
+                    <a:pt x="3581126" y="2289832"/>
+                  </a:lnTo>
+                  <a:lnTo>
+                    <a:pt x="3652748" y="2229717"/>
+                  </a:lnTo>
+                  <a:lnTo>
+                    <a:pt x="3724371" y="2166575"/>
+                  </a:lnTo>
+                  <a:lnTo>
+                    <a:pt x="3795993" y="2100253"/>
+                  </a:lnTo>
+                  <a:lnTo>
+                    <a:pt x="3867616" y="2030592"/>
+                  </a:lnTo>
+                  <a:lnTo>
+                    <a:pt x="3939238" y="1957424"/>
+                  </a:lnTo>
+                  <a:lnTo>
+                    <a:pt x="4010861" y="1880571"/>
+                  </a:lnTo>
+                  <a:lnTo>
+                    <a:pt x="4082483" y="1799849"/>
+                  </a:lnTo>
+                  <a:lnTo>
+                    <a:pt x="4154106" y="1715062"/>
+                  </a:lnTo>
+                  <a:lnTo>
+                    <a:pt x="4225729" y="1626006"/>
+                  </a:lnTo>
+                  <a:lnTo>
+                    <a:pt x="4297351" y="1532466"/>
+                  </a:lnTo>
+                  <a:lnTo>
+                    <a:pt x="4368974" y="1434216"/>
+                  </a:lnTo>
+                  <a:lnTo>
+                    <a:pt x="4440596" y="1331020"/>
+                  </a:lnTo>
+                  <a:lnTo>
+                    <a:pt x="4512219" y="1222627"/>
+                  </a:lnTo>
+                  <a:lnTo>
+                    <a:pt x="4583841" y="1108776"/>
+                  </a:lnTo>
+                  <a:lnTo>
+                    <a:pt x="4655464" y="989193"/>
+                  </a:lnTo>
+                  <a:lnTo>
+                    <a:pt x="4727086" y="863588"/>
+                  </a:lnTo>
+                  <a:lnTo>
+                    <a:pt x="4798709" y="731659"/>
+                  </a:lnTo>
+                  <a:lnTo>
+                    <a:pt x="4870331" y="593088"/>
+                  </a:lnTo>
+                  <a:lnTo>
+                    <a:pt x="4941954" y="447539"/>
+                  </a:lnTo>
+                  <a:lnTo>
+                    <a:pt x="5013576" y="294661"/>
+                  </a:lnTo>
+                  <a:lnTo>
+                    <a:pt x="5085199" y="134086"/>
                   </a:lnTo>
                   <a:lnTo>
                     <a:pt x="5142139" y="0"/>
@@ -4428,7 +4428,7 @@
           </p:nvSpPr>
           <p:spPr>
             <a:xfrm>
-              <a:off x="817517" y="4679530"/>
+              <a:off x="817517" y="4727786"/>
               <a:ext cx="7799693" cy="0"/>
             </a:xfrm>
             <a:custGeom>
@@ -4471,15 +4471,15 @@
           </p:nvSpPr>
           <p:spPr>
             <a:xfrm>
-              <a:off x="4222163" y="1896563"/>
-              <a:ext cx="0" cy="3826579"/>
+              <a:off x="4222163" y="2073503"/>
+              <a:ext cx="0" cy="3649639"/>
             </a:xfrm>
             <a:custGeom>
               <a:avLst/>
               <a:pathLst>
-                <a:path w="0" h="3826579">
+                <a:path w="0" h="3649639">
                   <a:moveTo>
-                    <a:pt x="0" y="3826579"/>
+                    <a:pt x="0" y="3649639"/>
                   </a:moveTo>
                   <a:lnTo>
                     <a:pt x="0" y="0"/>
@@ -4514,7 +4514,7 @@
           </p:nvSpPr>
           <p:spPr>
             <a:xfrm>
-              <a:off x="692708" y="5509156"/>
+              <a:off x="692708" y="5517199"/>
               <a:ext cx="62179" cy="80101"/>
             </a:xfrm>
             <a:prstGeom prst="rect">
@@ -4560,7 +4560,7 @@
           </p:nvSpPr>
           <p:spPr>
             <a:xfrm>
-              <a:off x="692708" y="4639479"/>
+              <a:off x="692708" y="4687735"/>
               <a:ext cx="62179" cy="80101"/>
             </a:xfrm>
             <a:prstGeom prst="rect">
@@ -4606,7 +4606,7 @@
           </p:nvSpPr>
           <p:spPr>
             <a:xfrm>
-              <a:off x="692708" y="3769802"/>
+              <a:off x="692708" y="3858272"/>
               <a:ext cx="62179" cy="80101"/>
             </a:xfrm>
             <a:prstGeom prst="rect">
@@ -4652,7 +4652,7 @@
           </p:nvSpPr>
           <p:spPr>
             <a:xfrm>
-              <a:off x="692708" y="2900125"/>
+              <a:off x="692708" y="3028808"/>
               <a:ext cx="62179" cy="80101"/>
             </a:xfrm>
             <a:prstGeom prst="rect">
@@ -4698,7 +4698,7 @@
           </p:nvSpPr>
           <p:spPr>
             <a:xfrm>
-              <a:off x="692708" y="2030448"/>
+              <a:off x="692708" y="2199345"/>
               <a:ext cx="62179" cy="80101"/>
             </a:xfrm>
             <a:prstGeom prst="rect">
@@ -5066,7 +5066,7 @@
           </p:nvSpPr>
           <p:spPr>
             <a:xfrm rot="-5400000">
-              <a:off x="68446" y="3759743"/>
+              <a:off x="68446" y="3848213"/>
               <a:ext cx="1016904" cy="100218"/>
             </a:xfrm>
             <a:prstGeom prst="rect">
@@ -5107,6 +5107,52 @@
         <p:sp>
           <p:nvSpPr>
             <p:cNvPr id="43" name="tx43"/>
+            <p:cNvSpPr/>
+            <p:nvPr/>
+          </p:nvSpPr>
+          <p:spPr>
+            <a:xfrm>
+              <a:off x="817517" y="1896563"/>
+              <a:ext cx="4433376" cy="82021"/>
+            </a:xfrm>
+            <a:prstGeom prst="rect">
+              <a:avLst/>
+            </a:prstGeom>
+            <a:noFill/>
+          </p:spPr>
+          <p:txBody>
+            <a:bodyPr lIns="0" rIns="0" tIns="0" bIns="0" anchorCtr="1" anchor="ctr" wrap="none"/>
+            <a:lstStyle/>
+            <a:p>
+              <a:pPr algn="l" marL="0" marR="0" indent="0">
+                <a:lnSpc>
+                  <a:spcPts val="900"/>
+                </a:lnSpc>
+                <a:spcBef>
+                  <a:spcPts val="0"/>
+                </a:spcBef>
+                <a:spcAft>
+                  <a:spcPts val="0"/>
+                </a:spcAft>
+              </a:pPr>
+              <a:r>
+                <a:rPr sz="900">
+                  <a:solidFill>
+                    <a:srgbClr val="404040">
+                      <a:alpha val="100000"/>
+                    </a:srgbClr>
+                  </a:solidFill>
+                  <a:latin typeface="Helvetica"/>
+                  <a:cs typeface="Helvetica"/>
+                </a:rPr>
+                <a:t>subHR = 1.60 (95% CI 1.09-2.34), p = 0.017   (per 25 mg increase in dose discrepancy)</a:t>
+              </a:r>
+            </a:p>
+          </p:txBody>
+        </p:sp>
+        <p:sp>
+          <p:nvSpPr>
+            <p:cNvPr id="44" name="tx44"/>
             <p:cNvSpPr/>
             <p:nvPr/>
           </p:nvSpPr>

--- a/docs/plots/carbo/jx_carbo_linsubhr_dosedisc_throm3.pptx
+++ b/docs/plots/carbo/jx_carbo_linsubhr_dosedisc_throm3.pptx
@@ -2271,26 +2271,26 @@
           </p:nvSpPr>
           <p:spPr>
             <a:xfrm>
-              <a:off x="817517" y="5142518"/>
-              <a:ext cx="7799693" cy="0"/>
+              <a:off x="915645" y="5071743"/>
+              <a:ext cx="7682587" cy="0"/>
             </a:xfrm>
             <a:custGeom>
               <a:avLst/>
               <a:pathLst>
-                <a:path w="7799693" h="0">
+                <a:path w="7682587" h="0">
                   <a:moveTo>
                     <a:pt x="0" y="0"/>
                   </a:moveTo>
                   <a:lnTo>
-                    <a:pt x="7799693" y="0"/>
-                  </a:lnTo>
-                  <a:lnTo>
-                    <a:pt x="7799693" y="0"/>
+                    <a:pt x="7682587" y="0"/>
+                  </a:lnTo>
+                  <a:lnTo>
+                    <a:pt x="7682587" y="0"/>
                   </a:lnTo>
                 </a:path>
               </a:pathLst>
             </a:custGeom>
-            <a:ln w="6775" cap="flat">
+            <a:ln w="8623" cap="flat">
               <a:solidFill>
                 <a:srgbClr val="EBEBEB">
                   <a:alpha val="100000"/>
@@ -2314,26 +2314,26 @@
           </p:nvSpPr>
           <p:spPr>
             <a:xfrm>
-              <a:off x="817517" y="4313054"/>
-              <a:ext cx="7799693" cy="0"/>
+              <a:off x="915645" y="4298074"/>
+              <a:ext cx="7682587" cy="0"/>
             </a:xfrm>
             <a:custGeom>
               <a:avLst/>
               <a:pathLst>
-                <a:path w="7799693" h="0">
+                <a:path w="7682587" h="0">
                   <a:moveTo>
                     <a:pt x="0" y="0"/>
                   </a:moveTo>
                   <a:lnTo>
-                    <a:pt x="7799693" y="0"/>
-                  </a:lnTo>
-                  <a:lnTo>
-                    <a:pt x="7799693" y="0"/>
+                    <a:pt x="7682587" y="0"/>
+                  </a:lnTo>
+                  <a:lnTo>
+                    <a:pt x="7682587" y="0"/>
                   </a:lnTo>
                 </a:path>
               </a:pathLst>
             </a:custGeom>
-            <a:ln w="6775" cap="flat">
+            <a:ln w="8623" cap="flat">
               <a:solidFill>
                 <a:srgbClr val="EBEBEB">
                   <a:alpha val="100000"/>
@@ -2357,26 +2357,26 @@
           </p:nvSpPr>
           <p:spPr>
             <a:xfrm>
-              <a:off x="817517" y="3483591"/>
-              <a:ext cx="7799693" cy="0"/>
+              <a:off x="915645" y="3524405"/>
+              <a:ext cx="7682587" cy="0"/>
             </a:xfrm>
             <a:custGeom>
               <a:avLst/>
               <a:pathLst>
-                <a:path w="7799693" h="0">
+                <a:path w="7682587" h="0">
                   <a:moveTo>
                     <a:pt x="0" y="0"/>
                   </a:moveTo>
                   <a:lnTo>
-                    <a:pt x="7799693" y="0"/>
-                  </a:lnTo>
-                  <a:lnTo>
-                    <a:pt x="7799693" y="0"/>
+                    <a:pt x="7682587" y="0"/>
+                  </a:lnTo>
+                  <a:lnTo>
+                    <a:pt x="7682587" y="0"/>
                   </a:lnTo>
                 </a:path>
               </a:pathLst>
             </a:custGeom>
-            <a:ln w="6775" cap="flat">
+            <a:ln w="8623" cap="flat">
               <a:solidFill>
                 <a:srgbClr val="EBEBEB">
                   <a:alpha val="100000"/>
@@ -2400,26 +2400,26 @@
           </p:nvSpPr>
           <p:spPr>
             <a:xfrm>
-              <a:off x="817517" y="2654127"/>
-              <a:ext cx="7799693" cy="0"/>
+              <a:off x="915645" y="2750737"/>
+              <a:ext cx="7682587" cy="0"/>
             </a:xfrm>
             <a:custGeom>
               <a:avLst/>
               <a:pathLst>
-                <a:path w="7799693" h="0">
+                <a:path w="7682587" h="0">
                   <a:moveTo>
                     <a:pt x="0" y="0"/>
                   </a:moveTo>
                   <a:lnTo>
-                    <a:pt x="7799693" y="0"/>
-                  </a:lnTo>
-                  <a:lnTo>
-                    <a:pt x="7799693" y="0"/>
+                    <a:pt x="7682587" y="0"/>
+                  </a:lnTo>
+                  <a:lnTo>
+                    <a:pt x="7682587" y="0"/>
                   </a:lnTo>
                 </a:path>
               </a:pathLst>
             </a:custGeom>
-            <a:ln w="6775" cap="flat">
+            <a:ln w="8623" cap="flat">
               <a:solidFill>
                 <a:srgbClr val="EBEBEB">
                   <a:alpha val="100000"/>
@@ -2443,15 +2443,15 @@
           </p:nvSpPr>
           <p:spPr>
             <a:xfrm>
-              <a:off x="2122745" y="2073503"/>
-              <a:ext cx="0" cy="3649639"/>
+              <a:off x="2201275" y="2209169"/>
+              <a:ext cx="0" cy="3404141"/>
             </a:xfrm>
             <a:custGeom>
               <a:avLst/>
               <a:pathLst>
-                <a:path w="0" h="3649639">
+                <a:path w="0" h="3404141">
                   <a:moveTo>
-                    <a:pt x="0" y="3649639"/>
+                    <a:pt x="0" y="3404141"/>
                   </a:moveTo>
                   <a:lnTo>
                     <a:pt x="0" y="0"/>
@@ -2462,7 +2462,7 @@
                 </a:path>
               </a:pathLst>
             </a:custGeom>
-            <a:ln w="6775" cap="flat">
+            <a:ln w="8623" cap="flat">
               <a:solidFill>
                 <a:srgbClr val="EBEBEB">
                   <a:alpha val="100000"/>
@@ -2486,15 +2486,15 @@
           </p:nvSpPr>
           <p:spPr>
             <a:xfrm>
-              <a:off x="3487174" y="2073503"/>
-              <a:ext cx="0" cy="3649639"/>
+              <a:off x="3545219" y="2209169"/>
+              <a:ext cx="0" cy="3404141"/>
             </a:xfrm>
             <a:custGeom>
               <a:avLst/>
               <a:pathLst>
-                <a:path w="0" h="3649639">
+                <a:path w="0" h="3404141">
                   <a:moveTo>
-                    <a:pt x="0" y="3649639"/>
+                    <a:pt x="0" y="3404141"/>
                   </a:moveTo>
                   <a:lnTo>
                     <a:pt x="0" y="0"/>
@@ -2505,7 +2505,7 @@
                 </a:path>
               </a:pathLst>
             </a:custGeom>
-            <a:ln w="6775" cap="flat">
+            <a:ln w="8623" cap="flat">
               <a:solidFill>
                 <a:srgbClr val="EBEBEB">
                   <a:alpha val="100000"/>
@@ -2529,15 +2529,15 @@
           </p:nvSpPr>
           <p:spPr>
             <a:xfrm>
-              <a:off x="4851604" y="2073503"/>
-              <a:ext cx="0" cy="3649639"/>
+              <a:off x="4889163" y="2209169"/>
+              <a:ext cx="0" cy="3404141"/>
             </a:xfrm>
             <a:custGeom>
               <a:avLst/>
               <a:pathLst>
-                <a:path w="0" h="3649639">
+                <a:path w="0" h="3404141">
                   <a:moveTo>
-                    <a:pt x="0" y="3649639"/>
+                    <a:pt x="0" y="3404141"/>
                   </a:moveTo>
                   <a:lnTo>
                     <a:pt x="0" y="0"/>
@@ -2548,7 +2548,7 @@
                 </a:path>
               </a:pathLst>
             </a:custGeom>
-            <a:ln w="6775" cap="flat">
+            <a:ln w="8623" cap="flat">
               <a:solidFill>
                 <a:srgbClr val="EBEBEB">
                   <a:alpha val="100000"/>
@@ -2572,15 +2572,15 @@
           </p:nvSpPr>
           <p:spPr>
             <a:xfrm>
-              <a:off x="6216034" y="2073503"/>
-              <a:ext cx="0" cy="3649639"/>
+              <a:off x="6233107" y="2209169"/>
+              <a:ext cx="0" cy="3404141"/>
             </a:xfrm>
             <a:custGeom>
               <a:avLst/>
               <a:pathLst>
-                <a:path w="0" h="3649639">
+                <a:path w="0" h="3404141">
                   <a:moveTo>
-                    <a:pt x="0" y="3649639"/>
+                    <a:pt x="0" y="3404141"/>
                   </a:moveTo>
                   <a:lnTo>
                     <a:pt x="0" y="0"/>
@@ -2591,7 +2591,7 @@
                 </a:path>
               </a:pathLst>
             </a:custGeom>
-            <a:ln w="6775" cap="flat">
+            <a:ln w="8623" cap="flat">
               <a:solidFill>
                 <a:srgbClr val="EBEBEB">
                   <a:alpha val="100000"/>
@@ -2615,15 +2615,15 @@
           </p:nvSpPr>
           <p:spPr>
             <a:xfrm>
-              <a:off x="7580464" y="2073503"/>
-              <a:ext cx="0" cy="3649639"/>
+              <a:off x="7577051" y="2209169"/>
+              <a:ext cx="0" cy="3404141"/>
             </a:xfrm>
             <a:custGeom>
               <a:avLst/>
               <a:pathLst>
-                <a:path w="0" h="3649639">
+                <a:path w="0" h="3404141">
                   <a:moveTo>
-                    <a:pt x="0" y="3649639"/>
+                    <a:pt x="0" y="3404141"/>
                   </a:moveTo>
                   <a:lnTo>
                     <a:pt x="0" y="0"/>
@@ -2634,7 +2634,7 @@
                 </a:path>
               </a:pathLst>
             </a:custGeom>
-            <a:ln w="6775" cap="flat">
+            <a:ln w="8623" cap="flat">
               <a:solidFill>
                 <a:srgbClr val="EBEBEB">
                   <a:alpha val="100000"/>
@@ -2658,26 +2658,26 @@
           </p:nvSpPr>
           <p:spPr>
             <a:xfrm>
-              <a:off x="817517" y="5557249"/>
-              <a:ext cx="7799693" cy="0"/>
+              <a:off x="915645" y="5458577"/>
+              <a:ext cx="7682587" cy="0"/>
             </a:xfrm>
             <a:custGeom>
               <a:avLst/>
               <a:pathLst>
-                <a:path w="7799693" h="0">
+                <a:path w="7682587" h="0">
                   <a:moveTo>
                     <a:pt x="0" y="0"/>
                   </a:moveTo>
                   <a:lnTo>
-                    <a:pt x="7799693" y="0"/>
-                  </a:lnTo>
-                  <a:lnTo>
-                    <a:pt x="7799693" y="0"/>
+                    <a:pt x="7682587" y="0"/>
+                  </a:lnTo>
+                  <a:lnTo>
+                    <a:pt x="7682587" y="0"/>
                   </a:lnTo>
                 </a:path>
               </a:pathLst>
             </a:custGeom>
-            <a:ln w="13550" cap="flat">
+            <a:ln w="17246" cap="flat">
               <a:solidFill>
                 <a:srgbClr val="EBEBEB">
                   <a:alpha val="100000"/>
@@ -2701,26 +2701,26 @@
           </p:nvSpPr>
           <p:spPr>
             <a:xfrm>
-              <a:off x="817517" y="4727786"/>
-              <a:ext cx="7799693" cy="0"/>
+              <a:off x="915645" y="4684908"/>
+              <a:ext cx="7682587" cy="0"/>
             </a:xfrm>
             <a:custGeom>
               <a:avLst/>
               <a:pathLst>
-                <a:path w="7799693" h="0">
+                <a:path w="7682587" h="0">
                   <a:moveTo>
                     <a:pt x="0" y="0"/>
                   </a:moveTo>
                   <a:lnTo>
-                    <a:pt x="7799693" y="0"/>
-                  </a:lnTo>
-                  <a:lnTo>
-                    <a:pt x="7799693" y="0"/>
+                    <a:pt x="7682587" y="0"/>
+                  </a:lnTo>
+                  <a:lnTo>
+                    <a:pt x="7682587" y="0"/>
                   </a:lnTo>
                 </a:path>
               </a:pathLst>
             </a:custGeom>
-            <a:ln w="13550" cap="flat">
+            <a:ln w="17246" cap="flat">
               <a:solidFill>
                 <a:srgbClr val="EBEBEB">
                   <a:alpha val="100000"/>
@@ -2744,26 +2744,26 @@
           </p:nvSpPr>
           <p:spPr>
             <a:xfrm>
-              <a:off x="817517" y="3898322"/>
-              <a:ext cx="7799693" cy="0"/>
+              <a:off x="915645" y="3911240"/>
+              <a:ext cx="7682587" cy="0"/>
             </a:xfrm>
             <a:custGeom>
               <a:avLst/>
               <a:pathLst>
-                <a:path w="7799693" h="0">
+                <a:path w="7682587" h="0">
                   <a:moveTo>
                     <a:pt x="0" y="0"/>
                   </a:moveTo>
                   <a:lnTo>
-                    <a:pt x="7799693" y="0"/>
-                  </a:lnTo>
-                  <a:lnTo>
-                    <a:pt x="7799693" y="0"/>
+                    <a:pt x="7682587" y="0"/>
+                  </a:lnTo>
+                  <a:lnTo>
+                    <a:pt x="7682587" y="0"/>
                   </a:lnTo>
                 </a:path>
               </a:pathLst>
             </a:custGeom>
-            <a:ln w="13550" cap="flat">
+            <a:ln w="17246" cap="flat">
               <a:solidFill>
                 <a:srgbClr val="EBEBEB">
                   <a:alpha val="100000"/>
@@ -2787,26 +2787,26 @@
           </p:nvSpPr>
           <p:spPr>
             <a:xfrm>
-              <a:off x="817517" y="3068859"/>
-              <a:ext cx="7799693" cy="0"/>
+              <a:off x="915645" y="3137571"/>
+              <a:ext cx="7682587" cy="0"/>
             </a:xfrm>
             <a:custGeom>
               <a:avLst/>
               <a:pathLst>
-                <a:path w="7799693" h="0">
+                <a:path w="7682587" h="0">
                   <a:moveTo>
                     <a:pt x="0" y="0"/>
                   </a:moveTo>
                   <a:lnTo>
-                    <a:pt x="7799693" y="0"/>
-                  </a:lnTo>
-                  <a:lnTo>
-                    <a:pt x="7799693" y="0"/>
+                    <a:pt x="7682587" y="0"/>
+                  </a:lnTo>
+                  <a:lnTo>
+                    <a:pt x="7682587" y="0"/>
                   </a:lnTo>
                 </a:path>
               </a:pathLst>
             </a:custGeom>
-            <a:ln w="13550" cap="flat">
+            <a:ln w="17246" cap="flat">
               <a:solidFill>
                 <a:srgbClr val="EBEBEB">
                   <a:alpha val="100000"/>
@@ -2830,26 +2830,26 @@
           </p:nvSpPr>
           <p:spPr>
             <a:xfrm>
-              <a:off x="817517" y="2239395"/>
-              <a:ext cx="7799693" cy="0"/>
+              <a:off x="915645" y="2363903"/>
+              <a:ext cx="7682587" cy="0"/>
             </a:xfrm>
             <a:custGeom>
               <a:avLst/>
               <a:pathLst>
-                <a:path w="7799693" h="0">
+                <a:path w="7682587" h="0">
                   <a:moveTo>
                     <a:pt x="0" y="0"/>
                   </a:moveTo>
                   <a:lnTo>
-                    <a:pt x="7799693" y="0"/>
-                  </a:lnTo>
-                  <a:lnTo>
-                    <a:pt x="7799693" y="0"/>
+                    <a:pt x="7682587" y="0"/>
+                  </a:lnTo>
+                  <a:lnTo>
+                    <a:pt x="7682587" y="0"/>
                   </a:lnTo>
                 </a:path>
               </a:pathLst>
             </a:custGeom>
-            <a:ln w="13550" cap="flat">
+            <a:ln w="17246" cap="flat">
               <a:solidFill>
                 <a:srgbClr val="EBEBEB">
                   <a:alpha val="100000"/>
@@ -2873,15 +2873,15 @@
           </p:nvSpPr>
           <p:spPr>
             <a:xfrm>
-              <a:off x="1440530" y="2073503"/>
-              <a:ext cx="0" cy="3649639"/>
+              <a:off x="1529303" y="2209169"/>
+              <a:ext cx="0" cy="3404141"/>
             </a:xfrm>
             <a:custGeom>
               <a:avLst/>
               <a:pathLst>
-                <a:path w="0" h="3649639">
+                <a:path w="0" h="3404141">
                   <a:moveTo>
-                    <a:pt x="0" y="3649639"/>
+                    <a:pt x="0" y="3404141"/>
                   </a:moveTo>
                   <a:lnTo>
                     <a:pt x="0" y="0"/>
@@ -2892,7 +2892,7 @@
                 </a:path>
               </a:pathLst>
             </a:custGeom>
-            <a:ln w="13550" cap="flat">
+            <a:ln w="17246" cap="flat">
               <a:solidFill>
                 <a:srgbClr val="EBEBEB">
                   <a:alpha val="100000"/>
@@ -2916,15 +2916,15 @@
           </p:nvSpPr>
           <p:spPr>
             <a:xfrm>
-              <a:off x="2804959" y="2073503"/>
-              <a:ext cx="0" cy="3649639"/>
+              <a:off x="2873247" y="2209169"/>
+              <a:ext cx="0" cy="3404141"/>
             </a:xfrm>
             <a:custGeom>
               <a:avLst/>
               <a:pathLst>
-                <a:path w="0" h="3649639">
+                <a:path w="0" h="3404141">
                   <a:moveTo>
-                    <a:pt x="0" y="3649639"/>
+                    <a:pt x="0" y="3404141"/>
                   </a:moveTo>
                   <a:lnTo>
                     <a:pt x="0" y="0"/>
@@ -2935,7 +2935,7 @@
                 </a:path>
               </a:pathLst>
             </a:custGeom>
-            <a:ln w="13550" cap="flat">
+            <a:ln w="17246" cap="flat">
               <a:solidFill>
                 <a:srgbClr val="EBEBEB">
                   <a:alpha val="100000"/>
@@ -2959,15 +2959,15 @@
           </p:nvSpPr>
           <p:spPr>
             <a:xfrm>
-              <a:off x="4169389" y="2073503"/>
-              <a:ext cx="0" cy="3649639"/>
+              <a:off x="4217191" y="2209169"/>
+              <a:ext cx="0" cy="3404141"/>
             </a:xfrm>
             <a:custGeom>
               <a:avLst/>
               <a:pathLst>
-                <a:path w="0" h="3649639">
+                <a:path w="0" h="3404141">
                   <a:moveTo>
-                    <a:pt x="0" y="3649639"/>
+                    <a:pt x="0" y="3404141"/>
                   </a:moveTo>
                   <a:lnTo>
                     <a:pt x="0" y="0"/>
@@ -2978,7 +2978,7 @@
                 </a:path>
               </a:pathLst>
             </a:custGeom>
-            <a:ln w="13550" cap="flat">
+            <a:ln w="17246" cap="flat">
               <a:solidFill>
                 <a:srgbClr val="EBEBEB">
                   <a:alpha val="100000"/>
@@ -3002,15 +3002,15 @@
           </p:nvSpPr>
           <p:spPr>
             <a:xfrm>
-              <a:off x="5533819" y="2073503"/>
-              <a:ext cx="0" cy="3649639"/>
+              <a:off x="5561135" y="2209169"/>
+              <a:ext cx="0" cy="3404141"/>
             </a:xfrm>
             <a:custGeom>
               <a:avLst/>
               <a:pathLst>
-                <a:path w="0" h="3649639">
+                <a:path w="0" h="3404141">
                   <a:moveTo>
-                    <a:pt x="0" y="3649639"/>
+                    <a:pt x="0" y="3404141"/>
                   </a:moveTo>
                   <a:lnTo>
                     <a:pt x="0" y="0"/>
@@ -3021,7 +3021,7 @@
                 </a:path>
               </a:pathLst>
             </a:custGeom>
-            <a:ln w="13550" cap="flat">
+            <a:ln w="17246" cap="flat">
               <a:solidFill>
                 <a:srgbClr val="EBEBEB">
                   <a:alpha val="100000"/>
@@ -3045,15 +3045,15 @@
           </p:nvSpPr>
           <p:spPr>
             <a:xfrm>
-              <a:off x="6898249" y="2073503"/>
-              <a:ext cx="0" cy="3649639"/>
+              <a:off x="6905079" y="2209169"/>
+              <a:ext cx="0" cy="3404141"/>
             </a:xfrm>
             <a:custGeom>
               <a:avLst/>
               <a:pathLst>
-                <a:path w="0" h="3649639">
+                <a:path w="0" h="3404141">
                   <a:moveTo>
-                    <a:pt x="0" y="3649639"/>
+                    <a:pt x="0" y="3404141"/>
                   </a:moveTo>
                   <a:lnTo>
                     <a:pt x="0" y="0"/>
@@ -3064,7 +3064,7 @@
                 </a:path>
               </a:pathLst>
             </a:custGeom>
-            <a:ln w="13550" cap="flat">
+            <a:ln w="17246" cap="flat">
               <a:solidFill>
                 <a:srgbClr val="EBEBEB">
                   <a:alpha val="100000"/>
@@ -3088,15 +3088,15 @@
           </p:nvSpPr>
           <p:spPr>
             <a:xfrm>
-              <a:off x="8262679" y="2073503"/>
-              <a:ext cx="0" cy="3649639"/>
+              <a:off x="8249023" y="2209169"/>
+              <a:ext cx="0" cy="3404141"/>
             </a:xfrm>
             <a:custGeom>
               <a:avLst/>
               <a:pathLst>
-                <a:path w="0" h="3649639">
+                <a:path w="0" h="3404141">
                   <a:moveTo>
-                    <a:pt x="0" y="3649639"/>
+                    <a:pt x="0" y="3404141"/>
                   </a:moveTo>
                   <a:lnTo>
                     <a:pt x="0" y="0"/>
@@ -3107,7 +3107,7 @@
                 </a:path>
               </a:pathLst>
             </a:custGeom>
-            <a:ln w="13550" cap="flat">
+            <a:ln w="17246" cap="flat">
               <a:solidFill>
                 <a:srgbClr val="EBEBEB">
                   <a:alpha val="100000"/>
@@ -3131,495 +3131,495 @@
           </p:nvSpPr>
           <p:spPr>
             <a:xfrm>
-              <a:off x="1172049" y="2073503"/>
-              <a:ext cx="7090630" cy="3465375"/>
+              <a:off x="1264853" y="2209169"/>
+              <a:ext cx="6984170" cy="3232272"/>
             </a:xfrm>
             <a:custGeom>
               <a:avLst/>
               <a:pathLst>
-                <a:path w="7090630" h="3465375">
+                <a:path w="6984170" h="3232272">
                   <a:moveTo>
-                    <a:pt x="0" y="2913139"/>
+                    <a:pt x="0" y="2717183"/>
                   </a:moveTo>
                   <a:lnTo>
-                    <a:pt x="71622" y="2908105"/>
-                  </a:lnTo>
-                  <a:lnTo>
-                    <a:pt x="143245" y="2903026"/>
-                  </a:lnTo>
-                  <a:lnTo>
-                    <a:pt x="214867" y="2897903"/>
-                  </a:lnTo>
-                  <a:lnTo>
-                    <a:pt x="286490" y="2892734"/>
-                  </a:lnTo>
-                  <a:lnTo>
-                    <a:pt x="358112" y="2887520"/>
-                  </a:lnTo>
-                  <a:lnTo>
-                    <a:pt x="429735" y="2882259"/>
-                  </a:lnTo>
-                  <a:lnTo>
-                    <a:pt x="501357" y="2876952"/>
-                  </a:lnTo>
-                  <a:lnTo>
-                    <a:pt x="572980" y="2871599"/>
-                  </a:lnTo>
-                  <a:lnTo>
-                    <a:pt x="644602" y="2866198"/>
-                  </a:lnTo>
-                  <a:lnTo>
-                    <a:pt x="716225" y="2860750"/>
-                  </a:lnTo>
-                  <a:lnTo>
-                    <a:pt x="787847" y="2855253"/>
-                  </a:lnTo>
-                  <a:lnTo>
-                    <a:pt x="859470" y="2849708"/>
-                  </a:lnTo>
-                  <a:lnTo>
-                    <a:pt x="931092" y="2844114"/>
-                  </a:lnTo>
-                  <a:lnTo>
-                    <a:pt x="1002715" y="2838471"/>
-                  </a:lnTo>
-                  <a:lnTo>
-                    <a:pt x="1074337" y="2832777"/>
-                  </a:lnTo>
-                  <a:lnTo>
-                    <a:pt x="1145960" y="2827034"/>
-                  </a:lnTo>
-                  <a:lnTo>
-                    <a:pt x="1217582" y="2821240"/>
-                  </a:lnTo>
-                  <a:lnTo>
-                    <a:pt x="1289205" y="2815395"/>
-                  </a:lnTo>
-                  <a:lnTo>
-                    <a:pt x="1360827" y="2809498"/>
-                  </a:lnTo>
-                  <a:lnTo>
-                    <a:pt x="1432450" y="2803550"/>
-                  </a:lnTo>
-                  <a:lnTo>
-                    <a:pt x="1504073" y="2797548"/>
-                  </a:lnTo>
-                  <a:lnTo>
-                    <a:pt x="1575695" y="2791494"/>
-                  </a:lnTo>
-                  <a:lnTo>
-                    <a:pt x="1647318" y="2785387"/>
-                  </a:lnTo>
-                  <a:lnTo>
-                    <a:pt x="1718940" y="2779225"/>
-                  </a:lnTo>
-                  <a:lnTo>
-                    <a:pt x="1790563" y="2773009"/>
-                  </a:lnTo>
-                  <a:lnTo>
-                    <a:pt x="1862185" y="2766739"/>
-                  </a:lnTo>
-                  <a:lnTo>
-                    <a:pt x="1933808" y="2760413"/>
-                  </a:lnTo>
-                  <a:lnTo>
-                    <a:pt x="2005430" y="2754031"/>
-                  </a:lnTo>
-                  <a:lnTo>
-                    <a:pt x="2077053" y="2747593"/>
-                  </a:lnTo>
-                  <a:lnTo>
-                    <a:pt x="2148675" y="2741098"/>
-                  </a:lnTo>
-                  <a:lnTo>
-                    <a:pt x="2220298" y="2734546"/>
-                  </a:lnTo>
-                  <a:lnTo>
-                    <a:pt x="2291920" y="2727935"/>
-                  </a:lnTo>
-                  <a:lnTo>
-                    <a:pt x="2363543" y="2721267"/>
-                  </a:lnTo>
-                  <a:lnTo>
-                    <a:pt x="2435165" y="2714540"/>
-                  </a:lnTo>
-                  <a:lnTo>
-                    <a:pt x="2506788" y="2707753"/>
-                  </a:lnTo>
-                  <a:lnTo>
-                    <a:pt x="2578410" y="2700907"/>
-                  </a:lnTo>
-                  <a:lnTo>
-                    <a:pt x="2650033" y="2694000"/>
-                  </a:lnTo>
-                  <a:lnTo>
-                    <a:pt x="2721655" y="2687032"/>
-                  </a:lnTo>
-                  <a:lnTo>
-                    <a:pt x="2793278" y="2680003"/>
-                  </a:lnTo>
-                  <a:lnTo>
-                    <a:pt x="2864901" y="2672912"/>
-                  </a:lnTo>
-                  <a:lnTo>
-                    <a:pt x="2936523" y="2665758"/>
-                  </a:lnTo>
-                  <a:lnTo>
-                    <a:pt x="3008146" y="2658541"/>
-                  </a:lnTo>
-                  <a:lnTo>
-                    <a:pt x="3079768" y="2622982"/>
-                  </a:lnTo>
-                  <a:lnTo>
-                    <a:pt x="3151391" y="2542423"/>
-                  </a:lnTo>
-                  <a:lnTo>
-                    <a:pt x="3223013" y="2454325"/>
-                  </a:lnTo>
-                  <a:lnTo>
-                    <a:pt x="3294636" y="2357982"/>
-                  </a:lnTo>
-                  <a:lnTo>
-                    <a:pt x="3366258" y="2252622"/>
-                  </a:lnTo>
-                  <a:lnTo>
-                    <a:pt x="3437881" y="2137401"/>
-                  </a:lnTo>
-                  <a:lnTo>
-                    <a:pt x="3509503" y="2011397"/>
-                  </a:lnTo>
-                  <a:lnTo>
-                    <a:pt x="3581126" y="1873600"/>
-                  </a:lnTo>
-                  <a:lnTo>
-                    <a:pt x="3652748" y="1722907"/>
-                  </a:lnTo>
-                  <a:lnTo>
-                    <a:pt x="3724371" y="1558110"/>
-                  </a:lnTo>
-                  <a:lnTo>
-                    <a:pt x="3795993" y="1377891"/>
-                  </a:lnTo>
-                  <a:lnTo>
-                    <a:pt x="3867616" y="1180804"/>
-                  </a:lnTo>
-                  <a:lnTo>
-                    <a:pt x="3939238" y="965273"/>
-                  </a:lnTo>
-                  <a:lnTo>
-                    <a:pt x="4010861" y="729569"/>
-                  </a:lnTo>
-                  <a:lnTo>
-                    <a:pt x="4082483" y="471807"/>
-                  </a:lnTo>
-                  <a:lnTo>
-                    <a:pt x="4154106" y="189920"/>
-                  </a:lnTo>
-                  <a:lnTo>
-                    <a:pt x="4198232" y="0"/>
-                  </a:lnTo>
-                  <a:lnTo>
-                    <a:pt x="7090630" y="0"/>
-                  </a:lnTo>
-                  <a:lnTo>
-                    <a:pt x="7090630" y="2122271"/>
-                  </a:lnTo>
-                  <a:lnTo>
-                    <a:pt x="7019007" y="2134178"/>
-                  </a:lnTo>
-                  <a:lnTo>
-                    <a:pt x="6947385" y="2145981"/>
-                  </a:lnTo>
-                  <a:lnTo>
-                    <a:pt x="6875762" y="2157680"/>
-                  </a:lnTo>
-                  <a:lnTo>
-                    <a:pt x="6804139" y="2169277"/>
-                  </a:lnTo>
-                  <a:lnTo>
-                    <a:pt x="6732517" y="2180773"/>
-                  </a:lnTo>
-                  <a:lnTo>
-                    <a:pt x="6660894" y="2192169"/>
-                  </a:lnTo>
-                  <a:lnTo>
-                    <a:pt x="6589272" y="2203464"/>
-                  </a:lnTo>
-                  <a:lnTo>
-                    <a:pt x="6517649" y="2214661"/>
-                  </a:lnTo>
-                  <a:lnTo>
-                    <a:pt x="6446027" y="2225760"/>
-                  </a:lnTo>
-                  <a:lnTo>
-                    <a:pt x="6374404" y="2236762"/>
-                  </a:lnTo>
-                  <a:lnTo>
-                    <a:pt x="6302782" y="2247667"/>
-                  </a:lnTo>
-                  <a:lnTo>
-                    <a:pt x="6231159" y="2258478"/>
-                  </a:lnTo>
-                  <a:lnTo>
-                    <a:pt x="6159537" y="2269193"/>
-                  </a:lnTo>
-                  <a:lnTo>
-                    <a:pt x="6087914" y="2279815"/>
-                  </a:lnTo>
-                  <a:lnTo>
-                    <a:pt x="6016292" y="2290345"/>
-                  </a:lnTo>
-                  <a:lnTo>
-                    <a:pt x="5944669" y="2300782"/>
-                  </a:lnTo>
-                  <a:lnTo>
-                    <a:pt x="5873047" y="2311127"/>
-                  </a:lnTo>
-                  <a:lnTo>
-                    <a:pt x="5801424" y="2321383"/>
-                  </a:lnTo>
-                  <a:lnTo>
-                    <a:pt x="5729802" y="2331548"/>
-                  </a:lnTo>
-                  <a:lnTo>
-                    <a:pt x="5658179" y="2341625"/>
-                  </a:lnTo>
-                  <a:lnTo>
-                    <a:pt x="5586557" y="2351613"/>
-                  </a:lnTo>
-                  <a:lnTo>
-                    <a:pt x="5514934" y="2361515"/>
-                  </a:lnTo>
-                  <a:lnTo>
-                    <a:pt x="5443311" y="2371329"/>
-                  </a:lnTo>
-                  <a:lnTo>
-                    <a:pt x="5371689" y="2381058"/>
-                  </a:lnTo>
-                  <a:lnTo>
-                    <a:pt x="5300066" y="2390702"/>
-                  </a:lnTo>
-                  <a:lnTo>
-                    <a:pt x="5228444" y="2400261"/>
-                  </a:lnTo>
-                  <a:lnTo>
-                    <a:pt x="5156821" y="2409737"/>
-                  </a:lnTo>
-                  <a:lnTo>
-                    <a:pt x="5085199" y="2419130"/>
-                  </a:lnTo>
-                  <a:lnTo>
-                    <a:pt x="5013576" y="2428440"/>
-                  </a:lnTo>
-                  <a:lnTo>
-                    <a:pt x="4941954" y="2437670"/>
-                  </a:lnTo>
-                  <a:lnTo>
-                    <a:pt x="4870331" y="2446818"/>
-                  </a:lnTo>
-                  <a:lnTo>
-                    <a:pt x="4798709" y="2455887"/>
-                  </a:lnTo>
-                  <a:lnTo>
-                    <a:pt x="4727086" y="2464876"/>
-                  </a:lnTo>
-                  <a:lnTo>
-                    <a:pt x="4655464" y="2473787"/>
-                  </a:lnTo>
-                  <a:lnTo>
-                    <a:pt x="4583841" y="2482619"/>
-                  </a:lnTo>
-                  <a:lnTo>
-                    <a:pt x="4512219" y="2491375"/>
-                  </a:lnTo>
-                  <a:lnTo>
-                    <a:pt x="4440596" y="2500054"/>
-                  </a:lnTo>
-                  <a:lnTo>
-                    <a:pt x="4368974" y="2508657"/>
-                  </a:lnTo>
-                  <a:lnTo>
-                    <a:pt x="4297351" y="2517184"/>
-                  </a:lnTo>
-                  <a:lnTo>
-                    <a:pt x="4225729" y="2525638"/>
-                  </a:lnTo>
-                  <a:lnTo>
-                    <a:pt x="4154106" y="2534017"/>
-                  </a:lnTo>
-                  <a:lnTo>
-                    <a:pt x="4082483" y="2542323"/>
-                  </a:lnTo>
-                  <a:lnTo>
-                    <a:pt x="4010861" y="2550556"/>
-                  </a:lnTo>
-                  <a:lnTo>
-                    <a:pt x="3939238" y="2558717"/>
-                  </a:lnTo>
-                  <a:lnTo>
-                    <a:pt x="3867616" y="2566807"/>
-                  </a:lnTo>
-                  <a:lnTo>
-                    <a:pt x="3795993" y="2574827"/>
-                  </a:lnTo>
-                  <a:lnTo>
-                    <a:pt x="3724371" y="2582776"/>
-                  </a:lnTo>
-                  <a:lnTo>
-                    <a:pt x="3652748" y="2590655"/>
-                  </a:lnTo>
-                  <a:lnTo>
-                    <a:pt x="3581126" y="2598466"/>
-                  </a:lnTo>
-                  <a:lnTo>
-                    <a:pt x="3509503" y="2606208"/>
-                  </a:lnTo>
-                  <a:lnTo>
-                    <a:pt x="3437881" y="2613883"/>
-                  </a:lnTo>
-                  <a:lnTo>
-                    <a:pt x="3366258" y="2621490"/>
-                  </a:lnTo>
-                  <a:lnTo>
-                    <a:pt x="3294636" y="2629031"/>
-                  </a:lnTo>
-                  <a:lnTo>
-                    <a:pt x="3223013" y="2636506"/>
-                  </a:lnTo>
-                  <a:lnTo>
-                    <a:pt x="3151391" y="2643916"/>
-                  </a:lnTo>
-                  <a:lnTo>
-                    <a:pt x="3079768" y="2651261"/>
-                  </a:lnTo>
-                  <a:lnTo>
-                    <a:pt x="3008146" y="2696646"/>
-                  </a:lnTo>
-                  <a:lnTo>
-                    <a:pt x="2936523" y="2764007"/>
-                  </a:lnTo>
-                  <a:lnTo>
-                    <a:pt x="2864901" y="2825602"/>
-                  </a:lnTo>
-                  <a:lnTo>
-                    <a:pt x="2793278" y="2881926"/>
-                  </a:lnTo>
-                  <a:lnTo>
-                    <a:pt x="2721655" y="2933430"/>
-                  </a:lnTo>
-                  <a:lnTo>
-                    <a:pt x="2650033" y="2980526"/>
-                  </a:lnTo>
-                  <a:lnTo>
-                    <a:pt x="2578410" y="3023592"/>
-                  </a:lnTo>
-                  <a:lnTo>
-                    <a:pt x="2506788" y="3062972"/>
-                  </a:lnTo>
-                  <a:lnTo>
-                    <a:pt x="2435165" y="3098982"/>
-                  </a:lnTo>
-                  <a:lnTo>
-                    <a:pt x="2363543" y="3131910"/>
-                  </a:lnTo>
-                  <a:lnTo>
-                    <a:pt x="2291920" y="3162021"/>
-                  </a:lnTo>
-                  <a:lnTo>
-                    <a:pt x="2220298" y="3189554"/>
-                  </a:lnTo>
-                  <a:lnTo>
-                    <a:pt x="2148675" y="3214731"/>
-                  </a:lnTo>
-                  <a:lnTo>
-                    <a:pt x="2077053" y="3237754"/>
-                  </a:lnTo>
-                  <a:lnTo>
-                    <a:pt x="2005430" y="3258806"/>
-                  </a:lnTo>
-                  <a:lnTo>
-                    <a:pt x="1933808" y="3278056"/>
-                  </a:lnTo>
-                  <a:lnTo>
-                    <a:pt x="1862185" y="3295659"/>
-                  </a:lnTo>
-                  <a:lnTo>
-                    <a:pt x="1790563" y="3311756"/>
-                  </a:lnTo>
-                  <a:lnTo>
-                    <a:pt x="1718940" y="3326475"/>
-                  </a:lnTo>
-                  <a:lnTo>
-                    <a:pt x="1647318" y="3339934"/>
-                  </a:lnTo>
-                  <a:lnTo>
-                    <a:pt x="1575695" y="3352242"/>
-                  </a:lnTo>
-                  <a:lnTo>
-                    <a:pt x="1504073" y="3363496"/>
-                  </a:lnTo>
-                  <a:lnTo>
-                    <a:pt x="1432450" y="3373787"/>
-                  </a:lnTo>
-                  <a:lnTo>
-                    <a:pt x="1360827" y="3383197"/>
-                  </a:lnTo>
-                  <a:lnTo>
-                    <a:pt x="1289205" y="3391802"/>
-                  </a:lnTo>
-                  <a:lnTo>
-                    <a:pt x="1217582" y="3399671"/>
-                  </a:lnTo>
-                  <a:lnTo>
-                    <a:pt x="1145960" y="3406866"/>
-                  </a:lnTo>
-                  <a:lnTo>
-                    <a:pt x="1074337" y="3413446"/>
-                  </a:lnTo>
-                  <a:lnTo>
-                    <a:pt x="1002715" y="3419462"/>
-                  </a:lnTo>
-                  <a:lnTo>
-                    <a:pt x="931092" y="3424963"/>
-                  </a:lnTo>
-                  <a:lnTo>
-                    <a:pt x="859470" y="3429994"/>
-                  </a:lnTo>
-                  <a:lnTo>
-                    <a:pt x="787847" y="3434594"/>
-                  </a:lnTo>
-                  <a:lnTo>
-                    <a:pt x="716225" y="3438801"/>
-                  </a:lnTo>
-                  <a:lnTo>
-                    <a:pt x="644602" y="3442647"/>
-                  </a:lnTo>
-                  <a:lnTo>
-                    <a:pt x="572980" y="3446164"/>
-                  </a:lnTo>
-                  <a:lnTo>
-                    <a:pt x="501357" y="3449381"/>
-                  </a:lnTo>
-                  <a:lnTo>
-                    <a:pt x="429735" y="3452322"/>
-                  </a:lnTo>
-                  <a:lnTo>
-                    <a:pt x="358112" y="3455011"/>
-                  </a:lnTo>
-                  <a:lnTo>
-                    <a:pt x="286490" y="3457470"/>
-                  </a:lnTo>
-                  <a:lnTo>
-                    <a:pt x="214867" y="3459719"/>
-                  </a:lnTo>
-                  <a:lnTo>
-                    <a:pt x="143245" y="3461775"/>
-                  </a:lnTo>
-                  <a:lnTo>
-                    <a:pt x="71622" y="3463656"/>
-                  </a:lnTo>
-                  <a:lnTo>
-                    <a:pt x="0" y="3465375"/>
+                    <a:pt x="70547" y="2712487"/>
+                  </a:lnTo>
+                  <a:lnTo>
+                    <a:pt x="141094" y="2707750"/>
+                  </a:lnTo>
+                  <a:lnTo>
+                    <a:pt x="211641" y="2702971"/>
+                  </a:lnTo>
+                  <a:lnTo>
+                    <a:pt x="282188" y="2698150"/>
+                  </a:lnTo>
+                  <a:lnTo>
+                    <a:pt x="352735" y="2693287"/>
+                  </a:lnTo>
+                  <a:lnTo>
+                    <a:pt x="423283" y="2688380"/>
+                  </a:lnTo>
+                  <a:lnTo>
+                    <a:pt x="493830" y="2683430"/>
+                  </a:lnTo>
+                  <a:lnTo>
+                    <a:pt x="564377" y="2678437"/>
+                  </a:lnTo>
+                  <a:lnTo>
+                    <a:pt x="634924" y="2673399"/>
+                  </a:lnTo>
+                  <a:lnTo>
+                    <a:pt x="705471" y="2668317"/>
+                  </a:lnTo>
+                  <a:lnTo>
+                    <a:pt x="776018" y="2663191"/>
+                  </a:lnTo>
+                  <a:lnTo>
+                    <a:pt x="846566" y="2658018"/>
+                  </a:lnTo>
+                  <a:lnTo>
+                    <a:pt x="917113" y="2652801"/>
+                  </a:lnTo>
+                  <a:lnTo>
+                    <a:pt x="987660" y="2647537"/>
+                  </a:lnTo>
+                  <a:lnTo>
+                    <a:pt x="1058207" y="2642227"/>
+                  </a:lnTo>
+                  <a:lnTo>
+                    <a:pt x="1128754" y="2636870"/>
+                  </a:lnTo>
+                  <a:lnTo>
+                    <a:pt x="1199301" y="2631466"/>
+                  </a:lnTo>
+                  <a:lnTo>
+                    <a:pt x="1269849" y="2626014"/>
+                  </a:lnTo>
+                  <a:lnTo>
+                    <a:pt x="1340396" y="2620514"/>
+                  </a:lnTo>
+                  <a:lnTo>
+                    <a:pt x="1410943" y="2614965"/>
+                  </a:lnTo>
+                  <a:lnTo>
+                    <a:pt x="1481490" y="2609367"/>
+                  </a:lnTo>
+                  <a:lnTo>
+                    <a:pt x="1552037" y="2603721"/>
+                  </a:lnTo>
+                  <a:lnTo>
+                    <a:pt x="1622584" y="2598024"/>
+                  </a:lnTo>
+                  <a:lnTo>
+                    <a:pt x="1693132" y="2592277"/>
+                  </a:lnTo>
+                  <a:lnTo>
+                    <a:pt x="1763679" y="2586479"/>
+                  </a:lnTo>
+                  <a:lnTo>
+                    <a:pt x="1834226" y="2580630"/>
+                  </a:lnTo>
+                  <a:lnTo>
+                    <a:pt x="1904773" y="2574730"/>
+                  </a:lnTo>
+                  <a:lnTo>
+                    <a:pt x="1975320" y="2568777"/>
+                  </a:lnTo>
+                  <a:lnTo>
+                    <a:pt x="2045868" y="2562772"/>
+                  </a:lnTo>
+                  <a:lnTo>
+                    <a:pt x="2116415" y="2556714"/>
+                  </a:lnTo>
+                  <a:lnTo>
+                    <a:pt x="2186962" y="2550603"/>
+                  </a:lnTo>
+                  <a:lnTo>
+                    <a:pt x="2257509" y="2544437"/>
+                  </a:lnTo>
+                  <a:lnTo>
+                    <a:pt x="2328056" y="2538217"/>
+                  </a:lnTo>
+                  <a:lnTo>
+                    <a:pt x="2398603" y="2531943"/>
+                  </a:lnTo>
+                  <a:lnTo>
+                    <a:pt x="2469151" y="2525613"/>
+                  </a:lnTo>
+                  <a:lnTo>
+                    <a:pt x="2539698" y="2519227"/>
+                  </a:lnTo>
+                  <a:lnTo>
+                    <a:pt x="2610245" y="2512785"/>
+                  </a:lnTo>
+                  <a:lnTo>
+                    <a:pt x="2680792" y="2506286"/>
+                  </a:lnTo>
+                  <a:lnTo>
+                    <a:pt x="2751339" y="2499729"/>
+                  </a:lnTo>
+                  <a:lnTo>
+                    <a:pt x="2821886" y="2493115"/>
+                  </a:lnTo>
+                  <a:lnTo>
+                    <a:pt x="2892434" y="2486442"/>
+                  </a:lnTo>
+                  <a:lnTo>
+                    <a:pt x="2962981" y="2479711"/>
+                  </a:lnTo>
+                  <a:lnTo>
+                    <a:pt x="3033528" y="2446543"/>
+                  </a:lnTo>
+                  <a:lnTo>
+                    <a:pt x="3104075" y="2371404"/>
+                  </a:lnTo>
+                  <a:lnTo>
+                    <a:pt x="3174622" y="2289231"/>
+                  </a:lnTo>
+                  <a:lnTo>
+                    <a:pt x="3245169" y="2199369"/>
+                  </a:lnTo>
+                  <a:lnTo>
+                    <a:pt x="3315717" y="2101096"/>
+                  </a:lnTo>
+                  <a:lnTo>
+                    <a:pt x="3386264" y="1993626"/>
+                  </a:lnTo>
+                  <a:lnTo>
+                    <a:pt x="3456811" y="1876098"/>
+                  </a:lnTo>
+                  <a:lnTo>
+                    <a:pt x="3527358" y="1747570"/>
+                  </a:lnTo>
+                  <a:lnTo>
+                    <a:pt x="3597905" y="1607013"/>
+                  </a:lnTo>
+                  <a:lnTo>
+                    <a:pt x="3668452" y="1453302"/>
+                  </a:lnTo>
+                  <a:lnTo>
+                    <a:pt x="3739000" y="1285205"/>
+                  </a:lnTo>
+                  <a:lnTo>
+                    <a:pt x="3809547" y="1101376"/>
+                  </a:lnTo>
+                  <a:lnTo>
+                    <a:pt x="3880094" y="900342"/>
+                  </a:lnTo>
+                  <a:lnTo>
+                    <a:pt x="3950641" y="680494"/>
+                  </a:lnTo>
+                  <a:lnTo>
+                    <a:pt x="4021188" y="440070"/>
+                  </a:lnTo>
+                  <a:lnTo>
+                    <a:pt x="4091736" y="177145"/>
+                  </a:lnTo>
+                  <a:lnTo>
+                    <a:pt x="4135199" y="0"/>
+                  </a:lnTo>
+                  <a:lnTo>
+                    <a:pt x="6984170" y="0"/>
+                  </a:lnTo>
+                  <a:lnTo>
+                    <a:pt x="6984170" y="1979513"/>
+                  </a:lnTo>
+                  <a:lnTo>
+                    <a:pt x="6913622" y="1990619"/>
+                  </a:lnTo>
+                  <a:lnTo>
+                    <a:pt x="6843075" y="2001628"/>
+                  </a:lnTo>
+                  <a:lnTo>
+                    <a:pt x="6772528" y="2012541"/>
+                  </a:lnTo>
+                  <a:lnTo>
+                    <a:pt x="6701981" y="2023358"/>
+                  </a:lnTo>
+                  <a:lnTo>
+                    <a:pt x="6631434" y="2034081"/>
+                  </a:lnTo>
+                  <a:lnTo>
+                    <a:pt x="6560887" y="2044709"/>
+                  </a:lnTo>
+                  <a:lnTo>
+                    <a:pt x="6490339" y="2055245"/>
+                  </a:lnTo>
+                  <a:lnTo>
+                    <a:pt x="6419792" y="2065689"/>
+                  </a:lnTo>
+                  <a:lnTo>
+                    <a:pt x="6349245" y="2076041"/>
+                  </a:lnTo>
+                  <a:lnTo>
+                    <a:pt x="6278698" y="2086303"/>
+                  </a:lnTo>
+                  <a:lnTo>
+                    <a:pt x="6208151" y="2096475"/>
+                  </a:lnTo>
+                  <a:lnTo>
+                    <a:pt x="6137604" y="2106558"/>
+                  </a:lnTo>
+                  <a:lnTo>
+                    <a:pt x="6067056" y="2116553"/>
+                  </a:lnTo>
+                  <a:lnTo>
+                    <a:pt x="5996509" y="2126461"/>
+                  </a:lnTo>
+                  <a:lnTo>
+                    <a:pt x="5925962" y="2136281"/>
+                  </a:lnTo>
+                  <a:lnTo>
+                    <a:pt x="5855415" y="2146016"/>
+                  </a:lnTo>
+                  <a:lnTo>
+                    <a:pt x="5784868" y="2155666"/>
+                  </a:lnTo>
+                  <a:lnTo>
+                    <a:pt x="5714320" y="2165232"/>
+                  </a:lnTo>
+                  <a:lnTo>
+                    <a:pt x="5643773" y="2174713"/>
+                  </a:lnTo>
+                  <a:lnTo>
+                    <a:pt x="5573226" y="2184112"/>
+                  </a:lnTo>
+                  <a:lnTo>
+                    <a:pt x="5502679" y="2193429"/>
+                  </a:lnTo>
+                  <a:lnTo>
+                    <a:pt x="5432132" y="2202664"/>
+                  </a:lnTo>
+                  <a:lnTo>
+                    <a:pt x="5361585" y="2211819"/>
+                  </a:lnTo>
+                  <a:lnTo>
+                    <a:pt x="5291037" y="2220893"/>
+                  </a:lnTo>
+                  <a:lnTo>
+                    <a:pt x="5220490" y="2229888"/>
+                  </a:lnTo>
+                  <a:lnTo>
+                    <a:pt x="5149943" y="2238804"/>
+                  </a:lnTo>
+                  <a:lnTo>
+                    <a:pt x="5079396" y="2247643"/>
+                  </a:lnTo>
+                  <a:lnTo>
+                    <a:pt x="5008849" y="2256404"/>
+                  </a:lnTo>
+                  <a:lnTo>
+                    <a:pt x="4938302" y="2265088"/>
+                  </a:lnTo>
+                  <a:lnTo>
+                    <a:pt x="4867754" y="2273696"/>
+                  </a:lnTo>
+                  <a:lnTo>
+                    <a:pt x="4797207" y="2282230"/>
+                  </a:lnTo>
+                  <a:lnTo>
+                    <a:pt x="4726660" y="2290688"/>
+                  </a:lnTo>
+                  <a:lnTo>
+                    <a:pt x="4656113" y="2299073"/>
+                  </a:lnTo>
+                  <a:lnTo>
+                    <a:pt x="4585566" y="2307384"/>
+                  </a:lnTo>
+                  <a:lnTo>
+                    <a:pt x="4515019" y="2315623"/>
+                  </a:lnTo>
+                  <a:lnTo>
+                    <a:pt x="4444471" y="2323789"/>
+                  </a:lnTo>
+                  <a:lnTo>
+                    <a:pt x="4373924" y="2331884"/>
+                  </a:lnTo>
+                  <a:lnTo>
+                    <a:pt x="4303377" y="2339909"/>
+                  </a:lnTo>
+                  <a:lnTo>
+                    <a:pt x="4232830" y="2347863"/>
+                  </a:lnTo>
+                  <a:lnTo>
+                    <a:pt x="4162283" y="2355747"/>
+                  </a:lnTo>
+                  <a:lnTo>
+                    <a:pt x="4091736" y="2363563"/>
+                  </a:lnTo>
+                  <a:lnTo>
+                    <a:pt x="4021188" y="2371310"/>
+                  </a:lnTo>
+                  <a:lnTo>
+                    <a:pt x="3950641" y="2378990"/>
+                  </a:lnTo>
+                  <a:lnTo>
+                    <a:pt x="3880094" y="2386602"/>
+                  </a:lnTo>
+                  <a:lnTo>
+                    <a:pt x="3809547" y="2394148"/>
+                  </a:lnTo>
+                  <a:lnTo>
+                    <a:pt x="3739000" y="2401627"/>
+                  </a:lnTo>
+                  <a:lnTo>
+                    <a:pt x="3668452" y="2409042"/>
+                  </a:lnTo>
+                  <a:lnTo>
+                    <a:pt x="3597905" y="2416391"/>
+                  </a:lnTo>
+                  <a:lnTo>
+                    <a:pt x="3527358" y="2423677"/>
+                  </a:lnTo>
+                  <a:lnTo>
+                    <a:pt x="3456811" y="2430898"/>
+                  </a:lnTo>
+                  <a:lnTo>
+                    <a:pt x="3386264" y="2438056"/>
+                  </a:lnTo>
+                  <a:lnTo>
+                    <a:pt x="3315717" y="2445152"/>
+                  </a:lnTo>
+                  <a:lnTo>
+                    <a:pt x="3245169" y="2452186"/>
+                  </a:lnTo>
+                  <a:lnTo>
+                    <a:pt x="3174622" y="2459158"/>
+                  </a:lnTo>
+                  <a:lnTo>
+                    <a:pt x="3104075" y="2466069"/>
+                  </a:lnTo>
+                  <a:lnTo>
+                    <a:pt x="3033528" y="2472920"/>
+                  </a:lnTo>
+                  <a:lnTo>
+                    <a:pt x="2962981" y="2515253"/>
+                  </a:lnTo>
+                  <a:lnTo>
+                    <a:pt x="2892434" y="2578082"/>
+                  </a:lnTo>
+                  <a:lnTo>
+                    <a:pt x="2821886" y="2635534"/>
+                  </a:lnTo>
+                  <a:lnTo>
+                    <a:pt x="2751339" y="2688070"/>
+                  </a:lnTo>
+                  <a:lnTo>
+                    <a:pt x="2680792" y="2736109"/>
+                  </a:lnTo>
+                  <a:lnTo>
+                    <a:pt x="2610245" y="2780037"/>
+                  </a:lnTo>
+                  <a:lnTo>
+                    <a:pt x="2539698" y="2820206"/>
+                  </a:lnTo>
+                  <a:lnTo>
+                    <a:pt x="2469151" y="2856937"/>
+                  </a:lnTo>
+                  <a:lnTo>
+                    <a:pt x="2398603" y="2890525"/>
+                  </a:lnTo>
+                  <a:lnTo>
+                    <a:pt x="2328056" y="2921238"/>
+                  </a:lnTo>
+                  <a:lnTo>
+                    <a:pt x="2257509" y="2949323"/>
+                  </a:lnTo>
+                  <a:lnTo>
+                    <a:pt x="2186962" y="2975004"/>
+                  </a:lnTo>
+                  <a:lnTo>
+                    <a:pt x="2116415" y="2998488"/>
+                  </a:lnTo>
+                  <a:lnTo>
+                    <a:pt x="2045868" y="3019962"/>
+                  </a:lnTo>
+                  <a:lnTo>
+                    <a:pt x="1975320" y="3039598"/>
+                  </a:lnTo>
+                  <a:lnTo>
+                    <a:pt x="1904773" y="3057553"/>
+                  </a:lnTo>
+                  <a:lnTo>
+                    <a:pt x="1834226" y="3073972"/>
+                  </a:lnTo>
+                  <a:lnTo>
+                    <a:pt x="1763679" y="3088986"/>
+                  </a:lnTo>
+                  <a:lnTo>
+                    <a:pt x="1693132" y="3102715"/>
+                  </a:lnTo>
+                  <a:lnTo>
+                    <a:pt x="1622584" y="3115269"/>
+                  </a:lnTo>
+                  <a:lnTo>
+                    <a:pt x="1552037" y="3126749"/>
+                  </a:lnTo>
+                  <a:lnTo>
+                    <a:pt x="1481490" y="3137246"/>
+                  </a:lnTo>
+                  <a:lnTo>
+                    <a:pt x="1410943" y="3146845"/>
+                  </a:lnTo>
+                  <a:lnTo>
+                    <a:pt x="1340396" y="3155622"/>
+                  </a:lnTo>
+                  <a:lnTo>
+                    <a:pt x="1269849" y="3163648"/>
+                  </a:lnTo>
+                  <a:lnTo>
+                    <a:pt x="1199301" y="3170988"/>
+                  </a:lnTo>
+                  <a:lnTo>
+                    <a:pt x="1128754" y="3177699"/>
+                  </a:lnTo>
+                  <a:lnTo>
+                    <a:pt x="1058207" y="3183836"/>
+                  </a:lnTo>
+                  <a:lnTo>
+                    <a:pt x="987660" y="3189447"/>
+                  </a:lnTo>
+                  <a:lnTo>
+                    <a:pt x="917113" y="3194579"/>
+                  </a:lnTo>
+                  <a:lnTo>
+                    <a:pt x="846566" y="3199271"/>
+                  </a:lnTo>
+                  <a:lnTo>
+                    <a:pt x="776018" y="3203562"/>
+                  </a:lnTo>
+                  <a:lnTo>
+                    <a:pt x="705471" y="3207485"/>
+                  </a:lnTo>
+                  <a:lnTo>
+                    <a:pt x="634924" y="3211073"/>
+                  </a:lnTo>
+                  <a:lnTo>
+                    <a:pt x="564377" y="3214354"/>
+                  </a:lnTo>
+                  <a:lnTo>
+                    <a:pt x="493830" y="3217354"/>
+                  </a:lnTo>
+                  <a:lnTo>
+                    <a:pt x="423283" y="3220097"/>
+                  </a:lnTo>
+                  <a:lnTo>
+                    <a:pt x="352735" y="3222605"/>
+                  </a:lnTo>
+                  <a:lnTo>
+                    <a:pt x="282188" y="3224899"/>
+                  </a:lnTo>
+                  <a:lnTo>
+                    <a:pt x="211641" y="3226996"/>
+                  </a:lnTo>
+                  <a:lnTo>
+                    <a:pt x="141094" y="3228914"/>
+                  </a:lnTo>
+                  <a:lnTo>
+                    <a:pt x="70547" y="3230668"/>
+                  </a:lnTo>
+                  <a:lnTo>
+                    <a:pt x="0" y="3232272"/>
                   </a:lnTo>
                   <a:close/>
                 </a:path>
@@ -3645,192 +3645,192 @@
           </p:nvSpPr>
           <p:spPr>
             <a:xfrm>
-              <a:off x="1172049" y="2073503"/>
-              <a:ext cx="4198232" cy="2913139"/>
+              <a:off x="1264853" y="2209169"/>
+              <a:ext cx="4135199" cy="2717183"/>
             </a:xfrm>
             <a:custGeom>
               <a:avLst/>
               <a:pathLst>
-                <a:path w="4198232" h="2913139">
+                <a:path w="4135199" h="2717183">
                   <a:moveTo>
-                    <a:pt x="0" y="2913139"/>
+                    <a:pt x="0" y="2717183"/>
                   </a:moveTo>
                   <a:lnTo>
-                    <a:pt x="71622" y="2908105"/>
-                  </a:lnTo>
-                  <a:lnTo>
-                    <a:pt x="143245" y="2903026"/>
-                  </a:lnTo>
-                  <a:lnTo>
-                    <a:pt x="214867" y="2897903"/>
-                  </a:lnTo>
-                  <a:lnTo>
-                    <a:pt x="286490" y="2892734"/>
-                  </a:lnTo>
-                  <a:lnTo>
-                    <a:pt x="358112" y="2887520"/>
-                  </a:lnTo>
-                  <a:lnTo>
-                    <a:pt x="429735" y="2882259"/>
-                  </a:lnTo>
-                  <a:lnTo>
-                    <a:pt x="501357" y="2876952"/>
-                  </a:lnTo>
-                  <a:lnTo>
-                    <a:pt x="572980" y="2871599"/>
-                  </a:lnTo>
-                  <a:lnTo>
-                    <a:pt x="644602" y="2866198"/>
-                  </a:lnTo>
-                  <a:lnTo>
-                    <a:pt x="716225" y="2860750"/>
-                  </a:lnTo>
-                  <a:lnTo>
-                    <a:pt x="787847" y="2855253"/>
-                  </a:lnTo>
-                  <a:lnTo>
-                    <a:pt x="859470" y="2849708"/>
-                  </a:lnTo>
-                  <a:lnTo>
-                    <a:pt x="931092" y="2844114"/>
-                  </a:lnTo>
-                  <a:lnTo>
-                    <a:pt x="1002715" y="2838471"/>
-                  </a:lnTo>
-                  <a:lnTo>
-                    <a:pt x="1074337" y="2832777"/>
-                  </a:lnTo>
-                  <a:lnTo>
-                    <a:pt x="1145960" y="2827034"/>
-                  </a:lnTo>
-                  <a:lnTo>
-                    <a:pt x="1217582" y="2821240"/>
-                  </a:lnTo>
-                  <a:lnTo>
-                    <a:pt x="1289205" y="2815395"/>
-                  </a:lnTo>
-                  <a:lnTo>
-                    <a:pt x="1360827" y="2809498"/>
-                  </a:lnTo>
-                  <a:lnTo>
-                    <a:pt x="1432450" y="2803550"/>
-                  </a:lnTo>
-                  <a:lnTo>
-                    <a:pt x="1504073" y="2797548"/>
-                  </a:lnTo>
-                  <a:lnTo>
-                    <a:pt x="1575695" y="2791494"/>
-                  </a:lnTo>
-                  <a:lnTo>
-                    <a:pt x="1647318" y="2785387"/>
-                  </a:lnTo>
-                  <a:lnTo>
-                    <a:pt x="1718940" y="2779225"/>
-                  </a:lnTo>
-                  <a:lnTo>
-                    <a:pt x="1790563" y="2773009"/>
-                  </a:lnTo>
-                  <a:lnTo>
-                    <a:pt x="1862185" y="2766739"/>
-                  </a:lnTo>
-                  <a:lnTo>
-                    <a:pt x="1933808" y="2760413"/>
-                  </a:lnTo>
-                  <a:lnTo>
-                    <a:pt x="2005430" y="2754031"/>
-                  </a:lnTo>
-                  <a:lnTo>
-                    <a:pt x="2077053" y="2747593"/>
-                  </a:lnTo>
-                  <a:lnTo>
-                    <a:pt x="2148675" y="2741098"/>
-                  </a:lnTo>
-                  <a:lnTo>
-                    <a:pt x="2220298" y="2734546"/>
-                  </a:lnTo>
-                  <a:lnTo>
-                    <a:pt x="2291920" y="2727935"/>
-                  </a:lnTo>
-                  <a:lnTo>
-                    <a:pt x="2363543" y="2721267"/>
-                  </a:lnTo>
-                  <a:lnTo>
-                    <a:pt x="2435165" y="2714540"/>
-                  </a:lnTo>
-                  <a:lnTo>
-                    <a:pt x="2506788" y="2707753"/>
-                  </a:lnTo>
-                  <a:lnTo>
-                    <a:pt x="2578410" y="2700907"/>
-                  </a:lnTo>
-                  <a:lnTo>
-                    <a:pt x="2650033" y="2694000"/>
-                  </a:lnTo>
-                  <a:lnTo>
-                    <a:pt x="2721655" y="2687032"/>
-                  </a:lnTo>
-                  <a:lnTo>
-                    <a:pt x="2793278" y="2680003"/>
-                  </a:lnTo>
-                  <a:lnTo>
-                    <a:pt x="2864901" y="2672912"/>
-                  </a:lnTo>
-                  <a:lnTo>
-                    <a:pt x="2936523" y="2665758"/>
-                  </a:lnTo>
-                  <a:lnTo>
-                    <a:pt x="3008146" y="2658541"/>
-                  </a:lnTo>
-                  <a:lnTo>
-                    <a:pt x="3079768" y="2622982"/>
-                  </a:lnTo>
-                  <a:lnTo>
-                    <a:pt x="3151391" y="2542423"/>
-                  </a:lnTo>
-                  <a:lnTo>
-                    <a:pt x="3223013" y="2454325"/>
-                  </a:lnTo>
-                  <a:lnTo>
-                    <a:pt x="3294636" y="2357982"/>
-                  </a:lnTo>
-                  <a:lnTo>
-                    <a:pt x="3366258" y="2252622"/>
-                  </a:lnTo>
-                  <a:lnTo>
-                    <a:pt x="3437881" y="2137401"/>
-                  </a:lnTo>
-                  <a:lnTo>
-                    <a:pt x="3509503" y="2011397"/>
-                  </a:lnTo>
-                  <a:lnTo>
-                    <a:pt x="3581126" y="1873600"/>
-                  </a:lnTo>
-                  <a:lnTo>
-                    <a:pt x="3652748" y="1722907"/>
-                  </a:lnTo>
-                  <a:lnTo>
-                    <a:pt x="3724371" y="1558110"/>
-                  </a:lnTo>
-                  <a:lnTo>
-                    <a:pt x="3795993" y="1377891"/>
-                  </a:lnTo>
-                  <a:lnTo>
-                    <a:pt x="3867616" y="1180804"/>
-                  </a:lnTo>
-                  <a:lnTo>
-                    <a:pt x="3939238" y="965273"/>
-                  </a:lnTo>
-                  <a:lnTo>
-                    <a:pt x="4010861" y="729569"/>
-                  </a:lnTo>
-                  <a:lnTo>
-                    <a:pt x="4082483" y="471807"/>
-                  </a:lnTo>
-                  <a:lnTo>
-                    <a:pt x="4154106" y="189920"/>
-                  </a:lnTo>
-                  <a:lnTo>
-                    <a:pt x="4198232" y="0"/>
+                    <a:pt x="70547" y="2712487"/>
+                  </a:lnTo>
+                  <a:lnTo>
+                    <a:pt x="141094" y="2707750"/>
+                  </a:lnTo>
+                  <a:lnTo>
+                    <a:pt x="211641" y="2702971"/>
+                  </a:lnTo>
+                  <a:lnTo>
+                    <a:pt x="282188" y="2698150"/>
+                  </a:lnTo>
+                  <a:lnTo>
+                    <a:pt x="352735" y="2693287"/>
+                  </a:lnTo>
+                  <a:lnTo>
+                    <a:pt x="423283" y="2688380"/>
+                  </a:lnTo>
+                  <a:lnTo>
+                    <a:pt x="493830" y="2683430"/>
+                  </a:lnTo>
+                  <a:lnTo>
+                    <a:pt x="564377" y="2678437"/>
+                  </a:lnTo>
+                  <a:lnTo>
+                    <a:pt x="634924" y="2673399"/>
+                  </a:lnTo>
+                  <a:lnTo>
+                    <a:pt x="705471" y="2668317"/>
+                  </a:lnTo>
+                  <a:lnTo>
+                    <a:pt x="776018" y="2663191"/>
+                  </a:lnTo>
+                  <a:lnTo>
+                    <a:pt x="846566" y="2658018"/>
+                  </a:lnTo>
+                  <a:lnTo>
+                    <a:pt x="917113" y="2652801"/>
+                  </a:lnTo>
+                  <a:lnTo>
+                    <a:pt x="987660" y="2647537"/>
+                  </a:lnTo>
+                  <a:lnTo>
+                    <a:pt x="1058207" y="2642227"/>
+                  </a:lnTo>
+                  <a:lnTo>
+                    <a:pt x="1128754" y="2636870"/>
+                  </a:lnTo>
+                  <a:lnTo>
+                    <a:pt x="1199301" y="2631466"/>
+                  </a:lnTo>
+                  <a:lnTo>
+                    <a:pt x="1269849" y="2626014"/>
+                  </a:lnTo>
+                  <a:lnTo>
+                    <a:pt x="1340396" y="2620514"/>
+                  </a:lnTo>
+                  <a:lnTo>
+                    <a:pt x="1410943" y="2614965"/>
+                  </a:lnTo>
+                  <a:lnTo>
+                    <a:pt x="1481490" y="2609367"/>
+                  </a:lnTo>
+                  <a:lnTo>
+                    <a:pt x="1552037" y="2603721"/>
+                  </a:lnTo>
+                  <a:lnTo>
+                    <a:pt x="1622584" y="2598024"/>
+                  </a:lnTo>
+                  <a:lnTo>
+                    <a:pt x="1693132" y="2592277"/>
+                  </a:lnTo>
+                  <a:lnTo>
+                    <a:pt x="1763679" y="2586479"/>
+                  </a:lnTo>
+                  <a:lnTo>
+                    <a:pt x="1834226" y="2580630"/>
+                  </a:lnTo>
+                  <a:lnTo>
+                    <a:pt x="1904773" y="2574730"/>
+                  </a:lnTo>
+                  <a:lnTo>
+                    <a:pt x="1975320" y="2568777"/>
+                  </a:lnTo>
+                  <a:lnTo>
+                    <a:pt x="2045868" y="2562772"/>
+                  </a:lnTo>
+                  <a:lnTo>
+                    <a:pt x="2116415" y="2556714"/>
+                  </a:lnTo>
+                  <a:lnTo>
+                    <a:pt x="2186962" y="2550603"/>
+                  </a:lnTo>
+                  <a:lnTo>
+                    <a:pt x="2257509" y="2544437"/>
+                  </a:lnTo>
+                  <a:lnTo>
+                    <a:pt x="2328056" y="2538217"/>
+                  </a:lnTo>
+                  <a:lnTo>
+                    <a:pt x="2398603" y="2531943"/>
+                  </a:lnTo>
+                  <a:lnTo>
+                    <a:pt x="2469151" y="2525613"/>
+                  </a:lnTo>
+                  <a:lnTo>
+                    <a:pt x="2539698" y="2519227"/>
+                  </a:lnTo>
+                  <a:lnTo>
+                    <a:pt x="2610245" y="2512785"/>
+                  </a:lnTo>
+                  <a:lnTo>
+                    <a:pt x="2680792" y="2506286"/>
+                  </a:lnTo>
+                  <a:lnTo>
+                    <a:pt x="2751339" y="2499729"/>
+                  </a:lnTo>
+                  <a:lnTo>
+                    <a:pt x="2821886" y="2493115"/>
+                  </a:lnTo>
+                  <a:lnTo>
+                    <a:pt x="2892434" y="2486442"/>
+                  </a:lnTo>
+                  <a:lnTo>
+                    <a:pt x="2962981" y="2479711"/>
+                  </a:lnTo>
+                  <a:lnTo>
+                    <a:pt x="3033528" y="2446543"/>
+                  </a:lnTo>
+                  <a:lnTo>
+                    <a:pt x="3104075" y="2371404"/>
+                  </a:lnTo>
+                  <a:lnTo>
+                    <a:pt x="3174622" y="2289231"/>
+                  </a:lnTo>
+                  <a:lnTo>
+                    <a:pt x="3245169" y="2199369"/>
+                  </a:lnTo>
+                  <a:lnTo>
+                    <a:pt x="3315717" y="2101096"/>
+                  </a:lnTo>
+                  <a:lnTo>
+                    <a:pt x="3386264" y="1993626"/>
+                  </a:lnTo>
+                  <a:lnTo>
+                    <a:pt x="3456811" y="1876098"/>
+                  </a:lnTo>
+                  <a:lnTo>
+                    <a:pt x="3527358" y="1747570"/>
+                  </a:lnTo>
+                  <a:lnTo>
+                    <a:pt x="3597905" y="1607013"/>
+                  </a:lnTo>
+                  <a:lnTo>
+                    <a:pt x="3668452" y="1453302"/>
+                  </a:lnTo>
+                  <a:lnTo>
+                    <a:pt x="3739000" y="1285205"/>
+                  </a:lnTo>
+                  <a:lnTo>
+                    <a:pt x="3809547" y="1101376"/>
+                  </a:lnTo>
+                  <a:lnTo>
+                    <a:pt x="3880094" y="900342"/>
+                  </a:lnTo>
+                  <a:lnTo>
+                    <a:pt x="3950641" y="680494"/>
+                  </a:lnTo>
+                  <a:lnTo>
+                    <a:pt x="4021188" y="440070"/>
+                  </a:lnTo>
+                  <a:lnTo>
+                    <a:pt x="4091736" y="177145"/>
+                  </a:lnTo>
+                  <a:lnTo>
+                    <a:pt x="4135199" y="0"/>
                   </a:lnTo>
                 </a:path>
               </a:pathLst>
@@ -3850,312 +3850,312 @@
           </p:nvSpPr>
           <p:spPr>
             <a:xfrm>
-              <a:off x="1172049" y="4195774"/>
-              <a:ext cx="7090630" cy="1343104"/>
+              <a:off x="1264853" y="4188683"/>
+              <a:ext cx="6984170" cy="1252758"/>
             </a:xfrm>
             <a:custGeom>
               <a:avLst/>
               <a:pathLst>
-                <a:path w="7090630" h="1343104">
+                <a:path w="6984170" h="1252758">
                   <a:moveTo>
-                    <a:pt x="7090630" y="0"/>
+                    <a:pt x="6984170" y="0"/>
                   </a:moveTo>
                   <a:lnTo>
-                    <a:pt x="7019007" y="11906"/>
-                  </a:lnTo>
-                  <a:lnTo>
-                    <a:pt x="6947385" y="23709"/>
-                  </a:lnTo>
-                  <a:lnTo>
-                    <a:pt x="6875762" y="35409"/>
-                  </a:lnTo>
-                  <a:lnTo>
-                    <a:pt x="6804139" y="47006"/>
-                  </a:lnTo>
-                  <a:lnTo>
-                    <a:pt x="6732517" y="58502"/>
-                  </a:lnTo>
-                  <a:lnTo>
-                    <a:pt x="6660894" y="69897"/>
-                  </a:lnTo>
-                  <a:lnTo>
-                    <a:pt x="6589272" y="81193"/>
-                  </a:lnTo>
-                  <a:lnTo>
-                    <a:pt x="6517649" y="92390"/>
-                  </a:lnTo>
-                  <a:lnTo>
-                    <a:pt x="6446027" y="103489"/>
-                  </a:lnTo>
-                  <a:lnTo>
-                    <a:pt x="6374404" y="114490"/>
-                  </a:lnTo>
-                  <a:lnTo>
-                    <a:pt x="6302782" y="125396"/>
-                  </a:lnTo>
-                  <a:lnTo>
-                    <a:pt x="6231159" y="136206"/>
-                  </a:lnTo>
-                  <a:lnTo>
-                    <a:pt x="6159537" y="146922"/>
-                  </a:lnTo>
-                  <a:lnTo>
-                    <a:pt x="6087914" y="157544"/>
-                  </a:lnTo>
-                  <a:lnTo>
-                    <a:pt x="6016292" y="168073"/>
-                  </a:lnTo>
-                  <a:lnTo>
-                    <a:pt x="5944669" y="178510"/>
-                  </a:lnTo>
-                  <a:lnTo>
-                    <a:pt x="5873047" y="188856"/>
-                  </a:lnTo>
-                  <a:lnTo>
-                    <a:pt x="5801424" y="199111"/>
-                  </a:lnTo>
-                  <a:lnTo>
-                    <a:pt x="5729802" y="209277"/>
-                  </a:lnTo>
-                  <a:lnTo>
-                    <a:pt x="5658179" y="219354"/>
-                  </a:lnTo>
-                  <a:lnTo>
-                    <a:pt x="5586557" y="229342"/>
-                  </a:lnTo>
-                  <a:lnTo>
-                    <a:pt x="5514934" y="239243"/>
-                  </a:lnTo>
-                  <a:lnTo>
-                    <a:pt x="5443311" y="249058"/>
-                  </a:lnTo>
-                  <a:lnTo>
-                    <a:pt x="5371689" y="258787"/>
-                  </a:lnTo>
-                  <a:lnTo>
-                    <a:pt x="5300066" y="268430"/>
-                  </a:lnTo>
-                  <a:lnTo>
-                    <a:pt x="5228444" y="277990"/>
-                  </a:lnTo>
-                  <a:lnTo>
-                    <a:pt x="5156821" y="287465"/>
-                  </a:lnTo>
-                  <a:lnTo>
-                    <a:pt x="5085199" y="296858"/>
-                  </a:lnTo>
-                  <a:lnTo>
-                    <a:pt x="5013576" y="306169"/>
-                  </a:lnTo>
-                  <a:lnTo>
-                    <a:pt x="4941954" y="315398"/>
-                  </a:lnTo>
-                  <a:lnTo>
-                    <a:pt x="4870331" y="324547"/>
-                  </a:lnTo>
-                  <a:lnTo>
-                    <a:pt x="4798709" y="333615"/>
-                  </a:lnTo>
-                  <a:lnTo>
-                    <a:pt x="4727086" y="342605"/>
-                  </a:lnTo>
-                  <a:lnTo>
-                    <a:pt x="4655464" y="351515"/>
-                  </a:lnTo>
-                  <a:lnTo>
-                    <a:pt x="4583841" y="360348"/>
-                  </a:lnTo>
-                  <a:lnTo>
-                    <a:pt x="4512219" y="369103"/>
-                  </a:lnTo>
-                  <a:lnTo>
-                    <a:pt x="4440596" y="377782"/>
-                  </a:lnTo>
-                  <a:lnTo>
-                    <a:pt x="4368974" y="386385"/>
-                  </a:lnTo>
-                  <a:lnTo>
-                    <a:pt x="4297351" y="394913"/>
-                  </a:lnTo>
-                  <a:lnTo>
-                    <a:pt x="4225729" y="403366"/>
-                  </a:lnTo>
-                  <a:lnTo>
-                    <a:pt x="4154106" y="411746"/>
-                  </a:lnTo>
-                  <a:lnTo>
-                    <a:pt x="4082483" y="420052"/>
-                  </a:lnTo>
-                  <a:lnTo>
-                    <a:pt x="4010861" y="428285"/>
-                  </a:lnTo>
-                  <a:lnTo>
-                    <a:pt x="3939238" y="436446"/>
-                  </a:lnTo>
-                  <a:lnTo>
-                    <a:pt x="3867616" y="444536"/>
-                  </a:lnTo>
-                  <a:lnTo>
-                    <a:pt x="3795993" y="452555"/>
-                  </a:lnTo>
-                  <a:lnTo>
-                    <a:pt x="3724371" y="460504"/>
-                  </a:lnTo>
-                  <a:lnTo>
-                    <a:pt x="3652748" y="468384"/>
-                  </a:lnTo>
-                  <a:lnTo>
-                    <a:pt x="3581126" y="476195"/>
-                  </a:lnTo>
-                  <a:lnTo>
-                    <a:pt x="3509503" y="483937"/>
-                  </a:lnTo>
-                  <a:lnTo>
-                    <a:pt x="3437881" y="491611"/>
-                  </a:lnTo>
-                  <a:lnTo>
-                    <a:pt x="3366258" y="499219"/>
-                  </a:lnTo>
-                  <a:lnTo>
-                    <a:pt x="3294636" y="506760"/>
-                  </a:lnTo>
-                  <a:lnTo>
-                    <a:pt x="3223013" y="514235"/>
-                  </a:lnTo>
-                  <a:lnTo>
-                    <a:pt x="3151391" y="521645"/>
-                  </a:lnTo>
-                  <a:lnTo>
-                    <a:pt x="3079768" y="528989"/>
-                  </a:lnTo>
-                  <a:lnTo>
-                    <a:pt x="3008146" y="574375"/>
-                  </a:lnTo>
-                  <a:lnTo>
-                    <a:pt x="2936523" y="641735"/>
-                  </a:lnTo>
-                  <a:lnTo>
-                    <a:pt x="2864901" y="703331"/>
-                  </a:lnTo>
-                  <a:lnTo>
-                    <a:pt x="2793278" y="759655"/>
-                  </a:lnTo>
-                  <a:lnTo>
-                    <a:pt x="2721655" y="811159"/>
-                  </a:lnTo>
-                  <a:lnTo>
-                    <a:pt x="2650033" y="858255"/>
-                  </a:lnTo>
-                  <a:lnTo>
-                    <a:pt x="2578410" y="901321"/>
-                  </a:lnTo>
-                  <a:lnTo>
-                    <a:pt x="2506788" y="940701"/>
-                  </a:lnTo>
-                  <a:lnTo>
-                    <a:pt x="2435165" y="976711"/>
-                  </a:lnTo>
-                  <a:lnTo>
-                    <a:pt x="2363543" y="1009639"/>
-                  </a:lnTo>
-                  <a:lnTo>
-                    <a:pt x="2291920" y="1039749"/>
-                  </a:lnTo>
-                  <a:lnTo>
-                    <a:pt x="2220298" y="1067283"/>
-                  </a:lnTo>
-                  <a:lnTo>
-                    <a:pt x="2148675" y="1092460"/>
-                  </a:lnTo>
-                  <a:lnTo>
-                    <a:pt x="2077053" y="1115482"/>
-                  </a:lnTo>
-                  <a:lnTo>
-                    <a:pt x="2005430" y="1136534"/>
-                  </a:lnTo>
-                  <a:lnTo>
-                    <a:pt x="1933808" y="1155785"/>
-                  </a:lnTo>
-                  <a:lnTo>
-                    <a:pt x="1862185" y="1173388"/>
-                  </a:lnTo>
-                  <a:lnTo>
-                    <a:pt x="1790563" y="1189484"/>
-                  </a:lnTo>
-                  <a:lnTo>
-                    <a:pt x="1718940" y="1204203"/>
-                  </a:lnTo>
-                  <a:lnTo>
-                    <a:pt x="1647318" y="1217663"/>
-                  </a:lnTo>
-                  <a:lnTo>
-                    <a:pt x="1575695" y="1229970"/>
-                  </a:lnTo>
-                  <a:lnTo>
-                    <a:pt x="1504073" y="1241225"/>
-                  </a:lnTo>
-                  <a:lnTo>
-                    <a:pt x="1432450" y="1251516"/>
-                  </a:lnTo>
-                  <a:lnTo>
-                    <a:pt x="1360827" y="1260926"/>
-                  </a:lnTo>
-                  <a:lnTo>
-                    <a:pt x="1289205" y="1269531"/>
-                  </a:lnTo>
-                  <a:lnTo>
-                    <a:pt x="1217582" y="1277400"/>
-                  </a:lnTo>
-                  <a:lnTo>
-                    <a:pt x="1145960" y="1284595"/>
-                  </a:lnTo>
-                  <a:lnTo>
-                    <a:pt x="1074337" y="1291174"/>
-                  </a:lnTo>
-                  <a:lnTo>
-                    <a:pt x="1002715" y="1297191"/>
-                  </a:lnTo>
-                  <a:lnTo>
-                    <a:pt x="931092" y="1302692"/>
-                  </a:lnTo>
-                  <a:lnTo>
-                    <a:pt x="859470" y="1307723"/>
-                  </a:lnTo>
-                  <a:lnTo>
-                    <a:pt x="787847" y="1312323"/>
-                  </a:lnTo>
-                  <a:lnTo>
-                    <a:pt x="716225" y="1316529"/>
-                  </a:lnTo>
-                  <a:lnTo>
-                    <a:pt x="644602" y="1320376"/>
-                  </a:lnTo>
-                  <a:lnTo>
-                    <a:pt x="572980" y="1323893"/>
-                  </a:lnTo>
-                  <a:lnTo>
-                    <a:pt x="501357" y="1327109"/>
-                  </a:lnTo>
-                  <a:lnTo>
-                    <a:pt x="429735" y="1330050"/>
-                  </a:lnTo>
-                  <a:lnTo>
-                    <a:pt x="358112" y="1332740"/>
-                  </a:lnTo>
-                  <a:lnTo>
-                    <a:pt x="286490" y="1335199"/>
-                  </a:lnTo>
-                  <a:lnTo>
-                    <a:pt x="214867" y="1337448"/>
-                  </a:lnTo>
-                  <a:lnTo>
-                    <a:pt x="143245" y="1339504"/>
-                  </a:lnTo>
-                  <a:lnTo>
-                    <a:pt x="71622" y="1341384"/>
-                  </a:lnTo>
-                  <a:lnTo>
-                    <a:pt x="0" y="1343104"/>
+                    <a:pt x="6913622" y="11105"/>
+                  </a:lnTo>
+                  <a:lnTo>
+                    <a:pt x="6843075" y="22114"/>
+                  </a:lnTo>
+                  <a:lnTo>
+                    <a:pt x="6772528" y="33027"/>
+                  </a:lnTo>
+                  <a:lnTo>
+                    <a:pt x="6701981" y="43844"/>
+                  </a:lnTo>
+                  <a:lnTo>
+                    <a:pt x="6631434" y="54567"/>
+                  </a:lnTo>
+                  <a:lnTo>
+                    <a:pt x="6560887" y="65195"/>
+                  </a:lnTo>
+                  <a:lnTo>
+                    <a:pt x="6490339" y="75731"/>
+                  </a:lnTo>
+                  <a:lnTo>
+                    <a:pt x="6419792" y="86175"/>
+                  </a:lnTo>
+                  <a:lnTo>
+                    <a:pt x="6349245" y="96527"/>
+                  </a:lnTo>
+                  <a:lnTo>
+                    <a:pt x="6278698" y="106789"/>
+                  </a:lnTo>
+                  <a:lnTo>
+                    <a:pt x="6208151" y="116961"/>
+                  </a:lnTo>
+                  <a:lnTo>
+                    <a:pt x="6137604" y="127044"/>
+                  </a:lnTo>
+                  <a:lnTo>
+                    <a:pt x="6067056" y="137039"/>
+                  </a:lnTo>
+                  <a:lnTo>
+                    <a:pt x="5996509" y="146947"/>
+                  </a:lnTo>
+                  <a:lnTo>
+                    <a:pt x="5925962" y="156768"/>
+                  </a:lnTo>
+                  <a:lnTo>
+                    <a:pt x="5855415" y="166502"/>
+                  </a:lnTo>
+                  <a:lnTo>
+                    <a:pt x="5784868" y="176152"/>
+                  </a:lnTo>
+                  <a:lnTo>
+                    <a:pt x="5714320" y="185718"/>
+                  </a:lnTo>
+                  <a:lnTo>
+                    <a:pt x="5643773" y="195200"/>
+                  </a:lnTo>
+                  <a:lnTo>
+                    <a:pt x="5573226" y="204598"/>
+                  </a:lnTo>
+                  <a:lnTo>
+                    <a:pt x="5502679" y="213915"/>
+                  </a:lnTo>
+                  <a:lnTo>
+                    <a:pt x="5432132" y="223150"/>
+                  </a:lnTo>
+                  <a:lnTo>
+                    <a:pt x="5361585" y="232305"/>
+                  </a:lnTo>
+                  <a:lnTo>
+                    <a:pt x="5291037" y="241379"/>
+                  </a:lnTo>
+                  <a:lnTo>
+                    <a:pt x="5220490" y="250374"/>
+                  </a:lnTo>
+                  <a:lnTo>
+                    <a:pt x="5149943" y="259290"/>
+                  </a:lnTo>
+                  <a:lnTo>
+                    <a:pt x="5079396" y="268129"/>
+                  </a:lnTo>
+                  <a:lnTo>
+                    <a:pt x="5008849" y="276890"/>
+                  </a:lnTo>
+                  <a:lnTo>
+                    <a:pt x="4938302" y="285574"/>
+                  </a:lnTo>
+                  <a:lnTo>
+                    <a:pt x="4867754" y="294183"/>
+                  </a:lnTo>
+                  <a:lnTo>
+                    <a:pt x="4797207" y="302716"/>
+                  </a:lnTo>
+                  <a:lnTo>
+                    <a:pt x="4726660" y="311174"/>
+                  </a:lnTo>
+                  <a:lnTo>
+                    <a:pt x="4656113" y="319559"/>
+                  </a:lnTo>
+                  <a:lnTo>
+                    <a:pt x="4585566" y="327870"/>
+                  </a:lnTo>
+                  <a:lnTo>
+                    <a:pt x="4515019" y="336109"/>
+                  </a:lnTo>
+                  <a:lnTo>
+                    <a:pt x="4444471" y="344275"/>
+                  </a:lnTo>
+                  <a:lnTo>
+                    <a:pt x="4373924" y="352370"/>
+                  </a:lnTo>
+                  <a:lnTo>
+                    <a:pt x="4303377" y="360395"/>
+                  </a:lnTo>
+                  <a:lnTo>
+                    <a:pt x="4232830" y="368349"/>
+                  </a:lnTo>
+                  <a:lnTo>
+                    <a:pt x="4162283" y="376233"/>
+                  </a:lnTo>
+                  <a:lnTo>
+                    <a:pt x="4091736" y="384049"/>
+                  </a:lnTo>
+                  <a:lnTo>
+                    <a:pt x="4021188" y="391796"/>
+                  </a:lnTo>
+                  <a:lnTo>
+                    <a:pt x="3950641" y="399476"/>
+                  </a:lnTo>
+                  <a:lnTo>
+                    <a:pt x="3880094" y="407088"/>
+                  </a:lnTo>
+                  <a:lnTo>
+                    <a:pt x="3809547" y="414634"/>
+                  </a:lnTo>
+                  <a:lnTo>
+                    <a:pt x="3739000" y="422114"/>
+                  </a:lnTo>
+                  <a:lnTo>
+                    <a:pt x="3668452" y="429528"/>
+                  </a:lnTo>
+                  <a:lnTo>
+                    <a:pt x="3597905" y="436877"/>
+                  </a:lnTo>
+                  <a:lnTo>
+                    <a:pt x="3527358" y="444163"/>
+                  </a:lnTo>
+                  <a:lnTo>
+                    <a:pt x="3456811" y="451384"/>
+                  </a:lnTo>
+                  <a:lnTo>
+                    <a:pt x="3386264" y="458543"/>
+                  </a:lnTo>
+                  <a:lnTo>
+                    <a:pt x="3315717" y="465638"/>
+                  </a:lnTo>
+                  <a:lnTo>
+                    <a:pt x="3245169" y="472672"/>
+                  </a:lnTo>
+                  <a:lnTo>
+                    <a:pt x="3174622" y="479644"/>
+                  </a:lnTo>
+                  <a:lnTo>
+                    <a:pt x="3104075" y="486555"/>
+                  </a:lnTo>
+                  <a:lnTo>
+                    <a:pt x="3033528" y="493406"/>
+                  </a:lnTo>
+                  <a:lnTo>
+                    <a:pt x="2962981" y="535739"/>
+                  </a:lnTo>
+                  <a:lnTo>
+                    <a:pt x="2892434" y="598568"/>
+                  </a:lnTo>
+                  <a:lnTo>
+                    <a:pt x="2821886" y="656020"/>
+                  </a:lnTo>
+                  <a:lnTo>
+                    <a:pt x="2751339" y="708556"/>
+                  </a:lnTo>
+                  <a:lnTo>
+                    <a:pt x="2680792" y="756595"/>
+                  </a:lnTo>
+                  <a:lnTo>
+                    <a:pt x="2610245" y="800523"/>
+                  </a:lnTo>
+                  <a:lnTo>
+                    <a:pt x="2539698" y="840692"/>
+                  </a:lnTo>
+                  <a:lnTo>
+                    <a:pt x="2469151" y="877423"/>
+                  </a:lnTo>
+                  <a:lnTo>
+                    <a:pt x="2398603" y="911011"/>
+                  </a:lnTo>
+                  <a:lnTo>
+                    <a:pt x="2328056" y="941724"/>
+                  </a:lnTo>
+                  <a:lnTo>
+                    <a:pt x="2257509" y="969809"/>
+                  </a:lnTo>
+                  <a:lnTo>
+                    <a:pt x="2186962" y="995491"/>
+                  </a:lnTo>
+                  <a:lnTo>
+                    <a:pt x="2116415" y="1018974"/>
+                  </a:lnTo>
+                  <a:lnTo>
+                    <a:pt x="2045868" y="1040448"/>
+                  </a:lnTo>
+                  <a:lnTo>
+                    <a:pt x="1975320" y="1060084"/>
+                  </a:lnTo>
+                  <a:lnTo>
+                    <a:pt x="1904773" y="1078039"/>
+                  </a:lnTo>
+                  <a:lnTo>
+                    <a:pt x="1834226" y="1094458"/>
+                  </a:lnTo>
+                  <a:lnTo>
+                    <a:pt x="1763679" y="1109472"/>
+                  </a:lnTo>
+                  <a:lnTo>
+                    <a:pt x="1693132" y="1123201"/>
+                  </a:lnTo>
+                  <a:lnTo>
+                    <a:pt x="1622584" y="1135755"/>
+                  </a:lnTo>
+                  <a:lnTo>
+                    <a:pt x="1552037" y="1147235"/>
+                  </a:lnTo>
+                  <a:lnTo>
+                    <a:pt x="1481490" y="1157732"/>
+                  </a:lnTo>
+                  <a:lnTo>
+                    <a:pt x="1410943" y="1167331"/>
+                  </a:lnTo>
+                  <a:lnTo>
+                    <a:pt x="1340396" y="1176108"/>
+                  </a:lnTo>
+                  <a:lnTo>
+                    <a:pt x="1269849" y="1184134"/>
+                  </a:lnTo>
+                  <a:lnTo>
+                    <a:pt x="1199301" y="1191474"/>
+                  </a:lnTo>
+                  <a:lnTo>
+                    <a:pt x="1128754" y="1198185"/>
+                  </a:lnTo>
+                  <a:lnTo>
+                    <a:pt x="1058207" y="1204322"/>
+                  </a:lnTo>
+                  <a:lnTo>
+                    <a:pt x="987660" y="1209933"/>
+                  </a:lnTo>
+                  <a:lnTo>
+                    <a:pt x="917113" y="1215065"/>
+                  </a:lnTo>
+                  <a:lnTo>
+                    <a:pt x="846566" y="1219757"/>
+                  </a:lnTo>
+                  <a:lnTo>
+                    <a:pt x="776018" y="1224048"/>
+                  </a:lnTo>
+                  <a:lnTo>
+                    <a:pt x="705471" y="1227971"/>
+                  </a:lnTo>
+                  <a:lnTo>
+                    <a:pt x="634924" y="1231559"/>
+                  </a:lnTo>
+                  <a:lnTo>
+                    <a:pt x="564377" y="1234840"/>
+                  </a:lnTo>
+                  <a:lnTo>
+                    <a:pt x="493830" y="1237840"/>
+                  </a:lnTo>
+                  <a:lnTo>
+                    <a:pt x="423283" y="1240583"/>
+                  </a:lnTo>
+                  <a:lnTo>
+                    <a:pt x="352735" y="1243091"/>
+                  </a:lnTo>
+                  <a:lnTo>
+                    <a:pt x="282188" y="1245385"/>
+                  </a:lnTo>
+                  <a:lnTo>
+                    <a:pt x="211641" y="1247482"/>
+                  </a:lnTo>
+                  <a:lnTo>
+                    <a:pt x="141094" y="1249400"/>
+                  </a:lnTo>
+                  <a:lnTo>
+                    <a:pt x="70547" y="1251154"/>
+                  </a:lnTo>
+                  <a:lnTo>
+                    <a:pt x="0" y="1252758"/>
                   </a:lnTo>
                 </a:path>
               </a:pathLst>
@@ -4175,231 +4175,231 @@
           </p:nvSpPr>
           <p:spPr>
             <a:xfrm>
-              <a:off x="1172049" y="2073503"/>
-              <a:ext cx="5142139" cy="3381360"/>
+              <a:off x="1264853" y="2209169"/>
+              <a:ext cx="5064934" cy="3153909"/>
             </a:xfrm>
             <a:custGeom>
               <a:avLst/>
               <a:pathLst>
-                <a:path w="5142139" h="3381360">
+                <a:path w="5064934" h="3153909">
                   <a:moveTo>
-                    <a:pt x="0" y="3381360"/>
+                    <a:pt x="0" y="3153909"/>
                   </a:moveTo>
                   <a:lnTo>
-                    <a:pt x="71622" y="3376205"/>
-                  </a:lnTo>
-                  <a:lnTo>
-                    <a:pt x="143245" y="3370790"/>
-                  </a:lnTo>
-                  <a:lnTo>
-                    <a:pt x="214867" y="3365103"/>
-                  </a:lnTo>
-                  <a:lnTo>
-                    <a:pt x="286490" y="3359129"/>
-                  </a:lnTo>
-                  <a:lnTo>
-                    <a:pt x="358112" y="3352854"/>
-                  </a:lnTo>
-                  <a:lnTo>
-                    <a:pt x="429735" y="3346264"/>
-                  </a:lnTo>
-                  <a:lnTo>
-                    <a:pt x="501357" y="3339341"/>
-                  </a:lnTo>
-                  <a:lnTo>
-                    <a:pt x="572980" y="3332070"/>
-                  </a:lnTo>
-                  <a:lnTo>
-                    <a:pt x="644602" y="3324433"/>
-                  </a:lnTo>
-                  <a:lnTo>
-                    <a:pt x="716225" y="3316411"/>
-                  </a:lnTo>
-                  <a:lnTo>
-                    <a:pt x="787847" y="3307986"/>
-                  </a:lnTo>
-                  <a:lnTo>
-                    <a:pt x="859470" y="3299136"/>
-                  </a:lnTo>
-                  <a:lnTo>
-                    <a:pt x="931092" y="3289840"/>
-                  </a:lnTo>
-                  <a:lnTo>
-                    <a:pt x="1002715" y="3280077"/>
-                  </a:lnTo>
-                  <a:lnTo>
-                    <a:pt x="1074337" y="3269822"/>
-                  </a:lnTo>
-                  <a:lnTo>
-                    <a:pt x="1145960" y="3259051"/>
-                  </a:lnTo>
-                  <a:lnTo>
-                    <a:pt x="1217582" y="3247737"/>
-                  </a:lnTo>
-                  <a:lnTo>
-                    <a:pt x="1289205" y="3235853"/>
-                  </a:lnTo>
-                  <a:lnTo>
-                    <a:pt x="1360827" y="3223372"/>
-                  </a:lnTo>
-                  <a:lnTo>
-                    <a:pt x="1432450" y="3210261"/>
-                  </a:lnTo>
-                  <a:lnTo>
-                    <a:pt x="1504073" y="3196491"/>
-                  </a:lnTo>
-                  <a:lnTo>
-                    <a:pt x="1575695" y="3182027"/>
-                  </a:lnTo>
-                  <a:lnTo>
-                    <a:pt x="1647318" y="3166835"/>
-                  </a:lnTo>
-                  <a:lnTo>
-                    <a:pt x="1718940" y="3150878"/>
-                  </a:lnTo>
-                  <a:lnTo>
-                    <a:pt x="1790563" y="3134118"/>
-                  </a:lnTo>
-                  <a:lnTo>
-                    <a:pt x="1862185" y="3116514"/>
-                  </a:lnTo>
-                  <a:lnTo>
-                    <a:pt x="1933808" y="3098023"/>
-                  </a:lnTo>
-                  <a:lnTo>
-                    <a:pt x="2005430" y="3078601"/>
-                  </a:lnTo>
-                  <a:lnTo>
-                    <a:pt x="2077053" y="3058201"/>
-                  </a:lnTo>
-                  <a:lnTo>
-                    <a:pt x="2148675" y="3036775"/>
-                  </a:lnTo>
-                  <a:lnTo>
-                    <a:pt x="2220298" y="3014269"/>
-                  </a:lnTo>
-                  <a:lnTo>
-                    <a:pt x="2291920" y="2990630"/>
-                  </a:lnTo>
-                  <a:lnTo>
-                    <a:pt x="2363543" y="2965801"/>
-                  </a:lnTo>
-                  <a:lnTo>
-                    <a:pt x="2435165" y="2939722"/>
-                  </a:lnTo>
-                  <a:lnTo>
-                    <a:pt x="2506788" y="2912329"/>
-                  </a:lnTo>
-                  <a:lnTo>
-                    <a:pt x="2578410" y="2883557"/>
-                  </a:lnTo>
-                  <a:lnTo>
-                    <a:pt x="2650033" y="2853337"/>
-                  </a:lnTo>
-                  <a:lnTo>
-                    <a:pt x="2721655" y="2821595"/>
-                  </a:lnTo>
-                  <a:lnTo>
-                    <a:pt x="2793278" y="2788255"/>
-                  </a:lnTo>
-                  <a:lnTo>
-                    <a:pt x="2864901" y="2753236"/>
-                  </a:lnTo>
-                  <a:lnTo>
-                    <a:pt x="2936523" y="2716453"/>
-                  </a:lnTo>
-                  <a:lnTo>
-                    <a:pt x="3008146" y="2677819"/>
-                  </a:lnTo>
-                  <a:lnTo>
-                    <a:pt x="3079768" y="2637239"/>
-                  </a:lnTo>
-                  <a:lnTo>
-                    <a:pt x="3151391" y="2594616"/>
-                  </a:lnTo>
-                  <a:lnTo>
-                    <a:pt x="3223013" y="2549847"/>
-                  </a:lnTo>
-                  <a:lnTo>
-                    <a:pt x="3294636" y="2502824"/>
-                  </a:lnTo>
-                  <a:lnTo>
-                    <a:pt x="3366258" y="2453433"/>
-                  </a:lnTo>
-                  <a:lnTo>
-                    <a:pt x="3437881" y="2401556"/>
-                  </a:lnTo>
-                  <a:lnTo>
-                    <a:pt x="3509503" y="2347066"/>
-                  </a:lnTo>
-                  <a:lnTo>
-                    <a:pt x="3581126" y="2289832"/>
-                  </a:lnTo>
-                  <a:lnTo>
-                    <a:pt x="3652748" y="2229717"/>
-                  </a:lnTo>
-                  <a:lnTo>
-                    <a:pt x="3724371" y="2166575"/>
-                  </a:lnTo>
-                  <a:lnTo>
-                    <a:pt x="3795993" y="2100253"/>
-                  </a:lnTo>
-                  <a:lnTo>
-                    <a:pt x="3867616" y="2030592"/>
-                  </a:lnTo>
-                  <a:lnTo>
-                    <a:pt x="3939238" y="1957424"/>
-                  </a:lnTo>
-                  <a:lnTo>
-                    <a:pt x="4010861" y="1880571"/>
-                  </a:lnTo>
-                  <a:lnTo>
-                    <a:pt x="4082483" y="1799849"/>
-                  </a:lnTo>
-                  <a:lnTo>
-                    <a:pt x="4154106" y="1715062"/>
-                  </a:lnTo>
-                  <a:lnTo>
-                    <a:pt x="4225729" y="1626006"/>
-                  </a:lnTo>
-                  <a:lnTo>
-                    <a:pt x="4297351" y="1532466"/>
-                  </a:lnTo>
-                  <a:lnTo>
-                    <a:pt x="4368974" y="1434216"/>
-                  </a:lnTo>
-                  <a:lnTo>
-                    <a:pt x="4440596" y="1331020"/>
-                  </a:lnTo>
-                  <a:lnTo>
-                    <a:pt x="4512219" y="1222627"/>
-                  </a:lnTo>
-                  <a:lnTo>
-                    <a:pt x="4583841" y="1108776"/>
-                  </a:lnTo>
-                  <a:lnTo>
-                    <a:pt x="4655464" y="989193"/>
-                  </a:lnTo>
-                  <a:lnTo>
-                    <a:pt x="4727086" y="863588"/>
-                  </a:lnTo>
-                  <a:lnTo>
-                    <a:pt x="4798709" y="731659"/>
-                  </a:lnTo>
-                  <a:lnTo>
-                    <a:pt x="4870331" y="593088"/>
-                  </a:lnTo>
-                  <a:lnTo>
-                    <a:pt x="4941954" y="447539"/>
-                  </a:lnTo>
-                  <a:lnTo>
-                    <a:pt x="5013576" y="294661"/>
-                  </a:lnTo>
-                  <a:lnTo>
-                    <a:pt x="5085199" y="134086"/>
-                  </a:lnTo>
-                  <a:lnTo>
-                    <a:pt x="5142139" y="0"/>
+                    <a:pt x="70547" y="3149100"/>
+                  </a:lnTo>
+                  <a:lnTo>
+                    <a:pt x="141094" y="3144050"/>
+                  </a:lnTo>
+                  <a:lnTo>
+                    <a:pt x="211641" y="3138745"/>
+                  </a:lnTo>
+                  <a:lnTo>
+                    <a:pt x="282188" y="3133173"/>
+                  </a:lnTo>
+                  <a:lnTo>
+                    <a:pt x="352735" y="3127320"/>
+                  </a:lnTo>
+                  <a:lnTo>
+                    <a:pt x="423283" y="3121173"/>
+                  </a:lnTo>
+                  <a:lnTo>
+                    <a:pt x="493830" y="3114716"/>
+                  </a:lnTo>
+                  <a:lnTo>
+                    <a:pt x="564377" y="3107934"/>
+                  </a:lnTo>
+                  <a:lnTo>
+                    <a:pt x="634924" y="3100811"/>
+                  </a:lnTo>
+                  <a:lnTo>
+                    <a:pt x="705471" y="3093328"/>
+                  </a:lnTo>
+                  <a:lnTo>
+                    <a:pt x="776018" y="3085470"/>
+                  </a:lnTo>
+                  <a:lnTo>
+                    <a:pt x="846566" y="3077215"/>
+                  </a:lnTo>
+                  <a:lnTo>
+                    <a:pt x="917113" y="3068545"/>
+                  </a:lnTo>
+                  <a:lnTo>
+                    <a:pt x="987660" y="3059438"/>
+                  </a:lnTo>
+                  <a:lnTo>
+                    <a:pt x="1058207" y="3049873"/>
+                  </a:lnTo>
+                  <a:lnTo>
+                    <a:pt x="1128754" y="3039826"/>
+                  </a:lnTo>
+                  <a:lnTo>
+                    <a:pt x="1199301" y="3029273"/>
+                  </a:lnTo>
+                  <a:lnTo>
+                    <a:pt x="1269849" y="3018189"/>
+                  </a:lnTo>
+                  <a:lnTo>
+                    <a:pt x="1340396" y="3006547"/>
+                  </a:lnTo>
+                  <a:lnTo>
+                    <a:pt x="1410943" y="2994319"/>
+                  </a:lnTo>
+                  <a:lnTo>
+                    <a:pt x="1481490" y="2981475"/>
+                  </a:lnTo>
+                  <a:lnTo>
+                    <a:pt x="1552037" y="2967984"/>
+                  </a:lnTo>
+                  <a:lnTo>
+                    <a:pt x="1622584" y="2953814"/>
+                  </a:lnTo>
+                  <a:lnTo>
+                    <a:pt x="1693132" y="2938930"/>
+                  </a:lnTo>
+                  <a:lnTo>
+                    <a:pt x="1763679" y="2923297"/>
+                  </a:lnTo>
+                  <a:lnTo>
+                    <a:pt x="1834226" y="2906877"/>
+                  </a:lnTo>
+                  <a:lnTo>
+                    <a:pt x="1904773" y="2889630"/>
+                  </a:lnTo>
+                  <a:lnTo>
+                    <a:pt x="1975320" y="2871515"/>
+                  </a:lnTo>
+                  <a:lnTo>
+                    <a:pt x="2045868" y="2852487"/>
+                  </a:lnTo>
+                  <a:lnTo>
+                    <a:pt x="2116415" y="2832502"/>
+                  </a:lnTo>
+                  <a:lnTo>
+                    <a:pt x="2186962" y="2811510"/>
+                  </a:lnTo>
+                  <a:lnTo>
+                    <a:pt x="2257509" y="2789461"/>
+                  </a:lnTo>
+                  <a:lnTo>
+                    <a:pt x="2328056" y="2766302"/>
+                  </a:lnTo>
+                  <a:lnTo>
+                    <a:pt x="2398603" y="2741977"/>
+                  </a:lnTo>
+                  <a:lnTo>
+                    <a:pt x="2469151" y="2716427"/>
+                  </a:lnTo>
+                  <a:lnTo>
+                    <a:pt x="2539698" y="2689591"/>
+                  </a:lnTo>
+                  <a:lnTo>
+                    <a:pt x="2610245" y="2661403"/>
+                  </a:lnTo>
+                  <a:lnTo>
+                    <a:pt x="2680792" y="2631797"/>
+                  </a:lnTo>
+                  <a:lnTo>
+                    <a:pt x="2751339" y="2600699"/>
+                  </a:lnTo>
+                  <a:lnTo>
+                    <a:pt x="2821886" y="2568036"/>
+                  </a:lnTo>
+                  <a:lnTo>
+                    <a:pt x="2892434" y="2533727"/>
+                  </a:lnTo>
+                  <a:lnTo>
+                    <a:pt x="2962981" y="2497692"/>
+                  </a:lnTo>
+                  <a:lnTo>
+                    <a:pt x="3033528" y="2459842"/>
+                  </a:lnTo>
+                  <a:lnTo>
+                    <a:pt x="3104075" y="2420086"/>
+                  </a:lnTo>
+                  <a:lnTo>
+                    <a:pt x="3174622" y="2378329"/>
+                  </a:lnTo>
+                  <a:lnTo>
+                    <a:pt x="3245169" y="2334468"/>
+                  </a:lnTo>
+                  <a:lnTo>
+                    <a:pt x="3315717" y="2288400"/>
+                  </a:lnTo>
+                  <a:lnTo>
+                    <a:pt x="3386264" y="2240012"/>
+                  </a:lnTo>
+                  <a:lnTo>
+                    <a:pt x="3456811" y="2189187"/>
+                  </a:lnTo>
+                  <a:lnTo>
+                    <a:pt x="3527358" y="2135804"/>
+                  </a:lnTo>
+                  <a:lnTo>
+                    <a:pt x="3597905" y="2079732"/>
+                  </a:lnTo>
+                  <a:lnTo>
+                    <a:pt x="3668452" y="2020837"/>
+                  </a:lnTo>
+                  <a:lnTo>
+                    <a:pt x="3739000" y="1958977"/>
+                  </a:lnTo>
+                  <a:lnTo>
+                    <a:pt x="3809547" y="1894002"/>
+                  </a:lnTo>
+                  <a:lnTo>
+                    <a:pt x="3880094" y="1825755"/>
+                  </a:lnTo>
+                  <a:lnTo>
+                    <a:pt x="3950641" y="1754072"/>
+                  </a:lnTo>
+                  <a:lnTo>
+                    <a:pt x="4021188" y="1678780"/>
+                  </a:lnTo>
+                  <a:lnTo>
+                    <a:pt x="4091736" y="1599696"/>
+                  </a:lnTo>
+                  <a:lnTo>
+                    <a:pt x="4162283" y="1516631"/>
+                  </a:lnTo>
+                  <a:lnTo>
+                    <a:pt x="4232830" y="1429383"/>
+                  </a:lnTo>
+                  <a:lnTo>
+                    <a:pt x="4303377" y="1337742"/>
+                  </a:lnTo>
+                  <a:lnTo>
+                    <a:pt x="4373924" y="1241487"/>
+                  </a:lnTo>
+                  <a:lnTo>
+                    <a:pt x="4444471" y="1140385"/>
+                  </a:lnTo>
+                  <a:lnTo>
+                    <a:pt x="4515019" y="1034193"/>
+                  </a:lnTo>
+                  <a:lnTo>
+                    <a:pt x="4585566" y="922653"/>
+                  </a:lnTo>
+                  <a:lnTo>
+                    <a:pt x="4656113" y="805498"/>
+                  </a:lnTo>
+                  <a:lnTo>
+                    <a:pt x="4726660" y="682443"/>
+                  </a:lnTo>
+                  <a:lnTo>
+                    <a:pt x="4797207" y="553193"/>
+                  </a:lnTo>
+                  <a:lnTo>
+                    <a:pt x="4867754" y="417434"/>
+                  </a:lnTo>
+                  <a:lnTo>
+                    <a:pt x="4938302" y="274840"/>
+                  </a:lnTo>
+                  <a:lnTo>
+                    <a:pt x="5008849" y="125067"/>
+                  </a:lnTo>
+                  <a:lnTo>
+                    <a:pt x="5064934" y="0"/>
                   </a:lnTo>
                 </a:path>
               </a:pathLst>
@@ -4428,21 +4428,21 @@
           </p:nvSpPr>
           <p:spPr>
             <a:xfrm>
-              <a:off x="817517" y="4727786"/>
-              <a:ext cx="7799693" cy="0"/>
+              <a:off x="915645" y="4684908"/>
+              <a:ext cx="7682587" cy="0"/>
             </a:xfrm>
             <a:custGeom>
               <a:avLst/>
               <a:pathLst>
-                <a:path w="7799693" h="0">
+                <a:path w="7682587" h="0">
                   <a:moveTo>
                     <a:pt x="0" y="0"/>
                   </a:moveTo>
                   <a:lnTo>
-                    <a:pt x="7799693" y="0"/>
-                  </a:lnTo>
-                  <a:lnTo>
-                    <a:pt x="7799693" y="0"/>
+                    <a:pt x="7682587" y="0"/>
+                  </a:lnTo>
+                  <a:lnTo>
+                    <a:pt x="7682587" y="0"/>
                   </a:lnTo>
                 </a:path>
               </a:pathLst>
@@ -4471,15 +4471,15 @@
           </p:nvSpPr>
           <p:spPr>
             <a:xfrm>
-              <a:off x="4222163" y="2073503"/>
-              <a:ext cx="0" cy="3649639"/>
+              <a:off x="4269172" y="2209169"/>
+              <a:ext cx="0" cy="3404141"/>
             </a:xfrm>
             <a:custGeom>
               <a:avLst/>
               <a:pathLst>
-                <a:path w="0" h="3649639">
+                <a:path w="0" h="3404141">
                   <a:moveTo>
-                    <a:pt x="0" y="3649639"/>
+                    <a:pt x="0" y="3404141"/>
                   </a:moveTo>
                   <a:lnTo>
                     <a:pt x="0" y="0"/>
@@ -4514,8 +4514,8 @@
           </p:nvSpPr>
           <p:spPr>
             <a:xfrm>
-              <a:off x="692708" y="5517199"/>
-              <a:ext cx="62179" cy="80101"/>
+              <a:off x="756929" y="5407599"/>
+              <a:ext cx="79004" cy="101955"/>
             </a:xfrm>
             <a:prstGeom prst="rect">
               <a:avLst/>
@@ -4528,7 +4528,7 @@
             <a:p>
               <a:pPr algn="l" marL="0" marR="0" indent="0">
                 <a:lnSpc>
-                  <a:spcPts val="880"/>
+                  <a:spcPts val="1120"/>
                 </a:lnSpc>
                 <a:spcBef>
                   <a:spcPts val="0"/>
@@ -4538,7 +4538,7 @@
                 </a:spcAft>
               </a:pPr>
               <a:r>
-                <a:rPr sz="880">
+                <a:rPr sz="1120">
                   <a:solidFill>
                     <a:srgbClr val="4D4D4D">
                       <a:alpha val="100000"/>
@@ -4560,8 +4560,8 @@
           </p:nvSpPr>
           <p:spPr>
             <a:xfrm>
-              <a:off x="692708" y="4687735"/>
-              <a:ext cx="62179" cy="80101"/>
+              <a:off x="756929" y="4633931"/>
+              <a:ext cx="79004" cy="101955"/>
             </a:xfrm>
             <a:prstGeom prst="rect">
               <a:avLst/>
@@ -4574,7 +4574,7 @@
             <a:p>
               <a:pPr algn="l" marL="0" marR="0" indent="0">
                 <a:lnSpc>
-                  <a:spcPts val="880"/>
+                  <a:spcPts val="1120"/>
                 </a:lnSpc>
                 <a:spcBef>
                   <a:spcPts val="0"/>
@@ -4584,7 +4584,7 @@
                 </a:spcAft>
               </a:pPr>
               <a:r>
-                <a:rPr sz="880">
+                <a:rPr sz="1120">
                   <a:solidFill>
                     <a:srgbClr val="4D4D4D">
                       <a:alpha val="100000"/>
@@ -4606,8 +4606,8 @@
           </p:nvSpPr>
           <p:spPr>
             <a:xfrm>
-              <a:off x="692708" y="3858272"/>
-              <a:ext cx="62179" cy="80101"/>
+              <a:off x="756929" y="3860262"/>
+              <a:ext cx="79004" cy="101955"/>
             </a:xfrm>
             <a:prstGeom prst="rect">
               <a:avLst/>
@@ -4620,7 +4620,7 @@
             <a:p>
               <a:pPr algn="l" marL="0" marR="0" indent="0">
                 <a:lnSpc>
-                  <a:spcPts val="880"/>
+                  <a:spcPts val="1120"/>
                 </a:lnSpc>
                 <a:spcBef>
                   <a:spcPts val="0"/>
@@ -4630,7 +4630,7 @@
                 </a:spcAft>
               </a:pPr>
               <a:r>
-                <a:rPr sz="880">
+                <a:rPr sz="1120">
                   <a:solidFill>
                     <a:srgbClr val="4D4D4D">
                       <a:alpha val="100000"/>
@@ -4652,8 +4652,8 @@
           </p:nvSpPr>
           <p:spPr>
             <a:xfrm>
-              <a:off x="692708" y="3028808"/>
-              <a:ext cx="62179" cy="80101"/>
+              <a:off x="756929" y="3086593"/>
+              <a:ext cx="79004" cy="101955"/>
             </a:xfrm>
             <a:prstGeom prst="rect">
               <a:avLst/>
@@ -4666,7 +4666,7 @@
             <a:p>
               <a:pPr algn="l" marL="0" marR="0" indent="0">
                 <a:lnSpc>
-                  <a:spcPts val="880"/>
+                  <a:spcPts val="1120"/>
                 </a:lnSpc>
                 <a:spcBef>
                   <a:spcPts val="0"/>
@@ -4676,7 +4676,7 @@
                 </a:spcAft>
               </a:pPr>
               <a:r>
-                <a:rPr sz="880">
+                <a:rPr sz="1120">
                   <a:solidFill>
                     <a:srgbClr val="4D4D4D">
                       <a:alpha val="100000"/>
@@ -4698,8 +4698,8 @@
           </p:nvSpPr>
           <p:spPr>
             <a:xfrm>
-              <a:off x="692708" y="2199345"/>
-              <a:ext cx="62179" cy="80101"/>
+              <a:off x="756929" y="2312925"/>
+              <a:ext cx="79004" cy="101955"/>
             </a:xfrm>
             <a:prstGeom prst="rect">
               <a:avLst/>
@@ -4712,7 +4712,7 @@
             <a:p>
               <a:pPr algn="l" marL="0" marR="0" indent="0">
                 <a:lnSpc>
-                  <a:spcPts val="880"/>
+                  <a:spcPts val="1120"/>
                 </a:lnSpc>
                 <a:spcBef>
                   <a:spcPts val="0"/>
@@ -4722,7 +4722,7 @@
                 </a:spcAft>
               </a:pPr>
               <a:r>
-                <a:rPr sz="880">
+                <a:rPr sz="1120">
                   <a:solidFill>
                     <a:srgbClr val="4D4D4D">
                       <a:alpha val="100000"/>
@@ -4744,8 +4744,8 @@
           </p:nvSpPr>
           <p:spPr>
             <a:xfrm>
-              <a:off x="1328653" y="5785772"/>
-              <a:ext cx="223753" cy="80101"/>
+              <a:off x="1387159" y="5693022"/>
+              <a:ext cx="284286" cy="101955"/>
             </a:xfrm>
             <a:prstGeom prst="rect">
               <a:avLst/>
@@ -4758,7 +4758,7 @@
             <a:p>
               <a:pPr algn="l" marL="0" marR="0" indent="0">
                 <a:lnSpc>
-                  <a:spcPts val="880"/>
+                  <a:spcPts val="1120"/>
                 </a:lnSpc>
                 <a:spcBef>
                   <a:spcPts val="0"/>
@@ -4768,7 +4768,7 @@
                 </a:spcAft>
               </a:pPr>
               <a:r>
-                <a:rPr sz="880">
+                <a:rPr sz="1120">
                   <a:solidFill>
                     <a:srgbClr val="4D4D4D">
                       <a:alpha val="100000"/>
@@ -4790,8 +4790,8 @@
           </p:nvSpPr>
           <p:spPr>
             <a:xfrm>
-              <a:off x="2724172" y="5785772"/>
-              <a:ext cx="161574" cy="80101"/>
+              <a:off x="2770605" y="5693022"/>
+              <a:ext cx="205282" cy="101955"/>
             </a:xfrm>
             <a:prstGeom prst="rect">
               <a:avLst/>
@@ -4804,7 +4804,7 @@
             <a:p>
               <a:pPr algn="l" marL="0" marR="0" indent="0">
                 <a:lnSpc>
-                  <a:spcPts val="880"/>
+                  <a:spcPts val="1120"/>
                 </a:lnSpc>
                 <a:spcBef>
                   <a:spcPts val="0"/>
@@ -4814,7 +4814,7 @@
                 </a:spcAft>
               </a:pPr>
               <a:r>
-                <a:rPr sz="880">
+                <a:rPr sz="1120">
                   <a:solidFill>
                     <a:srgbClr val="4D4D4D">
                       <a:alpha val="100000"/>
@@ -4836,8 +4836,8 @@
           </p:nvSpPr>
           <p:spPr>
             <a:xfrm>
-              <a:off x="4138300" y="5785772"/>
-              <a:ext cx="62179" cy="80101"/>
+              <a:off x="4177689" y="5693022"/>
+              <a:ext cx="79004" cy="101955"/>
             </a:xfrm>
             <a:prstGeom prst="rect">
               <a:avLst/>
@@ -4850,7 +4850,7 @@
             <a:p>
               <a:pPr algn="l" marL="0" marR="0" indent="0">
                 <a:lnSpc>
-                  <a:spcPts val="880"/>
+                  <a:spcPts val="1120"/>
                 </a:lnSpc>
                 <a:spcBef>
                   <a:spcPts val="0"/>
@@ -4860,7 +4860,7 @@
                 </a:spcAft>
               </a:pPr>
               <a:r>
-                <a:rPr sz="880">
+                <a:rPr sz="1120">
                   <a:solidFill>
                     <a:srgbClr val="4D4D4D">
                       <a:alpha val="100000"/>
@@ -4882,8 +4882,8 @@
           </p:nvSpPr>
           <p:spPr>
             <a:xfrm>
-              <a:off x="5471640" y="5785772"/>
-              <a:ext cx="124358" cy="80101"/>
+              <a:off x="5482131" y="5693022"/>
+              <a:ext cx="158008" cy="101955"/>
             </a:xfrm>
             <a:prstGeom prst="rect">
               <a:avLst/>
@@ -4896,7 +4896,7 @@
             <a:p>
               <a:pPr algn="l" marL="0" marR="0" indent="0">
                 <a:lnSpc>
-                  <a:spcPts val="880"/>
+                  <a:spcPts val="1120"/>
                 </a:lnSpc>
                 <a:spcBef>
                   <a:spcPts val="0"/>
@@ -4906,7 +4906,7 @@
                 </a:spcAft>
               </a:pPr>
               <a:r>
-                <a:rPr sz="880">
+                <a:rPr sz="1120">
                   <a:solidFill>
                     <a:srgbClr val="4D4D4D">
                       <a:alpha val="100000"/>
@@ -4928,8 +4928,8 @@
           </p:nvSpPr>
           <p:spPr>
             <a:xfrm>
-              <a:off x="6804980" y="5785772"/>
-              <a:ext cx="186537" cy="80101"/>
+              <a:off x="6786573" y="5693022"/>
+              <a:ext cx="237012" cy="101955"/>
             </a:xfrm>
             <a:prstGeom prst="rect">
               <a:avLst/>
@@ -4942,7 +4942,7 @@
             <a:p>
               <a:pPr algn="l" marL="0" marR="0" indent="0">
                 <a:lnSpc>
-                  <a:spcPts val="880"/>
+                  <a:spcPts val="1120"/>
                 </a:lnSpc>
                 <a:spcBef>
                   <a:spcPts val="0"/>
@@ -4952,7 +4952,7 @@
                 </a:spcAft>
               </a:pPr>
               <a:r>
-                <a:rPr sz="880">
+                <a:rPr sz="1120">
                   <a:solidFill>
                     <a:srgbClr val="4D4D4D">
                       <a:alpha val="100000"/>
@@ -4974,8 +4974,8 @@
           </p:nvSpPr>
           <p:spPr>
             <a:xfrm>
-              <a:off x="8169410" y="5785772"/>
-              <a:ext cx="186537" cy="80101"/>
+              <a:off x="8130517" y="5693022"/>
+              <a:ext cx="237012" cy="101955"/>
             </a:xfrm>
             <a:prstGeom prst="rect">
               <a:avLst/>
@@ -4988,7 +4988,7 @@
             <a:p>
               <a:pPr algn="l" marL="0" marR="0" indent="0">
                 <a:lnSpc>
-                  <a:spcPts val="880"/>
+                  <a:spcPts val="1120"/>
                 </a:lnSpc>
                 <a:spcBef>
                   <a:spcPts val="0"/>
@@ -4998,7 +4998,7 @@
                 </a:spcAft>
               </a:pPr>
               <a:r>
-                <a:rPr sz="880">
+                <a:rPr sz="1120">
                   <a:solidFill>
                     <a:srgbClr val="4D4D4D">
                       <a:alpha val="100000"/>
@@ -5020,8 +5020,8 @@
           </p:nvSpPr>
           <p:spPr>
             <a:xfrm>
-              <a:off x="3987536" y="5925448"/>
-              <a:ext cx="1459656" cy="100218"/>
+              <a:off x="3828319" y="5870717"/>
+              <a:ext cx="1857237" cy="127558"/>
             </a:xfrm>
             <a:prstGeom prst="rect">
               <a:avLst/>
@@ -5034,7 +5034,7 @@
             <a:p>
               <a:pPr algn="l" marL="0" marR="0" indent="0">
                 <a:lnSpc>
-                  <a:spcPts val="1100"/>
+                  <a:spcPts val="1400"/>
                 </a:lnSpc>
                 <a:spcBef>
                   <a:spcPts val="0"/>
@@ -5044,7 +5044,7 @@
                 </a:spcAft>
               </a:pPr>
               <a:r>
-                <a:rPr sz="1100">
+                <a:rPr sz="1400">
                   <a:solidFill>
                     <a:srgbClr val="000000">
                       <a:alpha val="100000"/>
@@ -5066,8 +5066,8 @@
           </p:nvSpPr>
           <p:spPr>
             <a:xfrm rot="-5400000">
-              <a:off x="68446" y="3848213"/>
-              <a:ext cx="1016904" cy="100218"/>
+              <a:off x="-37527" y="3847460"/>
+              <a:ext cx="1294150" cy="127558"/>
             </a:xfrm>
             <a:prstGeom prst="rect">
               <a:avLst/>
@@ -5080,7 +5080,7 @@
             <a:p>
               <a:pPr algn="l" marL="0" marR="0" indent="0">
                 <a:lnSpc>
-                  <a:spcPts val="1100"/>
+                  <a:spcPts val="1400"/>
                 </a:lnSpc>
                 <a:spcBef>
                   <a:spcPts val="0"/>
@@ -5090,7 +5090,7 @@
                 </a:spcAft>
               </a:pPr>
               <a:r>
-                <a:rPr sz="1100">
+                <a:rPr sz="1400">
                   <a:solidFill>
                     <a:srgbClr val="000000">
                       <a:alpha val="100000"/>
@@ -5112,8 +5112,8 @@
           </p:nvSpPr>
           <p:spPr>
             <a:xfrm>
-              <a:off x="817517" y="1896563"/>
-              <a:ext cx="4433376" cy="82021"/>
+              <a:off x="915645" y="1977589"/>
+              <a:ext cx="5912784" cy="109362"/>
             </a:xfrm>
             <a:prstGeom prst="rect">
               <a:avLst/>
@@ -5126,7 +5126,7 @@
             <a:p>
               <a:pPr algn="l" marL="0" marR="0" indent="0">
                 <a:lnSpc>
-                  <a:spcPts val="900"/>
+                  <a:spcPts val="1200"/>
                 </a:lnSpc>
                 <a:spcBef>
                   <a:spcPts val="0"/>
@@ -5136,7 +5136,7 @@
                 </a:spcAft>
               </a:pPr>
               <a:r>
-                <a:rPr sz="900">
+                <a:rPr sz="1200">
                   <a:solidFill>
                     <a:srgbClr val="404040">
                       <a:alpha val="100000"/>
@@ -5158,8 +5158,8 @@
           </p:nvSpPr>
           <p:spPr>
             <a:xfrm>
-              <a:off x="817517" y="1669789"/>
-              <a:ext cx="3054278" cy="120152"/>
+              <a:off x="915645" y="1688767"/>
+              <a:ext cx="3888211" cy="153070"/>
             </a:xfrm>
             <a:prstGeom prst="rect">
               <a:avLst/>
@@ -5172,7 +5172,7 @@
             <a:p>
               <a:pPr algn="l" marL="0" marR="0" indent="0">
                 <a:lnSpc>
-                  <a:spcPts val="1320"/>
+                  <a:spcPts val="1680"/>
                 </a:lnSpc>
                 <a:spcBef>
                   <a:spcPts val="0"/>
@@ -5182,7 +5182,7 @@
                 </a:spcAft>
               </a:pPr>
               <a:r>
-                <a:rPr sz="1320">
+                <a:rPr sz="1680">
                   <a:solidFill>
                     <a:srgbClr val="000000">
                       <a:alpha val="100000"/>
